--- a/presentation/Постачальники_снеків_собівартість.pptx
+++ b/presentation/Постачальники_снеків_собівартість.pptx
@@ -3632,8 +3632,8 @@
         </p:blipFill>
         <p:spPr>
           <a:xfrm>
-            <a:off x="6016752" y="3646424"/>
-            <a:ext cx="548640" cy="955040"/>
+            <a:off x="6016752" y="3651504"/>
+            <a:ext cx="548640" cy="944880"/>
           </a:xfrm>
           <a:prstGeom prst="rect">
             <a:avLst/>
@@ -26490,8 +26490,8 @@
         </p:nvSpPr>
         <p:spPr>
           <a:xfrm>
-            <a:off x="5486400" y="1304544"/>
-            <a:ext cx="1572767" cy="1347216"/>
+            <a:off x="5486400" y="1395984"/>
+            <a:ext cx="1572767" cy="1255776"/>
           </a:xfrm>
           <a:prstGeom prst="rect">
             <a:avLst/>
@@ -26540,8 +26540,8 @@
         </p:blipFill>
         <p:spPr>
           <a:xfrm>
-            <a:off x="5998464" y="1500632"/>
-            <a:ext cx="548640" cy="955040"/>
+            <a:off x="5998464" y="1551432"/>
+            <a:ext cx="548640" cy="944880"/>
           </a:xfrm>
           <a:prstGeom prst="rect">
             <a:avLst/>
@@ -26556,8 +26556,8 @@
         </p:nvSpPr>
         <p:spPr>
           <a:xfrm>
-            <a:off x="7205472" y="1304544"/>
-            <a:ext cx="1572767" cy="1347216"/>
+            <a:off x="7205472" y="1395984"/>
+            <a:ext cx="1572767" cy="1255776"/>
           </a:xfrm>
           <a:prstGeom prst="rect">
             <a:avLst/>
@@ -26606,8 +26606,8 @@
         </p:blipFill>
         <p:spPr>
           <a:xfrm>
-            <a:off x="7707376" y="1500632"/>
-            <a:ext cx="568960" cy="955040"/>
+            <a:off x="7722615" y="1551432"/>
+            <a:ext cx="538480" cy="944880"/>
           </a:xfrm>
           <a:prstGeom prst="rect">
             <a:avLst/>
@@ -26623,7 +26623,7 @@
         <p:spPr>
           <a:xfrm>
             <a:off x="5486400" y="2798064"/>
-            <a:ext cx="1572767" cy="1347216"/>
+            <a:ext cx="1572767" cy="1255776"/>
           </a:xfrm>
           <a:prstGeom prst="rect">
             <a:avLst/>
@@ -26672,8 +26672,8 @@
         </p:blipFill>
         <p:spPr>
           <a:xfrm>
-            <a:off x="5998464" y="2994152"/>
-            <a:ext cx="548640" cy="955040"/>
+            <a:off x="6023864" y="2953512"/>
+            <a:ext cx="497840" cy="944880"/>
           </a:xfrm>
           <a:prstGeom prst="rect">
             <a:avLst/>
@@ -26689,7 +26689,7 @@
         <p:spPr>
           <a:xfrm>
             <a:off x="7205472" y="2798064"/>
-            <a:ext cx="1572767" cy="1347216"/>
+            <a:ext cx="1572767" cy="1255776"/>
           </a:xfrm>
           <a:prstGeom prst="rect">
             <a:avLst/>
@@ -26738,8 +26738,8 @@
         </p:blipFill>
         <p:spPr>
           <a:xfrm>
-            <a:off x="7661655" y="2953512"/>
-            <a:ext cx="660400" cy="1036320"/>
+            <a:off x="7580375" y="3009392"/>
+            <a:ext cx="822960" cy="833120"/>
           </a:xfrm>
           <a:prstGeom prst="rect">
             <a:avLst/>
@@ -27148,8 +27148,8 @@
         </p:blipFill>
         <p:spPr>
           <a:xfrm>
-            <a:off x="1074420" y="1305559"/>
-            <a:ext cx="548640" cy="955040"/>
+            <a:off x="1074420" y="1271016"/>
+            <a:ext cx="548640" cy="944880"/>
           </a:xfrm>
           <a:prstGeom prst="rect">
             <a:avLst/>
@@ -27164,7 +27164,7 @@
         </p:nvSpPr>
         <p:spPr>
           <a:xfrm>
-            <a:off x="512064" y="2432303"/>
+            <a:off x="512064" y="2353056"/>
             <a:ext cx="1673351" cy="9144"/>
           </a:xfrm>
           <a:prstGeom prst="rect">
@@ -27206,7 +27206,7 @@
         </p:nvSpPr>
         <p:spPr>
           <a:xfrm>
-            <a:off x="512064" y="2542032"/>
+            <a:off x="512064" y="2462784"/>
             <a:ext cx="1673351" cy="146304"/>
           </a:xfrm>
           <a:prstGeom prst="rect">
@@ -27245,7 +27245,7 @@
         </p:nvSpPr>
         <p:spPr>
           <a:xfrm>
-            <a:off x="512064" y="2724911"/>
+            <a:off x="512064" y="2645664"/>
             <a:ext cx="1673351" cy="402336"/>
           </a:xfrm>
           <a:prstGeom prst="rect">
@@ -27300,7 +27300,7 @@
         </p:nvSpPr>
         <p:spPr>
           <a:xfrm>
-            <a:off x="512064" y="3182111"/>
+            <a:off x="512064" y="3102864"/>
             <a:ext cx="1673351" cy="585216"/>
           </a:xfrm>
           <a:prstGeom prst="rect">
@@ -28066,8 +28066,8 @@
         </p:blipFill>
         <p:spPr>
           <a:xfrm>
-            <a:off x="3213100" y="1305559"/>
-            <a:ext cx="568960" cy="955040"/>
+            <a:off x="3228340" y="1271016"/>
+            <a:ext cx="538480" cy="944880"/>
           </a:xfrm>
           <a:prstGeom prst="rect">
             <a:avLst/>
@@ -28082,7 +28082,7 @@
         </p:nvSpPr>
         <p:spPr>
           <a:xfrm>
-            <a:off x="2660904" y="2432303"/>
+            <a:off x="2660904" y="2353056"/>
             <a:ext cx="1673351" cy="9144"/>
           </a:xfrm>
           <a:prstGeom prst="rect">
@@ -28124,7 +28124,7 @@
         </p:nvSpPr>
         <p:spPr>
           <a:xfrm>
-            <a:off x="2660904" y="2542032"/>
+            <a:off x="2660904" y="2462784"/>
             <a:ext cx="1673351" cy="146304"/>
           </a:xfrm>
           <a:prstGeom prst="rect">
@@ -28163,7 +28163,7 @@
         </p:nvSpPr>
         <p:spPr>
           <a:xfrm>
-            <a:off x="2660904" y="2724911"/>
+            <a:off x="2660904" y="2645664"/>
             <a:ext cx="1673351" cy="402336"/>
           </a:xfrm>
           <a:prstGeom prst="rect">
@@ -28218,7 +28218,7 @@
         </p:nvSpPr>
         <p:spPr>
           <a:xfrm>
-            <a:off x="2660904" y="3182111"/>
+            <a:off x="2660904" y="3102864"/>
             <a:ext cx="1673351" cy="585216"/>
           </a:xfrm>
           <a:prstGeom prst="rect">
@@ -28984,8 +28984,8 @@
         </p:blipFill>
         <p:spPr>
           <a:xfrm>
-            <a:off x="5372100" y="1305559"/>
-            <a:ext cx="548640" cy="955040"/>
+            <a:off x="5397500" y="1271016"/>
+            <a:ext cx="497840" cy="944880"/>
           </a:xfrm>
           <a:prstGeom prst="rect">
             <a:avLst/>
@@ -29000,7 +29000,7 @@
         </p:nvSpPr>
         <p:spPr>
           <a:xfrm>
-            <a:off x="4809744" y="2432303"/>
+            <a:off x="4809744" y="2353056"/>
             <a:ext cx="1673351" cy="9144"/>
           </a:xfrm>
           <a:prstGeom prst="rect">
@@ -29042,7 +29042,7 @@
         </p:nvSpPr>
         <p:spPr>
           <a:xfrm>
-            <a:off x="4809744" y="2542032"/>
+            <a:off x="4809744" y="2462784"/>
             <a:ext cx="1673351" cy="146304"/>
           </a:xfrm>
           <a:prstGeom prst="rect">
@@ -29081,7 +29081,7 @@
         </p:nvSpPr>
         <p:spPr>
           <a:xfrm>
-            <a:off x="4809744" y="2724911"/>
+            <a:off x="4809744" y="2645664"/>
             <a:ext cx="1673351" cy="402336"/>
           </a:xfrm>
           <a:prstGeom prst="rect">
@@ -29136,7 +29136,7 @@
         </p:nvSpPr>
         <p:spPr>
           <a:xfrm>
-            <a:off x="4809744" y="3182111"/>
+            <a:off x="4809744" y="3102864"/>
             <a:ext cx="1673351" cy="585216"/>
           </a:xfrm>
           <a:prstGeom prst="rect">
@@ -29902,8 +29902,8 @@
         </p:blipFill>
         <p:spPr>
           <a:xfrm>
-            <a:off x="7465060" y="1264920"/>
-            <a:ext cx="660400" cy="1036320"/>
+            <a:off x="7383780" y="1326896"/>
+            <a:ext cx="822960" cy="833120"/>
           </a:xfrm>
           <a:prstGeom prst="rect">
             <a:avLst/>
@@ -29918,7 +29918,7 @@
         </p:nvSpPr>
         <p:spPr>
           <a:xfrm>
-            <a:off x="6958584" y="2432303"/>
+            <a:off x="6958584" y="2353056"/>
             <a:ext cx="1673351" cy="9144"/>
           </a:xfrm>
           <a:prstGeom prst="rect">
@@ -29960,7 +29960,7 @@
         </p:nvSpPr>
         <p:spPr>
           <a:xfrm>
-            <a:off x="6958584" y="2542032"/>
+            <a:off x="6958584" y="2462784"/>
             <a:ext cx="1673351" cy="146304"/>
           </a:xfrm>
           <a:prstGeom prst="rect">
@@ -29999,7 +29999,7 @@
         </p:nvSpPr>
         <p:spPr>
           <a:xfrm>
-            <a:off x="6958584" y="2724911"/>
+            <a:off x="6958584" y="2645664"/>
             <a:ext cx="1673351" cy="402336"/>
           </a:xfrm>
           <a:prstGeom prst="rect">
@@ -30054,7 +30054,7 @@
         </p:nvSpPr>
         <p:spPr>
           <a:xfrm>
-            <a:off x="6958584" y="3182111"/>
+            <a:off x="6958584" y="3102864"/>
             <a:ext cx="1673351" cy="585216"/>
           </a:xfrm>
           <a:prstGeom prst="rect">
@@ -31201,8 +31201,8 @@
         </p:blipFill>
         <p:spPr>
           <a:xfrm>
-            <a:off x="1366520" y="1259839"/>
-            <a:ext cx="680720" cy="1046480"/>
+            <a:off x="1275080" y="1271016"/>
+            <a:ext cx="863600" cy="843280"/>
           </a:xfrm>
           <a:prstGeom prst="rect">
             <a:avLst/>
@@ -31217,7 +31217,7 @@
         </p:nvSpPr>
         <p:spPr>
           <a:xfrm>
-            <a:off x="512064" y="2432303"/>
+            <a:off x="512064" y="2251456"/>
             <a:ext cx="2389632" cy="9144"/>
           </a:xfrm>
           <a:prstGeom prst="rect">
@@ -31259,7 +31259,7 @@
         </p:nvSpPr>
         <p:spPr>
           <a:xfrm>
-            <a:off x="512064" y="2542032"/>
+            <a:off x="512064" y="2361184"/>
             <a:ext cx="2389632" cy="146304"/>
           </a:xfrm>
           <a:prstGeom prst="rect">
@@ -31298,7 +31298,7 @@
         </p:nvSpPr>
         <p:spPr>
           <a:xfrm>
-            <a:off x="512064" y="2724911"/>
+            <a:off x="512064" y="2544063"/>
             <a:ext cx="2389632" cy="402336"/>
           </a:xfrm>
           <a:prstGeom prst="rect">
@@ -31353,7 +31353,7 @@
         </p:nvSpPr>
         <p:spPr>
           <a:xfrm>
-            <a:off x="512064" y="3182111"/>
+            <a:off x="512064" y="3001263"/>
             <a:ext cx="2389632" cy="585216"/>
           </a:xfrm>
           <a:prstGeom prst="rect">
@@ -32119,8 +32119,8 @@
         </p:blipFill>
         <p:spPr>
           <a:xfrm>
-            <a:off x="4292600" y="1417319"/>
-            <a:ext cx="558800" cy="731520"/>
+            <a:off x="4302760" y="1337055"/>
+            <a:ext cx="538480" cy="711200"/>
           </a:xfrm>
           <a:prstGeom prst="rect">
             <a:avLst/>
@@ -32135,7 +32135,7 @@
         </p:nvSpPr>
         <p:spPr>
           <a:xfrm>
-            <a:off x="3377184" y="2432303"/>
+            <a:off x="3377184" y="2251456"/>
             <a:ext cx="2389632" cy="9144"/>
           </a:xfrm>
           <a:prstGeom prst="rect">
@@ -32177,7 +32177,7 @@
         </p:nvSpPr>
         <p:spPr>
           <a:xfrm>
-            <a:off x="3377184" y="2542032"/>
+            <a:off x="3377184" y="2361184"/>
             <a:ext cx="2389632" cy="146304"/>
           </a:xfrm>
           <a:prstGeom prst="rect">
@@ -32216,7 +32216,7 @@
         </p:nvSpPr>
         <p:spPr>
           <a:xfrm>
-            <a:off x="3377184" y="2724911"/>
+            <a:off x="3377184" y="2544063"/>
             <a:ext cx="2389632" cy="402336"/>
           </a:xfrm>
           <a:prstGeom prst="rect">
@@ -32271,7 +32271,7 @@
         </p:nvSpPr>
         <p:spPr>
           <a:xfrm>
-            <a:off x="3377184" y="3182111"/>
+            <a:off x="3377184" y="3001263"/>
             <a:ext cx="2389632" cy="585216"/>
           </a:xfrm>
           <a:prstGeom prst="rect">
@@ -33037,8 +33037,8 @@
         </p:blipFill>
         <p:spPr>
           <a:xfrm>
-            <a:off x="7167880" y="1417319"/>
-            <a:ext cx="538480" cy="731520"/>
+            <a:off x="7167880" y="1331976"/>
+            <a:ext cx="538480" cy="721360"/>
           </a:xfrm>
           <a:prstGeom prst="rect">
             <a:avLst/>
@@ -33053,7 +33053,7 @@
         </p:nvSpPr>
         <p:spPr>
           <a:xfrm>
-            <a:off x="6242304" y="2432303"/>
+            <a:off x="6242304" y="2251456"/>
             <a:ext cx="2389632" cy="9144"/>
           </a:xfrm>
           <a:prstGeom prst="rect">
@@ -33095,7 +33095,7 @@
         </p:nvSpPr>
         <p:spPr>
           <a:xfrm>
-            <a:off x="6242304" y="2542032"/>
+            <a:off x="6242304" y="2361184"/>
             <a:ext cx="2389632" cy="146304"/>
           </a:xfrm>
           <a:prstGeom prst="rect">
@@ -33134,7 +33134,7 @@
         </p:nvSpPr>
         <p:spPr>
           <a:xfrm>
-            <a:off x="6242304" y="2724911"/>
+            <a:off x="6242304" y="2544063"/>
             <a:ext cx="2389632" cy="402336"/>
           </a:xfrm>
           <a:prstGeom prst="rect">
@@ -33189,7 +33189,7 @@
         </p:nvSpPr>
         <p:spPr>
           <a:xfrm>
-            <a:off x="6242304" y="3182111"/>
+            <a:off x="6242304" y="3001263"/>
             <a:ext cx="2389632" cy="585216"/>
           </a:xfrm>
           <a:prstGeom prst="rect">
@@ -34336,8 +34336,8 @@
         </p:blipFill>
         <p:spPr>
           <a:xfrm>
-            <a:off x="1432560" y="1417319"/>
-            <a:ext cx="548640" cy="731520"/>
+            <a:off x="1432560" y="1427479"/>
+            <a:ext cx="548640" cy="711200"/>
           </a:xfrm>
           <a:prstGeom prst="rect">
             <a:avLst/>
@@ -35254,8 +35254,8 @@
         </p:blipFill>
         <p:spPr>
           <a:xfrm>
-            <a:off x="4236720" y="1254759"/>
-            <a:ext cx="670560" cy="1056640"/>
+            <a:off x="4251960" y="1264920"/>
+            <a:ext cx="640080" cy="1036320"/>
           </a:xfrm>
           <a:prstGeom prst="rect">
             <a:avLst/>
@@ -36172,8 +36172,8 @@
         </p:blipFill>
         <p:spPr>
           <a:xfrm>
-            <a:off x="7122160" y="1259839"/>
-            <a:ext cx="629920" cy="1046480"/>
+            <a:off x="7117080" y="1270000"/>
+            <a:ext cx="640080" cy="1026160"/>
           </a:xfrm>
           <a:prstGeom prst="rect">
             <a:avLst/>

--- a/presentation/Постачальники_снеків_собівартість.pptx
+++ b/presentation/Постачальники_снеків_собівартість.pptx
@@ -4027,19 +4027,17 @@
       </p:sp>
       <p:sp>
         <p:nvSpPr>
-          <p:cNvPr id="4" name="Rounded Rectangle 3"/>
+          <p:cNvPr id="4" name="Rectangle 3"/>
           <p:cNvSpPr/>
           <p:nvPr/>
         </p:nvSpPr>
         <p:spPr>
           <a:xfrm>
-            <a:off x="365760" y="676656"/>
-            <a:ext cx="402336" cy="402336"/>
-          </a:xfrm>
-          <a:prstGeom prst="roundRect">
-            <a:avLst>
-              <a:gd name="adj" fmla="val 10000"/>
-            </a:avLst>
+            <a:off x="0" y="0"/>
+            <a:ext cx="9144000" cy="2670048"/>
+          </a:xfrm>
+          <a:prstGeom prst="rect">
+            <a:avLst/>
           </a:prstGeom>
           <a:solidFill>
             <a:srgbClr val="B23A22"/>
@@ -4071,192 +4069,22 @@
       </p:sp>
       <p:sp>
         <p:nvSpPr>
-          <p:cNvPr id="5" name="TextBox 4"/>
-          <p:cNvSpPr txBox="1"/>
-          <p:nvPr/>
-        </p:nvSpPr>
-        <p:spPr>
-          <a:xfrm>
-            <a:off x="365760" y="676656"/>
+          <p:cNvPr id="5" name="Rounded Rectangle 4"/>
+          <p:cNvSpPr/>
+          <p:nvPr/>
+        </p:nvSpPr>
+        <p:spPr>
+          <a:xfrm>
+            <a:off x="365760" y="475488"/>
             <a:ext cx="402336" cy="402336"/>
           </a:xfrm>
-          <a:prstGeom prst="rect">
-            <a:avLst/>
-          </a:prstGeom>
-          <a:noFill/>
-        </p:spPr>
-        <p:txBody>
-          <a:bodyPr wrap="square" lIns="0" rIns="0" tIns="0" bIns="0" anchor="ctr">
-            <a:spAutoFit/>
-          </a:bodyPr>
-          <a:lstStyle/>
-          <a:p>
-            <a:pPr algn="ctr">
-              <a:lnSpc>
-                <a:spcPct val="100000"/>
-              </a:lnSpc>
-            </a:pPr>
-            <a:r>
-              <a:rPr sz="1400" b="1" i="0">
-                <a:solidFill>
-                  <a:srgbClr val="FFFFFF"/>
-                </a:solidFill>
-                <a:latin typeface="Cambria"/>
-              </a:rPr>
-              <a:t>04</a:t>
-            </a:r>
-          </a:p>
-        </p:txBody>
-      </p:sp>
-      <p:sp>
-        <p:nvSpPr>
-          <p:cNvPr id="6" name="TextBox 5"/>
-          <p:cNvSpPr txBox="1"/>
-          <p:nvPr/>
-        </p:nvSpPr>
-        <p:spPr>
-          <a:xfrm>
-            <a:off x="914400" y="676656"/>
-            <a:ext cx="4297680" cy="182880"/>
-          </a:xfrm>
-          <a:prstGeom prst="rect">
-            <a:avLst/>
-          </a:prstGeom>
-          <a:noFill/>
-        </p:spPr>
-        <p:txBody>
-          <a:bodyPr wrap="square" lIns="0" rIns="0" tIns="0" bIns="0" anchor="t">
-            <a:spAutoFit/>
-          </a:bodyPr>
-          <a:lstStyle/>
-          <a:p>
-            <a:pPr algn="l">
-              <a:lnSpc>
-                <a:spcPct val="100000"/>
-              </a:lnSpc>
-            </a:pPr>
-            <a:r>
-              <a:rPr sz="700" b="1" i="0" spc="90">
-                <a:solidFill>
-                  <a:srgbClr val="8A938D"/>
-                </a:solidFill>
-                <a:latin typeface="Calibri"/>
-              </a:rPr>
-              <a:t>ПОСТАЧАЛЬНИК</a:t>
-            </a:r>
-          </a:p>
-        </p:txBody>
-      </p:sp>
-      <p:sp>
-        <p:nvSpPr>
-          <p:cNvPr id="7" name="TextBox 6"/>
-          <p:cNvSpPr txBox="1"/>
-          <p:nvPr/>
-        </p:nvSpPr>
-        <p:spPr>
-          <a:xfrm>
-            <a:off x="914400" y="859536"/>
-            <a:ext cx="4297680" cy="201168"/>
-          </a:xfrm>
-          <a:prstGeom prst="rect">
-            <a:avLst/>
-          </a:prstGeom>
-          <a:noFill/>
-        </p:spPr>
-        <p:txBody>
-          <a:bodyPr wrap="square" lIns="0" rIns="0" tIns="0" bIns="0" anchor="t">
-            <a:spAutoFit/>
-          </a:bodyPr>
-          <a:lstStyle/>
-          <a:p>
-            <a:pPr algn="l">
-              <a:lnSpc>
-                <a:spcPct val="100000"/>
-              </a:lnSpc>
-            </a:pPr>
-            <a:r>
-              <a:rPr sz="900" b="1" i="0" spc="90">
-                <a:solidFill>
-                  <a:srgbClr val="A23822"/>
-                </a:solidFill>
-                <a:latin typeface="Calibri"/>
-              </a:rPr>
-              <a:t>ZEK</a:t>
-            </a:r>
-          </a:p>
-        </p:txBody>
-      </p:sp>
-      <p:sp>
-        <p:nvSpPr>
-          <p:cNvPr id="8" name="TextBox 7"/>
-          <p:cNvSpPr txBox="1"/>
-          <p:nvPr/>
-        </p:nvSpPr>
-        <p:spPr>
-          <a:xfrm>
-            <a:off x="365760" y="1298448"/>
-            <a:ext cx="4846320" cy="1005840"/>
-          </a:xfrm>
-          <a:prstGeom prst="rect">
-            <a:avLst/>
-          </a:prstGeom>
-          <a:noFill/>
-        </p:spPr>
-        <p:txBody>
-          <a:bodyPr wrap="square" lIns="0" rIns="0" tIns="0" bIns="0" anchor="t">
-            <a:spAutoFit/>
-          </a:bodyPr>
-          <a:lstStyle/>
-          <a:p>
-            <a:pPr algn="l">
-              <a:lnSpc>
-                <a:spcPct val="110000"/>
-              </a:lnSpc>
-            </a:pPr>
-            <a:r>
-              <a:rPr sz="2700" b="1" i="0">
-                <a:solidFill>
-                  <a:srgbClr val="14241F"/>
-                </a:solidFill>
-                <a:latin typeface="Cambria"/>
-              </a:rPr>
-              <a:t>HanJin Food Co. Ltd</a:t>
-            </a:r>
-          </a:p>
-          <a:p>
-            <a:pPr algn="l">
-              <a:lnSpc>
-                <a:spcPct val="110000"/>
-              </a:lnSpc>
-            </a:pPr>
-            <a:r>
-              <a:rPr sz="2700" b="1" i="0">
-                <a:solidFill>
-                  <a:srgbClr val="14241F"/>
-                </a:solidFill>
-                <a:latin typeface="Cambria"/>
-              </a:rPr>
-              <a:t>бренд ZEK</a:t>
-            </a:r>
-          </a:p>
-        </p:txBody>
-      </p:sp>
-      <p:sp>
-        <p:nvSpPr>
-          <p:cNvPr id="9" name="Rectangle 8"/>
-          <p:cNvSpPr/>
-          <p:nvPr/>
-        </p:nvSpPr>
-        <p:spPr>
-          <a:xfrm>
-            <a:off x="365760" y="2468880"/>
-            <a:ext cx="1005840" cy="45720"/>
-          </a:xfrm>
-          <a:prstGeom prst="rect">
-            <a:avLst/>
+          <a:prstGeom prst="roundRect">
+            <a:avLst>
+              <a:gd name="adj" fmla="val 10000"/>
+            </a:avLst>
           </a:prstGeom>
           <a:solidFill>
-            <a:srgbClr val="B23A22"/>
+            <a:srgbClr val="FFFFFF"/>
           </a:solidFill>
           <a:ln>
             <a:noFill/>
@@ -4285,14 +4113,186 @@
       </p:sp>
       <p:sp>
         <p:nvSpPr>
+          <p:cNvPr id="6" name="TextBox 5"/>
+          <p:cNvSpPr txBox="1"/>
+          <p:nvPr/>
+        </p:nvSpPr>
+        <p:spPr>
+          <a:xfrm>
+            <a:off x="365760" y="475488"/>
+            <a:ext cx="402336" cy="402336"/>
+          </a:xfrm>
+          <a:prstGeom prst="rect">
+            <a:avLst/>
+          </a:prstGeom>
+          <a:noFill/>
+        </p:spPr>
+        <p:txBody>
+          <a:bodyPr wrap="square" lIns="0" rIns="0" tIns="0" bIns="0" anchor="ctr">
+            <a:spAutoFit/>
+          </a:bodyPr>
+          <a:lstStyle/>
+          <a:p>
+            <a:pPr algn="ctr">
+              <a:lnSpc>
+                <a:spcPct val="100000"/>
+              </a:lnSpc>
+            </a:pPr>
+            <a:r>
+              <a:rPr sz="1400" b="1" i="0">
+                <a:solidFill>
+                  <a:srgbClr val="AA3922"/>
+                </a:solidFill>
+                <a:latin typeface="Cambria"/>
+              </a:rPr>
+              <a:t>04</a:t>
+            </a:r>
+          </a:p>
+        </p:txBody>
+      </p:sp>
+      <p:sp>
+        <p:nvSpPr>
+          <p:cNvPr id="7" name="TextBox 6"/>
+          <p:cNvSpPr txBox="1"/>
+          <p:nvPr/>
+        </p:nvSpPr>
+        <p:spPr>
+          <a:xfrm>
+            <a:off x="914400" y="493776"/>
+            <a:ext cx="4023360" cy="182880"/>
+          </a:xfrm>
+          <a:prstGeom prst="rect">
+            <a:avLst/>
+          </a:prstGeom>
+          <a:noFill/>
+        </p:spPr>
+        <p:txBody>
+          <a:bodyPr wrap="square" lIns="0" rIns="0" tIns="0" bIns="0" anchor="t">
+            <a:spAutoFit/>
+          </a:bodyPr>
+          <a:lstStyle/>
+          <a:p>
+            <a:pPr algn="l">
+              <a:lnSpc>
+                <a:spcPct val="100000"/>
+              </a:lnSpc>
+            </a:pPr>
+            <a:r>
+              <a:rPr sz="700" b="1" i="0" spc="90">
+                <a:solidFill>
+                  <a:srgbClr val="E8C4BD"/>
+                </a:solidFill>
+                <a:latin typeface="Calibri"/>
+              </a:rPr>
+              <a:t>ПОСТАЧАЛЬНИК</a:t>
+            </a:r>
+          </a:p>
+        </p:txBody>
+      </p:sp>
+      <p:sp>
+        <p:nvSpPr>
+          <p:cNvPr id="8" name="TextBox 7"/>
+          <p:cNvSpPr txBox="1"/>
+          <p:nvPr/>
+        </p:nvSpPr>
+        <p:spPr>
+          <a:xfrm>
+            <a:off x="914400" y="676656"/>
+            <a:ext cx="4023360" cy="201168"/>
+          </a:xfrm>
+          <a:prstGeom prst="rect">
+            <a:avLst/>
+          </a:prstGeom>
+          <a:noFill/>
+        </p:spPr>
+        <p:txBody>
+          <a:bodyPr wrap="square" lIns="0" rIns="0" tIns="0" bIns="0" anchor="t">
+            <a:spAutoFit/>
+          </a:bodyPr>
+          <a:lstStyle/>
+          <a:p>
+            <a:pPr algn="l">
+              <a:lnSpc>
+                <a:spcPct val="100000"/>
+              </a:lnSpc>
+            </a:pPr>
+            <a:r>
+              <a:rPr sz="900" b="1" i="0" spc="90">
+                <a:solidFill>
+                  <a:srgbClr val="FFFFFF"/>
+                </a:solidFill>
+                <a:latin typeface="Calibri"/>
+              </a:rPr>
+              <a:t>ZEK</a:t>
+            </a:r>
+          </a:p>
+        </p:txBody>
+      </p:sp>
+      <p:sp>
+        <p:nvSpPr>
+          <p:cNvPr id="9" name="TextBox 8"/>
+          <p:cNvSpPr txBox="1"/>
+          <p:nvPr/>
+        </p:nvSpPr>
+        <p:spPr>
+          <a:xfrm>
+            <a:off x="365760" y="914400"/>
+            <a:ext cx="4663440" cy="804672"/>
+          </a:xfrm>
+          <a:prstGeom prst="rect">
+            <a:avLst/>
+          </a:prstGeom>
+          <a:noFill/>
+        </p:spPr>
+        <p:txBody>
+          <a:bodyPr wrap="square" lIns="0" rIns="0" tIns="0" bIns="0" anchor="t">
+            <a:spAutoFit/>
+          </a:bodyPr>
+          <a:lstStyle/>
+          <a:p>
+            <a:pPr algn="l">
+              <a:lnSpc>
+                <a:spcPct val="106000"/>
+              </a:lnSpc>
+            </a:pPr>
+            <a:r>
+              <a:rPr sz="2600" b="1" i="0">
+                <a:solidFill>
+                  <a:srgbClr val="FFFFFF"/>
+                </a:solidFill>
+                <a:latin typeface="Cambria"/>
+              </a:rPr>
+              <a:t>HanJin Food Co. Ltd</a:t>
+            </a:r>
+          </a:p>
+          <a:p>
+            <a:pPr algn="l">
+              <a:lnSpc>
+                <a:spcPct val="106000"/>
+              </a:lnSpc>
+            </a:pPr>
+            <a:r>
+              <a:rPr sz="2600" b="1" i="0">
+                <a:solidFill>
+                  <a:srgbClr val="FFFFFF"/>
+                </a:solidFill>
+                <a:latin typeface="Cambria"/>
+              </a:rPr>
+              <a:t>бренд ZEK</a:t>
+            </a:r>
+          </a:p>
+        </p:txBody>
+      </p:sp>
+      <p:sp>
+        <p:nvSpPr>
           <p:cNvPr id="10" name="TextBox 9"/>
           <p:cNvSpPr txBox="1"/>
           <p:nvPr/>
         </p:nvSpPr>
         <p:spPr>
           <a:xfrm>
-            <a:off x="365760" y="2688336"/>
-            <a:ext cx="4709160" cy="1005840"/>
+            <a:off x="365760" y="1901952"/>
+            <a:ext cx="2743200" cy="146304"/>
           </a:xfrm>
           <a:prstGeom prst="rect">
             <a:avLst/>
@@ -4307,52 +4307,13 @@
           <a:p>
             <a:pPr algn="l">
               <a:lnSpc>
-                <a:spcPct val="134000"/>
-              </a:lnSpc>
-            </a:pPr>
-            <a:r>
-              <a:rPr sz="1050" b="0" i="0">
-                <a:solidFill>
-                  <a:srgbClr val="44524C"/>
-                </a:solidFill>
-                <a:latin typeface="Calibri"/>
-              </a:rPr>
-              <a:t>Найбільший за глибиною розрахунку постачальник: 14 позицій у трьох напрямках — темпура, сендвіч і присипка з норі. Єдиний постачальник з відвантаженням із Циндао.</a:t>
-            </a:r>
-          </a:p>
-        </p:txBody>
-      </p:sp>
-      <p:sp>
-        <p:nvSpPr>
-          <p:cNvPr id="11" name="TextBox 10"/>
-          <p:cNvSpPr txBox="1"/>
-          <p:nvPr/>
-        </p:nvSpPr>
-        <p:spPr>
-          <a:xfrm>
-            <a:off x="365760" y="3584448"/>
-            <a:ext cx="2743200" cy="146304"/>
-          </a:xfrm>
-          <a:prstGeom prst="rect">
-            <a:avLst/>
-          </a:prstGeom>
-          <a:noFill/>
-        </p:spPr>
-        <p:txBody>
-          <a:bodyPr wrap="square" lIns="0" rIns="0" tIns="0" bIns="0" anchor="t">
-            <a:spAutoFit/>
-          </a:bodyPr>
-          <a:lstStyle/>
-          <a:p>
-            <a:pPr algn="l">
-              <a:lnSpc>
                 <a:spcPct val="100000"/>
               </a:lnSpc>
             </a:pPr>
             <a:r>
               <a:rPr sz="650" b="1" i="0" spc="90">
                 <a:solidFill>
-                  <a:srgbClr val="8A938D"/>
+                  <a:srgbClr val="E9C8C1"/>
                 </a:solidFill>
                 <a:latin typeface="Calibri"/>
               </a:rPr>
@@ -4363,13 +4324,13 @@
       </p:sp>
       <p:sp>
         <p:nvSpPr>
-          <p:cNvPr id="12" name="Rounded Rectangle 11"/>
+          <p:cNvPr id="11" name="Rounded Rectangle 10"/>
           <p:cNvSpPr/>
           <p:nvPr/>
         </p:nvSpPr>
         <p:spPr>
           <a:xfrm>
-            <a:off x="411480" y="3895344"/>
+            <a:off x="411480" y="2212848"/>
             <a:ext cx="128016" cy="128016"/>
           </a:xfrm>
           <a:prstGeom prst="roundRect">
@@ -4378,7 +4339,7 @@
             </a:avLst>
           </a:prstGeom>
           <a:solidFill>
-            <a:srgbClr val="B23A22"/>
+            <a:srgbClr val="FFFFFF"/>
           </a:solidFill>
           <a:ln>
             <a:noFill/>
@@ -4407,20 +4368,20 @@
       </p:sp>
       <p:sp>
         <p:nvSpPr>
-          <p:cNvPr id="13" name="Rectangle 12"/>
+          <p:cNvPr id="12" name="Rectangle 11"/>
           <p:cNvSpPr/>
           <p:nvPr/>
         </p:nvSpPr>
         <p:spPr>
           <a:xfrm>
-            <a:off x="676656" y="3945635"/>
+            <a:off x="676656" y="2263140"/>
             <a:ext cx="91440" cy="27432"/>
           </a:xfrm>
           <a:prstGeom prst="rect">
             <a:avLst/>
           </a:prstGeom>
           <a:solidFill>
-            <a:srgbClr val="DDAB9F"/>
+            <a:srgbClr val="D59385"/>
           </a:solidFill>
           <a:ln>
             <a:noFill/>
@@ -4449,20 +4410,20 @@
       </p:sp>
       <p:sp>
         <p:nvSpPr>
-          <p:cNvPr id="14" name="Rectangle 13"/>
+          <p:cNvPr id="13" name="Rectangle 12"/>
           <p:cNvSpPr/>
           <p:nvPr/>
         </p:nvSpPr>
         <p:spPr>
           <a:xfrm>
-            <a:off x="859536" y="3945635"/>
+            <a:off x="859536" y="2263140"/>
             <a:ext cx="91440" cy="27432"/>
           </a:xfrm>
           <a:prstGeom prst="rect">
             <a:avLst/>
           </a:prstGeom>
           <a:solidFill>
-            <a:srgbClr val="DDAB9F"/>
+            <a:srgbClr val="D59385"/>
           </a:solidFill>
           <a:ln>
             <a:noFill/>
@@ -4491,20 +4452,20 @@
       </p:sp>
       <p:sp>
         <p:nvSpPr>
-          <p:cNvPr id="15" name="Rectangle 14"/>
+          <p:cNvPr id="14" name="Rectangle 13"/>
           <p:cNvSpPr/>
           <p:nvPr/>
         </p:nvSpPr>
         <p:spPr>
           <a:xfrm>
-            <a:off x="1042416" y="3945635"/>
+            <a:off x="1042416" y="2263140"/>
             <a:ext cx="91440" cy="27432"/>
           </a:xfrm>
           <a:prstGeom prst="rect">
             <a:avLst/>
           </a:prstGeom>
           <a:solidFill>
-            <a:srgbClr val="DDAB9F"/>
+            <a:srgbClr val="D59385"/>
           </a:solidFill>
           <a:ln>
             <a:noFill/>
@@ -4533,20 +4494,20 @@
       </p:sp>
       <p:sp>
         <p:nvSpPr>
-          <p:cNvPr id="16" name="Rectangle 15"/>
+          <p:cNvPr id="15" name="Rectangle 14"/>
           <p:cNvSpPr/>
           <p:nvPr/>
         </p:nvSpPr>
         <p:spPr>
           <a:xfrm>
-            <a:off x="1225296" y="3945635"/>
+            <a:off x="1225296" y="2263140"/>
             <a:ext cx="91440" cy="27432"/>
           </a:xfrm>
           <a:prstGeom prst="rect">
             <a:avLst/>
           </a:prstGeom>
           <a:solidFill>
-            <a:srgbClr val="DDAB9F"/>
+            <a:srgbClr val="D59385"/>
           </a:solidFill>
           <a:ln>
             <a:noFill/>
@@ -4575,20 +4536,20 @@
       </p:sp>
       <p:sp>
         <p:nvSpPr>
-          <p:cNvPr id="17" name="Rectangle 16"/>
+          <p:cNvPr id="16" name="Rectangle 15"/>
           <p:cNvSpPr/>
           <p:nvPr/>
         </p:nvSpPr>
         <p:spPr>
           <a:xfrm>
-            <a:off x="1408176" y="3945635"/>
+            <a:off x="1408176" y="2263140"/>
             <a:ext cx="91440" cy="27432"/>
           </a:xfrm>
           <a:prstGeom prst="rect">
             <a:avLst/>
           </a:prstGeom>
           <a:solidFill>
-            <a:srgbClr val="DDAB9F"/>
+            <a:srgbClr val="D59385"/>
           </a:solidFill>
           <a:ln>
             <a:noFill/>
@@ -4617,20 +4578,20 @@
       </p:sp>
       <p:sp>
         <p:nvSpPr>
-          <p:cNvPr id="18" name="Rectangle 17"/>
+          <p:cNvPr id="17" name="Rectangle 16"/>
           <p:cNvSpPr/>
           <p:nvPr/>
         </p:nvSpPr>
         <p:spPr>
           <a:xfrm>
-            <a:off x="1591056" y="3945635"/>
+            <a:off x="1591056" y="2263140"/>
             <a:ext cx="91440" cy="27432"/>
           </a:xfrm>
           <a:prstGeom prst="rect">
             <a:avLst/>
           </a:prstGeom>
           <a:solidFill>
-            <a:srgbClr val="DDAB9F"/>
+            <a:srgbClr val="D59385"/>
           </a:solidFill>
           <a:ln>
             <a:noFill/>
@@ -4659,20 +4620,20 @@
       </p:sp>
       <p:sp>
         <p:nvSpPr>
-          <p:cNvPr id="19" name="Rectangle 18"/>
+          <p:cNvPr id="18" name="Rectangle 17"/>
           <p:cNvSpPr/>
           <p:nvPr/>
         </p:nvSpPr>
         <p:spPr>
           <a:xfrm>
-            <a:off x="1773936" y="3945635"/>
+            <a:off x="1773936" y="2263140"/>
             <a:ext cx="91440" cy="27432"/>
           </a:xfrm>
           <a:prstGeom prst="rect">
             <a:avLst/>
           </a:prstGeom>
           <a:solidFill>
-            <a:srgbClr val="DDAB9F"/>
+            <a:srgbClr val="D59385"/>
           </a:solidFill>
           <a:ln>
             <a:noFill/>
@@ -4701,20 +4662,20 @@
       </p:sp>
       <p:sp>
         <p:nvSpPr>
-          <p:cNvPr id="20" name="Rectangle 19"/>
+          <p:cNvPr id="19" name="Rectangle 18"/>
           <p:cNvSpPr/>
           <p:nvPr/>
         </p:nvSpPr>
         <p:spPr>
           <a:xfrm>
-            <a:off x="1956816" y="3945635"/>
+            <a:off x="1956816" y="2263140"/>
             <a:ext cx="91440" cy="27432"/>
           </a:xfrm>
           <a:prstGeom prst="rect">
             <a:avLst/>
           </a:prstGeom>
           <a:solidFill>
-            <a:srgbClr val="DDAB9F"/>
+            <a:srgbClr val="D59385"/>
           </a:solidFill>
           <a:ln>
             <a:noFill/>
@@ -4743,20 +4704,20 @@
       </p:sp>
       <p:sp>
         <p:nvSpPr>
-          <p:cNvPr id="21" name="Rectangle 20"/>
+          <p:cNvPr id="20" name="Rectangle 19"/>
           <p:cNvSpPr/>
           <p:nvPr/>
         </p:nvSpPr>
         <p:spPr>
           <a:xfrm>
-            <a:off x="2139696" y="3945635"/>
+            <a:off x="2139696" y="2263140"/>
             <a:ext cx="91440" cy="27432"/>
           </a:xfrm>
           <a:prstGeom prst="rect">
             <a:avLst/>
           </a:prstGeom>
           <a:solidFill>
-            <a:srgbClr val="DDAB9F"/>
+            <a:srgbClr val="D59385"/>
           </a:solidFill>
           <a:ln>
             <a:noFill/>
@@ -4785,20 +4746,20 @@
       </p:sp>
       <p:sp>
         <p:nvSpPr>
-          <p:cNvPr id="22" name="Rectangle 21"/>
+          <p:cNvPr id="21" name="Rectangle 20"/>
           <p:cNvSpPr/>
           <p:nvPr/>
         </p:nvSpPr>
         <p:spPr>
           <a:xfrm>
-            <a:off x="2322576" y="3945635"/>
+            <a:off x="2322576" y="2263140"/>
             <a:ext cx="91440" cy="27432"/>
           </a:xfrm>
           <a:prstGeom prst="rect">
             <a:avLst/>
           </a:prstGeom>
           <a:solidFill>
-            <a:srgbClr val="DDAB9F"/>
+            <a:srgbClr val="D59385"/>
           </a:solidFill>
           <a:ln>
             <a:noFill/>
@@ -4827,20 +4788,20 @@
       </p:sp>
       <p:sp>
         <p:nvSpPr>
-          <p:cNvPr id="23" name="Rectangle 22"/>
+          <p:cNvPr id="22" name="Rectangle 21"/>
           <p:cNvSpPr/>
           <p:nvPr/>
         </p:nvSpPr>
         <p:spPr>
           <a:xfrm>
-            <a:off x="2505456" y="3945635"/>
+            <a:off x="2505456" y="2263140"/>
             <a:ext cx="91440" cy="27432"/>
           </a:xfrm>
           <a:prstGeom prst="rect">
             <a:avLst/>
           </a:prstGeom>
           <a:solidFill>
-            <a:srgbClr val="DDAB9F"/>
+            <a:srgbClr val="D59385"/>
           </a:solidFill>
           <a:ln>
             <a:noFill/>
@@ -4869,13 +4830,13 @@
       </p:sp>
       <p:sp>
         <p:nvSpPr>
-          <p:cNvPr id="24" name="Rounded Rectangle 23"/>
+          <p:cNvPr id="23" name="Rounded Rectangle 22"/>
           <p:cNvSpPr/>
           <p:nvPr/>
         </p:nvSpPr>
         <p:spPr>
           <a:xfrm>
-            <a:off x="2670048" y="3895344"/>
+            <a:off x="2670048" y="2212848"/>
             <a:ext cx="128016" cy="128016"/>
           </a:xfrm>
           <a:prstGeom prst="roundRect">
@@ -4884,7 +4845,7 @@
             </a:avLst>
           </a:prstGeom>
           <a:solidFill>
-            <a:srgbClr val="14241F"/>
+            <a:srgbClr val="FFFFFF"/>
           </a:solidFill>
           <a:ln>
             <a:noFill/>
@@ -4913,14 +4874,53 @@
       </p:sp>
       <p:sp>
         <p:nvSpPr>
+          <p:cNvPr id="24" name="TextBox 23"/>
+          <p:cNvSpPr txBox="1"/>
+          <p:nvPr/>
+        </p:nvSpPr>
+        <p:spPr>
+          <a:xfrm>
+            <a:off x="365760" y="2432304"/>
+            <a:ext cx="1371600" cy="182880"/>
+          </a:xfrm>
+          <a:prstGeom prst="rect">
+            <a:avLst/>
+          </a:prstGeom>
+          <a:noFill/>
+        </p:spPr>
+        <p:txBody>
+          <a:bodyPr wrap="square" lIns="0" rIns="0" tIns="0" bIns="0" anchor="t">
+            <a:spAutoFit/>
+          </a:bodyPr>
+          <a:lstStyle/>
+          <a:p>
+            <a:pPr algn="l">
+              <a:lnSpc>
+                <a:spcPct val="100000"/>
+              </a:lnSpc>
+            </a:pPr>
+            <a:r>
+              <a:rPr sz="800" b="1" i="0">
+                <a:solidFill>
+                  <a:srgbClr val="FFFFFF"/>
+                </a:solidFill>
+                <a:latin typeface="Calibri"/>
+              </a:rPr>
+              <a:t>FOB Qingdao</a:t>
+            </a:r>
+          </a:p>
+        </p:txBody>
+      </p:sp>
+      <p:sp>
+        <p:nvSpPr>
           <p:cNvPr id="25" name="TextBox 24"/>
           <p:cNvSpPr txBox="1"/>
           <p:nvPr/>
         </p:nvSpPr>
         <p:spPr>
           <a:xfrm>
-            <a:off x="365760" y="4114800"/>
-            <a:ext cx="1371600" cy="182880"/>
+            <a:off x="1920240" y="2432304"/>
+            <a:ext cx="914400" cy="182880"/>
           </a:xfrm>
           <a:prstGeom prst="rect">
             <a:avLst/>
@@ -4933,7 +4933,7 @@
           </a:bodyPr>
           <a:lstStyle/>
           <a:p>
-            <a:pPr algn="l">
+            <a:pPr algn="r">
               <a:lnSpc>
                 <a:spcPct val="100000"/>
               </a:lnSpc>
@@ -4941,46 +4941,7 @@
             <a:r>
               <a:rPr sz="800" b="1" i="0">
                 <a:solidFill>
-                  <a:srgbClr val="14241F"/>
-                </a:solidFill>
-                <a:latin typeface="Calibri"/>
-              </a:rPr>
-              <a:t>FOB Qingdao</a:t>
-            </a:r>
-          </a:p>
-        </p:txBody>
-      </p:sp>
-      <p:sp>
-        <p:nvSpPr>
-          <p:cNvPr id="26" name="TextBox 25"/>
-          <p:cNvSpPr txBox="1"/>
-          <p:nvPr/>
-        </p:nvSpPr>
-        <p:spPr>
-          <a:xfrm>
-            <a:off x="1920240" y="4114800"/>
-            <a:ext cx="914400" cy="182880"/>
-          </a:xfrm>
-          <a:prstGeom prst="rect">
-            <a:avLst/>
-          </a:prstGeom>
-          <a:noFill/>
-        </p:spPr>
-        <p:txBody>
-          <a:bodyPr wrap="square" lIns="0" rIns="0" tIns="0" bIns="0" anchor="t">
-            <a:spAutoFit/>
-          </a:bodyPr>
-          <a:lstStyle/>
-          <a:p>
-            <a:pPr algn="r">
-              <a:lnSpc>
-                <a:spcPct val="100000"/>
-              </a:lnSpc>
-            </a:pPr>
-            <a:r>
-              <a:rPr sz="800" b="1" i="0">
-                <a:solidFill>
-                  <a:srgbClr val="14241F"/>
+                  <a:srgbClr val="FFFFFF"/>
                 </a:solidFill>
                 <a:latin typeface="Calibri"/>
               </a:rPr>
@@ -4991,18 +4952,18 @@
       </p:sp>
       <p:sp>
         <p:nvSpPr>
-          <p:cNvPr id="27" name="Rounded Rectangle 26"/>
+          <p:cNvPr id="26" name="Rounded Rectangle 25"/>
           <p:cNvSpPr/>
           <p:nvPr/>
         </p:nvSpPr>
         <p:spPr>
           <a:xfrm>
-            <a:off x="3383279" y="3584448"/>
-            <a:ext cx="822960" cy="841248"/>
+            <a:off x="5120640" y="1300601"/>
+            <a:ext cx="1755648" cy="2208784"/>
           </a:xfrm>
           <a:prstGeom prst="roundRect">
             <a:avLst>
-              <a:gd name="adj" fmla="val 8000"/>
+              <a:gd name="adj" fmla="val 6000"/>
             </a:avLst>
           </a:prstGeom>
           <a:solidFill>
@@ -5035,98 +4996,44 @@
           <a:p/>
         </p:txBody>
       </p:sp>
-      <p:sp>
-        <p:nvSpPr>
-          <p:cNvPr id="28" name="TextBox 27"/>
-          <p:cNvSpPr txBox="1"/>
-          <p:nvPr/>
-        </p:nvSpPr>
-        <p:spPr>
-          <a:xfrm>
-            <a:off x="3383279" y="3712463"/>
-            <a:ext cx="822960" cy="292608"/>
-          </a:xfrm>
-          <a:prstGeom prst="rect">
-            <a:avLst/>
-          </a:prstGeom>
-          <a:noFill/>
-        </p:spPr>
-        <p:txBody>
-          <a:bodyPr wrap="square" lIns="0" rIns="0" tIns="0" bIns="0" anchor="t">
-            <a:spAutoFit/>
-          </a:bodyPr>
-          <a:lstStyle/>
-          <a:p>
-            <a:pPr algn="ctr">
-              <a:lnSpc>
-                <a:spcPct val="100000"/>
-              </a:lnSpc>
-            </a:pPr>
-            <a:r>
-              <a:rPr sz="1300" b="1" i="0">
-                <a:solidFill>
-                  <a:srgbClr val="A23822"/>
-                </a:solidFill>
-                <a:latin typeface="Cambria"/>
-              </a:rPr>
-              <a:t>Китай</a:t>
-            </a:r>
-          </a:p>
-        </p:txBody>
-      </p:sp>
-      <p:sp>
-        <p:nvSpPr>
-          <p:cNvPr id="29" name="TextBox 28"/>
-          <p:cNvSpPr txBox="1"/>
-          <p:nvPr/>
-        </p:nvSpPr>
-        <p:spPr>
-          <a:xfrm>
-            <a:off x="3383279" y="4078224"/>
-            <a:ext cx="822960" cy="201168"/>
-          </a:xfrm>
-          <a:prstGeom prst="rect">
-            <a:avLst/>
-          </a:prstGeom>
-          <a:noFill/>
-        </p:spPr>
-        <p:txBody>
-          <a:bodyPr wrap="square" lIns="0" rIns="0" tIns="0" bIns="0" anchor="t">
-            <a:spAutoFit/>
-          </a:bodyPr>
-          <a:lstStyle/>
-          <a:p>
-            <a:pPr algn="ctr">
-              <a:lnSpc>
-                <a:spcPct val="100000"/>
-              </a:lnSpc>
-            </a:pPr>
-            <a:r>
-              <a:rPr sz="650" b="0" i="0">
-                <a:solidFill>
-                  <a:srgbClr val="8A938D"/>
-                </a:solidFill>
-                <a:latin typeface="Calibri"/>
-              </a:rPr>
-              <a:t>Країна</a:t>
-            </a:r>
-          </a:p>
-        </p:txBody>
-      </p:sp>
-      <p:sp>
-        <p:nvSpPr>
-          <p:cNvPr id="30" name="Rounded Rectangle 29"/>
+      <p:pic>
+        <p:nvPicPr>
+          <p:cNvPr id="27" name="Picture 26" descr="zek_tempura_corn30.png"/>
+          <p:cNvPicPr>
+            <a:picLocks noChangeAspect="1"/>
+          </p:cNvPicPr>
+          <p:nvPr/>
+        </p:nvPicPr>
+        <p:blipFill>
+          <a:blip r:embed="rId2"/>
+          <a:stretch>
+            <a:fillRect/>
+          </a:stretch>
+        </p:blipFill>
+        <p:spPr>
+          <a:xfrm>
+            <a:off x="5241544" y="1419473"/>
+            <a:ext cx="1513840" cy="1971040"/>
+          </a:xfrm>
+          <a:prstGeom prst="rect">
+            <a:avLst/>
+          </a:prstGeom>
+        </p:spPr>
+      </p:pic>
+      <p:sp>
+        <p:nvSpPr>
+          <p:cNvPr id="28" name="Rounded Rectangle 27"/>
           <p:cNvSpPr/>
           <p:nvPr/>
         </p:nvSpPr>
         <p:spPr>
           <a:xfrm>
-            <a:off x="4315968" y="3584448"/>
-            <a:ext cx="822960" cy="841248"/>
+            <a:off x="7022592" y="1300601"/>
+            <a:ext cx="1755648" cy="2208784"/>
           </a:xfrm>
           <a:prstGeom prst="roundRect">
             <a:avLst>
-              <a:gd name="adj" fmla="val 8000"/>
+              <a:gd name="adj" fmla="val 6000"/>
             </a:avLst>
           </a:prstGeom>
           <a:solidFill>
@@ -5159,203 +5066,9 @@
           <a:p/>
         </p:txBody>
       </p:sp>
-      <p:sp>
-        <p:nvSpPr>
-          <p:cNvPr id="31" name="TextBox 30"/>
-          <p:cNvSpPr txBox="1"/>
-          <p:nvPr/>
-        </p:nvSpPr>
-        <p:spPr>
-          <a:xfrm>
-            <a:off x="4315968" y="3712463"/>
-            <a:ext cx="822960" cy="292608"/>
-          </a:xfrm>
-          <a:prstGeom prst="rect">
-            <a:avLst/>
-          </a:prstGeom>
-          <a:noFill/>
-        </p:spPr>
-        <p:txBody>
-          <a:bodyPr wrap="square" lIns="0" rIns="0" tIns="0" bIns="0" anchor="t">
-            <a:spAutoFit/>
-          </a:bodyPr>
-          <a:lstStyle/>
-          <a:p>
-            <a:pPr algn="ctr">
-              <a:lnSpc>
-                <a:spcPct val="100000"/>
-              </a:lnSpc>
-            </a:pPr>
-            <a:r>
-              <a:rPr sz="1300" b="1" i="0">
-                <a:solidFill>
-                  <a:srgbClr val="A23822"/>
-                </a:solidFill>
-                <a:latin typeface="Cambria"/>
-              </a:rPr>
-              <a:t>14</a:t>
-            </a:r>
-          </a:p>
-        </p:txBody>
-      </p:sp>
-      <p:sp>
-        <p:nvSpPr>
-          <p:cNvPr id="32" name="TextBox 31"/>
-          <p:cNvSpPr txBox="1"/>
-          <p:nvPr/>
-        </p:nvSpPr>
-        <p:spPr>
-          <a:xfrm>
-            <a:off x="4315968" y="4078224"/>
-            <a:ext cx="822960" cy="201168"/>
-          </a:xfrm>
-          <a:prstGeom prst="rect">
-            <a:avLst/>
-          </a:prstGeom>
-          <a:noFill/>
-        </p:spPr>
-        <p:txBody>
-          <a:bodyPr wrap="square" lIns="0" rIns="0" tIns="0" bIns="0" anchor="t">
-            <a:spAutoFit/>
-          </a:bodyPr>
-          <a:lstStyle/>
-          <a:p>
-            <a:pPr algn="ctr">
-              <a:lnSpc>
-                <a:spcPct val="100000"/>
-              </a:lnSpc>
-            </a:pPr>
-            <a:r>
-              <a:rPr sz="650" b="0" i="0">
-                <a:solidFill>
-                  <a:srgbClr val="8A938D"/>
-                </a:solidFill>
-                <a:latin typeface="Calibri"/>
-              </a:rPr>
-              <a:t>Позицій із с/в</a:t>
-            </a:r>
-          </a:p>
-        </p:txBody>
-      </p:sp>
-      <p:sp>
-        <p:nvSpPr>
-          <p:cNvPr id="33" name="Rounded Rectangle 32"/>
-          <p:cNvSpPr/>
-          <p:nvPr/>
-        </p:nvSpPr>
-        <p:spPr>
-          <a:xfrm>
-            <a:off x="5440680" y="768096"/>
-            <a:ext cx="1604771" cy="2078838"/>
-          </a:xfrm>
-          <a:prstGeom prst="roundRect">
-            <a:avLst>
-              <a:gd name="adj" fmla="val 6000"/>
-            </a:avLst>
-          </a:prstGeom>
-          <a:solidFill>
-            <a:srgbClr val="FFFFFF"/>
-          </a:solidFill>
-          <a:ln w="9525">
-            <a:solidFill>
-              <a:srgbClr val="E6E1D8"/>
-            </a:solidFill>
-          </a:ln>
-          <a:effectLst/>
-        </p:spPr>
-        <p:style>
-          <a:lnRef idx="1">
-            <a:schemeClr val="accent1"/>
-          </a:lnRef>
-          <a:fillRef idx="3">
-            <a:schemeClr val="accent1"/>
-          </a:fillRef>
-          <a:effectRef idx="2">
-            <a:schemeClr val="accent1"/>
-          </a:effectRef>
-          <a:fontRef idx="minor">
-            <a:schemeClr val="lt1"/>
-          </a:fontRef>
-        </p:style>
-        <p:txBody>
-          <a:bodyPr rtlCol="0" anchor="ctr"/>
-          <a:lstStyle/>
-          <a:p/>
-        </p:txBody>
-      </p:sp>
       <p:pic>
         <p:nvPicPr>
-          <p:cNvPr id="34" name="Picture 33" descr="zek_tempura_corn30.png"/>
-          <p:cNvPicPr>
-            <a:picLocks noChangeAspect="1"/>
-          </p:cNvPicPr>
-          <p:nvPr/>
-        </p:nvPicPr>
-        <p:blipFill>
-          <a:blip r:embed="rId2"/>
-          <a:stretch>
-            <a:fillRect/>
-          </a:stretch>
-        </p:blipFill>
-        <p:spPr>
-          <a:xfrm>
-            <a:off x="5568696" y="929476"/>
-            <a:ext cx="1348739" cy="1756077"/>
-          </a:xfrm>
-          <a:prstGeom prst="rect">
-            <a:avLst/>
-          </a:prstGeom>
-        </p:spPr>
-      </p:pic>
-      <p:sp>
-        <p:nvSpPr>
-          <p:cNvPr id="35" name="Rounded Rectangle 34"/>
-          <p:cNvSpPr/>
-          <p:nvPr/>
-        </p:nvSpPr>
-        <p:spPr>
-          <a:xfrm>
-            <a:off x="7173468" y="768096"/>
-            <a:ext cx="1604771" cy="2078838"/>
-          </a:xfrm>
-          <a:prstGeom prst="roundRect">
-            <a:avLst>
-              <a:gd name="adj" fmla="val 6000"/>
-            </a:avLst>
-          </a:prstGeom>
-          <a:solidFill>
-            <a:srgbClr val="FFFFFF"/>
-          </a:solidFill>
-          <a:ln w="9525">
-            <a:solidFill>
-              <a:srgbClr val="E6E1D8"/>
-            </a:solidFill>
-          </a:ln>
-          <a:effectLst/>
-        </p:spPr>
-        <p:style>
-          <a:lnRef idx="1">
-            <a:schemeClr val="accent1"/>
-          </a:lnRef>
-          <a:fillRef idx="3">
-            <a:schemeClr val="accent1"/>
-          </a:fillRef>
-          <a:effectRef idx="2">
-            <a:schemeClr val="accent1"/>
-          </a:effectRef>
-          <a:fontRef idx="minor">
-            <a:schemeClr val="lt1"/>
-          </a:fontRef>
-        </p:style>
-        <p:txBody>
-          <a:bodyPr rtlCol="0" anchor="ctr"/>
-          <a:lstStyle/>
-          <a:p/>
-        </p:txBody>
-      </p:sp>
-      <p:pic>
-        <p:nvPicPr>
-          <p:cNvPr id="36" name="Picture 35" descr="zek_tempura_wasabi30.png"/>
+          <p:cNvPr id="29" name="Picture 28" descr="zek_topping_veg35.png"/>
           <p:cNvPicPr>
             <a:picLocks noChangeAspect="1"/>
           </p:cNvPicPr>
@@ -5369,8 +5082,8 @@
         </p:blipFill>
         <p:spPr>
           <a:xfrm>
-            <a:off x="7301483" y="923543"/>
-            <a:ext cx="1348739" cy="1767942"/>
+            <a:off x="7179056" y="1429633"/>
+            <a:ext cx="1442720" cy="1950720"/>
           </a:xfrm>
           <a:prstGeom prst="rect">
             <a:avLst/>
@@ -5379,178 +5092,131 @@
       </p:pic>
       <p:sp>
         <p:nvSpPr>
-          <p:cNvPr id="37" name="Rounded Rectangle 36"/>
+          <p:cNvPr id="30" name="TextBox 29"/>
+          <p:cNvSpPr txBox="1"/>
+          <p:nvPr/>
+        </p:nvSpPr>
+        <p:spPr>
+          <a:xfrm>
+            <a:off x="5120640" y="3637401"/>
+            <a:ext cx="3657600" cy="182880"/>
+          </a:xfrm>
+          <a:prstGeom prst="rect">
+            <a:avLst/>
+          </a:prstGeom>
+          <a:noFill/>
+        </p:spPr>
+        <p:txBody>
+          <a:bodyPr wrap="square" lIns="0" rIns="0" tIns="0" bIns="0" anchor="t">
+            <a:spAutoFit/>
+          </a:bodyPr>
+          <a:lstStyle/>
+          <a:p>
+            <a:pPr algn="ctr">
+              <a:lnSpc>
+                <a:spcPct val="100000"/>
+              </a:lnSpc>
+            </a:pPr>
+            <a:r>
+              <a:rPr sz="750" b="0" i="0">
+                <a:solidFill>
+                  <a:srgbClr val="8A938D"/>
+                </a:solidFill>
+                <a:latin typeface="Calibri"/>
+              </a:rPr>
+              <a:t>14 позицій із розрахованою собівартістю</a:t>
+            </a:r>
+          </a:p>
+        </p:txBody>
+      </p:sp>
+      <p:sp>
+        <p:nvSpPr>
+          <p:cNvPr id="31" name="TextBox 30"/>
+          <p:cNvSpPr txBox="1"/>
+          <p:nvPr/>
+        </p:nvSpPr>
+        <p:spPr>
+          <a:xfrm>
+            <a:off x="365760" y="2926080"/>
+            <a:ext cx="4617720" cy="822960"/>
+          </a:xfrm>
+          <a:prstGeom prst="rect">
+            <a:avLst/>
+          </a:prstGeom>
+          <a:noFill/>
+        </p:spPr>
+        <p:txBody>
+          <a:bodyPr wrap="square" lIns="0" rIns="0" tIns="0" bIns="0" anchor="t">
+            <a:spAutoFit/>
+          </a:bodyPr>
+          <a:lstStyle/>
+          <a:p>
+            <a:pPr algn="l">
+              <a:lnSpc>
+                <a:spcPct val="134000"/>
+              </a:lnSpc>
+            </a:pPr>
+            <a:r>
+              <a:rPr sz="1050" b="0" i="0">
+                <a:solidFill>
+                  <a:srgbClr val="44524C"/>
+                </a:solidFill>
+                <a:latin typeface="Calibri"/>
+              </a:rPr>
+              <a:t>Найбільший за глибиною розрахунку постачальник: 14 позицій у трьох напрямках — темпура, сендвіч і присипка з норі. Єдиний постачальник з відвантаженням із Циндао.</a:t>
+            </a:r>
+          </a:p>
+        </p:txBody>
+      </p:sp>
+      <p:sp>
+        <p:nvSpPr>
+          <p:cNvPr id="32" name="TextBox 31"/>
+          <p:cNvSpPr txBox="1"/>
+          <p:nvPr/>
+        </p:nvSpPr>
+        <p:spPr>
+          <a:xfrm>
+            <a:off x="365760" y="3803904"/>
+            <a:ext cx="4617720" cy="146304"/>
+          </a:xfrm>
+          <a:prstGeom prst="rect">
+            <a:avLst/>
+          </a:prstGeom>
+          <a:noFill/>
+        </p:spPr>
+        <p:txBody>
+          <a:bodyPr wrap="square" lIns="0" rIns="0" tIns="0" bIns="0" anchor="t">
+            <a:spAutoFit/>
+          </a:bodyPr>
+          <a:lstStyle/>
+          <a:p>
+            <a:pPr algn="l">
+              <a:lnSpc>
+                <a:spcPct val="100000"/>
+              </a:lnSpc>
+            </a:pPr>
+            <a:r>
+              <a:rPr sz="700" b="1" i="0" spc="90">
+                <a:solidFill>
+                  <a:srgbClr val="A23822"/>
+                </a:solidFill>
+                <a:latin typeface="Calibri"/>
+              </a:rPr>
+              <a:t>ВИРОБНИЦТВО І УМОВИ ПОСТАВКИ</a:t>
+            </a:r>
+          </a:p>
+        </p:txBody>
+      </p:sp>
+      <p:sp>
+        <p:nvSpPr>
+          <p:cNvPr id="33" name="Rectangle 32"/>
           <p:cNvSpPr/>
           <p:nvPr/>
         </p:nvSpPr>
         <p:spPr>
           <a:xfrm>
-            <a:off x="5440680" y="2974950"/>
-            <a:ext cx="3337559" cy="1743353"/>
-          </a:xfrm>
-          <a:prstGeom prst="roundRect">
-            <a:avLst>
-              <a:gd name="adj" fmla="val 6000"/>
-            </a:avLst>
-          </a:prstGeom>
-          <a:solidFill>
-            <a:srgbClr val="B23A22"/>
-          </a:solidFill>
-          <a:ln>
-            <a:noFill/>
-          </a:ln>
-          <a:effectLst/>
-        </p:spPr>
-        <p:style>
-          <a:lnRef idx="1">
-            <a:schemeClr val="accent1"/>
-          </a:lnRef>
-          <a:fillRef idx="3">
-            <a:schemeClr val="accent1"/>
-          </a:fillRef>
-          <a:effectRef idx="2">
-            <a:schemeClr val="accent1"/>
-          </a:effectRef>
-          <a:fontRef idx="minor">
-            <a:schemeClr val="lt1"/>
-          </a:fontRef>
-        </p:style>
-        <p:txBody>
-          <a:bodyPr rtlCol="0" anchor="ctr"/>
-          <a:lstStyle/>
-          <a:p/>
-        </p:txBody>
-      </p:sp>
-      <p:sp>
-        <p:nvSpPr>
-          <p:cNvPr id="38" name="TextBox 37"/>
-          <p:cNvSpPr txBox="1"/>
-          <p:nvPr/>
-        </p:nvSpPr>
-        <p:spPr>
-          <a:xfrm>
-            <a:off x="5696712" y="3194406"/>
-            <a:ext cx="2825495" cy="548640"/>
-          </a:xfrm>
-          <a:prstGeom prst="rect">
-            <a:avLst/>
-          </a:prstGeom>
-          <a:noFill/>
-        </p:spPr>
-        <p:txBody>
-          <a:bodyPr wrap="square" lIns="0" rIns="0" tIns="0" bIns="0" anchor="t">
-            <a:spAutoFit/>
-          </a:bodyPr>
-          <a:lstStyle/>
-          <a:p>
-            <a:pPr algn="l">
-              <a:lnSpc>
-                <a:spcPct val="106000"/>
-              </a:lnSpc>
-            </a:pPr>
-            <a:r>
-              <a:rPr sz="2200" b="1" i="0">
-                <a:solidFill>
-                  <a:srgbClr val="FFFFFF"/>
-                </a:solidFill>
-                <a:latin typeface="Cambria"/>
-              </a:rPr>
-              <a:t>ZEK</a:t>
-            </a:r>
-          </a:p>
-        </p:txBody>
-      </p:sp>
-      <p:sp>
-        <p:nvSpPr>
-          <p:cNvPr id="39" name="Rectangle 38"/>
-          <p:cNvSpPr/>
-          <p:nvPr/>
-        </p:nvSpPr>
-        <p:spPr>
-          <a:xfrm>
-            <a:off x="5696712" y="4187952"/>
-            <a:ext cx="548640" cy="32004"/>
-          </a:xfrm>
-          <a:prstGeom prst="rect">
-            <a:avLst/>
-          </a:prstGeom>
-          <a:solidFill>
-            <a:srgbClr val="FFFFFF"/>
-          </a:solidFill>
-          <a:ln>
-            <a:noFill/>
-          </a:ln>
-          <a:effectLst/>
-        </p:spPr>
-        <p:style>
-          <a:lnRef idx="1">
-            <a:schemeClr val="accent1"/>
-          </a:lnRef>
-          <a:fillRef idx="3">
-            <a:schemeClr val="accent1"/>
-          </a:fillRef>
-          <a:effectRef idx="2">
-            <a:schemeClr val="accent1"/>
-          </a:effectRef>
-          <a:fontRef idx="minor">
-            <a:schemeClr val="lt1"/>
-          </a:fontRef>
-        </p:style>
-        <p:txBody>
-          <a:bodyPr rtlCol="0" anchor="ctr"/>
-          <a:lstStyle/>
-          <a:p/>
-        </p:txBody>
-      </p:sp>
-      <p:sp>
-        <p:nvSpPr>
-          <p:cNvPr id="40" name="TextBox 39"/>
-          <p:cNvSpPr txBox="1"/>
-          <p:nvPr/>
-        </p:nvSpPr>
-        <p:spPr>
-          <a:xfrm>
-            <a:off x="5696712" y="4315968"/>
-            <a:ext cx="2825495" cy="219456"/>
-          </a:xfrm>
-          <a:prstGeom prst="rect">
-            <a:avLst/>
-          </a:prstGeom>
-          <a:noFill/>
-        </p:spPr>
-        <p:txBody>
-          <a:bodyPr wrap="square" lIns="0" rIns="0" tIns="0" bIns="0" anchor="t">
-            <a:spAutoFit/>
-          </a:bodyPr>
-          <a:lstStyle/>
-          <a:p>
-            <a:pPr algn="l">
-              <a:lnSpc>
-                <a:spcPct val="100000"/>
-              </a:lnSpc>
-            </a:pPr>
-            <a:r>
-              <a:rPr sz="850" b="0" i="0">
-                <a:solidFill>
-                  <a:srgbClr val="F3E1DE"/>
-                </a:solidFill>
-                <a:latin typeface="Calibri"/>
-              </a:rPr>
-              <a:t>Виробництво · Китай</a:t>
-            </a:r>
-          </a:p>
-        </p:txBody>
-      </p:sp>
-      <p:sp>
-        <p:nvSpPr>
-          <p:cNvPr id="41" name="Rectangle 40"/>
-          <p:cNvSpPr/>
-          <p:nvPr/>
-        </p:nvSpPr>
-        <p:spPr>
-          <a:xfrm>
-            <a:off x="365760" y="4809744"/>
-            <a:ext cx="8412480" cy="9144"/>
+            <a:off x="365760" y="4023360"/>
+            <a:ext cx="2194560" cy="9144"/>
           </a:xfrm>
           <a:prstGeom prst="rect">
             <a:avLst/>
@@ -5585,7 +5251,487 @@
       </p:sp>
       <p:sp>
         <p:nvSpPr>
-          <p:cNvPr id="42" name="TextBox 41"/>
+          <p:cNvPr id="34" name="TextBox 33"/>
+          <p:cNvSpPr txBox="1"/>
+          <p:nvPr/>
+        </p:nvSpPr>
+        <p:spPr>
+          <a:xfrm>
+            <a:off x="365760" y="4078224"/>
+            <a:ext cx="2194560" cy="146304"/>
+          </a:xfrm>
+          <a:prstGeom prst="rect">
+            <a:avLst/>
+          </a:prstGeom>
+          <a:noFill/>
+        </p:spPr>
+        <p:txBody>
+          <a:bodyPr wrap="square" lIns="0" rIns="0" tIns="0" bIns="0" anchor="t">
+            <a:spAutoFit/>
+          </a:bodyPr>
+          <a:lstStyle/>
+          <a:p>
+            <a:pPr algn="l">
+              <a:lnSpc>
+                <a:spcPct val="100000"/>
+              </a:lnSpc>
+            </a:pPr>
+            <a:r>
+              <a:rPr sz="650" b="0" i="0">
+                <a:solidFill>
+                  <a:srgbClr val="8A938D"/>
+                </a:solidFill>
+                <a:latin typeface="Calibri"/>
+              </a:rPr>
+              <a:t>Фасовка</a:t>
+            </a:r>
+          </a:p>
+        </p:txBody>
+      </p:sp>
+      <p:sp>
+        <p:nvSpPr>
+          <p:cNvPr id="35" name="TextBox 34"/>
+          <p:cNvSpPr txBox="1"/>
+          <p:nvPr/>
+        </p:nvSpPr>
+        <p:spPr>
+          <a:xfrm>
+            <a:off x="365760" y="4206240"/>
+            <a:ext cx="2194560" cy="182880"/>
+          </a:xfrm>
+          <a:prstGeom prst="rect">
+            <a:avLst/>
+          </a:prstGeom>
+          <a:noFill/>
+        </p:spPr>
+        <p:txBody>
+          <a:bodyPr wrap="square" lIns="0" rIns="0" tIns="0" bIns="0" anchor="t">
+            <a:spAutoFit/>
+          </a:bodyPr>
+          <a:lstStyle/>
+          <a:p>
+            <a:pPr algn="l">
+              <a:lnSpc>
+                <a:spcPct val="100000"/>
+              </a:lnSpc>
+            </a:pPr>
+            <a:r>
+              <a:rPr sz="900" b="1" i="0">
+                <a:solidFill>
+                  <a:srgbClr val="14241F"/>
+                </a:solidFill>
+                <a:latin typeface="Calibri"/>
+              </a:rPr>
+              <a:t>8 – 36 шт / картон</a:t>
+            </a:r>
+          </a:p>
+        </p:txBody>
+      </p:sp>
+      <p:sp>
+        <p:nvSpPr>
+          <p:cNvPr id="36" name="Rectangle 35"/>
+          <p:cNvSpPr/>
+          <p:nvPr/>
+        </p:nvSpPr>
+        <p:spPr>
+          <a:xfrm>
+            <a:off x="2743200" y="4023360"/>
+            <a:ext cx="2194560" cy="9144"/>
+          </a:xfrm>
+          <a:prstGeom prst="rect">
+            <a:avLst/>
+          </a:prstGeom>
+          <a:solidFill>
+            <a:srgbClr val="E6E1D8"/>
+          </a:solidFill>
+          <a:ln>
+            <a:noFill/>
+          </a:ln>
+          <a:effectLst/>
+        </p:spPr>
+        <p:style>
+          <a:lnRef idx="1">
+            <a:schemeClr val="accent1"/>
+          </a:lnRef>
+          <a:fillRef idx="3">
+            <a:schemeClr val="accent1"/>
+          </a:fillRef>
+          <a:effectRef idx="2">
+            <a:schemeClr val="accent1"/>
+          </a:effectRef>
+          <a:fontRef idx="minor">
+            <a:schemeClr val="lt1"/>
+          </a:fontRef>
+        </p:style>
+        <p:txBody>
+          <a:bodyPr rtlCol="0" anchor="ctr"/>
+          <a:lstStyle/>
+          <a:p/>
+        </p:txBody>
+      </p:sp>
+      <p:sp>
+        <p:nvSpPr>
+          <p:cNvPr id="37" name="TextBox 36"/>
+          <p:cNvSpPr txBox="1"/>
+          <p:nvPr/>
+        </p:nvSpPr>
+        <p:spPr>
+          <a:xfrm>
+            <a:off x="2743200" y="4078224"/>
+            <a:ext cx="2194560" cy="146304"/>
+          </a:xfrm>
+          <a:prstGeom prst="rect">
+            <a:avLst/>
+          </a:prstGeom>
+          <a:noFill/>
+        </p:spPr>
+        <p:txBody>
+          <a:bodyPr wrap="square" lIns="0" rIns="0" tIns="0" bIns="0" anchor="t">
+            <a:spAutoFit/>
+          </a:bodyPr>
+          <a:lstStyle/>
+          <a:p>
+            <a:pPr algn="l">
+              <a:lnSpc>
+                <a:spcPct val="100000"/>
+              </a:lnSpc>
+            </a:pPr>
+            <a:r>
+              <a:rPr sz="650" b="0" i="0">
+                <a:solidFill>
+                  <a:srgbClr val="8A938D"/>
+                </a:solidFill>
+                <a:latin typeface="Calibri"/>
+              </a:rPr>
+              <a:t>Термін придатності</a:t>
+            </a:r>
+          </a:p>
+        </p:txBody>
+      </p:sp>
+      <p:sp>
+        <p:nvSpPr>
+          <p:cNvPr id="38" name="TextBox 37"/>
+          <p:cNvSpPr txBox="1"/>
+          <p:nvPr/>
+        </p:nvSpPr>
+        <p:spPr>
+          <a:xfrm>
+            <a:off x="2743200" y="4206240"/>
+            <a:ext cx="2194560" cy="182880"/>
+          </a:xfrm>
+          <a:prstGeom prst="rect">
+            <a:avLst/>
+          </a:prstGeom>
+          <a:noFill/>
+        </p:spPr>
+        <p:txBody>
+          <a:bodyPr wrap="square" lIns="0" rIns="0" tIns="0" bIns="0" anchor="t">
+            <a:spAutoFit/>
+          </a:bodyPr>
+          <a:lstStyle/>
+          <a:p>
+            <a:pPr algn="l">
+              <a:lnSpc>
+                <a:spcPct val="100000"/>
+              </a:lnSpc>
+            </a:pPr>
+            <a:r>
+              <a:rPr sz="900" b="1" i="0">
+                <a:solidFill>
+                  <a:srgbClr val="14241F"/>
+                </a:solidFill>
+                <a:latin typeface="Calibri"/>
+              </a:rPr>
+              <a:t>9 – 12 місяців</a:t>
+            </a:r>
+          </a:p>
+        </p:txBody>
+      </p:sp>
+      <p:sp>
+        <p:nvSpPr>
+          <p:cNvPr id="39" name="Rectangle 38"/>
+          <p:cNvSpPr/>
+          <p:nvPr/>
+        </p:nvSpPr>
+        <p:spPr>
+          <a:xfrm>
+            <a:off x="365760" y="4425696"/>
+            <a:ext cx="2194560" cy="9144"/>
+          </a:xfrm>
+          <a:prstGeom prst="rect">
+            <a:avLst/>
+          </a:prstGeom>
+          <a:solidFill>
+            <a:srgbClr val="E6E1D8"/>
+          </a:solidFill>
+          <a:ln>
+            <a:noFill/>
+          </a:ln>
+          <a:effectLst/>
+        </p:spPr>
+        <p:style>
+          <a:lnRef idx="1">
+            <a:schemeClr val="accent1"/>
+          </a:lnRef>
+          <a:fillRef idx="3">
+            <a:schemeClr val="accent1"/>
+          </a:fillRef>
+          <a:effectRef idx="2">
+            <a:schemeClr val="accent1"/>
+          </a:effectRef>
+          <a:fontRef idx="minor">
+            <a:schemeClr val="lt1"/>
+          </a:fontRef>
+        </p:style>
+        <p:txBody>
+          <a:bodyPr rtlCol="0" anchor="ctr"/>
+          <a:lstStyle/>
+          <a:p/>
+        </p:txBody>
+      </p:sp>
+      <p:sp>
+        <p:nvSpPr>
+          <p:cNvPr id="40" name="TextBox 39"/>
+          <p:cNvSpPr txBox="1"/>
+          <p:nvPr/>
+        </p:nvSpPr>
+        <p:spPr>
+          <a:xfrm>
+            <a:off x="365760" y="4480560"/>
+            <a:ext cx="2194560" cy="146304"/>
+          </a:xfrm>
+          <a:prstGeom prst="rect">
+            <a:avLst/>
+          </a:prstGeom>
+          <a:noFill/>
+        </p:spPr>
+        <p:txBody>
+          <a:bodyPr wrap="square" lIns="0" rIns="0" tIns="0" bIns="0" anchor="t">
+            <a:spAutoFit/>
+          </a:bodyPr>
+          <a:lstStyle/>
+          <a:p>
+            <a:pPr algn="l">
+              <a:lnSpc>
+                <a:spcPct val="100000"/>
+              </a:lnSpc>
+            </a:pPr>
+            <a:r>
+              <a:rPr sz="650" b="0" i="0">
+                <a:solidFill>
+                  <a:srgbClr val="8A938D"/>
+                </a:solidFill>
+                <a:latin typeface="Calibri"/>
+              </a:rPr>
+              <a:t>Місткість 20′</a:t>
+            </a:r>
+          </a:p>
+        </p:txBody>
+      </p:sp>
+      <p:sp>
+        <p:nvSpPr>
+          <p:cNvPr id="41" name="TextBox 40"/>
+          <p:cNvSpPr txBox="1"/>
+          <p:nvPr/>
+        </p:nvSpPr>
+        <p:spPr>
+          <a:xfrm>
+            <a:off x="365760" y="4608576"/>
+            <a:ext cx="2194560" cy="182880"/>
+          </a:xfrm>
+          <a:prstGeom prst="rect">
+            <a:avLst/>
+          </a:prstGeom>
+          <a:noFill/>
+        </p:spPr>
+        <p:txBody>
+          <a:bodyPr wrap="square" lIns="0" rIns="0" tIns="0" bIns="0" anchor="t">
+            <a:spAutoFit/>
+          </a:bodyPr>
+          <a:lstStyle/>
+          <a:p>
+            <a:pPr algn="l">
+              <a:lnSpc>
+                <a:spcPct val="100000"/>
+              </a:lnSpc>
+            </a:pPr>
+            <a:r>
+              <a:rPr sz="900" b="1" i="0">
+                <a:solidFill>
+                  <a:srgbClr val="14241F"/>
+                </a:solidFill>
+                <a:latin typeface="Calibri"/>
+              </a:rPr>
+              <a:t>350 – 4 000 картонів</a:t>
+            </a:r>
+          </a:p>
+        </p:txBody>
+      </p:sp>
+      <p:sp>
+        <p:nvSpPr>
+          <p:cNvPr id="42" name="Rectangle 41"/>
+          <p:cNvSpPr/>
+          <p:nvPr/>
+        </p:nvSpPr>
+        <p:spPr>
+          <a:xfrm>
+            <a:off x="2743200" y="4425696"/>
+            <a:ext cx="2194560" cy="9144"/>
+          </a:xfrm>
+          <a:prstGeom prst="rect">
+            <a:avLst/>
+          </a:prstGeom>
+          <a:solidFill>
+            <a:srgbClr val="E6E1D8"/>
+          </a:solidFill>
+          <a:ln>
+            <a:noFill/>
+          </a:ln>
+          <a:effectLst/>
+        </p:spPr>
+        <p:style>
+          <a:lnRef idx="1">
+            <a:schemeClr val="accent1"/>
+          </a:lnRef>
+          <a:fillRef idx="3">
+            <a:schemeClr val="accent1"/>
+          </a:fillRef>
+          <a:effectRef idx="2">
+            <a:schemeClr val="accent1"/>
+          </a:effectRef>
+          <a:fontRef idx="minor">
+            <a:schemeClr val="lt1"/>
+          </a:fontRef>
+        </p:style>
+        <p:txBody>
+          <a:bodyPr rtlCol="0" anchor="ctr"/>
+          <a:lstStyle/>
+          <a:p/>
+        </p:txBody>
+      </p:sp>
+      <p:sp>
+        <p:nvSpPr>
+          <p:cNvPr id="43" name="TextBox 42"/>
+          <p:cNvSpPr txBox="1"/>
+          <p:nvPr/>
+        </p:nvSpPr>
+        <p:spPr>
+          <a:xfrm>
+            <a:off x="2743200" y="4480560"/>
+            <a:ext cx="2194560" cy="146304"/>
+          </a:xfrm>
+          <a:prstGeom prst="rect">
+            <a:avLst/>
+          </a:prstGeom>
+          <a:noFill/>
+        </p:spPr>
+        <p:txBody>
+          <a:bodyPr wrap="square" lIns="0" rIns="0" tIns="0" bIns="0" anchor="t">
+            <a:spAutoFit/>
+          </a:bodyPr>
+          <a:lstStyle/>
+          <a:p>
+            <a:pPr algn="l">
+              <a:lnSpc>
+                <a:spcPct val="100000"/>
+              </a:lnSpc>
+            </a:pPr>
+            <a:r>
+              <a:rPr sz="650" b="0" i="0">
+                <a:solidFill>
+                  <a:srgbClr val="8A938D"/>
+                </a:solidFill>
+                <a:latin typeface="Calibri"/>
+              </a:rPr>
+              <a:t>Місткість 40′HQ</a:t>
+            </a:r>
+          </a:p>
+        </p:txBody>
+      </p:sp>
+      <p:sp>
+        <p:nvSpPr>
+          <p:cNvPr id="44" name="TextBox 43"/>
+          <p:cNvSpPr txBox="1"/>
+          <p:nvPr/>
+        </p:nvSpPr>
+        <p:spPr>
+          <a:xfrm>
+            <a:off x="2743200" y="4608576"/>
+            <a:ext cx="2194560" cy="182880"/>
+          </a:xfrm>
+          <a:prstGeom prst="rect">
+            <a:avLst/>
+          </a:prstGeom>
+          <a:noFill/>
+        </p:spPr>
+        <p:txBody>
+          <a:bodyPr wrap="square" lIns="0" rIns="0" tIns="0" bIns="0" anchor="t">
+            <a:spAutoFit/>
+          </a:bodyPr>
+          <a:lstStyle/>
+          <a:p>
+            <a:pPr algn="l">
+              <a:lnSpc>
+                <a:spcPct val="100000"/>
+              </a:lnSpc>
+            </a:pPr>
+            <a:r>
+              <a:rPr sz="900" b="1" i="0">
+                <a:solidFill>
+                  <a:srgbClr val="14241F"/>
+                </a:solidFill>
+                <a:latin typeface="Calibri"/>
+              </a:rPr>
+              <a:t>500 – 2 370 картонів</a:t>
+            </a:r>
+          </a:p>
+        </p:txBody>
+      </p:sp>
+      <p:sp>
+        <p:nvSpPr>
+          <p:cNvPr id="45" name="Rectangle 44"/>
+          <p:cNvSpPr/>
+          <p:nvPr/>
+        </p:nvSpPr>
+        <p:spPr>
+          <a:xfrm>
+            <a:off x="365760" y="4809744"/>
+            <a:ext cx="8412480" cy="9144"/>
+          </a:xfrm>
+          <a:prstGeom prst="rect">
+            <a:avLst/>
+          </a:prstGeom>
+          <a:solidFill>
+            <a:srgbClr val="E6E1D8"/>
+          </a:solidFill>
+          <a:ln>
+            <a:noFill/>
+          </a:ln>
+          <a:effectLst/>
+        </p:spPr>
+        <p:style>
+          <a:lnRef idx="1">
+            <a:schemeClr val="accent1"/>
+          </a:lnRef>
+          <a:fillRef idx="3">
+            <a:schemeClr val="accent1"/>
+          </a:fillRef>
+          <a:effectRef idx="2">
+            <a:schemeClr val="accent1"/>
+          </a:effectRef>
+          <a:fontRef idx="minor">
+            <a:schemeClr val="lt1"/>
+          </a:fontRef>
+        </p:style>
+        <p:txBody>
+          <a:bodyPr rtlCol="0" anchor="ctr"/>
+          <a:lstStyle/>
+          <a:p/>
+        </p:txBody>
+      </p:sp>
+      <p:sp>
+        <p:nvSpPr>
+          <p:cNvPr id="46" name="TextBox 45"/>
           <p:cNvSpPr txBox="1"/>
           <p:nvPr/>
         </p:nvSpPr>
@@ -21362,19 +21508,17 @@
       </p:sp>
       <p:sp>
         <p:nvSpPr>
-          <p:cNvPr id="4" name="Rounded Rectangle 3"/>
+          <p:cNvPr id="4" name="Rectangle 3"/>
           <p:cNvSpPr/>
           <p:nvPr/>
         </p:nvSpPr>
         <p:spPr>
           <a:xfrm>
-            <a:off x="365760" y="676656"/>
-            <a:ext cx="402336" cy="402336"/>
-          </a:xfrm>
-          <a:prstGeom prst="roundRect">
-            <a:avLst>
-              <a:gd name="adj" fmla="val 10000"/>
-            </a:avLst>
+            <a:off x="0" y="0"/>
+            <a:ext cx="9144000" cy="2670048"/>
+          </a:xfrm>
+          <a:prstGeom prst="rect">
+            <a:avLst/>
           </a:prstGeom>
           <a:solidFill>
             <a:srgbClr val="B36214"/>
@@ -21406,192 +21550,22 @@
       </p:sp>
       <p:sp>
         <p:nvSpPr>
-          <p:cNvPr id="5" name="TextBox 4"/>
-          <p:cNvSpPr txBox="1"/>
-          <p:nvPr/>
-        </p:nvSpPr>
-        <p:spPr>
-          <a:xfrm>
-            <a:off x="365760" y="676656"/>
+          <p:cNvPr id="5" name="Rounded Rectangle 4"/>
+          <p:cNvSpPr/>
+          <p:nvPr/>
+        </p:nvSpPr>
+        <p:spPr>
+          <a:xfrm>
+            <a:off x="365760" y="475488"/>
             <a:ext cx="402336" cy="402336"/>
           </a:xfrm>
-          <a:prstGeom prst="rect">
-            <a:avLst/>
-          </a:prstGeom>
-          <a:noFill/>
-        </p:spPr>
-        <p:txBody>
-          <a:bodyPr wrap="square" lIns="0" rIns="0" tIns="0" bIns="0" anchor="ctr">
-            <a:spAutoFit/>
-          </a:bodyPr>
-          <a:lstStyle/>
-          <a:p>
-            <a:pPr algn="ctr">
-              <a:lnSpc>
-                <a:spcPct val="100000"/>
-              </a:lnSpc>
-            </a:pPr>
-            <a:r>
-              <a:rPr sz="1400" b="1" i="0">
-                <a:solidFill>
-                  <a:srgbClr val="FFFFFF"/>
-                </a:solidFill>
-                <a:latin typeface="Cambria"/>
-              </a:rPr>
-              <a:t>01</a:t>
-            </a:r>
-          </a:p>
-        </p:txBody>
-      </p:sp>
-      <p:sp>
-        <p:nvSpPr>
-          <p:cNvPr id="6" name="TextBox 5"/>
-          <p:cNvSpPr txBox="1"/>
-          <p:nvPr/>
-        </p:nvSpPr>
-        <p:spPr>
-          <a:xfrm>
-            <a:off x="914400" y="676656"/>
-            <a:ext cx="4297680" cy="182880"/>
-          </a:xfrm>
-          <a:prstGeom prst="rect">
-            <a:avLst/>
-          </a:prstGeom>
-          <a:noFill/>
-        </p:spPr>
-        <p:txBody>
-          <a:bodyPr wrap="square" lIns="0" rIns="0" tIns="0" bIns="0" anchor="t">
-            <a:spAutoFit/>
-          </a:bodyPr>
-          <a:lstStyle/>
-          <a:p>
-            <a:pPr algn="l">
-              <a:lnSpc>
-                <a:spcPct val="100000"/>
-              </a:lnSpc>
-            </a:pPr>
-            <a:r>
-              <a:rPr sz="700" b="1" i="0" spc="90">
-                <a:solidFill>
-                  <a:srgbClr val="8A938D"/>
-                </a:solidFill>
-                <a:latin typeface="Calibri"/>
-              </a:rPr>
-              <a:t>ПОСТАЧАЛЬНИК</a:t>
-            </a:r>
-          </a:p>
-        </p:txBody>
-      </p:sp>
-      <p:sp>
-        <p:nvSpPr>
-          <p:cNvPr id="7" name="TextBox 6"/>
-          <p:cNvSpPr txBox="1"/>
-          <p:nvPr/>
-        </p:nvSpPr>
-        <p:spPr>
-          <a:xfrm>
-            <a:off x="914400" y="859536"/>
-            <a:ext cx="4297680" cy="201168"/>
-          </a:xfrm>
-          <a:prstGeom prst="rect">
-            <a:avLst/>
-          </a:prstGeom>
-          <a:noFill/>
-        </p:spPr>
-        <p:txBody>
-          <a:bodyPr wrap="square" lIns="0" rIns="0" tIns="0" bIns="0" anchor="t">
-            <a:spAutoFit/>
-          </a:bodyPr>
-          <a:lstStyle/>
-          <a:p>
-            <a:pPr algn="l">
-              <a:lnSpc>
-                <a:spcPct val="100000"/>
-              </a:lnSpc>
-            </a:pPr>
-            <a:r>
-              <a:rPr sz="900" b="1" i="0" spc="90">
-                <a:solidFill>
-                  <a:srgbClr val="A35C15"/>
-                </a:solidFill>
-                <a:latin typeface="Calibri"/>
-              </a:rPr>
-              <a:t>ARARE NORIMAKI</a:t>
-            </a:r>
-          </a:p>
-        </p:txBody>
-      </p:sp>
-      <p:sp>
-        <p:nvSpPr>
-          <p:cNvPr id="8" name="TextBox 7"/>
-          <p:cNvSpPr txBox="1"/>
-          <p:nvPr/>
-        </p:nvSpPr>
-        <p:spPr>
-          <a:xfrm>
-            <a:off x="365760" y="1298448"/>
-            <a:ext cx="4846320" cy="1005840"/>
-          </a:xfrm>
-          <a:prstGeom prst="rect">
-            <a:avLst/>
-          </a:prstGeom>
-          <a:noFill/>
-        </p:spPr>
-        <p:txBody>
-          <a:bodyPr wrap="square" lIns="0" rIns="0" tIns="0" bIns="0" anchor="t">
-            <a:spAutoFit/>
-          </a:bodyPr>
-          <a:lstStyle/>
-          <a:p>
-            <a:pPr algn="l">
-              <a:lnSpc>
-                <a:spcPct val="110000"/>
-              </a:lnSpc>
-            </a:pPr>
-            <a:r>
-              <a:rPr sz="2700" b="1" i="0">
-                <a:solidFill>
-                  <a:srgbClr val="14241F"/>
-                </a:solidFill>
-                <a:latin typeface="Cambria"/>
-              </a:rPr>
-              <a:t>Singha Kameda</a:t>
-            </a:r>
-          </a:p>
-          <a:p>
-            <a:pPr algn="l">
-              <a:lnSpc>
-                <a:spcPct val="110000"/>
-              </a:lnSpc>
-            </a:pPr>
-            <a:r>
-              <a:rPr sz="2700" b="1" i="0">
-                <a:solidFill>
-                  <a:srgbClr val="14241F"/>
-                </a:solidFill>
-                <a:latin typeface="Cambria"/>
-              </a:rPr>
-              <a:t>(Thailand) Co., Ltd.</a:t>
-            </a:r>
-          </a:p>
-        </p:txBody>
-      </p:sp>
-      <p:sp>
-        <p:nvSpPr>
-          <p:cNvPr id="9" name="Rectangle 8"/>
-          <p:cNvSpPr/>
-          <p:nvPr/>
-        </p:nvSpPr>
-        <p:spPr>
-          <a:xfrm>
-            <a:off x="365760" y="2468880"/>
-            <a:ext cx="1005840" cy="45720"/>
-          </a:xfrm>
-          <a:prstGeom prst="rect">
-            <a:avLst/>
+          <a:prstGeom prst="roundRect">
+            <a:avLst>
+              <a:gd name="adj" fmla="val 10000"/>
+            </a:avLst>
           </a:prstGeom>
           <a:solidFill>
-            <a:srgbClr val="B36214"/>
+            <a:srgbClr val="FFFFFF"/>
           </a:solidFill>
           <a:ln>
             <a:noFill/>
@@ -21620,14 +21594,186 @@
       </p:sp>
       <p:sp>
         <p:nvSpPr>
+          <p:cNvPr id="6" name="TextBox 5"/>
+          <p:cNvSpPr txBox="1"/>
+          <p:nvPr/>
+        </p:nvSpPr>
+        <p:spPr>
+          <a:xfrm>
+            <a:off x="365760" y="475488"/>
+            <a:ext cx="402336" cy="402336"/>
+          </a:xfrm>
+          <a:prstGeom prst="rect">
+            <a:avLst/>
+          </a:prstGeom>
+          <a:noFill/>
+        </p:spPr>
+        <p:txBody>
+          <a:bodyPr wrap="square" lIns="0" rIns="0" tIns="0" bIns="0" anchor="ctr">
+            <a:spAutoFit/>
+          </a:bodyPr>
+          <a:lstStyle/>
+          <a:p>
+            <a:pPr algn="ctr">
+              <a:lnSpc>
+                <a:spcPct val="100000"/>
+              </a:lnSpc>
+            </a:pPr>
+            <a:r>
+              <a:rPr sz="1400" b="1" i="0">
+                <a:solidFill>
+                  <a:srgbClr val="AB5F15"/>
+                </a:solidFill>
+                <a:latin typeface="Cambria"/>
+              </a:rPr>
+              <a:t>01</a:t>
+            </a:r>
+          </a:p>
+        </p:txBody>
+      </p:sp>
+      <p:sp>
+        <p:nvSpPr>
+          <p:cNvPr id="7" name="TextBox 6"/>
+          <p:cNvSpPr txBox="1"/>
+          <p:nvPr/>
+        </p:nvSpPr>
+        <p:spPr>
+          <a:xfrm>
+            <a:off x="914400" y="493776"/>
+            <a:ext cx="4023360" cy="182880"/>
+          </a:xfrm>
+          <a:prstGeom prst="rect">
+            <a:avLst/>
+          </a:prstGeom>
+          <a:noFill/>
+        </p:spPr>
+        <p:txBody>
+          <a:bodyPr wrap="square" lIns="0" rIns="0" tIns="0" bIns="0" anchor="t">
+            <a:spAutoFit/>
+          </a:bodyPr>
+          <a:lstStyle/>
+          <a:p>
+            <a:pPr algn="l">
+              <a:lnSpc>
+                <a:spcPct val="100000"/>
+              </a:lnSpc>
+            </a:pPr>
+            <a:r>
+              <a:rPr sz="700" b="1" i="0" spc="90">
+                <a:solidFill>
+                  <a:srgbClr val="E8D0B8"/>
+                </a:solidFill>
+                <a:latin typeface="Calibri"/>
+              </a:rPr>
+              <a:t>ПОСТАЧАЛЬНИК</a:t>
+            </a:r>
+          </a:p>
+        </p:txBody>
+      </p:sp>
+      <p:sp>
+        <p:nvSpPr>
+          <p:cNvPr id="8" name="TextBox 7"/>
+          <p:cNvSpPr txBox="1"/>
+          <p:nvPr/>
+        </p:nvSpPr>
+        <p:spPr>
+          <a:xfrm>
+            <a:off x="914400" y="676656"/>
+            <a:ext cx="4023360" cy="201168"/>
+          </a:xfrm>
+          <a:prstGeom prst="rect">
+            <a:avLst/>
+          </a:prstGeom>
+          <a:noFill/>
+        </p:spPr>
+        <p:txBody>
+          <a:bodyPr wrap="square" lIns="0" rIns="0" tIns="0" bIns="0" anchor="t">
+            <a:spAutoFit/>
+          </a:bodyPr>
+          <a:lstStyle/>
+          <a:p>
+            <a:pPr algn="l">
+              <a:lnSpc>
+                <a:spcPct val="100000"/>
+              </a:lnSpc>
+            </a:pPr>
+            <a:r>
+              <a:rPr sz="900" b="1" i="0" spc="90">
+                <a:solidFill>
+                  <a:srgbClr val="FFFFFF"/>
+                </a:solidFill>
+                <a:latin typeface="Calibri"/>
+              </a:rPr>
+              <a:t>ARARE NORIMAKI</a:t>
+            </a:r>
+          </a:p>
+        </p:txBody>
+      </p:sp>
+      <p:sp>
+        <p:nvSpPr>
+          <p:cNvPr id="9" name="TextBox 8"/>
+          <p:cNvSpPr txBox="1"/>
+          <p:nvPr/>
+        </p:nvSpPr>
+        <p:spPr>
+          <a:xfrm>
+            <a:off x="365760" y="914400"/>
+            <a:ext cx="4663440" cy="804672"/>
+          </a:xfrm>
+          <a:prstGeom prst="rect">
+            <a:avLst/>
+          </a:prstGeom>
+          <a:noFill/>
+        </p:spPr>
+        <p:txBody>
+          <a:bodyPr wrap="square" lIns="0" rIns="0" tIns="0" bIns="0" anchor="t">
+            <a:spAutoFit/>
+          </a:bodyPr>
+          <a:lstStyle/>
+          <a:p>
+            <a:pPr algn="l">
+              <a:lnSpc>
+                <a:spcPct val="106000"/>
+              </a:lnSpc>
+            </a:pPr>
+            <a:r>
+              <a:rPr sz="2600" b="1" i="0">
+                <a:solidFill>
+                  <a:srgbClr val="FFFFFF"/>
+                </a:solidFill>
+                <a:latin typeface="Cambria"/>
+              </a:rPr>
+              <a:t>Singha Kameda</a:t>
+            </a:r>
+          </a:p>
+          <a:p>
+            <a:pPr algn="l">
+              <a:lnSpc>
+                <a:spcPct val="106000"/>
+              </a:lnSpc>
+            </a:pPr>
+            <a:r>
+              <a:rPr sz="2600" b="1" i="0">
+                <a:solidFill>
+                  <a:srgbClr val="FFFFFF"/>
+                </a:solidFill>
+                <a:latin typeface="Cambria"/>
+              </a:rPr>
+              <a:t>(Thailand) Co., Ltd.</a:t>
+            </a:r>
+          </a:p>
+        </p:txBody>
+      </p:sp>
+      <p:sp>
+        <p:nvSpPr>
           <p:cNvPr id="10" name="TextBox 9"/>
           <p:cNvSpPr txBox="1"/>
           <p:nvPr/>
         </p:nvSpPr>
         <p:spPr>
           <a:xfrm>
-            <a:off x="365760" y="2688336"/>
-            <a:ext cx="4709160" cy="1005840"/>
+            <a:off x="365760" y="1901952"/>
+            <a:ext cx="2743200" cy="146304"/>
           </a:xfrm>
           <a:prstGeom prst="rect">
             <a:avLst/>
@@ -21642,52 +21788,13 @@
           <a:p>
             <a:pPr algn="l">
               <a:lnSpc>
-                <a:spcPct val="134000"/>
-              </a:lnSpc>
-            </a:pPr>
-            <a:r>
-              <a:rPr sz="1050" b="0" i="0">
-                <a:solidFill>
-                  <a:srgbClr val="44524C"/>
-                </a:solidFill>
-                <a:latin typeface="Calibri"/>
-              </a:rPr>
-              <a:t>Спільне підприємство японської Kameda Seika — світового лідера ринку рисових крекерів — та тайської групи Singha. Виробництво в Таїланді за японськими стандартами.</a:t>
-            </a:r>
-          </a:p>
-        </p:txBody>
-      </p:sp>
-      <p:sp>
-        <p:nvSpPr>
-          <p:cNvPr id="11" name="TextBox 10"/>
-          <p:cNvSpPr txBox="1"/>
-          <p:nvPr/>
-        </p:nvSpPr>
-        <p:spPr>
-          <a:xfrm>
-            <a:off x="365760" y="3584448"/>
-            <a:ext cx="2743200" cy="146304"/>
-          </a:xfrm>
-          <a:prstGeom prst="rect">
-            <a:avLst/>
-          </a:prstGeom>
-          <a:noFill/>
-        </p:spPr>
-        <p:txBody>
-          <a:bodyPr wrap="square" lIns="0" rIns="0" tIns="0" bIns="0" anchor="t">
-            <a:spAutoFit/>
-          </a:bodyPr>
-          <a:lstStyle/>
-          <a:p>
-            <a:pPr algn="l">
-              <a:lnSpc>
                 <a:spcPct val="100000"/>
               </a:lnSpc>
             </a:pPr>
             <a:r>
               <a:rPr sz="650" b="1" i="0" spc="90">
                 <a:solidFill>
-                  <a:srgbClr val="8A938D"/>
+                  <a:srgbClr val="EAD3BD"/>
                 </a:solidFill>
                 <a:latin typeface="Calibri"/>
               </a:rPr>
@@ -21698,13 +21805,13 @@
       </p:sp>
       <p:sp>
         <p:nvSpPr>
-          <p:cNvPr id="12" name="Rounded Rectangle 11"/>
+          <p:cNvPr id="11" name="Rounded Rectangle 10"/>
           <p:cNvSpPr/>
           <p:nvPr/>
         </p:nvSpPr>
         <p:spPr>
           <a:xfrm>
-            <a:off x="411480" y="3895344"/>
+            <a:off x="411480" y="2212848"/>
             <a:ext cx="128016" cy="128016"/>
           </a:xfrm>
           <a:prstGeom prst="roundRect">
@@ -21713,7 +21820,7 @@
             </a:avLst>
           </a:prstGeom>
           <a:solidFill>
-            <a:srgbClr val="B36214"/>
+            <a:srgbClr val="FFFFFF"/>
           </a:solidFill>
           <a:ln>
             <a:noFill/>
@@ -21742,20 +21849,20 @@
       </p:sp>
       <p:sp>
         <p:nvSpPr>
-          <p:cNvPr id="13" name="Rectangle 12"/>
+          <p:cNvPr id="12" name="Rectangle 11"/>
           <p:cNvSpPr/>
           <p:nvPr/>
         </p:nvSpPr>
         <p:spPr>
           <a:xfrm>
-            <a:off x="676656" y="3945635"/>
+            <a:off x="676656" y="2263140"/>
             <a:ext cx="91440" cy="27432"/>
           </a:xfrm>
           <a:prstGeom prst="rect">
             <a:avLst/>
           </a:prstGeom>
           <a:solidFill>
-            <a:srgbClr val="DEBB99"/>
+            <a:srgbClr val="D5A97E"/>
           </a:solidFill>
           <a:ln>
             <a:noFill/>
@@ -21784,20 +21891,20 @@
       </p:sp>
       <p:sp>
         <p:nvSpPr>
-          <p:cNvPr id="14" name="Rectangle 13"/>
+          <p:cNvPr id="13" name="Rectangle 12"/>
           <p:cNvSpPr/>
           <p:nvPr/>
         </p:nvSpPr>
         <p:spPr>
           <a:xfrm>
-            <a:off x="859536" y="3945635"/>
+            <a:off x="859536" y="2263140"/>
             <a:ext cx="91440" cy="27432"/>
           </a:xfrm>
           <a:prstGeom prst="rect">
             <a:avLst/>
           </a:prstGeom>
           <a:solidFill>
-            <a:srgbClr val="DEBB99"/>
+            <a:srgbClr val="D5A97E"/>
           </a:solidFill>
           <a:ln>
             <a:noFill/>
@@ -21826,20 +21933,20 @@
       </p:sp>
       <p:sp>
         <p:nvSpPr>
-          <p:cNvPr id="15" name="Rectangle 14"/>
+          <p:cNvPr id="14" name="Rectangle 13"/>
           <p:cNvSpPr/>
           <p:nvPr/>
         </p:nvSpPr>
         <p:spPr>
           <a:xfrm>
-            <a:off x="1042416" y="3945635"/>
+            <a:off x="1042416" y="2263140"/>
             <a:ext cx="91440" cy="27432"/>
           </a:xfrm>
           <a:prstGeom prst="rect">
             <a:avLst/>
           </a:prstGeom>
           <a:solidFill>
-            <a:srgbClr val="DEBB99"/>
+            <a:srgbClr val="D5A97E"/>
           </a:solidFill>
           <a:ln>
             <a:noFill/>
@@ -21868,20 +21975,20 @@
       </p:sp>
       <p:sp>
         <p:nvSpPr>
-          <p:cNvPr id="16" name="Rectangle 15"/>
+          <p:cNvPr id="15" name="Rectangle 14"/>
           <p:cNvSpPr/>
           <p:nvPr/>
         </p:nvSpPr>
         <p:spPr>
           <a:xfrm>
-            <a:off x="1225296" y="3945635"/>
+            <a:off x="1225296" y="2263140"/>
             <a:ext cx="91440" cy="27432"/>
           </a:xfrm>
           <a:prstGeom prst="rect">
             <a:avLst/>
           </a:prstGeom>
           <a:solidFill>
-            <a:srgbClr val="DEBB99"/>
+            <a:srgbClr val="D5A97E"/>
           </a:solidFill>
           <a:ln>
             <a:noFill/>
@@ -21910,20 +22017,20 @@
       </p:sp>
       <p:sp>
         <p:nvSpPr>
-          <p:cNvPr id="17" name="Rectangle 16"/>
+          <p:cNvPr id="16" name="Rectangle 15"/>
           <p:cNvSpPr/>
           <p:nvPr/>
         </p:nvSpPr>
         <p:spPr>
           <a:xfrm>
-            <a:off x="1408176" y="3945635"/>
+            <a:off x="1408176" y="2263140"/>
             <a:ext cx="91440" cy="27432"/>
           </a:xfrm>
           <a:prstGeom prst="rect">
             <a:avLst/>
           </a:prstGeom>
           <a:solidFill>
-            <a:srgbClr val="DEBB99"/>
+            <a:srgbClr val="D5A97E"/>
           </a:solidFill>
           <a:ln>
             <a:noFill/>
@@ -21952,20 +22059,20 @@
       </p:sp>
       <p:sp>
         <p:nvSpPr>
-          <p:cNvPr id="18" name="Rectangle 17"/>
+          <p:cNvPr id="17" name="Rectangle 16"/>
           <p:cNvSpPr/>
           <p:nvPr/>
         </p:nvSpPr>
         <p:spPr>
           <a:xfrm>
-            <a:off x="1591056" y="3945635"/>
+            <a:off x="1591056" y="2263140"/>
             <a:ext cx="91440" cy="27432"/>
           </a:xfrm>
           <a:prstGeom prst="rect">
             <a:avLst/>
           </a:prstGeom>
           <a:solidFill>
-            <a:srgbClr val="DEBB99"/>
+            <a:srgbClr val="D5A97E"/>
           </a:solidFill>
           <a:ln>
             <a:noFill/>
@@ -21994,20 +22101,20 @@
       </p:sp>
       <p:sp>
         <p:nvSpPr>
-          <p:cNvPr id="19" name="Rectangle 18"/>
+          <p:cNvPr id="18" name="Rectangle 17"/>
           <p:cNvSpPr/>
           <p:nvPr/>
         </p:nvSpPr>
         <p:spPr>
           <a:xfrm>
-            <a:off x="1773936" y="3945635"/>
+            <a:off x="1773936" y="2263140"/>
             <a:ext cx="91440" cy="27432"/>
           </a:xfrm>
           <a:prstGeom prst="rect">
             <a:avLst/>
           </a:prstGeom>
           <a:solidFill>
-            <a:srgbClr val="DEBB99"/>
+            <a:srgbClr val="D5A97E"/>
           </a:solidFill>
           <a:ln>
             <a:noFill/>
@@ -22036,20 +22143,20 @@
       </p:sp>
       <p:sp>
         <p:nvSpPr>
-          <p:cNvPr id="20" name="Rectangle 19"/>
+          <p:cNvPr id="19" name="Rectangle 18"/>
           <p:cNvSpPr/>
           <p:nvPr/>
         </p:nvSpPr>
         <p:spPr>
           <a:xfrm>
-            <a:off x="1956816" y="3945635"/>
+            <a:off x="1956816" y="2263140"/>
             <a:ext cx="91440" cy="27432"/>
           </a:xfrm>
           <a:prstGeom prst="rect">
             <a:avLst/>
           </a:prstGeom>
           <a:solidFill>
-            <a:srgbClr val="DEBB99"/>
+            <a:srgbClr val="D5A97E"/>
           </a:solidFill>
           <a:ln>
             <a:noFill/>
@@ -22078,20 +22185,20 @@
       </p:sp>
       <p:sp>
         <p:nvSpPr>
-          <p:cNvPr id="21" name="Rectangle 20"/>
+          <p:cNvPr id="20" name="Rectangle 19"/>
           <p:cNvSpPr/>
           <p:nvPr/>
         </p:nvSpPr>
         <p:spPr>
           <a:xfrm>
-            <a:off x="2139696" y="3945635"/>
+            <a:off x="2139696" y="2263140"/>
             <a:ext cx="91440" cy="27432"/>
           </a:xfrm>
           <a:prstGeom prst="rect">
             <a:avLst/>
           </a:prstGeom>
           <a:solidFill>
-            <a:srgbClr val="DEBB99"/>
+            <a:srgbClr val="D5A97E"/>
           </a:solidFill>
           <a:ln>
             <a:noFill/>
@@ -22120,20 +22227,20 @@
       </p:sp>
       <p:sp>
         <p:nvSpPr>
-          <p:cNvPr id="22" name="Rectangle 21"/>
+          <p:cNvPr id="21" name="Rectangle 20"/>
           <p:cNvSpPr/>
           <p:nvPr/>
         </p:nvSpPr>
         <p:spPr>
           <a:xfrm>
-            <a:off x="2322576" y="3945635"/>
+            <a:off x="2322576" y="2263140"/>
             <a:ext cx="91440" cy="27432"/>
           </a:xfrm>
           <a:prstGeom prst="rect">
             <a:avLst/>
           </a:prstGeom>
           <a:solidFill>
-            <a:srgbClr val="DEBB99"/>
+            <a:srgbClr val="D5A97E"/>
           </a:solidFill>
           <a:ln>
             <a:noFill/>
@@ -22162,20 +22269,20 @@
       </p:sp>
       <p:sp>
         <p:nvSpPr>
-          <p:cNvPr id="23" name="Rectangle 22"/>
+          <p:cNvPr id="22" name="Rectangle 21"/>
           <p:cNvSpPr/>
           <p:nvPr/>
         </p:nvSpPr>
         <p:spPr>
           <a:xfrm>
-            <a:off x="2505456" y="3945635"/>
+            <a:off x="2505456" y="2263140"/>
             <a:ext cx="91440" cy="27432"/>
           </a:xfrm>
           <a:prstGeom prst="rect">
             <a:avLst/>
           </a:prstGeom>
           <a:solidFill>
-            <a:srgbClr val="DEBB99"/>
+            <a:srgbClr val="D5A97E"/>
           </a:solidFill>
           <a:ln>
             <a:noFill/>
@@ -22204,13 +22311,13 @@
       </p:sp>
       <p:sp>
         <p:nvSpPr>
-          <p:cNvPr id="24" name="Rounded Rectangle 23"/>
+          <p:cNvPr id="23" name="Rounded Rectangle 22"/>
           <p:cNvSpPr/>
           <p:nvPr/>
         </p:nvSpPr>
         <p:spPr>
           <a:xfrm>
-            <a:off x="2670048" y="3895344"/>
+            <a:off x="2670048" y="2212848"/>
             <a:ext cx="128016" cy="128016"/>
           </a:xfrm>
           <a:prstGeom prst="roundRect">
@@ -22219,7 +22326,7 @@
             </a:avLst>
           </a:prstGeom>
           <a:solidFill>
-            <a:srgbClr val="14241F"/>
+            <a:srgbClr val="FFFFFF"/>
           </a:solidFill>
           <a:ln>
             <a:noFill/>
@@ -22248,14 +22355,53 @@
       </p:sp>
       <p:sp>
         <p:nvSpPr>
+          <p:cNvPr id="24" name="TextBox 23"/>
+          <p:cNvSpPr txBox="1"/>
+          <p:nvPr/>
+        </p:nvSpPr>
+        <p:spPr>
+          <a:xfrm>
+            <a:off x="365760" y="2432304"/>
+            <a:ext cx="1371600" cy="182880"/>
+          </a:xfrm>
+          <a:prstGeom prst="rect">
+            <a:avLst/>
+          </a:prstGeom>
+          <a:noFill/>
+        </p:spPr>
+        <p:txBody>
+          <a:bodyPr wrap="square" lIns="0" rIns="0" tIns="0" bIns="0" anchor="t">
+            <a:spAutoFit/>
+          </a:bodyPr>
+          <a:lstStyle/>
+          <a:p>
+            <a:pPr algn="l">
+              <a:lnSpc>
+                <a:spcPct val="100000"/>
+              </a:lnSpc>
+            </a:pPr>
+            <a:r>
+              <a:rPr sz="800" b="1" i="0">
+                <a:solidFill>
+                  <a:srgbClr val="FFFFFF"/>
+                </a:solidFill>
+                <a:latin typeface="Calibri"/>
+              </a:rPr>
+              <a:t>FOB Bangkok</a:t>
+            </a:r>
+          </a:p>
+        </p:txBody>
+      </p:sp>
+      <p:sp>
+        <p:nvSpPr>
           <p:cNvPr id="25" name="TextBox 24"/>
           <p:cNvSpPr txBox="1"/>
           <p:nvPr/>
         </p:nvSpPr>
         <p:spPr>
           <a:xfrm>
-            <a:off x="365760" y="4114800"/>
-            <a:ext cx="1371600" cy="182880"/>
+            <a:off x="1920240" y="2432304"/>
+            <a:ext cx="914400" cy="182880"/>
           </a:xfrm>
           <a:prstGeom prst="rect">
             <a:avLst/>
@@ -22268,7 +22414,7 @@
           </a:bodyPr>
           <a:lstStyle/>
           <a:p>
-            <a:pPr algn="l">
+            <a:pPr algn="r">
               <a:lnSpc>
                 <a:spcPct val="100000"/>
               </a:lnSpc>
@@ -22276,46 +22422,7 @@
             <a:r>
               <a:rPr sz="800" b="1" i="0">
                 <a:solidFill>
-                  <a:srgbClr val="14241F"/>
-                </a:solidFill>
-                <a:latin typeface="Calibri"/>
-              </a:rPr>
-              <a:t>FOB Bangkok</a:t>
-            </a:r>
-          </a:p>
-        </p:txBody>
-      </p:sp>
-      <p:sp>
-        <p:nvSpPr>
-          <p:cNvPr id="26" name="TextBox 25"/>
-          <p:cNvSpPr txBox="1"/>
-          <p:nvPr/>
-        </p:nvSpPr>
-        <p:spPr>
-          <a:xfrm>
-            <a:off x="1920240" y="4114800"/>
-            <a:ext cx="914400" cy="182880"/>
-          </a:xfrm>
-          <a:prstGeom prst="rect">
-            <a:avLst/>
-          </a:prstGeom>
-          <a:noFill/>
-        </p:spPr>
-        <p:txBody>
-          <a:bodyPr wrap="square" lIns="0" rIns="0" tIns="0" bIns="0" anchor="t">
-            <a:spAutoFit/>
-          </a:bodyPr>
-          <a:lstStyle/>
-          <a:p>
-            <a:pPr algn="r">
-              <a:lnSpc>
-                <a:spcPct val="100000"/>
-              </a:lnSpc>
-            </a:pPr>
-            <a:r>
-              <a:rPr sz="800" b="1" i="0">
-                <a:solidFill>
-                  <a:srgbClr val="14241F"/>
+                  <a:srgbClr val="FFFFFF"/>
                 </a:solidFill>
                 <a:latin typeface="Calibri"/>
               </a:rPr>
@@ -22326,18 +22433,18 @@
       </p:sp>
       <p:sp>
         <p:nvSpPr>
-          <p:cNvPr id="27" name="Rounded Rectangle 26"/>
+          <p:cNvPr id="26" name="Rounded Rectangle 25"/>
           <p:cNvSpPr/>
           <p:nvPr/>
         </p:nvSpPr>
         <p:spPr>
           <a:xfrm>
-            <a:off x="3383279" y="3584448"/>
-            <a:ext cx="822960" cy="841248"/>
+            <a:off x="5120640" y="1476979"/>
+            <a:ext cx="1755648" cy="1924304"/>
           </a:xfrm>
           <a:prstGeom prst="roundRect">
             <a:avLst>
-              <a:gd name="adj" fmla="val 8000"/>
+              <a:gd name="adj" fmla="val 6000"/>
             </a:avLst>
           </a:prstGeom>
           <a:solidFill>
@@ -22370,98 +22477,44 @@
           <a:p/>
         </p:txBody>
       </p:sp>
-      <p:sp>
-        <p:nvSpPr>
-          <p:cNvPr id="28" name="TextBox 27"/>
-          <p:cNvSpPr txBox="1"/>
-          <p:nvPr/>
-        </p:nvSpPr>
-        <p:spPr>
-          <a:xfrm>
-            <a:off x="3383279" y="3712463"/>
-            <a:ext cx="822960" cy="292608"/>
-          </a:xfrm>
-          <a:prstGeom prst="rect">
-            <a:avLst/>
-          </a:prstGeom>
-          <a:noFill/>
-        </p:spPr>
-        <p:txBody>
-          <a:bodyPr wrap="square" lIns="0" rIns="0" tIns="0" bIns="0" anchor="t">
-            <a:spAutoFit/>
-          </a:bodyPr>
-          <a:lstStyle/>
-          <a:p>
-            <a:pPr algn="ctr">
-              <a:lnSpc>
-                <a:spcPct val="100000"/>
-              </a:lnSpc>
-            </a:pPr>
-            <a:r>
-              <a:rPr sz="1300" b="1" i="0">
-                <a:solidFill>
-                  <a:srgbClr val="A35C15"/>
-                </a:solidFill>
-                <a:latin typeface="Cambria"/>
-              </a:rPr>
-              <a:t>Таїланд</a:t>
-            </a:r>
-          </a:p>
-        </p:txBody>
-      </p:sp>
-      <p:sp>
-        <p:nvSpPr>
-          <p:cNvPr id="29" name="TextBox 28"/>
-          <p:cNvSpPr txBox="1"/>
-          <p:nvPr/>
-        </p:nvSpPr>
-        <p:spPr>
-          <a:xfrm>
-            <a:off x="3383279" y="4078224"/>
-            <a:ext cx="822960" cy="201168"/>
-          </a:xfrm>
-          <a:prstGeom prst="rect">
-            <a:avLst/>
-          </a:prstGeom>
-          <a:noFill/>
-        </p:spPr>
-        <p:txBody>
-          <a:bodyPr wrap="square" lIns="0" rIns="0" tIns="0" bIns="0" anchor="t">
-            <a:spAutoFit/>
-          </a:bodyPr>
-          <a:lstStyle/>
-          <a:p>
-            <a:pPr algn="ctr">
-              <a:lnSpc>
-                <a:spcPct val="100000"/>
-              </a:lnSpc>
-            </a:pPr>
-            <a:r>
-              <a:rPr sz="650" b="0" i="0">
-                <a:solidFill>
-                  <a:srgbClr val="8A938D"/>
-                </a:solidFill>
-                <a:latin typeface="Calibri"/>
-              </a:rPr>
-              <a:t>Країна</a:t>
-            </a:r>
-          </a:p>
-        </p:txBody>
-      </p:sp>
-      <p:sp>
-        <p:nvSpPr>
-          <p:cNvPr id="30" name="Rounded Rectangle 29"/>
+      <p:pic>
+        <p:nvPicPr>
+          <p:cNvPr id="27" name="Picture 26" descr="sk_original.png"/>
+          <p:cNvPicPr>
+            <a:picLocks noChangeAspect="1"/>
+          </p:cNvPicPr>
+          <p:nvPr/>
+        </p:nvPicPr>
+        <p:blipFill>
+          <a:blip r:embed="rId2"/>
+          <a:stretch>
+            <a:fillRect/>
+          </a:stretch>
+        </p:blipFill>
+        <p:spPr>
+          <a:xfrm>
+            <a:off x="5363464" y="1636491"/>
+            <a:ext cx="1270000" cy="1605280"/>
+          </a:xfrm>
+          <a:prstGeom prst="rect">
+            <a:avLst/>
+          </a:prstGeom>
+        </p:spPr>
+      </p:pic>
+      <p:sp>
+        <p:nvSpPr>
+          <p:cNvPr id="28" name="Rounded Rectangle 27"/>
           <p:cNvSpPr/>
           <p:nvPr/>
         </p:nvSpPr>
         <p:spPr>
           <a:xfrm>
-            <a:off x="4315968" y="3584448"/>
-            <a:ext cx="822960" cy="841248"/>
+            <a:off x="7022592" y="1476979"/>
+            <a:ext cx="1755648" cy="1924304"/>
           </a:xfrm>
           <a:prstGeom prst="roundRect">
             <a:avLst>
-              <a:gd name="adj" fmla="val 8000"/>
+              <a:gd name="adj" fmla="val 6000"/>
             </a:avLst>
           </a:prstGeom>
           <a:solidFill>
@@ -22494,203 +22547,9 @@
           <a:p/>
         </p:txBody>
       </p:sp>
-      <p:sp>
-        <p:nvSpPr>
-          <p:cNvPr id="31" name="TextBox 30"/>
-          <p:cNvSpPr txBox="1"/>
-          <p:nvPr/>
-        </p:nvSpPr>
-        <p:spPr>
-          <a:xfrm>
-            <a:off x="4315968" y="3712463"/>
-            <a:ext cx="822960" cy="292608"/>
-          </a:xfrm>
-          <a:prstGeom prst="rect">
-            <a:avLst/>
-          </a:prstGeom>
-          <a:noFill/>
-        </p:spPr>
-        <p:txBody>
-          <a:bodyPr wrap="square" lIns="0" rIns="0" tIns="0" bIns="0" anchor="t">
-            <a:spAutoFit/>
-          </a:bodyPr>
-          <a:lstStyle/>
-          <a:p>
-            <a:pPr algn="ctr">
-              <a:lnSpc>
-                <a:spcPct val="100000"/>
-              </a:lnSpc>
-            </a:pPr>
-            <a:r>
-              <a:rPr sz="1300" b="1" i="0">
-                <a:solidFill>
-                  <a:srgbClr val="A35C15"/>
-                </a:solidFill>
-                <a:latin typeface="Cambria"/>
-              </a:rPr>
-              <a:t>2</a:t>
-            </a:r>
-          </a:p>
-        </p:txBody>
-      </p:sp>
-      <p:sp>
-        <p:nvSpPr>
-          <p:cNvPr id="32" name="TextBox 31"/>
-          <p:cNvSpPr txBox="1"/>
-          <p:nvPr/>
-        </p:nvSpPr>
-        <p:spPr>
-          <a:xfrm>
-            <a:off x="4315968" y="4078224"/>
-            <a:ext cx="822960" cy="201168"/>
-          </a:xfrm>
-          <a:prstGeom prst="rect">
-            <a:avLst/>
-          </a:prstGeom>
-          <a:noFill/>
-        </p:spPr>
-        <p:txBody>
-          <a:bodyPr wrap="square" lIns="0" rIns="0" tIns="0" bIns="0" anchor="t">
-            <a:spAutoFit/>
-          </a:bodyPr>
-          <a:lstStyle/>
-          <a:p>
-            <a:pPr algn="ctr">
-              <a:lnSpc>
-                <a:spcPct val="100000"/>
-              </a:lnSpc>
-            </a:pPr>
-            <a:r>
-              <a:rPr sz="650" b="0" i="0">
-                <a:solidFill>
-                  <a:srgbClr val="8A938D"/>
-                </a:solidFill>
-                <a:latin typeface="Calibri"/>
-              </a:rPr>
-              <a:t>Позицій із с/в</a:t>
-            </a:r>
-          </a:p>
-        </p:txBody>
-      </p:sp>
-      <p:sp>
-        <p:nvSpPr>
-          <p:cNvPr id="33" name="Rounded Rectangle 32"/>
-          <p:cNvSpPr/>
-          <p:nvPr/>
-        </p:nvSpPr>
-        <p:spPr>
-          <a:xfrm>
-            <a:off x="5440680" y="768096"/>
-            <a:ext cx="1604771" cy="1997456"/>
-          </a:xfrm>
-          <a:prstGeom prst="roundRect">
-            <a:avLst>
-              <a:gd name="adj" fmla="val 6000"/>
-            </a:avLst>
-          </a:prstGeom>
-          <a:solidFill>
-            <a:srgbClr val="FFFFFF"/>
-          </a:solidFill>
-          <a:ln w="9525">
-            <a:solidFill>
-              <a:srgbClr val="E6E1D8"/>
-            </a:solidFill>
-          </a:ln>
-          <a:effectLst/>
-        </p:spPr>
-        <p:style>
-          <a:lnRef idx="1">
-            <a:schemeClr val="accent1"/>
-          </a:lnRef>
-          <a:fillRef idx="3">
-            <a:schemeClr val="accent1"/>
-          </a:fillRef>
-          <a:effectRef idx="2">
-            <a:schemeClr val="accent1"/>
-          </a:effectRef>
-          <a:fontRef idx="minor">
-            <a:schemeClr val="lt1"/>
-          </a:fontRef>
-        </p:style>
-        <p:txBody>
-          <a:bodyPr rtlCol="0" anchor="ctr"/>
-          <a:lstStyle/>
-          <a:p/>
-        </p:txBody>
-      </p:sp>
       <p:pic>
         <p:nvPicPr>
-          <p:cNvPr id="34" name="Picture 33" descr="sk_original.png"/>
-          <p:cNvPicPr>
-            <a:picLocks noChangeAspect="1"/>
-          </p:cNvPicPr>
-          <p:nvPr/>
-        </p:nvPicPr>
-        <p:blipFill>
-          <a:blip r:embed="rId2"/>
-          <a:stretch>
-            <a:fillRect/>
-          </a:stretch>
-        </p:blipFill>
-        <p:spPr>
-          <a:xfrm>
-            <a:off x="5608065" y="964184"/>
-            <a:ext cx="1270000" cy="1605280"/>
-          </a:xfrm>
-          <a:prstGeom prst="rect">
-            <a:avLst/>
-          </a:prstGeom>
-        </p:spPr>
-      </p:pic>
-      <p:sp>
-        <p:nvSpPr>
-          <p:cNvPr id="35" name="Rounded Rectangle 34"/>
-          <p:cNvSpPr/>
-          <p:nvPr/>
-        </p:nvSpPr>
-        <p:spPr>
-          <a:xfrm>
-            <a:off x="7173468" y="768096"/>
-            <a:ext cx="1604771" cy="1997456"/>
-          </a:xfrm>
-          <a:prstGeom prst="roundRect">
-            <a:avLst>
-              <a:gd name="adj" fmla="val 6000"/>
-            </a:avLst>
-          </a:prstGeom>
-          <a:solidFill>
-            <a:srgbClr val="FFFFFF"/>
-          </a:solidFill>
-          <a:ln w="9525">
-            <a:solidFill>
-              <a:srgbClr val="E6E1D8"/>
-            </a:solidFill>
-          </a:ln>
-          <a:effectLst/>
-        </p:spPr>
-        <p:style>
-          <a:lnRef idx="1">
-            <a:schemeClr val="accent1"/>
-          </a:lnRef>
-          <a:fillRef idx="3">
-            <a:schemeClr val="accent1"/>
-          </a:fillRef>
-          <a:effectRef idx="2">
-            <a:schemeClr val="accent1"/>
-          </a:effectRef>
-          <a:fontRef idx="minor">
-            <a:schemeClr val="lt1"/>
-          </a:fontRef>
-        </p:style>
-        <p:txBody>
-          <a:bodyPr rtlCol="0" anchor="ctr"/>
-          <a:lstStyle/>
-          <a:p/>
-        </p:txBody>
-      </p:sp>
-      <p:pic>
-        <p:nvPicPr>
-          <p:cNvPr id="36" name="Picture 35" descr="sk_wasabi.png"/>
+          <p:cNvPr id="29" name="Picture 28" descr="sk_wasabi.png"/>
           <p:cNvPicPr>
             <a:picLocks noChangeAspect="1"/>
           </p:cNvPicPr>
@@ -22704,7 +22563,7 @@
         </p:blipFill>
         <p:spPr>
           <a:xfrm>
-            <a:off x="7335773" y="923543"/>
+            <a:off x="7260336" y="1595851"/>
             <a:ext cx="1280160" cy="1686560"/>
           </a:xfrm>
           <a:prstGeom prst="rect">
@@ -22714,194 +22573,131 @@
       </p:pic>
       <p:sp>
         <p:nvSpPr>
-          <p:cNvPr id="37" name="Rounded Rectangle 36"/>
+          <p:cNvPr id="30" name="TextBox 29"/>
+          <p:cNvSpPr txBox="1"/>
+          <p:nvPr/>
+        </p:nvSpPr>
+        <p:spPr>
+          <a:xfrm>
+            <a:off x="5120640" y="3529299"/>
+            <a:ext cx="3657600" cy="182880"/>
+          </a:xfrm>
+          <a:prstGeom prst="rect">
+            <a:avLst/>
+          </a:prstGeom>
+          <a:noFill/>
+        </p:spPr>
+        <p:txBody>
+          <a:bodyPr wrap="square" lIns="0" rIns="0" tIns="0" bIns="0" anchor="t">
+            <a:spAutoFit/>
+          </a:bodyPr>
+          <a:lstStyle/>
+          <a:p>
+            <a:pPr algn="ctr">
+              <a:lnSpc>
+                <a:spcPct val="100000"/>
+              </a:lnSpc>
+            </a:pPr>
+            <a:r>
+              <a:rPr sz="750" b="0" i="0">
+                <a:solidFill>
+                  <a:srgbClr val="8A938D"/>
+                </a:solidFill>
+                <a:latin typeface="Calibri"/>
+              </a:rPr>
+              <a:t>2 позиції із розрахованою собівартістю</a:t>
+            </a:r>
+          </a:p>
+        </p:txBody>
+      </p:sp>
+      <p:sp>
+        <p:nvSpPr>
+          <p:cNvPr id="31" name="TextBox 30"/>
+          <p:cNvSpPr txBox="1"/>
+          <p:nvPr/>
+        </p:nvSpPr>
+        <p:spPr>
+          <a:xfrm>
+            <a:off x="365760" y="2926080"/>
+            <a:ext cx="4617720" cy="822960"/>
+          </a:xfrm>
+          <a:prstGeom prst="rect">
+            <a:avLst/>
+          </a:prstGeom>
+          <a:noFill/>
+        </p:spPr>
+        <p:txBody>
+          <a:bodyPr wrap="square" lIns="0" rIns="0" tIns="0" bIns="0" anchor="t">
+            <a:spAutoFit/>
+          </a:bodyPr>
+          <a:lstStyle/>
+          <a:p>
+            <a:pPr algn="l">
+              <a:lnSpc>
+                <a:spcPct val="134000"/>
+              </a:lnSpc>
+            </a:pPr>
+            <a:r>
+              <a:rPr sz="1050" b="0" i="0">
+                <a:solidFill>
+                  <a:srgbClr val="44524C"/>
+                </a:solidFill>
+                <a:latin typeface="Calibri"/>
+              </a:rPr>
+              <a:t>Спільне підприємство японської Kameda Seika — світового лідера ринку рисових крекерів — та тайської групи Singha. Виробництво в Таїланді за японськими стандартами.</a:t>
+            </a:r>
+          </a:p>
+        </p:txBody>
+      </p:sp>
+      <p:sp>
+        <p:nvSpPr>
+          <p:cNvPr id="32" name="TextBox 31"/>
+          <p:cNvSpPr txBox="1"/>
+          <p:nvPr/>
+        </p:nvSpPr>
+        <p:spPr>
+          <a:xfrm>
+            <a:off x="365760" y="3803904"/>
+            <a:ext cx="4617720" cy="146304"/>
+          </a:xfrm>
+          <a:prstGeom prst="rect">
+            <a:avLst/>
+          </a:prstGeom>
+          <a:noFill/>
+        </p:spPr>
+        <p:txBody>
+          <a:bodyPr wrap="square" lIns="0" rIns="0" tIns="0" bIns="0" anchor="t">
+            <a:spAutoFit/>
+          </a:bodyPr>
+          <a:lstStyle/>
+          <a:p>
+            <a:pPr algn="l">
+              <a:lnSpc>
+                <a:spcPct val="100000"/>
+              </a:lnSpc>
+            </a:pPr>
+            <a:r>
+              <a:rPr sz="700" b="1" i="0" spc="90">
+                <a:solidFill>
+                  <a:srgbClr val="A35C15"/>
+                </a:solidFill>
+                <a:latin typeface="Calibri"/>
+              </a:rPr>
+              <a:t>ВИРОБНИЦТВО І УМОВИ ПОСТАВКИ</a:t>
+            </a:r>
+          </a:p>
+        </p:txBody>
+      </p:sp>
+      <p:sp>
+        <p:nvSpPr>
+          <p:cNvPr id="33" name="Rectangle 32"/>
           <p:cNvSpPr/>
           <p:nvPr/>
         </p:nvSpPr>
         <p:spPr>
           <a:xfrm>
-            <a:off x="5440680" y="2893568"/>
-            <a:ext cx="3337559" cy="1824736"/>
-          </a:xfrm>
-          <a:prstGeom prst="roundRect">
-            <a:avLst>
-              <a:gd name="adj" fmla="val 6000"/>
-            </a:avLst>
-          </a:prstGeom>
-          <a:solidFill>
-            <a:srgbClr val="B36214"/>
-          </a:solidFill>
-          <a:ln>
-            <a:noFill/>
-          </a:ln>
-          <a:effectLst/>
-        </p:spPr>
-        <p:style>
-          <a:lnRef idx="1">
-            <a:schemeClr val="accent1"/>
-          </a:lnRef>
-          <a:fillRef idx="3">
-            <a:schemeClr val="accent1"/>
-          </a:fillRef>
-          <a:effectRef idx="2">
-            <a:schemeClr val="accent1"/>
-          </a:effectRef>
-          <a:fontRef idx="minor">
-            <a:schemeClr val="lt1"/>
-          </a:fontRef>
-        </p:style>
-        <p:txBody>
-          <a:bodyPr rtlCol="0" anchor="ctr"/>
-          <a:lstStyle/>
-          <a:p/>
-        </p:txBody>
-      </p:sp>
-      <p:sp>
-        <p:nvSpPr>
-          <p:cNvPr id="38" name="TextBox 37"/>
-          <p:cNvSpPr txBox="1"/>
-          <p:nvPr/>
-        </p:nvSpPr>
-        <p:spPr>
-          <a:xfrm>
-            <a:off x="5696712" y="3113024"/>
-            <a:ext cx="2825495" cy="548640"/>
-          </a:xfrm>
-          <a:prstGeom prst="rect">
-            <a:avLst/>
-          </a:prstGeom>
-          <a:noFill/>
-        </p:spPr>
-        <p:txBody>
-          <a:bodyPr wrap="square" lIns="0" rIns="0" tIns="0" bIns="0" anchor="t">
-            <a:spAutoFit/>
-          </a:bodyPr>
-          <a:lstStyle/>
-          <a:p>
-            <a:pPr algn="l">
-              <a:lnSpc>
-                <a:spcPct val="106000"/>
-              </a:lnSpc>
-            </a:pPr>
-            <a:r>
-              <a:rPr sz="2200" b="1" i="0">
-                <a:solidFill>
-                  <a:srgbClr val="FFFFFF"/>
-                </a:solidFill>
-                <a:latin typeface="Cambria"/>
-              </a:rPr>
-              <a:t>SINGHA</a:t>
-            </a:r>
-          </a:p>
-          <a:p>
-            <a:pPr algn="l">
-              <a:lnSpc>
-                <a:spcPct val="106000"/>
-              </a:lnSpc>
-            </a:pPr>
-            <a:r>
-              <a:rPr sz="2200" b="1" i="0">
-                <a:solidFill>
-                  <a:srgbClr val="FFFFFF"/>
-                </a:solidFill>
-                <a:latin typeface="Cambria"/>
-              </a:rPr>
-              <a:t>KAMEDA</a:t>
-            </a:r>
-          </a:p>
-        </p:txBody>
-      </p:sp>
-      <p:sp>
-        <p:nvSpPr>
-          <p:cNvPr id="39" name="Rectangle 38"/>
-          <p:cNvSpPr/>
-          <p:nvPr/>
-        </p:nvSpPr>
-        <p:spPr>
-          <a:xfrm>
-            <a:off x="5696712" y="4187952"/>
-            <a:ext cx="548640" cy="32004"/>
-          </a:xfrm>
-          <a:prstGeom prst="rect">
-            <a:avLst/>
-          </a:prstGeom>
-          <a:solidFill>
-            <a:srgbClr val="FFFFFF"/>
-          </a:solidFill>
-          <a:ln>
-            <a:noFill/>
-          </a:ln>
-          <a:effectLst/>
-        </p:spPr>
-        <p:style>
-          <a:lnRef idx="1">
-            <a:schemeClr val="accent1"/>
-          </a:lnRef>
-          <a:fillRef idx="3">
-            <a:schemeClr val="accent1"/>
-          </a:fillRef>
-          <a:effectRef idx="2">
-            <a:schemeClr val="accent1"/>
-          </a:effectRef>
-          <a:fontRef idx="minor">
-            <a:schemeClr val="lt1"/>
-          </a:fontRef>
-        </p:style>
-        <p:txBody>
-          <a:bodyPr rtlCol="0" anchor="ctr"/>
-          <a:lstStyle/>
-          <a:p/>
-        </p:txBody>
-      </p:sp>
-      <p:sp>
-        <p:nvSpPr>
-          <p:cNvPr id="40" name="TextBox 39"/>
-          <p:cNvSpPr txBox="1"/>
-          <p:nvPr/>
-        </p:nvSpPr>
-        <p:spPr>
-          <a:xfrm>
-            <a:off x="5696712" y="4315968"/>
-            <a:ext cx="2825495" cy="219456"/>
-          </a:xfrm>
-          <a:prstGeom prst="rect">
-            <a:avLst/>
-          </a:prstGeom>
-          <a:noFill/>
-        </p:spPr>
-        <p:txBody>
-          <a:bodyPr wrap="square" lIns="0" rIns="0" tIns="0" bIns="0" anchor="t">
-            <a:spAutoFit/>
-          </a:bodyPr>
-          <a:lstStyle/>
-          <a:p>
-            <a:pPr algn="l">
-              <a:lnSpc>
-                <a:spcPct val="100000"/>
-              </a:lnSpc>
-            </a:pPr>
-            <a:r>
-              <a:rPr sz="850" b="0" i="0">
-                <a:solidFill>
-                  <a:srgbClr val="F4E7DC"/>
-                </a:solidFill>
-                <a:latin typeface="Calibri"/>
-              </a:rPr>
-              <a:t>Виробництво · Таїланд</a:t>
-            </a:r>
-          </a:p>
-        </p:txBody>
-      </p:sp>
-      <p:sp>
-        <p:nvSpPr>
-          <p:cNvPr id="41" name="Rectangle 40"/>
-          <p:cNvSpPr/>
-          <p:nvPr/>
-        </p:nvSpPr>
-        <p:spPr>
-          <a:xfrm>
-            <a:off x="365760" y="4809744"/>
-            <a:ext cx="8412480" cy="9144"/>
+            <a:off x="365760" y="4023360"/>
+            <a:ext cx="2194560" cy="9144"/>
           </a:xfrm>
           <a:prstGeom prst="rect">
             <a:avLst/>
@@ -22936,7 +22732,487 @@
       </p:sp>
       <p:sp>
         <p:nvSpPr>
-          <p:cNvPr id="42" name="TextBox 41"/>
+          <p:cNvPr id="34" name="TextBox 33"/>
+          <p:cNvSpPr txBox="1"/>
+          <p:nvPr/>
+        </p:nvSpPr>
+        <p:spPr>
+          <a:xfrm>
+            <a:off x="365760" y="4078224"/>
+            <a:ext cx="2194560" cy="146304"/>
+          </a:xfrm>
+          <a:prstGeom prst="rect">
+            <a:avLst/>
+          </a:prstGeom>
+          <a:noFill/>
+        </p:spPr>
+        <p:txBody>
+          <a:bodyPr wrap="square" lIns="0" rIns="0" tIns="0" bIns="0" anchor="t">
+            <a:spAutoFit/>
+          </a:bodyPr>
+          <a:lstStyle/>
+          <a:p>
+            <a:pPr algn="l">
+              <a:lnSpc>
+                <a:spcPct val="100000"/>
+              </a:lnSpc>
+            </a:pPr>
+            <a:r>
+              <a:rPr sz="650" b="0" i="0">
+                <a:solidFill>
+                  <a:srgbClr val="8A938D"/>
+                </a:solidFill>
+                <a:latin typeface="Calibri"/>
+              </a:rPr>
+              <a:t>Фасовка</a:t>
+            </a:r>
+          </a:p>
+        </p:txBody>
+      </p:sp>
+      <p:sp>
+        <p:nvSpPr>
+          <p:cNvPr id="35" name="TextBox 34"/>
+          <p:cNvSpPr txBox="1"/>
+          <p:nvPr/>
+        </p:nvSpPr>
+        <p:spPr>
+          <a:xfrm>
+            <a:off x="365760" y="4206240"/>
+            <a:ext cx="2194560" cy="182880"/>
+          </a:xfrm>
+          <a:prstGeom prst="rect">
+            <a:avLst/>
+          </a:prstGeom>
+          <a:noFill/>
+        </p:spPr>
+        <p:txBody>
+          <a:bodyPr wrap="square" lIns="0" rIns="0" tIns="0" bIns="0" anchor="t">
+            <a:spAutoFit/>
+          </a:bodyPr>
+          <a:lstStyle/>
+          <a:p>
+            <a:pPr algn="l">
+              <a:lnSpc>
+                <a:spcPct val="100000"/>
+              </a:lnSpc>
+            </a:pPr>
+            <a:r>
+              <a:rPr sz="900" b="1" i="0">
+                <a:solidFill>
+                  <a:srgbClr val="14241F"/>
+                </a:solidFill>
+                <a:latin typeface="Calibri"/>
+              </a:rPr>
+              <a:t>24 шт / картон</a:t>
+            </a:r>
+          </a:p>
+        </p:txBody>
+      </p:sp>
+      <p:sp>
+        <p:nvSpPr>
+          <p:cNvPr id="36" name="Rectangle 35"/>
+          <p:cNvSpPr/>
+          <p:nvPr/>
+        </p:nvSpPr>
+        <p:spPr>
+          <a:xfrm>
+            <a:off x="2743200" y="4023360"/>
+            <a:ext cx="2194560" cy="9144"/>
+          </a:xfrm>
+          <a:prstGeom prst="rect">
+            <a:avLst/>
+          </a:prstGeom>
+          <a:solidFill>
+            <a:srgbClr val="E6E1D8"/>
+          </a:solidFill>
+          <a:ln>
+            <a:noFill/>
+          </a:ln>
+          <a:effectLst/>
+        </p:spPr>
+        <p:style>
+          <a:lnRef idx="1">
+            <a:schemeClr val="accent1"/>
+          </a:lnRef>
+          <a:fillRef idx="3">
+            <a:schemeClr val="accent1"/>
+          </a:fillRef>
+          <a:effectRef idx="2">
+            <a:schemeClr val="accent1"/>
+          </a:effectRef>
+          <a:fontRef idx="minor">
+            <a:schemeClr val="lt1"/>
+          </a:fontRef>
+        </p:style>
+        <p:txBody>
+          <a:bodyPr rtlCol="0" anchor="ctr"/>
+          <a:lstStyle/>
+          <a:p/>
+        </p:txBody>
+      </p:sp>
+      <p:sp>
+        <p:nvSpPr>
+          <p:cNvPr id="37" name="TextBox 36"/>
+          <p:cNvSpPr txBox="1"/>
+          <p:nvPr/>
+        </p:nvSpPr>
+        <p:spPr>
+          <a:xfrm>
+            <a:off x="2743200" y="4078224"/>
+            <a:ext cx="2194560" cy="146304"/>
+          </a:xfrm>
+          <a:prstGeom prst="rect">
+            <a:avLst/>
+          </a:prstGeom>
+          <a:noFill/>
+        </p:spPr>
+        <p:txBody>
+          <a:bodyPr wrap="square" lIns="0" rIns="0" tIns="0" bIns="0" anchor="t">
+            <a:spAutoFit/>
+          </a:bodyPr>
+          <a:lstStyle/>
+          <a:p>
+            <a:pPr algn="l">
+              <a:lnSpc>
+                <a:spcPct val="100000"/>
+              </a:lnSpc>
+            </a:pPr>
+            <a:r>
+              <a:rPr sz="650" b="0" i="0">
+                <a:solidFill>
+                  <a:srgbClr val="8A938D"/>
+                </a:solidFill>
+                <a:latin typeface="Calibri"/>
+              </a:rPr>
+              <a:t>Термін придатності</a:t>
+            </a:r>
+          </a:p>
+        </p:txBody>
+      </p:sp>
+      <p:sp>
+        <p:nvSpPr>
+          <p:cNvPr id="38" name="TextBox 37"/>
+          <p:cNvSpPr txBox="1"/>
+          <p:nvPr/>
+        </p:nvSpPr>
+        <p:spPr>
+          <a:xfrm>
+            <a:off x="2743200" y="4206240"/>
+            <a:ext cx="2194560" cy="182880"/>
+          </a:xfrm>
+          <a:prstGeom prst="rect">
+            <a:avLst/>
+          </a:prstGeom>
+          <a:noFill/>
+        </p:spPr>
+        <p:txBody>
+          <a:bodyPr wrap="square" lIns="0" rIns="0" tIns="0" bIns="0" anchor="t">
+            <a:spAutoFit/>
+          </a:bodyPr>
+          <a:lstStyle/>
+          <a:p>
+            <a:pPr algn="l">
+              <a:lnSpc>
+                <a:spcPct val="100000"/>
+              </a:lnSpc>
+            </a:pPr>
+            <a:r>
+              <a:rPr sz="900" b="1" i="0">
+                <a:solidFill>
+                  <a:srgbClr val="14241F"/>
+                </a:solidFill>
+                <a:latin typeface="Calibri"/>
+              </a:rPr>
+              <a:t>12 місяців</a:t>
+            </a:r>
+          </a:p>
+        </p:txBody>
+      </p:sp>
+      <p:sp>
+        <p:nvSpPr>
+          <p:cNvPr id="39" name="Rectangle 38"/>
+          <p:cNvSpPr/>
+          <p:nvPr/>
+        </p:nvSpPr>
+        <p:spPr>
+          <a:xfrm>
+            <a:off x="365760" y="4425696"/>
+            <a:ext cx="2194560" cy="9144"/>
+          </a:xfrm>
+          <a:prstGeom prst="rect">
+            <a:avLst/>
+          </a:prstGeom>
+          <a:solidFill>
+            <a:srgbClr val="E6E1D8"/>
+          </a:solidFill>
+          <a:ln>
+            <a:noFill/>
+          </a:ln>
+          <a:effectLst/>
+        </p:spPr>
+        <p:style>
+          <a:lnRef idx="1">
+            <a:schemeClr val="accent1"/>
+          </a:lnRef>
+          <a:fillRef idx="3">
+            <a:schemeClr val="accent1"/>
+          </a:fillRef>
+          <a:effectRef idx="2">
+            <a:schemeClr val="accent1"/>
+          </a:effectRef>
+          <a:fontRef idx="minor">
+            <a:schemeClr val="lt1"/>
+          </a:fontRef>
+        </p:style>
+        <p:txBody>
+          <a:bodyPr rtlCol="0" anchor="ctr"/>
+          <a:lstStyle/>
+          <a:p/>
+        </p:txBody>
+      </p:sp>
+      <p:sp>
+        <p:nvSpPr>
+          <p:cNvPr id="40" name="TextBox 39"/>
+          <p:cNvSpPr txBox="1"/>
+          <p:nvPr/>
+        </p:nvSpPr>
+        <p:spPr>
+          <a:xfrm>
+            <a:off x="365760" y="4480560"/>
+            <a:ext cx="2194560" cy="146304"/>
+          </a:xfrm>
+          <a:prstGeom prst="rect">
+            <a:avLst/>
+          </a:prstGeom>
+          <a:noFill/>
+        </p:spPr>
+        <p:txBody>
+          <a:bodyPr wrap="square" lIns="0" rIns="0" tIns="0" bIns="0" anchor="t">
+            <a:spAutoFit/>
+          </a:bodyPr>
+          <a:lstStyle/>
+          <a:p>
+            <a:pPr algn="l">
+              <a:lnSpc>
+                <a:spcPct val="100000"/>
+              </a:lnSpc>
+            </a:pPr>
+            <a:r>
+              <a:rPr sz="650" b="0" i="0">
+                <a:solidFill>
+                  <a:srgbClr val="8A938D"/>
+                </a:solidFill>
+                <a:latin typeface="Calibri"/>
+              </a:rPr>
+              <a:t>Місткість 20′</a:t>
+            </a:r>
+          </a:p>
+        </p:txBody>
+      </p:sp>
+      <p:sp>
+        <p:nvSpPr>
+          <p:cNvPr id="41" name="TextBox 40"/>
+          <p:cNvSpPr txBox="1"/>
+          <p:nvPr/>
+        </p:nvSpPr>
+        <p:spPr>
+          <a:xfrm>
+            <a:off x="365760" y="4608576"/>
+            <a:ext cx="2194560" cy="182880"/>
+          </a:xfrm>
+          <a:prstGeom prst="rect">
+            <a:avLst/>
+          </a:prstGeom>
+          <a:noFill/>
+        </p:spPr>
+        <p:txBody>
+          <a:bodyPr wrap="square" lIns="0" rIns="0" tIns="0" bIns="0" anchor="t">
+            <a:spAutoFit/>
+          </a:bodyPr>
+          <a:lstStyle/>
+          <a:p>
+            <a:pPr algn="l">
+              <a:lnSpc>
+                <a:spcPct val="100000"/>
+              </a:lnSpc>
+            </a:pPr>
+            <a:r>
+              <a:rPr sz="900" b="1" i="0">
+                <a:solidFill>
+                  <a:srgbClr val="14241F"/>
+                </a:solidFill>
+                <a:latin typeface="Calibri"/>
+              </a:rPr>
+              <a:t>1 485 картонів</a:t>
+            </a:r>
+          </a:p>
+        </p:txBody>
+      </p:sp>
+      <p:sp>
+        <p:nvSpPr>
+          <p:cNvPr id="42" name="Rectangle 41"/>
+          <p:cNvSpPr/>
+          <p:nvPr/>
+        </p:nvSpPr>
+        <p:spPr>
+          <a:xfrm>
+            <a:off x="2743200" y="4425696"/>
+            <a:ext cx="2194560" cy="9144"/>
+          </a:xfrm>
+          <a:prstGeom prst="rect">
+            <a:avLst/>
+          </a:prstGeom>
+          <a:solidFill>
+            <a:srgbClr val="E6E1D8"/>
+          </a:solidFill>
+          <a:ln>
+            <a:noFill/>
+          </a:ln>
+          <a:effectLst/>
+        </p:spPr>
+        <p:style>
+          <a:lnRef idx="1">
+            <a:schemeClr val="accent1"/>
+          </a:lnRef>
+          <a:fillRef idx="3">
+            <a:schemeClr val="accent1"/>
+          </a:fillRef>
+          <a:effectRef idx="2">
+            <a:schemeClr val="accent1"/>
+          </a:effectRef>
+          <a:fontRef idx="minor">
+            <a:schemeClr val="lt1"/>
+          </a:fontRef>
+        </p:style>
+        <p:txBody>
+          <a:bodyPr rtlCol="0" anchor="ctr"/>
+          <a:lstStyle/>
+          <a:p/>
+        </p:txBody>
+      </p:sp>
+      <p:sp>
+        <p:nvSpPr>
+          <p:cNvPr id="43" name="TextBox 42"/>
+          <p:cNvSpPr txBox="1"/>
+          <p:nvPr/>
+        </p:nvSpPr>
+        <p:spPr>
+          <a:xfrm>
+            <a:off x="2743200" y="4480560"/>
+            <a:ext cx="2194560" cy="146304"/>
+          </a:xfrm>
+          <a:prstGeom prst="rect">
+            <a:avLst/>
+          </a:prstGeom>
+          <a:noFill/>
+        </p:spPr>
+        <p:txBody>
+          <a:bodyPr wrap="square" lIns="0" rIns="0" tIns="0" bIns="0" anchor="t">
+            <a:spAutoFit/>
+          </a:bodyPr>
+          <a:lstStyle/>
+          <a:p>
+            <a:pPr algn="l">
+              <a:lnSpc>
+                <a:spcPct val="100000"/>
+              </a:lnSpc>
+            </a:pPr>
+            <a:r>
+              <a:rPr sz="650" b="0" i="0">
+                <a:solidFill>
+                  <a:srgbClr val="8A938D"/>
+                </a:solidFill>
+                <a:latin typeface="Calibri"/>
+              </a:rPr>
+              <a:t>Місткість 40′HC</a:t>
+            </a:r>
+          </a:p>
+        </p:txBody>
+      </p:sp>
+      <p:sp>
+        <p:nvSpPr>
+          <p:cNvPr id="44" name="TextBox 43"/>
+          <p:cNvSpPr txBox="1"/>
+          <p:nvPr/>
+        </p:nvSpPr>
+        <p:spPr>
+          <a:xfrm>
+            <a:off x="2743200" y="4608576"/>
+            <a:ext cx="2194560" cy="182880"/>
+          </a:xfrm>
+          <a:prstGeom prst="rect">
+            <a:avLst/>
+          </a:prstGeom>
+          <a:noFill/>
+        </p:spPr>
+        <p:txBody>
+          <a:bodyPr wrap="square" lIns="0" rIns="0" tIns="0" bIns="0" anchor="t">
+            <a:spAutoFit/>
+          </a:bodyPr>
+          <a:lstStyle/>
+          <a:p>
+            <a:pPr algn="l">
+              <a:lnSpc>
+                <a:spcPct val="100000"/>
+              </a:lnSpc>
+            </a:pPr>
+            <a:r>
+              <a:rPr sz="900" b="1" i="0">
+                <a:solidFill>
+                  <a:srgbClr val="14241F"/>
+                </a:solidFill>
+                <a:latin typeface="Calibri"/>
+              </a:rPr>
+              <a:t>3 626 картонів</a:t>
+            </a:r>
+          </a:p>
+        </p:txBody>
+      </p:sp>
+      <p:sp>
+        <p:nvSpPr>
+          <p:cNvPr id="45" name="Rectangle 44"/>
+          <p:cNvSpPr/>
+          <p:nvPr/>
+        </p:nvSpPr>
+        <p:spPr>
+          <a:xfrm>
+            <a:off x="365760" y="4809744"/>
+            <a:ext cx="8412480" cy="9144"/>
+          </a:xfrm>
+          <a:prstGeom prst="rect">
+            <a:avLst/>
+          </a:prstGeom>
+          <a:solidFill>
+            <a:srgbClr val="E6E1D8"/>
+          </a:solidFill>
+          <a:ln>
+            <a:noFill/>
+          </a:ln>
+          <a:effectLst/>
+        </p:spPr>
+        <p:style>
+          <a:lnRef idx="1">
+            <a:schemeClr val="accent1"/>
+          </a:lnRef>
+          <a:fillRef idx="3">
+            <a:schemeClr val="accent1"/>
+          </a:fillRef>
+          <a:effectRef idx="2">
+            <a:schemeClr val="accent1"/>
+          </a:effectRef>
+          <a:fontRef idx="minor">
+            <a:schemeClr val="lt1"/>
+          </a:fontRef>
+        </p:style>
+        <p:txBody>
+          <a:bodyPr rtlCol="0" anchor="ctr"/>
+          <a:lstStyle/>
+          <a:p/>
+        </p:txBody>
+      </p:sp>
+      <p:sp>
+        <p:nvSpPr>
+          <p:cNvPr id="46" name="TextBox 45"/>
           <p:cNvSpPr txBox="1"/>
           <p:nvPr/>
         </p:nvSpPr>
@@ -25606,19 +25882,17 @@
       </p:sp>
       <p:sp>
         <p:nvSpPr>
-          <p:cNvPr id="4" name="Rounded Rectangle 3"/>
+          <p:cNvPr id="4" name="Rectangle 3"/>
           <p:cNvSpPr/>
           <p:nvPr/>
         </p:nvSpPr>
         <p:spPr>
           <a:xfrm>
-            <a:off x="365760" y="676656"/>
-            <a:ext cx="402336" cy="402336"/>
-          </a:xfrm>
-          <a:prstGeom prst="roundRect">
-            <a:avLst>
-              <a:gd name="adj" fmla="val 10000"/>
-            </a:avLst>
+            <a:off x="0" y="0"/>
+            <a:ext cx="9144000" cy="2670048"/>
+          </a:xfrm>
+          <a:prstGeom prst="rect">
+            <a:avLst/>
           </a:prstGeom>
           <a:solidFill>
             <a:srgbClr val="1D5B63"/>
@@ -25650,192 +25924,22 @@
       </p:sp>
       <p:sp>
         <p:nvSpPr>
-          <p:cNvPr id="5" name="TextBox 4"/>
-          <p:cNvSpPr txBox="1"/>
-          <p:nvPr/>
-        </p:nvSpPr>
-        <p:spPr>
-          <a:xfrm>
-            <a:off x="365760" y="676656"/>
+          <p:cNvPr id="5" name="Rounded Rectangle 4"/>
+          <p:cNvSpPr/>
+          <p:nvPr/>
+        </p:nvSpPr>
+        <p:spPr>
+          <a:xfrm>
+            <a:off x="365760" y="475488"/>
             <a:ext cx="402336" cy="402336"/>
           </a:xfrm>
-          <a:prstGeom prst="rect">
-            <a:avLst/>
-          </a:prstGeom>
-          <a:noFill/>
-        </p:spPr>
-        <p:txBody>
-          <a:bodyPr wrap="square" lIns="0" rIns="0" tIns="0" bIns="0" anchor="ctr">
-            <a:spAutoFit/>
-          </a:bodyPr>
-          <a:lstStyle/>
-          <a:p>
-            <a:pPr algn="ctr">
-              <a:lnSpc>
-                <a:spcPct val="100000"/>
-              </a:lnSpc>
-            </a:pPr>
-            <a:r>
-              <a:rPr sz="1400" b="1" i="0">
-                <a:solidFill>
-                  <a:srgbClr val="FFFFFF"/>
-                </a:solidFill>
-                <a:latin typeface="Cambria"/>
-              </a:rPr>
-              <a:t>02</a:t>
-            </a:r>
-          </a:p>
-        </p:txBody>
-      </p:sp>
-      <p:sp>
-        <p:nvSpPr>
-          <p:cNvPr id="6" name="TextBox 5"/>
-          <p:cNvSpPr txBox="1"/>
-          <p:nvPr/>
-        </p:nvSpPr>
-        <p:spPr>
-          <a:xfrm>
-            <a:off x="914400" y="676656"/>
-            <a:ext cx="4297680" cy="182880"/>
-          </a:xfrm>
-          <a:prstGeom prst="rect">
-            <a:avLst/>
-          </a:prstGeom>
-          <a:noFill/>
-        </p:spPr>
-        <p:txBody>
-          <a:bodyPr wrap="square" lIns="0" rIns="0" tIns="0" bIns="0" anchor="t">
-            <a:spAutoFit/>
-          </a:bodyPr>
-          <a:lstStyle/>
-          <a:p>
-            <a:pPr algn="l">
-              <a:lnSpc>
-                <a:spcPct val="100000"/>
-              </a:lnSpc>
-            </a:pPr>
-            <a:r>
-              <a:rPr sz="700" b="1" i="0" spc="90">
-                <a:solidFill>
-                  <a:srgbClr val="8A938D"/>
-                </a:solidFill>
-                <a:latin typeface="Calibri"/>
-              </a:rPr>
-              <a:t>ПОСТАЧАЛЬНИК</a:t>
-            </a:r>
-          </a:p>
-        </p:txBody>
-      </p:sp>
-      <p:sp>
-        <p:nvSpPr>
-          <p:cNvPr id="7" name="TextBox 6"/>
-          <p:cNvSpPr txBox="1"/>
-          <p:nvPr/>
-        </p:nvSpPr>
-        <p:spPr>
-          <a:xfrm>
-            <a:off x="914400" y="859536"/>
-            <a:ext cx="4297680" cy="201168"/>
-          </a:xfrm>
-          <a:prstGeom prst="rect">
-            <a:avLst/>
-          </a:prstGeom>
-          <a:noFill/>
-        </p:spPr>
-        <p:txBody>
-          <a:bodyPr wrap="square" lIns="0" rIns="0" tIns="0" bIns="0" anchor="t">
-            <a:spAutoFit/>
-          </a:bodyPr>
-          <a:lstStyle/>
-          <a:p>
-            <a:pPr algn="l">
-              <a:lnSpc>
-                <a:spcPct val="100000"/>
-              </a:lnSpc>
-            </a:pPr>
-            <a:r>
-              <a:rPr sz="900" b="1" i="0" spc="90">
-                <a:solidFill>
-                  <a:srgbClr val="1C565C"/>
-                </a:solidFill>
-                <a:latin typeface="Calibri"/>
-              </a:rPr>
-              <a:t>MIZUHO · NORIMAKI</a:t>
-            </a:r>
-          </a:p>
-        </p:txBody>
-      </p:sp>
-      <p:sp>
-        <p:nvSpPr>
-          <p:cNvPr id="8" name="TextBox 7"/>
-          <p:cNvSpPr txBox="1"/>
-          <p:nvPr/>
-        </p:nvSpPr>
-        <p:spPr>
-          <a:xfrm>
-            <a:off x="365760" y="1298448"/>
-            <a:ext cx="4846320" cy="1005840"/>
-          </a:xfrm>
-          <a:prstGeom prst="rect">
-            <a:avLst/>
-          </a:prstGeom>
-          <a:noFill/>
-        </p:spPr>
-        <p:txBody>
-          <a:bodyPr wrap="square" lIns="0" rIns="0" tIns="0" bIns="0" anchor="t">
-            <a:spAutoFit/>
-          </a:bodyPr>
-          <a:lstStyle/>
-          <a:p>
-            <a:pPr algn="l">
-              <a:lnSpc>
-                <a:spcPct val="110000"/>
-              </a:lnSpc>
-            </a:pPr>
-            <a:r>
-              <a:rPr sz="2700" b="1" i="0">
-                <a:solidFill>
-                  <a:srgbClr val="14241F"/>
-                </a:solidFill>
-                <a:latin typeface="Cambria"/>
-              </a:rPr>
-              <a:t>Thai-Nichi</a:t>
-            </a:r>
-          </a:p>
-          <a:p>
-            <a:pPr algn="l">
-              <a:lnSpc>
-                <a:spcPct val="110000"/>
-              </a:lnSpc>
-            </a:pPr>
-            <a:r>
-              <a:rPr sz="2700" b="1" i="0">
-                <a:solidFill>
-                  <a:srgbClr val="14241F"/>
-                </a:solidFill>
-                <a:latin typeface="Cambria"/>
-              </a:rPr>
-              <a:t>Industries Co., Ltd.</a:t>
-            </a:r>
-          </a:p>
-        </p:txBody>
-      </p:sp>
-      <p:sp>
-        <p:nvSpPr>
-          <p:cNvPr id="9" name="Rectangle 8"/>
-          <p:cNvSpPr/>
-          <p:nvPr/>
-        </p:nvSpPr>
-        <p:spPr>
-          <a:xfrm>
-            <a:off x="365760" y="2468880"/>
-            <a:ext cx="1005840" cy="45720"/>
-          </a:xfrm>
-          <a:prstGeom prst="rect">
-            <a:avLst/>
+          <a:prstGeom prst="roundRect">
+            <a:avLst>
+              <a:gd name="adj" fmla="val 10000"/>
+            </a:avLst>
           </a:prstGeom>
           <a:solidFill>
-            <a:srgbClr val="1D5B63"/>
+            <a:srgbClr val="FFFFFF"/>
           </a:solidFill>
           <a:ln>
             <a:noFill/>
@@ -25864,14 +25968,186 @@
       </p:sp>
       <p:sp>
         <p:nvSpPr>
+          <p:cNvPr id="6" name="TextBox 5"/>
+          <p:cNvSpPr txBox="1"/>
+          <p:nvPr/>
+        </p:nvSpPr>
+        <p:spPr>
+          <a:xfrm>
+            <a:off x="365760" y="475488"/>
+            <a:ext cx="402336" cy="402336"/>
+          </a:xfrm>
+          <a:prstGeom prst="rect">
+            <a:avLst/>
+          </a:prstGeom>
+          <a:noFill/>
+        </p:spPr>
+        <p:txBody>
+          <a:bodyPr wrap="square" lIns="0" rIns="0" tIns="0" bIns="0" anchor="ctr">
+            <a:spAutoFit/>
+          </a:bodyPr>
+          <a:lstStyle/>
+          <a:p>
+            <a:pPr algn="ctr">
+              <a:lnSpc>
+                <a:spcPct val="100000"/>
+              </a:lnSpc>
+            </a:pPr>
+            <a:r>
+              <a:rPr sz="1400" b="1" i="0">
+                <a:solidFill>
+                  <a:srgbClr val="1D5860"/>
+                </a:solidFill>
+                <a:latin typeface="Cambria"/>
+              </a:rPr>
+              <a:t>02</a:t>
+            </a:r>
+          </a:p>
+        </p:txBody>
+      </p:sp>
+      <p:sp>
+        <p:nvSpPr>
+          <p:cNvPr id="7" name="TextBox 6"/>
+          <p:cNvSpPr txBox="1"/>
+          <p:nvPr/>
+        </p:nvSpPr>
+        <p:spPr>
+          <a:xfrm>
+            <a:off x="914400" y="493776"/>
+            <a:ext cx="4023360" cy="182880"/>
+          </a:xfrm>
+          <a:prstGeom prst="rect">
+            <a:avLst/>
+          </a:prstGeom>
+          <a:noFill/>
+        </p:spPr>
+        <p:txBody>
+          <a:bodyPr wrap="square" lIns="0" rIns="0" tIns="0" bIns="0" anchor="t">
+            <a:spAutoFit/>
+          </a:bodyPr>
+          <a:lstStyle/>
+          <a:p>
+            <a:pPr algn="l">
+              <a:lnSpc>
+                <a:spcPct val="100000"/>
+              </a:lnSpc>
+            </a:pPr>
+            <a:r>
+              <a:rPr sz="700" b="1" i="0" spc="90">
+                <a:solidFill>
+                  <a:srgbClr val="BBCED0"/>
+                </a:solidFill>
+                <a:latin typeface="Calibri"/>
+              </a:rPr>
+              <a:t>ПОСТАЧАЛЬНИК</a:t>
+            </a:r>
+          </a:p>
+        </p:txBody>
+      </p:sp>
+      <p:sp>
+        <p:nvSpPr>
+          <p:cNvPr id="8" name="TextBox 7"/>
+          <p:cNvSpPr txBox="1"/>
+          <p:nvPr/>
+        </p:nvSpPr>
+        <p:spPr>
+          <a:xfrm>
+            <a:off x="914400" y="676656"/>
+            <a:ext cx="4023360" cy="201168"/>
+          </a:xfrm>
+          <a:prstGeom prst="rect">
+            <a:avLst/>
+          </a:prstGeom>
+          <a:noFill/>
+        </p:spPr>
+        <p:txBody>
+          <a:bodyPr wrap="square" lIns="0" rIns="0" tIns="0" bIns="0" anchor="t">
+            <a:spAutoFit/>
+          </a:bodyPr>
+          <a:lstStyle/>
+          <a:p>
+            <a:pPr algn="l">
+              <a:lnSpc>
+                <a:spcPct val="100000"/>
+              </a:lnSpc>
+            </a:pPr>
+            <a:r>
+              <a:rPr sz="900" b="1" i="0" spc="90">
+                <a:solidFill>
+                  <a:srgbClr val="FFFFFF"/>
+                </a:solidFill>
+                <a:latin typeface="Calibri"/>
+              </a:rPr>
+              <a:t>MIZUHO · NORIMAKI</a:t>
+            </a:r>
+          </a:p>
+        </p:txBody>
+      </p:sp>
+      <p:sp>
+        <p:nvSpPr>
+          <p:cNvPr id="9" name="TextBox 8"/>
+          <p:cNvSpPr txBox="1"/>
+          <p:nvPr/>
+        </p:nvSpPr>
+        <p:spPr>
+          <a:xfrm>
+            <a:off x="365760" y="914400"/>
+            <a:ext cx="4663440" cy="804672"/>
+          </a:xfrm>
+          <a:prstGeom prst="rect">
+            <a:avLst/>
+          </a:prstGeom>
+          <a:noFill/>
+        </p:spPr>
+        <p:txBody>
+          <a:bodyPr wrap="square" lIns="0" rIns="0" tIns="0" bIns="0" anchor="t">
+            <a:spAutoFit/>
+          </a:bodyPr>
+          <a:lstStyle/>
+          <a:p>
+            <a:pPr algn="l">
+              <a:lnSpc>
+                <a:spcPct val="106000"/>
+              </a:lnSpc>
+            </a:pPr>
+            <a:r>
+              <a:rPr sz="2600" b="1" i="0">
+                <a:solidFill>
+                  <a:srgbClr val="FFFFFF"/>
+                </a:solidFill>
+                <a:latin typeface="Cambria"/>
+              </a:rPr>
+              <a:t>Thai-Nichi</a:t>
+            </a:r>
+          </a:p>
+          <a:p>
+            <a:pPr algn="l">
+              <a:lnSpc>
+                <a:spcPct val="106000"/>
+              </a:lnSpc>
+            </a:pPr>
+            <a:r>
+              <a:rPr sz="2600" b="1" i="0">
+                <a:solidFill>
+                  <a:srgbClr val="FFFFFF"/>
+                </a:solidFill>
+                <a:latin typeface="Cambria"/>
+              </a:rPr>
+              <a:t>Industries Co., Ltd.</a:t>
+            </a:r>
+          </a:p>
+        </p:txBody>
+      </p:sp>
+      <p:sp>
+        <p:nvSpPr>
           <p:cNvPr id="10" name="TextBox 9"/>
           <p:cNvSpPr txBox="1"/>
           <p:nvPr/>
         </p:nvSpPr>
         <p:spPr>
           <a:xfrm>
-            <a:off x="365760" y="2688336"/>
-            <a:ext cx="4709160" cy="1005840"/>
+            <a:off x="365760" y="1901952"/>
+            <a:ext cx="2743200" cy="146304"/>
           </a:xfrm>
           <a:prstGeom prst="rect">
             <a:avLst/>
@@ -25886,52 +26162,13 @@
           <a:p>
             <a:pPr algn="l">
               <a:lnSpc>
-                <a:spcPct val="134000"/>
-              </a:lnSpc>
-            </a:pPr>
-            <a:r>
-              <a:rPr sz="1050" b="0" i="0">
-                <a:solidFill>
-                  <a:srgbClr val="44524C"/>
-                </a:solidFill>
-                <a:latin typeface="Calibri"/>
-              </a:rPr>
-              <a:t>Тайсько-японський виробник рисових снеків із найширшим прайсом серед усіх постачальників — 28 позицій. Одна фабрика закриває і крекери, і чипси, і протеїнові снеки.</a:t>
-            </a:r>
-          </a:p>
-        </p:txBody>
-      </p:sp>
-      <p:sp>
-        <p:nvSpPr>
-          <p:cNvPr id="11" name="TextBox 10"/>
-          <p:cNvSpPr txBox="1"/>
-          <p:nvPr/>
-        </p:nvSpPr>
-        <p:spPr>
-          <a:xfrm>
-            <a:off x="365760" y="3584448"/>
-            <a:ext cx="2743200" cy="146304"/>
-          </a:xfrm>
-          <a:prstGeom prst="rect">
-            <a:avLst/>
-          </a:prstGeom>
-          <a:noFill/>
-        </p:spPr>
-        <p:txBody>
-          <a:bodyPr wrap="square" lIns="0" rIns="0" tIns="0" bIns="0" anchor="t">
-            <a:spAutoFit/>
-          </a:bodyPr>
-          <a:lstStyle/>
-          <a:p>
-            <a:pPr algn="l">
-              <a:lnSpc>
                 <a:spcPct val="100000"/>
               </a:lnSpc>
             </a:pPr>
             <a:r>
               <a:rPr sz="650" b="1" i="0" spc="90">
                 <a:solidFill>
-                  <a:srgbClr val="8A938D"/>
+                  <a:srgbClr val="C0D1D3"/>
                 </a:solidFill>
                 <a:latin typeface="Calibri"/>
               </a:rPr>
@@ -25942,13 +26179,13 @@
       </p:sp>
       <p:sp>
         <p:nvSpPr>
-          <p:cNvPr id="12" name="Rounded Rectangle 11"/>
+          <p:cNvPr id="11" name="Rounded Rectangle 10"/>
           <p:cNvSpPr/>
           <p:nvPr/>
         </p:nvSpPr>
         <p:spPr>
           <a:xfrm>
-            <a:off x="411480" y="3895344"/>
+            <a:off x="411480" y="2212848"/>
             <a:ext cx="128016" cy="128016"/>
           </a:xfrm>
           <a:prstGeom prst="roundRect">
@@ -25957,7 +26194,7 @@
             </a:avLst>
           </a:prstGeom>
           <a:solidFill>
-            <a:srgbClr val="1D5B63"/>
+            <a:srgbClr val="FFFFFF"/>
           </a:solidFill>
           <a:ln>
             <a:noFill/>
@@ -25986,20 +26223,20 @@
       </p:sp>
       <p:sp>
         <p:nvSpPr>
-          <p:cNvPr id="13" name="Rectangle 12"/>
+          <p:cNvPr id="12" name="Rectangle 11"/>
           <p:cNvSpPr/>
           <p:nvPr/>
         </p:nvSpPr>
         <p:spPr>
           <a:xfrm>
-            <a:off x="676656" y="3945635"/>
+            <a:off x="676656" y="2263140"/>
             <a:ext cx="91440" cy="27432"/>
           </a:xfrm>
           <a:prstGeom prst="rect">
             <a:avLst/>
           </a:prstGeom>
           <a:solidFill>
-            <a:srgbClr val="A2B9B9"/>
+            <a:srgbClr val="83A5A9"/>
           </a:solidFill>
           <a:ln>
             <a:noFill/>
@@ -26028,20 +26265,20 @@
       </p:sp>
       <p:sp>
         <p:nvSpPr>
-          <p:cNvPr id="14" name="Rectangle 13"/>
+          <p:cNvPr id="13" name="Rectangle 12"/>
           <p:cNvSpPr/>
           <p:nvPr/>
         </p:nvSpPr>
         <p:spPr>
           <a:xfrm>
-            <a:off x="859536" y="3945635"/>
+            <a:off x="859536" y="2263140"/>
             <a:ext cx="91440" cy="27432"/>
           </a:xfrm>
           <a:prstGeom prst="rect">
             <a:avLst/>
           </a:prstGeom>
           <a:solidFill>
-            <a:srgbClr val="A2B9B9"/>
+            <a:srgbClr val="83A5A9"/>
           </a:solidFill>
           <a:ln>
             <a:noFill/>
@@ -26070,20 +26307,20 @@
       </p:sp>
       <p:sp>
         <p:nvSpPr>
-          <p:cNvPr id="15" name="Rectangle 14"/>
+          <p:cNvPr id="14" name="Rectangle 13"/>
           <p:cNvSpPr/>
           <p:nvPr/>
         </p:nvSpPr>
         <p:spPr>
           <a:xfrm>
-            <a:off x="1042416" y="3945635"/>
+            <a:off x="1042416" y="2263140"/>
             <a:ext cx="91440" cy="27432"/>
           </a:xfrm>
           <a:prstGeom prst="rect">
             <a:avLst/>
           </a:prstGeom>
           <a:solidFill>
-            <a:srgbClr val="A2B9B9"/>
+            <a:srgbClr val="83A5A9"/>
           </a:solidFill>
           <a:ln>
             <a:noFill/>
@@ -26112,20 +26349,20 @@
       </p:sp>
       <p:sp>
         <p:nvSpPr>
-          <p:cNvPr id="16" name="Rectangle 15"/>
+          <p:cNvPr id="15" name="Rectangle 14"/>
           <p:cNvSpPr/>
           <p:nvPr/>
         </p:nvSpPr>
         <p:spPr>
           <a:xfrm>
-            <a:off x="1225296" y="3945635"/>
+            <a:off x="1225296" y="2263140"/>
             <a:ext cx="91440" cy="27432"/>
           </a:xfrm>
           <a:prstGeom prst="rect">
             <a:avLst/>
           </a:prstGeom>
           <a:solidFill>
-            <a:srgbClr val="A2B9B9"/>
+            <a:srgbClr val="83A5A9"/>
           </a:solidFill>
           <a:ln>
             <a:noFill/>
@@ -26154,20 +26391,20 @@
       </p:sp>
       <p:sp>
         <p:nvSpPr>
-          <p:cNvPr id="17" name="Rectangle 16"/>
+          <p:cNvPr id="16" name="Rectangle 15"/>
           <p:cNvSpPr/>
           <p:nvPr/>
         </p:nvSpPr>
         <p:spPr>
           <a:xfrm>
-            <a:off x="1408176" y="3945635"/>
+            <a:off x="1408176" y="2263140"/>
             <a:ext cx="91440" cy="27432"/>
           </a:xfrm>
           <a:prstGeom prst="rect">
             <a:avLst/>
           </a:prstGeom>
           <a:solidFill>
-            <a:srgbClr val="A2B9B9"/>
+            <a:srgbClr val="83A5A9"/>
           </a:solidFill>
           <a:ln>
             <a:noFill/>
@@ -26196,20 +26433,20 @@
       </p:sp>
       <p:sp>
         <p:nvSpPr>
-          <p:cNvPr id="18" name="Rectangle 17"/>
+          <p:cNvPr id="17" name="Rectangle 16"/>
           <p:cNvSpPr/>
           <p:nvPr/>
         </p:nvSpPr>
         <p:spPr>
           <a:xfrm>
-            <a:off x="1591056" y="3945635"/>
+            <a:off x="1591056" y="2263140"/>
             <a:ext cx="91440" cy="27432"/>
           </a:xfrm>
           <a:prstGeom prst="rect">
             <a:avLst/>
           </a:prstGeom>
           <a:solidFill>
-            <a:srgbClr val="A2B9B9"/>
+            <a:srgbClr val="83A5A9"/>
           </a:solidFill>
           <a:ln>
             <a:noFill/>
@@ -26238,20 +26475,20 @@
       </p:sp>
       <p:sp>
         <p:nvSpPr>
-          <p:cNvPr id="19" name="Rectangle 18"/>
+          <p:cNvPr id="18" name="Rectangle 17"/>
           <p:cNvSpPr/>
           <p:nvPr/>
         </p:nvSpPr>
         <p:spPr>
           <a:xfrm>
-            <a:off x="1773936" y="3945635"/>
+            <a:off x="1773936" y="2263140"/>
             <a:ext cx="91440" cy="27432"/>
           </a:xfrm>
           <a:prstGeom prst="rect">
             <a:avLst/>
           </a:prstGeom>
           <a:solidFill>
-            <a:srgbClr val="A2B9B9"/>
+            <a:srgbClr val="83A5A9"/>
           </a:solidFill>
           <a:ln>
             <a:noFill/>
@@ -26280,20 +26517,20 @@
       </p:sp>
       <p:sp>
         <p:nvSpPr>
-          <p:cNvPr id="20" name="Rectangle 19"/>
+          <p:cNvPr id="19" name="Rectangle 18"/>
           <p:cNvSpPr/>
           <p:nvPr/>
         </p:nvSpPr>
         <p:spPr>
           <a:xfrm>
-            <a:off x="1956816" y="3945635"/>
+            <a:off x="1956816" y="2263140"/>
             <a:ext cx="91440" cy="27432"/>
           </a:xfrm>
           <a:prstGeom prst="rect">
             <a:avLst/>
           </a:prstGeom>
           <a:solidFill>
-            <a:srgbClr val="A2B9B9"/>
+            <a:srgbClr val="83A5A9"/>
           </a:solidFill>
           <a:ln>
             <a:noFill/>
@@ -26322,20 +26559,20 @@
       </p:sp>
       <p:sp>
         <p:nvSpPr>
-          <p:cNvPr id="21" name="Rectangle 20"/>
+          <p:cNvPr id="20" name="Rectangle 19"/>
           <p:cNvSpPr/>
           <p:nvPr/>
         </p:nvSpPr>
         <p:spPr>
           <a:xfrm>
-            <a:off x="2139696" y="3945635"/>
+            <a:off x="2139696" y="2263140"/>
             <a:ext cx="91440" cy="27432"/>
           </a:xfrm>
           <a:prstGeom prst="rect">
             <a:avLst/>
           </a:prstGeom>
           <a:solidFill>
-            <a:srgbClr val="A2B9B9"/>
+            <a:srgbClr val="83A5A9"/>
           </a:solidFill>
           <a:ln>
             <a:noFill/>
@@ -26364,20 +26601,20 @@
       </p:sp>
       <p:sp>
         <p:nvSpPr>
-          <p:cNvPr id="22" name="Rectangle 21"/>
+          <p:cNvPr id="21" name="Rectangle 20"/>
           <p:cNvSpPr/>
           <p:nvPr/>
         </p:nvSpPr>
         <p:spPr>
           <a:xfrm>
-            <a:off x="2322576" y="3945635"/>
+            <a:off x="2322576" y="2263140"/>
             <a:ext cx="91440" cy="27432"/>
           </a:xfrm>
           <a:prstGeom prst="rect">
             <a:avLst/>
           </a:prstGeom>
           <a:solidFill>
-            <a:srgbClr val="A2B9B9"/>
+            <a:srgbClr val="83A5A9"/>
           </a:solidFill>
           <a:ln>
             <a:noFill/>
@@ -26406,20 +26643,20 @@
       </p:sp>
       <p:sp>
         <p:nvSpPr>
-          <p:cNvPr id="23" name="Rectangle 22"/>
+          <p:cNvPr id="22" name="Rectangle 21"/>
           <p:cNvSpPr/>
           <p:nvPr/>
         </p:nvSpPr>
         <p:spPr>
           <a:xfrm>
-            <a:off x="2505456" y="3945635"/>
+            <a:off x="2505456" y="2263140"/>
             <a:ext cx="91440" cy="27432"/>
           </a:xfrm>
           <a:prstGeom prst="rect">
             <a:avLst/>
           </a:prstGeom>
           <a:solidFill>
-            <a:srgbClr val="A2B9B9"/>
+            <a:srgbClr val="83A5A9"/>
           </a:solidFill>
           <a:ln>
             <a:noFill/>
@@ -26448,13 +26685,13 @@
       </p:sp>
       <p:sp>
         <p:nvSpPr>
-          <p:cNvPr id="24" name="Rounded Rectangle 23"/>
+          <p:cNvPr id="23" name="Rounded Rectangle 22"/>
           <p:cNvSpPr/>
           <p:nvPr/>
         </p:nvSpPr>
         <p:spPr>
           <a:xfrm>
-            <a:off x="2670048" y="3895344"/>
+            <a:off x="2670048" y="2212848"/>
             <a:ext cx="128016" cy="128016"/>
           </a:xfrm>
           <a:prstGeom prst="roundRect">
@@ -26463,7 +26700,7 @@
             </a:avLst>
           </a:prstGeom>
           <a:solidFill>
-            <a:srgbClr val="14241F"/>
+            <a:srgbClr val="FFFFFF"/>
           </a:solidFill>
           <a:ln>
             <a:noFill/>
@@ -26492,14 +26729,53 @@
       </p:sp>
       <p:sp>
         <p:nvSpPr>
+          <p:cNvPr id="24" name="TextBox 23"/>
+          <p:cNvSpPr txBox="1"/>
+          <p:nvPr/>
+        </p:nvSpPr>
+        <p:spPr>
+          <a:xfrm>
+            <a:off x="365760" y="2432304"/>
+            <a:ext cx="1371600" cy="182880"/>
+          </a:xfrm>
+          <a:prstGeom prst="rect">
+            <a:avLst/>
+          </a:prstGeom>
+          <a:noFill/>
+        </p:spPr>
+        <p:txBody>
+          <a:bodyPr wrap="square" lIns="0" rIns="0" tIns="0" bIns="0" anchor="t">
+            <a:spAutoFit/>
+          </a:bodyPr>
+          <a:lstStyle/>
+          <a:p>
+            <a:pPr algn="l">
+              <a:lnSpc>
+                <a:spcPct val="100000"/>
+              </a:lnSpc>
+            </a:pPr>
+            <a:r>
+              <a:rPr sz="800" b="1" i="0">
+                <a:solidFill>
+                  <a:srgbClr val="FFFFFF"/>
+                </a:solidFill>
+                <a:latin typeface="Calibri"/>
+              </a:rPr>
+              <a:t>FOB Bangkok</a:t>
+            </a:r>
+          </a:p>
+        </p:txBody>
+      </p:sp>
+      <p:sp>
+        <p:nvSpPr>
           <p:cNvPr id="25" name="TextBox 24"/>
           <p:cNvSpPr txBox="1"/>
           <p:nvPr/>
         </p:nvSpPr>
         <p:spPr>
           <a:xfrm>
-            <a:off x="365760" y="4114800"/>
-            <a:ext cx="1371600" cy="182880"/>
+            <a:off x="1920240" y="2432304"/>
+            <a:ext cx="914400" cy="182880"/>
           </a:xfrm>
           <a:prstGeom prst="rect">
             <a:avLst/>
@@ -26512,7 +26788,7 @@
           </a:bodyPr>
           <a:lstStyle/>
           <a:p>
-            <a:pPr algn="l">
+            <a:pPr algn="r">
               <a:lnSpc>
                 <a:spcPct val="100000"/>
               </a:lnSpc>
@@ -26520,46 +26796,7 @@
             <a:r>
               <a:rPr sz="800" b="1" i="0">
                 <a:solidFill>
-                  <a:srgbClr val="14241F"/>
-                </a:solidFill>
-                <a:latin typeface="Calibri"/>
-              </a:rPr>
-              <a:t>FOB Bangkok</a:t>
-            </a:r>
-          </a:p>
-        </p:txBody>
-      </p:sp>
-      <p:sp>
-        <p:nvSpPr>
-          <p:cNvPr id="26" name="TextBox 25"/>
-          <p:cNvSpPr txBox="1"/>
-          <p:nvPr/>
-        </p:nvSpPr>
-        <p:spPr>
-          <a:xfrm>
-            <a:off x="1920240" y="4114800"/>
-            <a:ext cx="914400" cy="182880"/>
-          </a:xfrm>
-          <a:prstGeom prst="rect">
-            <a:avLst/>
-          </a:prstGeom>
-          <a:noFill/>
-        </p:spPr>
-        <p:txBody>
-          <a:bodyPr wrap="square" lIns="0" rIns="0" tIns="0" bIns="0" anchor="t">
-            <a:spAutoFit/>
-          </a:bodyPr>
-          <a:lstStyle/>
-          <a:p>
-            <a:pPr algn="r">
-              <a:lnSpc>
-                <a:spcPct val="100000"/>
-              </a:lnSpc>
-            </a:pPr>
-            <a:r>
-              <a:rPr sz="800" b="1" i="0">
-                <a:solidFill>
-                  <a:srgbClr val="14241F"/>
+                  <a:srgbClr val="FFFFFF"/>
                 </a:solidFill>
                 <a:latin typeface="Calibri"/>
               </a:rPr>
@@ -26570,18 +26807,18 @@
       </p:sp>
       <p:sp>
         <p:nvSpPr>
-          <p:cNvPr id="27" name="Rounded Rectangle 26"/>
+          <p:cNvPr id="26" name="Rounded Rectangle 25"/>
           <p:cNvSpPr/>
           <p:nvPr/>
         </p:nvSpPr>
         <p:spPr>
           <a:xfrm>
-            <a:off x="3383279" y="3584448"/>
-            <a:ext cx="822960" cy="841248"/>
+            <a:off x="5120640" y="1350359"/>
+            <a:ext cx="1755648" cy="2128529"/>
           </a:xfrm>
           <a:prstGeom prst="roundRect">
             <a:avLst>
-              <a:gd name="adj" fmla="val 8000"/>
+              <a:gd name="adj" fmla="val 6000"/>
             </a:avLst>
           </a:prstGeom>
           <a:solidFill>
@@ -26614,98 +26851,44 @@
           <a:p/>
         </p:txBody>
       </p:sp>
-      <p:sp>
-        <p:nvSpPr>
-          <p:cNvPr id="28" name="TextBox 27"/>
-          <p:cNvSpPr txBox="1"/>
-          <p:nvPr/>
-        </p:nvSpPr>
-        <p:spPr>
-          <a:xfrm>
-            <a:off x="3383279" y="3712463"/>
-            <a:ext cx="822960" cy="292608"/>
-          </a:xfrm>
-          <a:prstGeom prst="rect">
-            <a:avLst/>
-          </a:prstGeom>
-          <a:noFill/>
-        </p:spPr>
-        <p:txBody>
-          <a:bodyPr wrap="square" lIns="0" rIns="0" tIns="0" bIns="0" anchor="t">
-            <a:spAutoFit/>
-          </a:bodyPr>
-          <a:lstStyle/>
-          <a:p>
-            <a:pPr algn="ctr">
-              <a:lnSpc>
-                <a:spcPct val="100000"/>
-              </a:lnSpc>
-            </a:pPr>
-            <a:r>
-              <a:rPr sz="1300" b="1" i="0">
-                <a:solidFill>
-                  <a:srgbClr val="1C565C"/>
-                </a:solidFill>
-                <a:latin typeface="Cambria"/>
-              </a:rPr>
-              <a:t>Таїланд</a:t>
-            </a:r>
-          </a:p>
-        </p:txBody>
-      </p:sp>
-      <p:sp>
-        <p:nvSpPr>
-          <p:cNvPr id="29" name="TextBox 28"/>
-          <p:cNvSpPr txBox="1"/>
-          <p:nvPr/>
-        </p:nvSpPr>
-        <p:spPr>
-          <a:xfrm>
-            <a:off x="3383279" y="4078224"/>
-            <a:ext cx="822960" cy="201168"/>
-          </a:xfrm>
-          <a:prstGeom prst="rect">
-            <a:avLst/>
-          </a:prstGeom>
-          <a:noFill/>
-        </p:spPr>
-        <p:txBody>
-          <a:bodyPr wrap="square" lIns="0" rIns="0" tIns="0" bIns="0" anchor="t">
-            <a:spAutoFit/>
-          </a:bodyPr>
-          <a:lstStyle/>
-          <a:p>
-            <a:pPr algn="ctr">
-              <a:lnSpc>
-                <a:spcPct val="100000"/>
-              </a:lnSpc>
-            </a:pPr>
-            <a:r>
-              <a:rPr sz="650" b="0" i="0">
-                <a:solidFill>
-                  <a:srgbClr val="8A938D"/>
-                </a:solidFill>
-                <a:latin typeface="Calibri"/>
-              </a:rPr>
-              <a:t>Країна</a:t>
-            </a:r>
-          </a:p>
-        </p:txBody>
-      </p:sp>
-      <p:sp>
-        <p:nvSpPr>
-          <p:cNvPr id="30" name="Rounded Rectangle 29"/>
+      <p:pic>
+        <p:nvPicPr>
+          <p:cNvPr id="27" name="Picture 26" descr="tn_original.png"/>
+          <p:cNvPicPr>
+            <a:picLocks noChangeAspect="1"/>
+          </p:cNvPicPr>
+          <p:nvPr/>
+        </p:nvPicPr>
+        <p:blipFill>
+          <a:blip r:embed="rId2"/>
+          <a:stretch>
+            <a:fillRect/>
+          </a:stretch>
+        </p:blipFill>
+        <p:spPr>
+          <a:xfrm>
+            <a:off x="5221224" y="1480441"/>
+            <a:ext cx="1554480" cy="1868365"/>
+          </a:xfrm>
+          <a:prstGeom prst="rect">
+            <a:avLst/>
+          </a:prstGeom>
+        </p:spPr>
+      </p:pic>
+      <p:sp>
+        <p:nvSpPr>
+          <p:cNvPr id="28" name="Rounded Rectangle 27"/>
           <p:cNvSpPr/>
           <p:nvPr/>
         </p:nvSpPr>
         <p:spPr>
           <a:xfrm>
-            <a:off x="4315968" y="3584448"/>
-            <a:ext cx="822960" cy="841248"/>
+            <a:off x="7022592" y="1350359"/>
+            <a:ext cx="1755648" cy="2128529"/>
           </a:xfrm>
           <a:prstGeom prst="roundRect">
             <a:avLst>
-              <a:gd name="adj" fmla="val 8000"/>
+              <a:gd name="adj" fmla="val 6000"/>
             </a:avLst>
           </a:prstGeom>
           <a:solidFill>
@@ -26738,203 +26921,9 @@
           <a:p/>
         </p:txBody>
       </p:sp>
-      <p:sp>
-        <p:nvSpPr>
-          <p:cNvPr id="31" name="TextBox 30"/>
-          <p:cNvSpPr txBox="1"/>
-          <p:nvPr/>
-        </p:nvSpPr>
-        <p:spPr>
-          <a:xfrm>
-            <a:off x="4315968" y="3712463"/>
-            <a:ext cx="822960" cy="292608"/>
-          </a:xfrm>
-          <a:prstGeom prst="rect">
-            <a:avLst/>
-          </a:prstGeom>
-          <a:noFill/>
-        </p:spPr>
-        <p:txBody>
-          <a:bodyPr wrap="square" lIns="0" rIns="0" tIns="0" bIns="0" anchor="t">
-            <a:spAutoFit/>
-          </a:bodyPr>
-          <a:lstStyle/>
-          <a:p>
-            <a:pPr algn="ctr">
-              <a:lnSpc>
-                <a:spcPct val="100000"/>
-              </a:lnSpc>
-            </a:pPr>
-            <a:r>
-              <a:rPr sz="1300" b="1" i="0">
-                <a:solidFill>
-                  <a:srgbClr val="1C565C"/>
-                </a:solidFill>
-                <a:latin typeface="Cambria"/>
-              </a:rPr>
-              <a:t>2</a:t>
-            </a:r>
-          </a:p>
-        </p:txBody>
-      </p:sp>
-      <p:sp>
-        <p:nvSpPr>
-          <p:cNvPr id="32" name="TextBox 31"/>
-          <p:cNvSpPr txBox="1"/>
-          <p:nvPr/>
-        </p:nvSpPr>
-        <p:spPr>
-          <a:xfrm>
-            <a:off x="4315968" y="4078224"/>
-            <a:ext cx="822960" cy="201168"/>
-          </a:xfrm>
-          <a:prstGeom prst="rect">
-            <a:avLst/>
-          </a:prstGeom>
-          <a:noFill/>
-        </p:spPr>
-        <p:txBody>
-          <a:bodyPr wrap="square" lIns="0" rIns="0" tIns="0" bIns="0" anchor="t">
-            <a:spAutoFit/>
-          </a:bodyPr>
-          <a:lstStyle/>
-          <a:p>
-            <a:pPr algn="ctr">
-              <a:lnSpc>
-                <a:spcPct val="100000"/>
-              </a:lnSpc>
-            </a:pPr>
-            <a:r>
-              <a:rPr sz="650" b="0" i="0">
-                <a:solidFill>
-                  <a:srgbClr val="8A938D"/>
-                </a:solidFill>
-                <a:latin typeface="Calibri"/>
-              </a:rPr>
-              <a:t>Позицій із с/в</a:t>
-            </a:r>
-          </a:p>
-        </p:txBody>
-      </p:sp>
-      <p:sp>
-        <p:nvSpPr>
-          <p:cNvPr id="33" name="Rounded Rectangle 32"/>
-          <p:cNvSpPr/>
-          <p:nvPr/>
-        </p:nvSpPr>
-        <p:spPr>
-          <a:xfrm>
-            <a:off x="5440680" y="768096"/>
-            <a:ext cx="1604771" cy="1951430"/>
-          </a:xfrm>
-          <a:prstGeom prst="roundRect">
-            <a:avLst>
-              <a:gd name="adj" fmla="val 6000"/>
-            </a:avLst>
-          </a:prstGeom>
-          <a:solidFill>
-            <a:srgbClr val="FFFFFF"/>
-          </a:solidFill>
-          <a:ln w="9525">
-            <a:solidFill>
-              <a:srgbClr val="E6E1D8"/>
-            </a:solidFill>
-          </a:ln>
-          <a:effectLst/>
-        </p:spPr>
-        <p:style>
-          <a:lnRef idx="1">
-            <a:schemeClr val="accent1"/>
-          </a:lnRef>
-          <a:fillRef idx="3">
-            <a:schemeClr val="accent1"/>
-          </a:fillRef>
-          <a:effectRef idx="2">
-            <a:schemeClr val="accent1"/>
-          </a:effectRef>
-          <a:fontRef idx="minor">
-            <a:schemeClr val="lt1"/>
-          </a:fontRef>
-        </p:style>
-        <p:txBody>
-          <a:bodyPr rtlCol="0" anchor="ctr"/>
-          <a:lstStyle/>
-          <a:p/>
-        </p:txBody>
-      </p:sp>
       <p:pic>
         <p:nvPicPr>
-          <p:cNvPr id="34" name="Picture 33" descr="tn_original.png"/>
-          <p:cNvPicPr>
-            <a:picLocks noChangeAspect="1"/>
-          </p:cNvPicPr>
-          <p:nvPr/>
-        </p:nvPicPr>
-        <p:blipFill>
-          <a:blip r:embed="rId2"/>
-          <a:stretch>
-            <a:fillRect/>
-          </a:stretch>
-        </p:blipFill>
-        <p:spPr>
-          <a:xfrm>
-            <a:off x="5568696" y="933270"/>
-            <a:ext cx="1348739" cy="1621081"/>
-          </a:xfrm>
-          <a:prstGeom prst="rect">
-            <a:avLst/>
-          </a:prstGeom>
-        </p:spPr>
-      </p:pic>
-      <p:sp>
-        <p:nvSpPr>
-          <p:cNvPr id="35" name="Rounded Rectangle 34"/>
-          <p:cNvSpPr/>
-          <p:nvPr/>
-        </p:nvSpPr>
-        <p:spPr>
-          <a:xfrm>
-            <a:off x="7173468" y="768096"/>
-            <a:ext cx="1604771" cy="1951430"/>
-          </a:xfrm>
-          <a:prstGeom prst="roundRect">
-            <a:avLst>
-              <a:gd name="adj" fmla="val 6000"/>
-            </a:avLst>
-          </a:prstGeom>
-          <a:solidFill>
-            <a:srgbClr val="FFFFFF"/>
-          </a:solidFill>
-          <a:ln w="9525">
-            <a:solidFill>
-              <a:srgbClr val="E6E1D8"/>
-            </a:solidFill>
-          </a:ln>
-          <a:effectLst/>
-        </p:spPr>
-        <p:style>
-          <a:lnRef idx="1">
-            <a:schemeClr val="accent1"/>
-          </a:lnRef>
-          <a:fillRef idx="3">
-            <a:schemeClr val="accent1"/>
-          </a:fillRef>
-          <a:effectRef idx="2">
-            <a:schemeClr val="accent1"/>
-          </a:effectRef>
-          <a:fontRef idx="minor">
-            <a:schemeClr val="lt1"/>
-          </a:fontRef>
-        </p:style>
-        <p:txBody>
-          <a:bodyPr rtlCol="0" anchor="ctr"/>
-          <a:lstStyle/>
-          <a:p/>
-        </p:txBody>
-      </p:sp>
-      <p:pic>
-        <p:nvPicPr>
-          <p:cNvPr id="36" name="Picture 35" descr="tn_wasabi.png"/>
+          <p:cNvPr id="29" name="Picture 28" descr="tn_wasabi.png"/>
           <p:cNvPicPr>
             <a:picLocks noChangeAspect="1"/>
           </p:cNvPicPr>
@@ -26948,8 +26937,8 @@
         </p:blipFill>
         <p:spPr>
           <a:xfrm>
-            <a:off x="7301483" y="923544"/>
-            <a:ext cx="1348739" cy="1640534"/>
+            <a:off x="7123176" y="1469231"/>
+            <a:ext cx="1554480" cy="1890785"/>
           </a:xfrm>
           <a:prstGeom prst="rect">
             <a:avLst/>
@@ -26958,194 +26947,131 @@
       </p:pic>
       <p:sp>
         <p:nvSpPr>
-          <p:cNvPr id="37" name="Rounded Rectangle 36"/>
+          <p:cNvPr id="30" name="TextBox 29"/>
+          <p:cNvSpPr txBox="1"/>
+          <p:nvPr/>
+        </p:nvSpPr>
+        <p:spPr>
+          <a:xfrm>
+            <a:off x="5120640" y="3606905"/>
+            <a:ext cx="3657600" cy="182880"/>
+          </a:xfrm>
+          <a:prstGeom prst="rect">
+            <a:avLst/>
+          </a:prstGeom>
+          <a:noFill/>
+        </p:spPr>
+        <p:txBody>
+          <a:bodyPr wrap="square" lIns="0" rIns="0" tIns="0" bIns="0" anchor="t">
+            <a:spAutoFit/>
+          </a:bodyPr>
+          <a:lstStyle/>
+          <a:p>
+            <a:pPr algn="ctr">
+              <a:lnSpc>
+                <a:spcPct val="100000"/>
+              </a:lnSpc>
+            </a:pPr>
+            <a:r>
+              <a:rPr sz="750" b="0" i="0">
+                <a:solidFill>
+                  <a:srgbClr val="8A938D"/>
+                </a:solidFill>
+                <a:latin typeface="Calibri"/>
+              </a:rPr>
+              <a:t>2 позиції із розрахованою собівартістю</a:t>
+            </a:r>
+          </a:p>
+        </p:txBody>
+      </p:sp>
+      <p:sp>
+        <p:nvSpPr>
+          <p:cNvPr id="31" name="TextBox 30"/>
+          <p:cNvSpPr txBox="1"/>
+          <p:nvPr/>
+        </p:nvSpPr>
+        <p:spPr>
+          <a:xfrm>
+            <a:off x="365760" y="2926080"/>
+            <a:ext cx="4617720" cy="822960"/>
+          </a:xfrm>
+          <a:prstGeom prst="rect">
+            <a:avLst/>
+          </a:prstGeom>
+          <a:noFill/>
+        </p:spPr>
+        <p:txBody>
+          <a:bodyPr wrap="square" lIns="0" rIns="0" tIns="0" bIns="0" anchor="t">
+            <a:spAutoFit/>
+          </a:bodyPr>
+          <a:lstStyle/>
+          <a:p>
+            <a:pPr algn="l">
+              <a:lnSpc>
+                <a:spcPct val="134000"/>
+              </a:lnSpc>
+            </a:pPr>
+            <a:r>
+              <a:rPr sz="1050" b="0" i="0">
+                <a:solidFill>
+                  <a:srgbClr val="44524C"/>
+                </a:solidFill>
+                <a:latin typeface="Calibri"/>
+              </a:rPr>
+              <a:t>Тайсько-японський виробник рисових снеків із найширшим прайсом серед усіх постачальників — 28 позицій. Одна фабрика закриває і крекери, і чипси, і протеїнові снеки.</a:t>
+            </a:r>
+          </a:p>
+        </p:txBody>
+      </p:sp>
+      <p:sp>
+        <p:nvSpPr>
+          <p:cNvPr id="32" name="TextBox 31"/>
+          <p:cNvSpPr txBox="1"/>
+          <p:nvPr/>
+        </p:nvSpPr>
+        <p:spPr>
+          <a:xfrm>
+            <a:off x="365760" y="3803904"/>
+            <a:ext cx="4617720" cy="146304"/>
+          </a:xfrm>
+          <a:prstGeom prst="rect">
+            <a:avLst/>
+          </a:prstGeom>
+          <a:noFill/>
+        </p:spPr>
+        <p:txBody>
+          <a:bodyPr wrap="square" lIns="0" rIns="0" tIns="0" bIns="0" anchor="t">
+            <a:spAutoFit/>
+          </a:bodyPr>
+          <a:lstStyle/>
+          <a:p>
+            <a:pPr algn="l">
+              <a:lnSpc>
+                <a:spcPct val="100000"/>
+              </a:lnSpc>
+            </a:pPr>
+            <a:r>
+              <a:rPr sz="700" b="1" i="0" spc="90">
+                <a:solidFill>
+                  <a:srgbClr val="1C565C"/>
+                </a:solidFill>
+                <a:latin typeface="Calibri"/>
+              </a:rPr>
+              <a:t>ВИРОБНИЦТВО І УМОВИ ПОСТАВКИ</a:t>
+            </a:r>
+          </a:p>
+        </p:txBody>
+      </p:sp>
+      <p:sp>
+        <p:nvSpPr>
+          <p:cNvPr id="33" name="Rectangle 32"/>
           <p:cNvSpPr/>
           <p:nvPr/>
         </p:nvSpPr>
         <p:spPr>
           <a:xfrm>
-            <a:off x="5440680" y="2847542"/>
-            <a:ext cx="3337559" cy="1870761"/>
-          </a:xfrm>
-          <a:prstGeom prst="roundRect">
-            <a:avLst>
-              <a:gd name="adj" fmla="val 6000"/>
-            </a:avLst>
-          </a:prstGeom>
-          <a:solidFill>
-            <a:srgbClr val="1D5B63"/>
-          </a:solidFill>
-          <a:ln>
-            <a:noFill/>
-          </a:ln>
-          <a:effectLst/>
-        </p:spPr>
-        <p:style>
-          <a:lnRef idx="1">
-            <a:schemeClr val="accent1"/>
-          </a:lnRef>
-          <a:fillRef idx="3">
-            <a:schemeClr val="accent1"/>
-          </a:fillRef>
-          <a:effectRef idx="2">
-            <a:schemeClr val="accent1"/>
-          </a:effectRef>
-          <a:fontRef idx="minor">
-            <a:schemeClr val="lt1"/>
-          </a:fontRef>
-        </p:style>
-        <p:txBody>
-          <a:bodyPr rtlCol="0" anchor="ctr"/>
-          <a:lstStyle/>
-          <a:p/>
-        </p:txBody>
-      </p:sp>
-      <p:sp>
-        <p:nvSpPr>
-          <p:cNvPr id="38" name="TextBox 37"/>
-          <p:cNvSpPr txBox="1"/>
-          <p:nvPr/>
-        </p:nvSpPr>
-        <p:spPr>
-          <a:xfrm>
-            <a:off x="5696712" y="3066998"/>
-            <a:ext cx="2825495" cy="548640"/>
-          </a:xfrm>
-          <a:prstGeom prst="rect">
-            <a:avLst/>
-          </a:prstGeom>
-          <a:noFill/>
-        </p:spPr>
-        <p:txBody>
-          <a:bodyPr wrap="square" lIns="0" rIns="0" tIns="0" bIns="0" anchor="t">
-            <a:spAutoFit/>
-          </a:bodyPr>
-          <a:lstStyle/>
-          <a:p>
-            <a:pPr algn="l">
-              <a:lnSpc>
-                <a:spcPct val="106000"/>
-              </a:lnSpc>
-            </a:pPr>
-            <a:r>
-              <a:rPr sz="2200" b="1" i="0">
-                <a:solidFill>
-                  <a:srgbClr val="FFFFFF"/>
-                </a:solidFill>
-                <a:latin typeface="Cambria"/>
-              </a:rPr>
-              <a:t>THAI</a:t>
-            </a:r>
-          </a:p>
-          <a:p>
-            <a:pPr algn="l">
-              <a:lnSpc>
-                <a:spcPct val="106000"/>
-              </a:lnSpc>
-            </a:pPr>
-            <a:r>
-              <a:rPr sz="2200" b="1" i="0">
-                <a:solidFill>
-                  <a:srgbClr val="FFFFFF"/>
-                </a:solidFill>
-                <a:latin typeface="Cambria"/>
-              </a:rPr>
-              <a:t>NICHI</a:t>
-            </a:r>
-          </a:p>
-        </p:txBody>
-      </p:sp>
-      <p:sp>
-        <p:nvSpPr>
-          <p:cNvPr id="39" name="Rectangle 38"/>
-          <p:cNvSpPr/>
-          <p:nvPr/>
-        </p:nvSpPr>
-        <p:spPr>
-          <a:xfrm>
-            <a:off x="5696712" y="4187952"/>
-            <a:ext cx="548640" cy="32004"/>
-          </a:xfrm>
-          <a:prstGeom prst="rect">
-            <a:avLst/>
-          </a:prstGeom>
-          <a:solidFill>
-            <a:srgbClr val="FFFFFF"/>
-          </a:solidFill>
-          <a:ln>
-            <a:noFill/>
-          </a:ln>
-          <a:effectLst/>
-        </p:spPr>
-        <p:style>
-          <a:lnRef idx="1">
-            <a:schemeClr val="accent1"/>
-          </a:lnRef>
-          <a:fillRef idx="3">
-            <a:schemeClr val="accent1"/>
-          </a:fillRef>
-          <a:effectRef idx="2">
-            <a:schemeClr val="accent1"/>
-          </a:effectRef>
-          <a:fontRef idx="minor">
-            <a:schemeClr val="lt1"/>
-          </a:fontRef>
-        </p:style>
-        <p:txBody>
-          <a:bodyPr rtlCol="0" anchor="ctr"/>
-          <a:lstStyle/>
-          <a:p/>
-        </p:txBody>
-      </p:sp>
-      <p:sp>
-        <p:nvSpPr>
-          <p:cNvPr id="40" name="TextBox 39"/>
-          <p:cNvSpPr txBox="1"/>
-          <p:nvPr/>
-        </p:nvSpPr>
-        <p:spPr>
-          <a:xfrm>
-            <a:off x="5696712" y="4315968"/>
-            <a:ext cx="2825495" cy="219456"/>
-          </a:xfrm>
-          <a:prstGeom prst="rect">
-            <a:avLst/>
-          </a:prstGeom>
-          <a:noFill/>
-        </p:spPr>
-        <p:txBody>
-          <a:bodyPr wrap="square" lIns="0" rIns="0" tIns="0" bIns="0" anchor="t">
-            <a:spAutoFit/>
-          </a:bodyPr>
-          <a:lstStyle/>
-          <a:p>
-            <a:pPr algn="l">
-              <a:lnSpc>
-                <a:spcPct val="100000"/>
-              </a:lnSpc>
-            </a:pPr>
-            <a:r>
-              <a:rPr sz="850" b="0" i="0">
-                <a:solidFill>
-                  <a:srgbClr val="DDE6E8"/>
-                </a:solidFill>
-                <a:latin typeface="Calibri"/>
-              </a:rPr>
-              <a:t>Виробництво · Таїланд</a:t>
-            </a:r>
-          </a:p>
-        </p:txBody>
-      </p:sp>
-      <p:sp>
-        <p:nvSpPr>
-          <p:cNvPr id="41" name="Rectangle 40"/>
-          <p:cNvSpPr/>
-          <p:nvPr/>
-        </p:nvSpPr>
-        <p:spPr>
-          <a:xfrm>
-            <a:off x="365760" y="4809744"/>
-            <a:ext cx="8412480" cy="9144"/>
+            <a:off x="365760" y="4023360"/>
+            <a:ext cx="2194560" cy="9144"/>
           </a:xfrm>
           <a:prstGeom prst="rect">
             <a:avLst/>
@@ -27180,7 +27106,487 @@
       </p:sp>
       <p:sp>
         <p:nvSpPr>
-          <p:cNvPr id="42" name="TextBox 41"/>
+          <p:cNvPr id="34" name="TextBox 33"/>
+          <p:cNvSpPr txBox="1"/>
+          <p:nvPr/>
+        </p:nvSpPr>
+        <p:spPr>
+          <a:xfrm>
+            <a:off x="365760" y="4078224"/>
+            <a:ext cx="2194560" cy="146304"/>
+          </a:xfrm>
+          <a:prstGeom prst="rect">
+            <a:avLst/>
+          </a:prstGeom>
+          <a:noFill/>
+        </p:spPr>
+        <p:txBody>
+          <a:bodyPr wrap="square" lIns="0" rIns="0" tIns="0" bIns="0" anchor="t">
+            <a:spAutoFit/>
+          </a:bodyPr>
+          <a:lstStyle/>
+          <a:p>
+            <a:pPr algn="l">
+              <a:lnSpc>
+                <a:spcPct val="100000"/>
+              </a:lnSpc>
+            </a:pPr>
+            <a:r>
+              <a:rPr sz="650" b="0" i="0">
+                <a:solidFill>
+                  <a:srgbClr val="8A938D"/>
+                </a:solidFill>
+                <a:latin typeface="Calibri"/>
+              </a:rPr>
+              <a:t>Фасовка</a:t>
+            </a:r>
+          </a:p>
+        </p:txBody>
+      </p:sp>
+      <p:sp>
+        <p:nvSpPr>
+          <p:cNvPr id="35" name="TextBox 34"/>
+          <p:cNvSpPr txBox="1"/>
+          <p:nvPr/>
+        </p:nvSpPr>
+        <p:spPr>
+          <a:xfrm>
+            <a:off x="365760" y="4206240"/>
+            <a:ext cx="2194560" cy="182880"/>
+          </a:xfrm>
+          <a:prstGeom prst="rect">
+            <a:avLst/>
+          </a:prstGeom>
+          <a:noFill/>
+        </p:spPr>
+        <p:txBody>
+          <a:bodyPr wrap="square" lIns="0" rIns="0" tIns="0" bIns="0" anchor="t">
+            <a:spAutoFit/>
+          </a:bodyPr>
+          <a:lstStyle/>
+          <a:p>
+            <a:pPr algn="l">
+              <a:lnSpc>
+                <a:spcPct val="100000"/>
+              </a:lnSpc>
+            </a:pPr>
+            <a:r>
+              <a:rPr sz="900" b="1" i="0">
+                <a:solidFill>
+                  <a:srgbClr val="14241F"/>
+                </a:solidFill>
+                <a:latin typeface="Calibri"/>
+              </a:rPr>
+              <a:t>12 – 96 шт / картон</a:t>
+            </a:r>
+          </a:p>
+        </p:txBody>
+      </p:sp>
+      <p:sp>
+        <p:nvSpPr>
+          <p:cNvPr id="36" name="Rectangle 35"/>
+          <p:cNvSpPr/>
+          <p:nvPr/>
+        </p:nvSpPr>
+        <p:spPr>
+          <a:xfrm>
+            <a:off x="2743200" y="4023360"/>
+            <a:ext cx="2194560" cy="9144"/>
+          </a:xfrm>
+          <a:prstGeom prst="rect">
+            <a:avLst/>
+          </a:prstGeom>
+          <a:solidFill>
+            <a:srgbClr val="E6E1D8"/>
+          </a:solidFill>
+          <a:ln>
+            <a:noFill/>
+          </a:ln>
+          <a:effectLst/>
+        </p:spPr>
+        <p:style>
+          <a:lnRef idx="1">
+            <a:schemeClr val="accent1"/>
+          </a:lnRef>
+          <a:fillRef idx="3">
+            <a:schemeClr val="accent1"/>
+          </a:fillRef>
+          <a:effectRef idx="2">
+            <a:schemeClr val="accent1"/>
+          </a:effectRef>
+          <a:fontRef idx="minor">
+            <a:schemeClr val="lt1"/>
+          </a:fontRef>
+        </p:style>
+        <p:txBody>
+          <a:bodyPr rtlCol="0" anchor="ctr"/>
+          <a:lstStyle/>
+          <a:p/>
+        </p:txBody>
+      </p:sp>
+      <p:sp>
+        <p:nvSpPr>
+          <p:cNvPr id="37" name="TextBox 36"/>
+          <p:cNvSpPr txBox="1"/>
+          <p:nvPr/>
+        </p:nvSpPr>
+        <p:spPr>
+          <a:xfrm>
+            <a:off x="2743200" y="4078224"/>
+            <a:ext cx="2194560" cy="146304"/>
+          </a:xfrm>
+          <a:prstGeom prst="rect">
+            <a:avLst/>
+          </a:prstGeom>
+          <a:noFill/>
+        </p:spPr>
+        <p:txBody>
+          <a:bodyPr wrap="square" lIns="0" rIns="0" tIns="0" bIns="0" anchor="t">
+            <a:spAutoFit/>
+          </a:bodyPr>
+          <a:lstStyle/>
+          <a:p>
+            <a:pPr algn="l">
+              <a:lnSpc>
+                <a:spcPct val="100000"/>
+              </a:lnSpc>
+            </a:pPr>
+            <a:r>
+              <a:rPr sz="650" b="0" i="0">
+                <a:solidFill>
+                  <a:srgbClr val="8A938D"/>
+                </a:solidFill>
+                <a:latin typeface="Calibri"/>
+              </a:rPr>
+              <a:t>Термін придатності</a:t>
+            </a:r>
+          </a:p>
+        </p:txBody>
+      </p:sp>
+      <p:sp>
+        <p:nvSpPr>
+          <p:cNvPr id="38" name="TextBox 37"/>
+          <p:cNvSpPr txBox="1"/>
+          <p:nvPr/>
+        </p:nvSpPr>
+        <p:spPr>
+          <a:xfrm>
+            <a:off x="2743200" y="4206240"/>
+            <a:ext cx="2194560" cy="182880"/>
+          </a:xfrm>
+          <a:prstGeom prst="rect">
+            <a:avLst/>
+          </a:prstGeom>
+          <a:noFill/>
+        </p:spPr>
+        <p:txBody>
+          <a:bodyPr wrap="square" lIns="0" rIns="0" tIns="0" bIns="0" anchor="t">
+            <a:spAutoFit/>
+          </a:bodyPr>
+          <a:lstStyle/>
+          <a:p>
+            <a:pPr algn="l">
+              <a:lnSpc>
+                <a:spcPct val="100000"/>
+              </a:lnSpc>
+            </a:pPr>
+            <a:r>
+              <a:rPr sz="900" b="1" i="0">
+                <a:solidFill>
+                  <a:srgbClr val="14241F"/>
+                </a:solidFill>
+                <a:latin typeface="Calibri"/>
+              </a:rPr>
+              <a:t>8 – 12 місяців</a:t>
+            </a:r>
+          </a:p>
+        </p:txBody>
+      </p:sp>
+      <p:sp>
+        <p:nvSpPr>
+          <p:cNvPr id="39" name="Rectangle 38"/>
+          <p:cNvSpPr/>
+          <p:nvPr/>
+        </p:nvSpPr>
+        <p:spPr>
+          <a:xfrm>
+            <a:off x="365760" y="4425696"/>
+            <a:ext cx="2194560" cy="9144"/>
+          </a:xfrm>
+          <a:prstGeom prst="rect">
+            <a:avLst/>
+          </a:prstGeom>
+          <a:solidFill>
+            <a:srgbClr val="E6E1D8"/>
+          </a:solidFill>
+          <a:ln>
+            <a:noFill/>
+          </a:ln>
+          <a:effectLst/>
+        </p:spPr>
+        <p:style>
+          <a:lnRef idx="1">
+            <a:schemeClr val="accent1"/>
+          </a:lnRef>
+          <a:fillRef idx="3">
+            <a:schemeClr val="accent1"/>
+          </a:fillRef>
+          <a:effectRef idx="2">
+            <a:schemeClr val="accent1"/>
+          </a:effectRef>
+          <a:fontRef idx="minor">
+            <a:schemeClr val="lt1"/>
+          </a:fontRef>
+        </p:style>
+        <p:txBody>
+          <a:bodyPr rtlCol="0" anchor="ctr"/>
+          <a:lstStyle/>
+          <a:p/>
+        </p:txBody>
+      </p:sp>
+      <p:sp>
+        <p:nvSpPr>
+          <p:cNvPr id="40" name="TextBox 39"/>
+          <p:cNvSpPr txBox="1"/>
+          <p:nvPr/>
+        </p:nvSpPr>
+        <p:spPr>
+          <a:xfrm>
+            <a:off x="365760" y="4480560"/>
+            <a:ext cx="2194560" cy="146304"/>
+          </a:xfrm>
+          <a:prstGeom prst="rect">
+            <a:avLst/>
+          </a:prstGeom>
+          <a:noFill/>
+        </p:spPr>
+        <p:txBody>
+          <a:bodyPr wrap="square" lIns="0" rIns="0" tIns="0" bIns="0" anchor="t">
+            <a:spAutoFit/>
+          </a:bodyPr>
+          <a:lstStyle/>
+          <a:p>
+            <a:pPr algn="l">
+              <a:lnSpc>
+                <a:spcPct val="100000"/>
+              </a:lnSpc>
+            </a:pPr>
+            <a:r>
+              <a:rPr sz="650" b="0" i="0">
+                <a:solidFill>
+                  <a:srgbClr val="8A938D"/>
+                </a:solidFill>
+                <a:latin typeface="Calibri"/>
+              </a:rPr>
+              <a:t>Місткість 20′</a:t>
+            </a:r>
+          </a:p>
+        </p:txBody>
+      </p:sp>
+      <p:sp>
+        <p:nvSpPr>
+          <p:cNvPr id="41" name="TextBox 40"/>
+          <p:cNvSpPr txBox="1"/>
+          <p:nvPr/>
+        </p:nvSpPr>
+        <p:spPr>
+          <a:xfrm>
+            <a:off x="365760" y="4608576"/>
+            <a:ext cx="2194560" cy="182880"/>
+          </a:xfrm>
+          <a:prstGeom prst="rect">
+            <a:avLst/>
+          </a:prstGeom>
+          <a:noFill/>
+        </p:spPr>
+        <p:txBody>
+          <a:bodyPr wrap="square" lIns="0" rIns="0" tIns="0" bIns="0" anchor="t">
+            <a:spAutoFit/>
+          </a:bodyPr>
+          <a:lstStyle/>
+          <a:p>
+            <a:pPr algn="l">
+              <a:lnSpc>
+                <a:spcPct val="100000"/>
+              </a:lnSpc>
+            </a:pPr>
+            <a:r>
+              <a:rPr sz="900" b="1" i="0">
+                <a:solidFill>
+                  <a:srgbClr val="14241F"/>
+                </a:solidFill>
+                <a:latin typeface="Calibri"/>
+              </a:rPr>
+              <a:t>1 013 картонів</a:t>
+            </a:r>
+          </a:p>
+        </p:txBody>
+      </p:sp>
+      <p:sp>
+        <p:nvSpPr>
+          <p:cNvPr id="42" name="Rectangle 41"/>
+          <p:cNvSpPr/>
+          <p:nvPr/>
+        </p:nvSpPr>
+        <p:spPr>
+          <a:xfrm>
+            <a:off x="2743200" y="4425696"/>
+            <a:ext cx="2194560" cy="9144"/>
+          </a:xfrm>
+          <a:prstGeom prst="rect">
+            <a:avLst/>
+          </a:prstGeom>
+          <a:solidFill>
+            <a:srgbClr val="E6E1D8"/>
+          </a:solidFill>
+          <a:ln>
+            <a:noFill/>
+          </a:ln>
+          <a:effectLst/>
+        </p:spPr>
+        <p:style>
+          <a:lnRef idx="1">
+            <a:schemeClr val="accent1"/>
+          </a:lnRef>
+          <a:fillRef idx="3">
+            <a:schemeClr val="accent1"/>
+          </a:fillRef>
+          <a:effectRef idx="2">
+            <a:schemeClr val="accent1"/>
+          </a:effectRef>
+          <a:fontRef idx="minor">
+            <a:schemeClr val="lt1"/>
+          </a:fontRef>
+        </p:style>
+        <p:txBody>
+          <a:bodyPr rtlCol="0" anchor="ctr"/>
+          <a:lstStyle/>
+          <a:p/>
+        </p:txBody>
+      </p:sp>
+      <p:sp>
+        <p:nvSpPr>
+          <p:cNvPr id="43" name="TextBox 42"/>
+          <p:cNvSpPr txBox="1"/>
+          <p:nvPr/>
+        </p:nvSpPr>
+        <p:spPr>
+          <a:xfrm>
+            <a:off x="2743200" y="4480560"/>
+            <a:ext cx="2194560" cy="146304"/>
+          </a:xfrm>
+          <a:prstGeom prst="rect">
+            <a:avLst/>
+          </a:prstGeom>
+          <a:noFill/>
+        </p:spPr>
+        <p:txBody>
+          <a:bodyPr wrap="square" lIns="0" rIns="0" tIns="0" bIns="0" anchor="t">
+            <a:spAutoFit/>
+          </a:bodyPr>
+          <a:lstStyle/>
+          <a:p>
+            <a:pPr algn="l">
+              <a:lnSpc>
+                <a:spcPct val="100000"/>
+              </a:lnSpc>
+            </a:pPr>
+            <a:r>
+              <a:rPr sz="650" b="0" i="0">
+                <a:solidFill>
+                  <a:srgbClr val="8A938D"/>
+                </a:solidFill>
+                <a:latin typeface="Calibri"/>
+              </a:rPr>
+              <a:t>MOQ</a:t>
+            </a:r>
+          </a:p>
+        </p:txBody>
+      </p:sp>
+      <p:sp>
+        <p:nvSpPr>
+          <p:cNvPr id="44" name="TextBox 43"/>
+          <p:cNvSpPr txBox="1"/>
+          <p:nvPr/>
+        </p:nvSpPr>
+        <p:spPr>
+          <a:xfrm>
+            <a:off x="2743200" y="4608576"/>
+            <a:ext cx="2194560" cy="182880"/>
+          </a:xfrm>
+          <a:prstGeom prst="rect">
+            <a:avLst/>
+          </a:prstGeom>
+          <a:noFill/>
+        </p:spPr>
+        <p:txBody>
+          <a:bodyPr wrap="square" lIns="0" rIns="0" tIns="0" bIns="0" anchor="t">
+            <a:spAutoFit/>
+          </a:bodyPr>
+          <a:lstStyle/>
+          <a:p>
+            <a:pPr algn="l">
+              <a:lnSpc>
+                <a:spcPct val="100000"/>
+              </a:lnSpc>
+            </a:pPr>
+            <a:r>
+              <a:rPr sz="900" b="1" i="0">
+                <a:solidFill>
+                  <a:srgbClr val="14241F"/>
+                </a:solidFill>
+                <a:latin typeface="Calibri"/>
+              </a:rPr>
+              <a:t>від 300 картонів</a:t>
+            </a:r>
+          </a:p>
+        </p:txBody>
+      </p:sp>
+      <p:sp>
+        <p:nvSpPr>
+          <p:cNvPr id="45" name="Rectangle 44"/>
+          <p:cNvSpPr/>
+          <p:nvPr/>
+        </p:nvSpPr>
+        <p:spPr>
+          <a:xfrm>
+            <a:off x="365760" y="4809744"/>
+            <a:ext cx="8412480" cy="9144"/>
+          </a:xfrm>
+          <a:prstGeom prst="rect">
+            <a:avLst/>
+          </a:prstGeom>
+          <a:solidFill>
+            <a:srgbClr val="E6E1D8"/>
+          </a:solidFill>
+          <a:ln>
+            <a:noFill/>
+          </a:ln>
+          <a:effectLst/>
+        </p:spPr>
+        <p:style>
+          <a:lnRef idx="1">
+            <a:schemeClr val="accent1"/>
+          </a:lnRef>
+          <a:fillRef idx="3">
+            <a:schemeClr val="accent1"/>
+          </a:fillRef>
+          <a:effectRef idx="2">
+            <a:schemeClr val="accent1"/>
+          </a:effectRef>
+          <a:fontRef idx="minor">
+            <a:schemeClr val="lt1"/>
+          </a:fontRef>
+        </p:style>
+        <p:txBody>
+          <a:bodyPr rtlCol="0" anchor="ctr"/>
+          <a:lstStyle/>
+          <a:p/>
+        </p:txBody>
+      </p:sp>
+      <p:sp>
+        <p:nvSpPr>
+          <p:cNvPr id="46" name="TextBox 45"/>
           <p:cNvSpPr txBox="1"/>
           <p:nvPr/>
         </p:nvSpPr>
@@ -29850,19 +30256,17 @@
       </p:sp>
       <p:sp>
         <p:nvSpPr>
-          <p:cNvPr id="4" name="Rounded Rectangle 3"/>
+          <p:cNvPr id="4" name="Rectangle 3"/>
           <p:cNvSpPr/>
           <p:nvPr/>
         </p:nvSpPr>
         <p:spPr>
           <a:xfrm>
-            <a:off x="365760" y="676656"/>
-            <a:ext cx="402336" cy="402336"/>
-          </a:xfrm>
-          <a:prstGeom prst="roundRect">
-            <a:avLst>
-              <a:gd name="adj" fmla="val 10000"/>
-            </a:avLst>
+            <a:off x="0" y="0"/>
+            <a:ext cx="9144000" cy="2670048"/>
+          </a:xfrm>
+          <a:prstGeom prst="rect">
+            <a:avLst/>
           </a:prstGeom>
           <a:solidFill>
             <a:srgbClr val="2F7A3E"/>
@@ -29894,192 +30298,22 @@
       </p:sp>
       <p:sp>
         <p:nvSpPr>
-          <p:cNvPr id="5" name="TextBox 4"/>
-          <p:cNvSpPr txBox="1"/>
-          <p:nvPr/>
-        </p:nvSpPr>
-        <p:spPr>
-          <a:xfrm>
-            <a:off x="365760" y="676656"/>
+          <p:cNvPr id="5" name="Rounded Rectangle 4"/>
+          <p:cNvSpPr/>
+          <p:nvPr/>
+        </p:nvSpPr>
+        <p:spPr>
+          <a:xfrm>
+            <a:off x="365760" y="475488"/>
             <a:ext cx="402336" cy="402336"/>
           </a:xfrm>
-          <a:prstGeom prst="rect">
-            <a:avLst/>
-          </a:prstGeom>
-          <a:noFill/>
-        </p:spPr>
-        <p:txBody>
-          <a:bodyPr wrap="square" lIns="0" rIns="0" tIns="0" bIns="0" anchor="ctr">
-            <a:spAutoFit/>
-          </a:bodyPr>
-          <a:lstStyle/>
-          <a:p>
-            <a:pPr algn="ctr">
-              <a:lnSpc>
-                <a:spcPct val="100000"/>
-              </a:lnSpc>
-            </a:pPr>
-            <a:r>
-              <a:rPr sz="1400" b="1" i="0">
-                <a:solidFill>
-                  <a:srgbClr val="FFFFFF"/>
-                </a:solidFill>
-                <a:latin typeface="Cambria"/>
-              </a:rPr>
-              <a:t>03</a:t>
-            </a:r>
-          </a:p>
-        </p:txBody>
-      </p:sp>
-      <p:sp>
-        <p:nvSpPr>
-          <p:cNvPr id="6" name="TextBox 5"/>
-          <p:cNvSpPr txBox="1"/>
-          <p:nvPr/>
-        </p:nvSpPr>
-        <p:spPr>
-          <a:xfrm>
-            <a:off x="914400" y="676656"/>
-            <a:ext cx="4297680" cy="182880"/>
-          </a:xfrm>
-          <a:prstGeom prst="rect">
-            <a:avLst/>
-          </a:prstGeom>
-          <a:noFill/>
-        </p:spPr>
-        <p:txBody>
-          <a:bodyPr wrap="square" lIns="0" rIns="0" tIns="0" bIns="0" anchor="t">
-            <a:spAutoFit/>
-          </a:bodyPr>
-          <a:lstStyle/>
-          <a:p>
-            <a:pPr algn="l">
-              <a:lnSpc>
-                <a:spcPct val="100000"/>
-              </a:lnSpc>
-            </a:pPr>
-            <a:r>
-              <a:rPr sz="700" b="1" i="0" spc="90">
-                <a:solidFill>
-                  <a:srgbClr val="8A938D"/>
-                </a:solidFill>
-                <a:latin typeface="Calibri"/>
-              </a:rPr>
-              <a:t>ПОСТАЧАЛЬНИК</a:t>
-            </a:r>
-          </a:p>
-        </p:txBody>
-      </p:sp>
-      <p:sp>
-        <p:nvSpPr>
-          <p:cNvPr id="7" name="TextBox 6"/>
-          <p:cNvSpPr txBox="1"/>
-          <p:nvPr/>
-        </p:nvSpPr>
-        <p:spPr>
-          <a:xfrm>
-            <a:off x="914400" y="859536"/>
-            <a:ext cx="4297680" cy="201168"/>
-          </a:xfrm>
-          <a:prstGeom prst="rect">
-            <a:avLst/>
-          </a:prstGeom>
-          <a:noFill/>
-        </p:spPr>
-        <p:txBody>
-          <a:bodyPr wrap="square" lIns="0" rIns="0" tIns="0" bIns="0" anchor="t">
-            <a:spAutoFit/>
-          </a:bodyPr>
-          <a:lstStyle/>
-          <a:p>
-            <a:pPr algn="l">
-              <a:lnSpc>
-                <a:spcPct val="100000"/>
-              </a:lnSpc>
-            </a:pPr>
-            <a:r>
-              <a:rPr sz="900" b="1" i="0" spc="90">
-                <a:solidFill>
-                  <a:srgbClr val="2C713B"/>
-                </a:solidFill>
-                <a:latin typeface="Calibri"/>
-              </a:rPr>
-              <a:t>KOKIRI WOW</a:t>
-            </a:r>
-          </a:p>
-        </p:txBody>
-      </p:sp>
-      <p:sp>
-        <p:nvSpPr>
-          <p:cNvPr id="8" name="TextBox 7"/>
-          <p:cNvSpPr txBox="1"/>
-          <p:nvPr/>
-        </p:nvSpPr>
-        <p:spPr>
-          <a:xfrm>
-            <a:off x="365760" y="1298448"/>
-            <a:ext cx="4846320" cy="1005840"/>
-          </a:xfrm>
-          <a:prstGeom prst="rect">
-            <a:avLst/>
-          </a:prstGeom>
-          <a:noFill/>
-        </p:spPr>
-        <p:txBody>
-          <a:bodyPr wrap="square" lIns="0" rIns="0" tIns="0" bIns="0" anchor="t">
-            <a:spAutoFit/>
-          </a:bodyPr>
-          <a:lstStyle/>
-          <a:p>
-            <a:pPr algn="l">
-              <a:lnSpc>
-                <a:spcPct val="110000"/>
-              </a:lnSpc>
-            </a:pPr>
-            <a:r>
-              <a:rPr sz="2700" b="1" i="0">
-                <a:solidFill>
-                  <a:srgbClr val="14241F"/>
-                </a:solidFill>
-                <a:latin typeface="Cambria"/>
-              </a:rPr>
-              <a:t>TMK (Thailand)</a:t>
-            </a:r>
-          </a:p>
-          <a:p>
-            <a:pPr algn="l">
-              <a:lnSpc>
-                <a:spcPct val="110000"/>
-              </a:lnSpc>
-            </a:pPr>
-            <a:r>
-              <a:rPr sz="2700" b="1" i="0">
-                <a:solidFill>
-                  <a:srgbClr val="14241F"/>
-                </a:solidFill>
-                <a:latin typeface="Cambria"/>
-              </a:rPr>
-              <a:t>Co., Ltd.</a:t>
-            </a:r>
-          </a:p>
-        </p:txBody>
-      </p:sp>
-      <p:sp>
-        <p:nvSpPr>
-          <p:cNvPr id="9" name="Rectangle 8"/>
-          <p:cNvSpPr/>
-          <p:nvPr/>
-        </p:nvSpPr>
-        <p:spPr>
-          <a:xfrm>
-            <a:off x="365760" y="2468880"/>
-            <a:ext cx="1005840" cy="45720"/>
-          </a:xfrm>
-          <a:prstGeom prst="rect">
-            <a:avLst/>
+          <a:prstGeom prst="roundRect">
+            <a:avLst>
+              <a:gd name="adj" fmla="val 10000"/>
+            </a:avLst>
           </a:prstGeom>
           <a:solidFill>
-            <a:srgbClr val="2F7A3E"/>
+            <a:srgbClr val="FFFFFF"/>
           </a:solidFill>
           <a:ln>
             <a:noFill/>
@@ -30108,14 +30342,186 @@
       </p:sp>
       <p:sp>
         <p:nvSpPr>
+          <p:cNvPr id="6" name="TextBox 5"/>
+          <p:cNvSpPr txBox="1"/>
+          <p:nvPr/>
+        </p:nvSpPr>
+        <p:spPr>
+          <a:xfrm>
+            <a:off x="365760" y="475488"/>
+            <a:ext cx="402336" cy="402336"/>
+          </a:xfrm>
+          <a:prstGeom prst="rect">
+            <a:avLst/>
+          </a:prstGeom>
+          <a:noFill/>
+        </p:spPr>
+        <p:txBody>
+          <a:bodyPr wrap="square" lIns="0" rIns="0" tIns="0" bIns="0" anchor="ctr">
+            <a:spAutoFit/>
+          </a:bodyPr>
+          <a:lstStyle/>
+          <a:p>
+            <a:pPr algn="ctr">
+              <a:lnSpc>
+                <a:spcPct val="100000"/>
+              </a:lnSpc>
+            </a:pPr>
+            <a:r>
+              <a:rPr sz="1400" b="1" i="0">
+                <a:solidFill>
+                  <a:srgbClr val="2E763C"/>
+                </a:solidFill>
+                <a:latin typeface="Cambria"/>
+              </a:rPr>
+              <a:t>03</a:t>
+            </a:r>
+          </a:p>
+        </p:txBody>
+      </p:sp>
+      <p:sp>
+        <p:nvSpPr>
+          <p:cNvPr id="7" name="TextBox 6"/>
+          <p:cNvSpPr txBox="1"/>
+          <p:nvPr/>
+        </p:nvSpPr>
+        <p:spPr>
+          <a:xfrm>
+            <a:off x="914400" y="493776"/>
+            <a:ext cx="4023360" cy="182880"/>
+          </a:xfrm>
+          <a:prstGeom prst="rect">
+            <a:avLst/>
+          </a:prstGeom>
+          <a:noFill/>
+        </p:spPr>
+        <p:txBody>
+          <a:bodyPr wrap="square" lIns="0" rIns="0" tIns="0" bIns="0" anchor="t">
+            <a:spAutoFit/>
+          </a:bodyPr>
+          <a:lstStyle/>
+          <a:p>
+            <a:pPr algn="l">
+              <a:lnSpc>
+                <a:spcPct val="100000"/>
+              </a:lnSpc>
+            </a:pPr>
+            <a:r>
+              <a:rPr sz="700" b="1" i="0" spc="90">
+                <a:solidFill>
+                  <a:srgbClr val="C1D7C5"/>
+                </a:solidFill>
+                <a:latin typeface="Calibri"/>
+              </a:rPr>
+              <a:t>ПОСТАЧАЛЬНИК</a:t>
+            </a:r>
+          </a:p>
+        </p:txBody>
+      </p:sp>
+      <p:sp>
+        <p:nvSpPr>
+          <p:cNvPr id="8" name="TextBox 7"/>
+          <p:cNvSpPr txBox="1"/>
+          <p:nvPr/>
+        </p:nvSpPr>
+        <p:spPr>
+          <a:xfrm>
+            <a:off x="914400" y="676656"/>
+            <a:ext cx="4023360" cy="201168"/>
+          </a:xfrm>
+          <a:prstGeom prst="rect">
+            <a:avLst/>
+          </a:prstGeom>
+          <a:noFill/>
+        </p:spPr>
+        <p:txBody>
+          <a:bodyPr wrap="square" lIns="0" rIns="0" tIns="0" bIns="0" anchor="t">
+            <a:spAutoFit/>
+          </a:bodyPr>
+          <a:lstStyle/>
+          <a:p>
+            <a:pPr algn="l">
+              <a:lnSpc>
+                <a:spcPct val="100000"/>
+              </a:lnSpc>
+            </a:pPr>
+            <a:r>
+              <a:rPr sz="900" b="1" i="0" spc="90">
+                <a:solidFill>
+                  <a:srgbClr val="FFFFFF"/>
+                </a:solidFill>
+                <a:latin typeface="Calibri"/>
+              </a:rPr>
+              <a:t>KOKIRI WOW</a:t>
+            </a:r>
+          </a:p>
+        </p:txBody>
+      </p:sp>
+      <p:sp>
+        <p:nvSpPr>
+          <p:cNvPr id="9" name="TextBox 8"/>
+          <p:cNvSpPr txBox="1"/>
+          <p:nvPr/>
+        </p:nvSpPr>
+        <p:spPr>
+          <a:xfrm>
+            <a:off x="365760" y="914400"/>
+            <a:ext cx="4663440" cy="804672"/>
+          </a:xfrm>
+          <a:prstGeom prst="rect">
+            <a:avLst/>
+          </a:prstGeom>
+          <a:noFill/>
+        </p:spPr>
+        <p:txBody>
+          <a:bodyPr wrap="square" lIns="0" rIns="0" tIns="0" bIns="0" anchor="t">
+            <a:spAutoFit/>
+          </a:bodyPr>
+          <a:lstStyle/>
+          <a:p>
+            <a:pPr algn="l">
+              <a:lnSpc>
+                <a:spcPct val="106000"/>
+              </a:lnSpc>
+            </a:pPr>
+            <a:r>
+              <a:rPr sz="2600" b="1" i="0">
+                <a:solidFill>
+                  <a:srgbClr val="FFFFFF"/>
+                </a:solidFill>
+                <a:latin typeface="Cambria"/>
+              </a:rPr>
+              <a:t>TMK (Thailand)</a:t>
+            </a:r>
+          </a:p>
+          <a:p>
+            <a:pPr algn="l">
+              <a:lnSpc>
+                <a:spcPct val="106000"/>
+              </a:lnSpc>
+            </a:pPr>
+            <a:r>
+              <a:rPr sz="2600" b="1" i="0">
+                <a:solidFill>
+                  <a:srgbClr val="FFFFFF"/>
+                </a:solidFill>
+                <a:latin typeface="Cambria"/>
+              </a:rPr>
+              <a:t>Co., Ltd.</a:t>
+            </a:r>
+          </a:p>
+        </p:txBody>
+      </p:sp>
+      <p:sp>
+        <p:nvSpPr>
           <p:cNvPr id="10" name="TextBox 9"/>
           <p:cNvSpPr txBox="1"/>
           <p:nvPr/>
         </p:nvSpPr>
         <p:spPr>
           <a:xfrm>
-            <a:off x="365760" y="2688336"/>
-            <a:ext cx="4709160" cy="1005840"/>
+            <a:off x="365760" y="1901952"/>
+            <a:ext cx="2743200" cy="146304"/>
           </a:xfrm>
           <a:prstGeom prst="rect">
             <a:avLst/>
@@ -30130,52 +30536,13 @@
           <a:p>
             <a:pPr algn="l">
               <a:lnSpc>
-                <a:spcPct val="134000"/>
-              </a:lnSpc>
-            </a:pPr>
-            <a:r>
-              <a:rPr sz="1050" b="0" i="0">
-                <a:solidFill>
-                  <a:srgbClr val="44524C"/>
-                </a:solidFill>
-                <a:latin typeface="Calibri"/>
-              </a:rPr>
-              <a:t>Тайський виробник снеків із водоростей під брендом KOKIRI Wow. Найнижча собівартість одиниці в каталозі — за рахунок мінімальної фасовки та дитячого позиціонування.</a:t>
-            </a:r>
-          </a:p>
-        </p:txBody>
-      </p:sp>
-      <p:sp>
-        <p:nvSpPr>
-          <p:cNvPr id="11" name="TextBox 10"/>
-          <p:cNvSpPr txBox="1"/>
-          <p:nvPr/>
-        </p:nvSpPr>
-        <p:spPr>
-          <a:xfrm>
-            <a:off x="365760" y="3584448"/>
-            <a:ext cx="2743200" cy="146304"/>
-          </a:xfrm>
-          <a:prstGeom prst="rect">
-            <a:avLst/>
-          </a:prstGeom>
-          <a:noFill/>
-        </p:spPr>
-        <p:txBody>
-          <a:bodyPr wrap="square" lIns="0" rIns="0" tIns="0" bIns="0" anchor="t">
-            <a:spAutoFit/>
-          </a:bodyPr>
-          <a:lstStyle/>
-          <a:p>
-            <a:pPr algn="l">
-              <a:lnSpc>
                 <a:spcPct val="100000"/>
               </a:lnSpc>
             </a:pPr>
             <a:r>
               <a:rPr sz="650" b="1" i="0" spc="90">
                 <a:solidFill>
-                  <a:srgbClr val="8A938D"/>
+                  <a:srgbClr val="C5DAC9"/>
                 </a:solidFill>
                 <a:latin typeface="Calibri"/>
               </a:rPr>
@@ -30186,13 +30553,13 @@
       </p:sp>
       <p:sp>
         <p:nvSpPr>
-          <p:cNvPr id="12" name="Rounded Rectangle 11"/>
+          <p:cNvPr id="11" name="Rounded Rectangle 10"/>
           <p:cNvSpPr/>
           <p:nvPr/>
         </p:nvSpPr>
         <p:spPr>
           <a:xfrm>
-            <a:off x="411480" y="3895344"/>
+            <a:off x="411480" y="2212848"/>
             <a:ext cx="128016" cy="128016"/>
           </a:xfrm>
           <a:prstGeom prst="roundRect">
@@ -30201,7 +30568,7 @@
             </a:avLst>
           </a:prstGeom>
           <a:solidFill>
-            <a:srgbClr val="2F7A3E"/>
+            <a:srgbClr val="FFFFFF"/>
           </a:solidFill>
           <a:ln>
             <a:noFill/>
@@ -30230,20 +30597,20 @@
       </p:sp>
       <p:sp>
         <p:nvSpPr>
-          <p:cNvPr id="13" name="Rectangle 12"/>
+          <p:cNvPr id="12" name="Rectangle 11"/>
           <p:cNvSpPr/>
           <p:nvPr/>
         </p:nvSpPr>
         <p:spPr>
           <a:xfrm>
-            <a:off x="676656" y="3945635"/>
+            <a:off x="676656" y="2263140"/>
             <a:ext cx="91440" cy="27432"/>
           </a:xfrm>
           <a:prstGeom prst="rect">
             <a:avLst/>
           </a:prstGeom>
           <a:solidFill>
-            <a:srgbClr val="A9C5AA"/>
+            <a:srgbClr val="8DB695"/>
           </a:solidFill>
           <a:ln>
             <a:noFill/>
@@ -30272,20 +30639,20 @@
       </p:sp>
       <p:sp>
         <p:nvSpPr>
-          <p:cNvPr id="14" name="Rectangle 13"/>
+          <p:cNvPr id="13" name="Rectangle 12"/>
           <p:cNvSpPr/>
           <p:nvPr/>
         </p:nvSpPr>
         <p:spPr>
           <a:xfrm>
-            <a:off x="859536" y="3945635"/>
+            <a:off x="859536" y="2263140"/>
             <a:ext cx="91440" cy="27432"/>
           </a:xfrm>
           <a:prstGeom prst="rect">
             <a:avLst/>
           </a:prstGeom>
           <a:solidFill>
-            <a:srgbClr val="A9C5AA"/>
+            <a:srgbClr val="8DB695"/>
           </a:solidFill>
           <a:ln>
             <a:noFill/>
@@ -30314,20 +30681,20 @@
       </p:sp>
       <p:sp>
         <p:nvSpPr>
-          <p:cNvPr id="15" name="Rectangle 14"/>
+          <p:cNvPr id="14" name="Rectangle 13"/>
           <p:cNvSpPr/>
           <p:nvPr/>
         </p:nvSpPr>
         <p:spPr>
           <a:xfrm>
-            <a:off x="1042416" y="3945635"/>
+            <a:off x="1042416" y="2263140"/>
             <a:ext cx="91440" cy="27432"/>
           </a:xfrm>
           <a:prstGeom prst="rect">
             <a:avLst/>
           </a:prstGeom>
           <a:solidFill>
-            <a:srgbClr val="A9C5AA"/>
+            <a:srgbClr val="8DB695"/>
           </a:solidFill>
           <a:ln>
             <a:noFill/>
@@ -30356,20 +30723,20 @@
       </p:sp>
       <p:sp>
         <p:nvSpPr>
-          <p:cNvPr id="16" name="Rectangle 15"/>
+          <p:cNvPr id="15" name="Rectangle 14"/>
           <p:cNvSpPr/>
           <p:nvPr/>
         </p:nvSpPr>
         <p:spPr>
           <a:xfrm>
-            <a:off x="1225296" y="3945635"/>
+            <a:off x="1225296" y="2263140"/>
             <a:ext cx="91440" cy="27432"/>
           </a:xfrm>
           <a:prstGeom prst="rect">
             <a:avLst/>
           </a:prstGeom>
           <a:solidFill>
-            <a:srgbClr val="A9C5AA"/>
+            <a:srgbClr val="8DB695"/>
           </a:solidFill>
           <a:ln>
             <a:noFill/>
@@ -30398,20 +30765,20 @@
       </p:sp>
       <p:sp>
         <p:nvSpPr>
-          <p:cNvPr id="17" name="Rectangle 16"/>
+          <p:cNvPr id="16" name="Rectangle 15"/>
           <p:cNvSpPr/>
           <p:nvPr/>
         </p:nvSpPr>
         <p:spPr>
           <a:xfrm>
-            <a:off x="1408176" y="3945635"/>
+            <a:off x="1408176" y="2263140"/>
             <a:ext cx="91440" cy="27432"/>
           </a:xfrm>
           <a:prstGeom prst="rect">
             <a:avLst/>
           </a:prstGeom>
           <a:solidFill>
-            <a:srgbClr val="A9C5AA"/>
+            <a:srgbClr val="8DB695"/>
           </a:solidFill>
           <a:ln>
             <a:noFill/>
@@ -30440,20 +30807,20 @@
       </p:sp>
       <p:sp>
         <p:nvSpPr>
-          <p:cNvPr id="18" name="Rectangle 17"/>
+          <p:cNvPr id="17" name="Rectangle 16"/>
           <p:cNvSpPr/>
           <p:nvPr/>
         </p:nvSpPr>
         <p:spPr>
           <a:xfrm>
-            <a:off x="1591056" y="3945635"/>
+            <a:off x="1591056" y="2263140"/>
             <a:ext cx="91440" cy="27432"/>
           </a:xfrm>
           <a:prstGeom prst="rect">
             <a:avLst/>
           </a:prstGeom>
           <a:solidFill>
-            <a:srgbClr val="A9C5AA"/>
+            <a:srgbClr val="8DB695"/>
           </a:solidFill>
           <a:ln>
             <a:noFill/>
@@ -30482,20 +30849,20 @@
       </p:sp>
       <p:sp>
         <p:nvSpPr>
-          <p:cNvPr id="19" name="Rectangle 18"/>
+          <p:cNvPr id="18" name="Rectangle 17"/>
           <p:cNvSpPr/>
           <p:nvPr/>
         </p:nvSpPr>
         <p:spPr>
           <a:xfrm>
-            <a:off x="1773936" y="3945635"/>
+            <a:off x="1773936" y="2263140"/>
             <a:ext cx="91440" cy="27432"/>
           </a:xfrm>
           <a:prstGeom prst="rect">
             <a:avLst/>
           </a:prstGeom>
           <a:solidFill>
-            <a:srgbClr val="A9C5AA"/>
+            <a:srgbClr val="8DB695"/>
           </a:solidFill>
           <a:ln>
             <a:noFill/>
@@ -30524,20 +30891,20 @@
       </p:sp>
       <p:sp>
         <p:nvSpPr>
-          <p:cNvPr id="20" name="Rectangle 19"/>
+          <p:cNvPr id="19" name="Rectangle 18"/>
           <p:cNvSpPr/>
           <p:nvPr/>
         </p:nvSpPr>
         <p:spPr>
           <a:xfrm>
-            <a:off x="1956816" y="3945635"/>
+            <a:off x="1956816" y="2263140"/>
             <a:ext cx="91440" cy="27432"/>
           </a:xfrm>
           <a:prstGeom prst="rect">
             <a:avLst/>
           </a:prstGeom>
           <a:solidFill>
-            <a:srgbClr val="A9C5AA"/>
+            <a:srgbClr val="8DB695"/>
           </a:solidFill>
           <a:ln>
             <a:noFill/>
@@ -30566,20 +30933,20 @@
       </p:sp>
       <p:sp>
         <p:nvSpPr>
-          <p:cNvPr id="21" name="Rectangle 20"/>
+          <p:cNvPr id="20" name="Rectangle 19"/>
           <p:cNvSpPr/>
           <p:nvPr/>
         </p:nvSpPr>
         <p:spPr>
           <a:xfrm>
-            <a:off x="2139696" y="3945635"/>
+            <a:off x="2139696" y="2263140"/>
             <a:ext cx="91440" cy="27432"/>
           </a:xfrm>
           <a:prstGeom prst="rect">
             <a:avLst/>
           </a:prstGeom>
           <a:solidFill>
-            <a:srgbClr val="A9C5AA"/>
+            <a:srgbClr val="8DB695"/>
           </a:solidFill>
           <a:ln>
             <a:noFill/>
@@ -30608,20 +30975,20 @@
       </p:sp>
       <p:sp>
         <p:nvSpPr>
-          <p:cNvPr id="22" name="Rectangle 21"/>
+          <p:cNvPr id="21" name="Rectangle 20"/>
           <p:cNvSpPr/>
           <p:nvPr/>
         </p:nvSpPr>
         <p:spPr>
           <a:xfrm>
-            <a:off x="2322576" y="3945635"/>
+            <a:off x="2322576" y="2263140"/>
             <a:ext cx="91440" cy="27432"/>
           </a:xfrm>
           <a:prstGeom prst="rect">
             <a:avLst/>
           </a:prstGeom>
           <a:solidFill>
-            <a:srgbClr val="A9C5AA"/>
+            <a:srgbClr val="8DB695"/>
           </a:solidFill>
           <a:ln>
             <a:noFill/>
@@ -30650,20 +31017,20 @@
       </p:sp>
       <p:sp>
         <p:nvSpPr>
-          <p:cNvPr id="23" name="Rectangle 22"/>
+          <p:cNvPr id="22" name="Rectangle 21"/>
           <p:cNvSpPr/>
           <p:nvPr/>
         </p:nvSpPr>
         <p:spPr>
           <a:xfrm>
-            <a:off x="2505456" y="3945635"/>
+            <a:off x="2505456" y="2263140"/>
             <a:ext cx="91440" cy="27432"/>
           </a:xfrm>
           <a:prstGeom prst="rect">
             <a:avLst/>
           </a:prstGeom>
           <a:solidFill>
-            <a:srgbClr val="A9C5AA"/>
+            <a:srgbClr val="8DB695"/>
           </a:solidFill>
           <a:ln>
             <a:noFill/>
@@ -30692,13 +31059,13 @@
       </p:sp>
       <p:sp>
         <p:nvSpPr>
-          <p:cNvPr id="24" name="Rounded Rectangle 23"/>
+          <p:cNvPr id="23" name="Rounded Rectangle 22"/>
           <p:cNvSpPr/>
           <p:nvPr/>
         </p:nvSpPr>
         <p:spPr>
           <a:xfrm>
-            <a:off x="2670048" y="3895344"/>
+            <a:off x="2670048" y="2212848"/>
             <a:ext cx="128016" cy="128016"/>
           </a:xfrm>
           <a:prstGeom prst="roundRect">
@@ -30707,7 +31074,7 @@
             </a:avLst>
           </a:prstGeom>
           <a:solidFill>
-            <a:srgbClr val="14241F"/>
+            <a:srgbClr val="FFFFFF"/>
           </a:solidFill>
           <a:ln>
             <a:noFill/>
@@ -30736,14 +31103,53 @@
       </p:sp>
       <p:sp>
         <p:nvSpPr>
+          <p:cNvPr id="24" name="TextBox 23"/>
+          <p:cNvSpPr txBox="1"/>
+          <p:nvPr/>
+        </p:nvSpPr>
+        <p:spPr>
+          <a:xfrm>
+            <a:off x="365760" y="2432304"/>
+            <a:ext cx="1371600" cy="182880"/>
+          </a:xfrm>
+          <a:prstGeom prst="rect">
+            <a:avLst/>
+          </a:prstGeom>
+          <a:noFill/>
+        </p:spPr>
+        <p:txBody>
+          <a:bodyPr wrap="square" lIns="0" rIns="0" tIns="0" bIns="0" anchor="t">
+            <a:spAutoFit/>
+          </a:bodyPr>
+          <a:lstStyle/>
+          <a:p>
+            <a:pPr algn="l">
+              <a:lnSpc>
+                <a:spcPct val="100000"/>
+              </a:lnSpc>
+            </a:pPr>
+            <a:r>
+              <a:rPr sz="800" b="1" i="0">
+                <a:solidFill>
+                  <a:srgbClr val="FFFFFF"/>
+                </a:solidFill>
+                <a:latin typeface="Calibri"/>
+              </a:rPr>
+              <a:t>FOB Bangkok</a:t>
+            </a:r>
+          </a:p>
+        </p:txBody>
+      </p:sp>
+      <p:sp>
+        <p:nvSpPr>
           <p:cNvPr id="25" name="TextBox 24"/>
           <p:cNvSpPr txBox="1"/>
           <p:nvPr/>
         </p:nvSpPr>
         <p:spPr>
           <a:xfrm>
-            <a:off x="365760" y="4114800"/>
-            <a:ext cx="1371600" cy="182880"/>
+            <a:off x="1920240" y="2432304"/>
+            <a:ext cx="914400" cy="182880"/>
           </a:xfrm>
           <a:prstGeom prst="rect">
             <a:avLst/>
@@ -30756,7 +31162,7 @@
           </a:bodyPr>
           <a:lstStyle/>
           <a:p>
-            <a:pPr algn="l">
+            <a:pPr algn="r">
               <a:lnSpc>
                 <a:spcPct val="100000"/>
               </a:lnSpc>
@@ -30764,46 +31170,7 @@
             <a:r>
               <a:rPr sz="800" b="1" i="0">
                 <a:solidFill>
-                  <a:srgbClr val="14241F"/>
-                </a:solidFill>
-                <a:latin typeface="Calibri"/>
-              </a:rPr>
-              <a:t>FOB Bangkok</a:t>
-            </a:r>
-          </a:p>
-        </p:txBody>
-      </p:sp>
-      <p:sp>
-        <p:nvSpPr>
-          <p:cNvPr id="26" name="TextBox 25"/>
-          <p:cNvSpPr txBox="1"/>
-          <p:nvPr/>
-        </p:nvSpPr>
-        <p:spPr>
-          <a:xfrm>
-            <a:off x="1920240" y="4114800"/>
-            <a:ext cx="914400" cy="182880"/>
-          </a:xfrm>
-          <a:prstGeom prst="rect">
-            <a:avLst/>
-          </a:prstGeom>
-          <a:noFill/>
-        </p:spPr>
-        <p:txBody>
-          <a:bodyPr wrap="square" lIns="0" rIns="0" tIns="0" bIns="0" anchor="t">
-            <a:spAutoFit/>
-          </a:bodyPr>
-          <a:lstStyle/>
-          <a:p>
-            <a:pPr algn="r">
-              <a:lnSpc>
-                <a:spcPct val="100000"/>
-              </a:lnSpc>
-            </a:pPr>
-            <a:r>
-              <a:rPr sz="800" b="1" i="0">
-                <a:solidFill>
-                  <a:srgbClr val="14241F"/>
+                  <a:srgbClr val="FFFFFF"/>
                 </a:solidFill>
                 <a:latin typeface="Calibri"/>
               </a:rPr>
@@ -30814,18 +31181,18 @@
       </p:sp>
       <p:sp>
         <p:nvSpPr>
-          <p:cNvPr id="27" name="Rounded Rectangle 26"/>
+          <p:cNvPr id="26" name="Rounded Rectangle 25"/>
           <p:cNvSpPr/>
           <p:nvPr/>
         </p:nvSpPr>
         <p:spPr>
           <a:xfrm>
-            <a:off x="3383279" y="3584448"/>
-            <a:ext cx="822960" cy="841248"/>
+            <a:off x="5120640" y="1936821"/>
+            <a:ext cx="1755648" cy="1182624"/>
           </a:xfrm>
           <a:prstGeom prst="roundRect">
             <a:avLst>
-              <a:gd name="adj" fmla="val 8000"/>
+              <a:gd name="adj" fmla="val 6000"/>
             </a:avLst>
           </a:prstGeom>
           <a:solidFill>
@@ -30858,98 +31225,44 @@
           <a:p/>
         </p:txBody>
       </p:sp>
-      <p:sp>
-        <p:nvSpPr>
-          <p:cNvPr id="28" name="TextBox 27"/>
-          <p:cNvSpPr txBox="1"/>
-          <p:nvPr/>
-        </p:nvSpPr>
-        <p:spPr>
-          <a:xfrm>
-            <a:off x="3383279" y="3712463"/>
-            <a:ext cx="822960" cy="292608"/>
-          </a:xfrm>
-          <a:prstGeom prst="rect">
-            <a:avLst/>
-          </a:prstGeom>
-          <a:noFill/>
-        </p:spPr>
-        <p:txBody>
-          <a:bodyPr wrap="square" lIns="0" rIns="0" tIns="0" bIns="0" anchor="t">
-            <a:spAutoFit/>
-          </a:bodyPr>
-          <a:lstStyle/>
-          <a:p>
-            <a:pPr algn="ctr">
-              <a:lnSpc>
-                <a:spcPct val="100000"/>
-              </a:lnSpc>
-            </a:pPr>
-            <a:r>
-              <a:rPr sz="1300" b="1" i="0">
-                <a:solidFill>
-                  <a:srgbClr val="2C713B"/>
-                </a:solidFill>
-                <a:latin typeface="Cambria"/>
-              </a:rPr>
-              <a:t>Таїланд</a:t>
-            </a:r>
-          </a:p>
-        </p:txBody>
-      </p:sp>
-      <p:sp>
-        <p:nvSpPr>
-          <p:cNvPr id="29" name="TextBox 28"/>
-          <p:cNvSpPr txBox="1"/>
-          <p:nvPr/>
-        </p:nvSpPr>
-        <p:spPr>
-          <a:xfrm>
-            <a:off x="3383279" y="4078224"/>
-            <a:ext cx="822960" cy="201168"/>
-          </a:xfrm>
-          <a:prstGeom prst="rect">
-            <a:avLst/>
-          </a:prstGeom>
-          <a:noFill/>
-        </p:spPr>
-        <p:txBody>
-          <a:bodyPr wrap="square" lIns="0" rIns="0" tIns="0" bIns="0" anchor="t">
-            <a:spAutoFit/>
-          </a:bodyPr>
-          <a:lstStyle/>
-          <a:p>
-            <a:pPr algn="ctr">
-              <a:lnSpc>
-                <a:spcPct val="100000"/>
-              </a:lnSpc>
-            </a:pPr>
-            <a:r>
-              <a:rPr sz="650" b="0" i="0">
-                <a:solidFill>
-                  <a:srgbClr val="8A938D"/>
-                </a:solidFill>
-                <a:latin typeface="Calibri"/>
-              </a:rPr>
-              <a:t>Країна</a:t>
-            </a:r>
-          </a:p>
-        </p:txBody>
-      </p:sp>
-      <p:sp>
-        <p:nvSpPr>
-          <p:cNvPr id="30" name="Rounded Rectangle 29"/>
+      <p:pic>
+        <p:nvPicPr>
+          <p:cNvPr id="27" name="Picture 26" descr="tmk_roll_orig.png"/>
+          <p:cNvPicPr>
+            <a:picLocks noChangeAspect="1"/>
+          </p:cNvPicPr>
+          <p:nvPr/>
+        </p:nvPicPr>
+        <p:blipFill>
+          <a:blip r:embed="rId2"/>
+          <a:stretch>
+            <a:fillRect/>
+          </a:stretch>
+        </p:blipFill>
+        <p:spPr>
+          <a:xfrm>
+            <a:off x="5724144" y="2055693"/>
+            <a:ext cx="548640" cy="944880"/>
+          </a:xfrm>
+          <a:prstGeom prst="rect">
+            <a:avLst/>
+          </a:prstGeom>
+        </p:spPr>
+      </p:pic>
+      <p:sp>
+        <p:nvSpPr>
+          <p:cNvPr id="28" name="Rounded Rectangle 27"/>
           <p:cNvSpPr/>
           <p:nvPr/>
         </p:nvSpPr>
         <p:spPr>
           <a:xfrm>
-            <a:off x="4315968" y="3584448"/>
-            <a:ext cx="822960" cy="841248"/>
+            <a:off x="7022592" y="1936821"/>
+            <a:ext cx="1755648" cy="1182624"/>
           </a:xfrm>
           <a:prstGeom prst="roundRect">
             <a:avLst>
-              <a:gd name="adj" fmla="val 8000"/>
+              <a:gd name="adj" fmla="val 6000"/>
             </a:avLst>
           </a:prstGeom>
           <a:solidFill>
@@ -30982,203 +31295,9 @@
           <a:p/>
         </p:txBody>
       </p:sp>
-      <p:sp>
-        <p:nvSpPr>
-          <p:cNvPr id="31" name="TextBox 30"/>
-          <p:cNvSpPr txBox="1"/>
-          <p:nvPr/>
-        </p:nvSpPr>
-        <p:spPr>
-          <a:xfrm>
-            <a:off x="4315968" y="3712463"/>
-            <a:ext cx="822960" cy="292608"/>
-          </a:xfrm>
-          <a:prstGeom prst="rect">
-            <a:avLst/>
-          </a:prstGeom>
-          <a:noFill/>
-        </p:spPr>
-        <p:txBody>
-          <a:bodyPr wrap="square" lIns="0" rIns="0" tIns="0" bIns="0" anchor="t">
-            <a:spAutoFit/>
-          </a:bodyPr>
-          <a:lstStyle/>
-          <a:p>
-            <a:pPr algn="ctr">
-              <a:lnSpc>
-                <a:spcPct val="100000"/>
-              </a:lnSpc>
-            </a:pPr>
-            <a:r>
-              <a:rPr sz="1300" b="1" i="0">
-                <a:solidFill>
-                  <a:srgbClr val="2C713B"/>
-                </a:solidFill>
-                <a:latin typeface="Cambria"/>
-              </a:rPr>
-              <a:t>10</a:t>
-            </a:r>
-          </a:p>
-        </p:txBody>
-      </p:sp>
-      <p:sp>
-        <p:nvSpPr>
-          <p:cNvPr id="32" name="TextBox 31"/>
-          <p:cNvSpPr txBox="1"/>
-          <p:nvPr/>
-        </p:nvSpPr>
-        <p:spPr>
-          <a:xfrm>
-            <a:off x="4315968" y="4078224"/>
-            <a:ext cx="822960" cy="201168"/>
-          </a:xfrm>
-          <a:prstGeom prst="rect">
-            <a:avLst/>
-          </a:prstGeom>
-          <a:noFill/>
-        </p:spPr>
-        <p:txBody>
-          <a:bodyPr wrap="square" lIns="0" rIns="0" tIns="0" bIns="0" anchor="t">
-            <a:spAutoFit/>
-          </a:bodyPr>
-          <a:lstStyle/>
-          <a:p>
-            <a:pPr algn="ctr">
-              <a:lnSpc>
-                <a:spcPct val="100000"/>
-              </a:lnSpc>
-            </a:pPr>
-            <a:r>
-              <a:rPr sz="650" b="0" i="0">
-                <a:solidFill>
-                  <a:srgbClr val="8A938D"/>
-                </a:solidFill>
-                <a:latin typeface="Calibri"/>
-              </a:rPr>
-              <a:t>Позицій із с/в</a:t>
-            </a:r>
-          </a:p>
-        </p:txBody>
-      </p:sp>
-      <p:sp>
-        <p:nvSpPr>
-          <p:cNvPr id="33" name="Rounded Rectangle 32"/>
-          <p:cNvSpPr/>
-          <p:nvPr/>
-        </p:nvSpPr>
-        <p:spPr>
-          <a:xfrm>
-            <a:off x="5440680" y="768096"/>
-            <a:ext cx="1604771" cy="1255776"/>
-          </a:xfrm>
-          <a:prstGeom prst="roundRect">
-            <a:avLst>
-              <a:gd name="adj" fmla="val 6000"/>
-            </a:avLst>
-          </a:prstGeom>
-          <a:solidFill>
-            <a:srgbClr val="FFFFFF"/>
-          </a:solidFill>
-          <a:ln w="9525">
-            <a:solidFill>
-              <a:srgbClr val="E6E1D8"/>
-            </a:solidFill>
-          </a:ln>
-          <a:effectLst/>
-        </p:spPr>
-        <p:style>
-          <a:lnRef idx="1">
-            <a:schemeClr val="accent1"/>
-          </a:lnRef>
-          <a:fillRef idx="3">
-            <a:schemeClr val="accent1"/>
-          </a:fillRef>
-          <a:effectRef idx="2">
-            <a:schemeClr val="accent1"/>
-          </a:effectRef>
-          <a:fontRef idx="minor">
-            <a:schemeClr val="lt1"/>
-          </a:fontRef>
-        </p:style>
-        <p:txBody>
-          <a:bodyPr rtlCol="0" anchor="ctr"/>
-          <a:lstStyle/>
-          <a:p/>
-        </p:txBody>
-      </p:sp>
       <p:pic>
         <p:nvPicPr>
-          <p:cNvPr id="34" name="Picture 33" descr="tmk_roll_orig.png"/>
-          <p:cNvPicPr>
-            <a:picLocks noChangeAspect="1"/>
-          </p:cNvPicPr>
-          <p:nvPr/>
-        </p:nvPicPr>
-        <p:blipFill>
-          <a:blip r:embed="rId2"/>
-          <a:stretch>
-            <a:fillRect/>
-          </a:stretch>
-        </p:blipFill>
-        <p:spPr>
-          <a:xfrm>
-            <a:off x="5968746" y="923544"/>
-            <a:ext cx="548640" cy="944880"/>
-          </a:xfrm>
-          <a:prstGeom prst="rect">
-            <a:avLst/>
-          </a:prstGeom>
-        </p:spPr>
-      </p:pic>
-      <p:sp>
-        <p:nvSpPr>
-          <p:cNvPr id="35" name="Rounded Rectangle 34"/>
-          <p:cNvSpPr/>
-          <p:nvPr/>
-        </p:nvSpPr>
-        <p:spPr>
-          <a:xfrm>
-            <a:off x="7173468" y="768096"/>
-            <a:ext cx="1604771" cy="1255776"/>
-          </a:xfrm>
-          <a:prstGeom prst="roundRect">
-            <a:avLst>
-              <a:gd name="adj" fmla="val 6000"/>
-            </a:avLst>
-          </a:prstGeom>
-          <a:solidFill>
-            <a:srgbClr val="FFFFFF"/>
-          </a:solidFill>
-          <a:ln w="9525">
-            <a:solidFill>
-              <a:srgbClr val="E6E1D8"/>
-            </a:solidFill>
-          </a:ln>
-          <a:effectLst/>
-        </p:spPr>
-        <p:style>
-          <a:lnRef idx="1">
-            <a:schemeClr val="accent1"/>
-          </a:lnRef>
-          <a:fillRef idx="3">
-            <a:schemeClr val="accent1"/>
-          </a:fillRef>
-          <a:effectRef idx="2">
-            <a:schemeClr val="accent1"/>
-          </a:effectRef>
-          <a:fontRef idx="minor">
-            <a:schemeClr val="lt1"/>
-          </a:fontRef>
-        </p:style>
-        <p:txBody>
-          <a:bodyPr rtlCol="0" anchor="ctr"/>
-          <a:lstStyle/>
-          <a:p/>
-        </p:txBody>
-      </p:sp>
-      <p:pic>
-        <p:nvPicPr>
-          <p:cNvPr id="36" name="Picture 35" descr="tmk_roll_spicy.png"/>
+          <p:cNvPr id="29" name="Picture 28" descr="tmk_dbl_orig.png"/>
           <p:cNvPicPr>
             <a:picLocks noChangeAspect="1"/>
           </p:cNvPicPr>
@@ -31192,8 +31311,8 @@
         </p:blipFill>
         <p:spPr>
           <a:xfrm>
-            <a:off x="7706613" y="923544"/>
-            <a:ext cx="538480" cy="944880"/>
+            <a:off x="7488936" y="2111573"/>
+            <a:ext cx="822960" cy="833120"/>
           </a:xfrm>
           <a:prstGeom prst="rect">
             <a:avLst/>
@@ -31202,178 +31321,131 @@
       </p:pic>
       <p:sp>
         <p:nvSpPr>
-          <p:cNvPr id="37" name="Rounded Rectangle 36"/>
+          <p:cNvPr id="30" name="TextBox 29"/>
+          <p:cNvSpPr txBox="1"/>
+          <p:nvPr/>
+        </p:nvSpPr>
+        <p:spPr>
+          <a:xfrm>
+            <a:off x="5120640" y="3247461"/>
+            <a:ext cx="3657600" cy="182880"/>
+          </a:xfrm>
+          <a:prstGeom prst="rect">
+            <a:avLst/>
+          </a:prstGeom>
+          <a:noFill/>
+        </p:spPr>
+        <p:txBody>
+          <a:bodyPr wrap="square" lIns="0" rIns="0" tIns="0" bIns="0" anchor="t">
+            <a:spAutoFit/>
+          </a:bodyPr>
+          <a:lstStyle/>
+          <a:p>
+            <a:pPr algn="ctr">
+              <a:lnSpc>
+                <a:spcPct val="100000"/>
+              </a:lnSpc>
+            </a:pPr>
+            <a:r>
+              <a:rPr sz="750" b="0" i="0">
+                <a:solidFill>
+                  <a:srgbClr val="8A938D"/>
+                </a:solidFill>
+                <a:latin typeface="Calibri"/>
+              </a:rPr>
+              <a:t>10 позицій із розрахованою собівартістю</a:t>
+            </a:r>
+          </a:p>
+        </p:txBody>
+      </p:sp>
+      <p:sp>
+        <p:nvSpPr>
+          <p:cNvPr id="31" name="TextBox 30"/>
+          <p:cNvSpPr txBox="1"/>
+          <p:nvPr/>
+        </p:nvSpPr>
+        <p:spPr>
+          <a:xfrm>
+            <a:off x="365760" y="2926080"/>
+            <a:ext cx="4617720" cy="822960"/>
+          </a:xfrm>
+          <a:prstGeom prst="rect">
+            <a:avLst/>
+          </a:prstGeom>
+          <a:noFill/>
+        </p:spPr>
+        <p:txBody>
+          <a:bodyPr wrap="square" lIns="0" rIns="0" tIns="0" bIns="0" anchor="t">
+            <a:spAutoFit/>
+          </a:bodyPr>
+          <a:lstStyle/>
+          <a:p>
+            <a:pPr algn="l">
+              <a:lnSpc>
+                <a:spcPct val="134000"/>
+              </a:lnSpc>
+            </a:pPr>
+            <a:r>
+              <a:rPr sz="1050" b="0" i="0">
+                <a:solidFill>
+                  <a:srgbClr val="44524C"/>
+                </a:solidFill>
+                <a:latin typeface="Calibri"/>
+              </a:rPr>
+              <a:t>Тайський виробник снеків із водоростей під брендом KOKIRI Wow. Найнижча собівартість одиниці в каталозі — за рахунок мінімальної фасовки та дитячого позиціонування.</a:t>
+            </a:r>
+          </a:p>
+        </p:txBody>
+      </p:sp>
+      <p:sp>
+        <p:nvSpPr>
+          <p:cNvPr id="32" name="TextBox 31"/>
+          <p:cNvSpPr txBox="1"/>
+          <p:nvPr/>
+        </p:nvSpPr>
+        <p:spPr>
+          <a:xfrm>
+            <a:off x="365760" y="3803904"/>
+            <a:ext cx="4617720" cy="146304"/>
+          </a:xfrm>
+          <a:prstGeom prst="rect">
+            <a:avLst/>
+          </a:prstGeom>
+          <a:noFill/>
+        </p:spPr>
+        <p:txBody>
+          <a:bodyPr wrap="square" lIns="0" rIns="0" tIns="0" bIns="0" anchor="t">
+            <a:spAutoFit/>
+          </a:bodyPr>
+          <a:lstStyle/>
+          <a:p>
+            <a:pPr algn="l">
+              <a:lnSpc>
+                <a:spcPct val="100000"/>
+              </a:lnSpc>
+            </a:pPr>
+            <a:r>
+              <a:rPr sz="700" b="1" i="0" spc="90">
+                <a:solidFill>
+                  <a:srgbClr val="2C713B"/>
+                </a:solidFill>
+                <a:latin typeface="Calibri"/>
+              </a:rPr>
+              <a:t>ВИРОБНИЦТВО І УМОВИ ПОСТАВКИ</a:t>
+            </a:r>
+          </a:p>
+        </p:txBody>
+      </p:sp>
+      <p:sp>
+        <p:nvSpPr>
+          <p:cNvPr id="33" name="Rectangle 32"/>
           <p:cNvSpPr/>
           <p:nvPr/>
         </p:nvSpPr>
         <p:spPr>
           <a:xfrm>
-            <a:off x="5440680" y="2151888"/>
-            <a:ext cx="3337559" cy="2566416"/>
-          </a:xfrm>
-          <a:prstGeom prst="roundRect">
-            <a:avLst>
-              <a:gd name="adj" fmla="val 6000"/>
-            </a:avLst>
-          </a:prstGeom>
-          <a:solidFill>
-            <a:srgbClr val="2F7A3E"/>
-          </a:solidFill>
-          <a:ln>
-            <a:noFill/>
-          </a:ln>
-          <a:effectLst/>
-        </p:spPr>
-        <p:style>
-          <a:lnRef idx="1">
-            <a:schemeClr val="accent1"/>
-          </a:lnRef>
-          <a:fillRef idx="3">
-            <a:schemeClr val="accent1"/>
-          </a:fillRef>
-          <a:effectRef idx="2">
-            <a:schemeClr val="accent1"/>
-          </a:effectRef>
-          <a:fontRef idx="minor">
-            <a:schemeClr val="lt1"/>
-          </a:fontRef>
-        </p:style>
-        <p:txBody>
-          <a:bodyPr rtlCol="0" anchor="ctr"/>
-          <a:lstStyle/>
-          <a:p/>
-        </p:txBody>
-      </p:sp>
-      <p:sp>
-        <p:nvSpPr>
-          <p:cNvPr id="38" name="TextBox 37"/>
-          <p:cNvSpPr txBox="1"/>
-          <p:nvPr/>
-        </p:nvSpPr>
-        <p:spPr>
-          <a:xfrm>
-            <a:off x="5696712" y="2371344"/>
-            <a:ext cx="2825495" cy="548640"/>
-          </a:xfrm>
-          <a:prstGeom prst="rect">
-            <a:avLst/>
-          </a:prstGeom>
-          <a:noFill/>
-        </p:spPr>
-        <p:txBody>
-          <a:bodyPr wrap="square" lIns="0" rIns="0" tIns="0" bIns="0" anchor="t">
-            <a:spAutoFit/>
-          </a:bodyPr>
-          <a:lstStyle/>
-          <a:p>
-            <a:pPr algn="l">
-              <a:lnSpc>
-                <a:spcPct val="106000"/>
-              </a:lnSpc>
-            </a:pPr>
-            <a:r>
-              <a:rPr sz="2200" b="1" i="0">
-                <a:solidFill>
-                  <a:srgbClr val="FFFFFF"/>
-                </a:solidFill>
-                <a:latin typeface="Cambria"/>
-              </a:rPr>
-              <a:t>KOKIRI</a:t>
-            </a:r>
-          </a:p>
-        </p:txBody>
-      </p:sp>
-      <p:sp>
-        <p:nvSpPr>
-          <p:cNvPr id="39" name="Rectangle 38"/>
-          <p:cNvSpPr/>
-          <p:nvPr/>
-        </p:nvSpPr>
-        <p:spPr>
-          <a:xfrm>
-            <a:off x="5696712" y="4187952"/>
-            <a:ext cx="548640" cy="32004"/>
-          </a:xfrm>
-          <a:prstGeom prst="rect">
-            <a:avLst/>
-          </a:prstGeom>
-          <a:solidFill>
-            <a:srgbClr val="FFFFFF"/>
-          </a:solidFill>
-          <a:ln>
-            <a:noFill/>
-          </a:ln>
-          <a:effectLst/>
-        </p:spPr>
-        <p:style>
-          <a:lnRef idx="1">
-            <a:schemeClr val="accent1"/>
-          </a:lnRef>
-          <a:fillRef idx="3">
-            <a:schemeClr val="accent1"/>
-          </a:fillRef>
-          <a:effectRef idx="2">
-            <a:schemeClr val="accent1"/>
-          </a:effectRef>
-          <a:fontRef idx="minor">
-            <a:schemeClr val="lt1"/>
-          </a:fontRef>
-        </p:style>
-        <p:txBody>
-          <a:bodyPr rtlCol="0" anchor="ctr"/>
-          <a:lstStyle/>
-          <a:p/>
-        </p:txBody>
-      </p:sp>
-      <p:sp>
-        <p:nvSpPr>
-          <p:cNvPr id="40" name="TextBox 39"/>
-          <p:cNvSpPr txBox="1"/>
-          <p:nvPr/>
-        </p:nvSpPr>
-        <p:spPr>
-          <a:xfrm>
-            <a:off x="5696712" y="4315968"/>
-            <a:ext cx="2825495" cy="219456"/>
-          </a:xfrm>
-          <a:prstGeom prst="rect">
-            <a:avLst/>
-          </a:prstGeom>
-          <a:noFill/>
-        </p:spPr>
-        <p:txBody>
-          <a:bodyPr wrap="square" lIns="0" rIns="0" tIns="0" bIns="0" anchor="t">
-            <a:spAutoFit/>
-          </a:bodyPr>
-          <a:lstStyle/>
-          <a:p>
-            <a:pPr algn="l">
-              <a:lnSpc>
-                <a:spcPct val="100000"/>
-              </a:lnSpc>
-            </a:pPr>
-            <a:r>
-              <a:rPr sz="850" b="0" i="0">
-                <a:solidFill>
-                  <a:srgbClr val="E0EBE2"/>
-                </a:solidFill>
-                <a:latin typeface="Calibri"/>
-              </a:rPr>
-              <a:t>Виробництво · Таїланд</a:t>
-            </a:r>
-          </a:p>
-        </p:txBody>
-      </p:sp>
-      <p:sp>
-        <p:nvSpPr>
-          <p:cNvPr id="41" name="Rectangle 40"/>
-          <p:cNvSpPr/>
-          <p:nvPr/>
-        </p:nvSpPr>
-        <p:spPr>
-          <a:xfrm>
-            <a:off x="365760" y="4809744"/>
-            <a:ext cx="8412480" cy="9144"/>
+            <a:off x="365760" y="4023360"/>
+            <a:ext cx="2194560" cy="9144"/>
           </a:xfrm>
           <a:prstGeom prst="rect">
             <a:avLst/>
@@ -31408,7 +31480,487 @@
       </p:sp>
       <p:sp>
         <p:nvSpPr>
-          <p:cNvPr id="42" name="TextBox 41"/>
+          <p:cNvPr id="34" name="TextBox 33"/>
+          <p:cNvSpPr txBox="1"/>
+          <p:nvPr/>
+        </p:nvSpPr>
+        <p:spPr>
+          <a:xfrm>
+            <a:off x="365760" y="4078224"/>
+            <a:ext cx="2194560" cy="146304"/>
+          </a:xfrm>
+          <a:prstGeom prst="rect">
+            <a:avLst/>
+          </a:prstGeom>
+          <a:noFill/>
+        </p:spPr>
+        <p:txBody>
+          <a:bodyPr wrap="square" lIns="0" rIns="0" tIns="0" bIns="0" anchor="t">
+            <a:spAutoFit/>
+          </a:bodyPr>
+          <a:lstStyle/>
+          <a:p>
+            <a:pPr algn="l">
+              <a:lnSpc>
+                <a:spcPct val="100000"/>
+              </a:lnSpc>
+            </a:pPr>
+            <a:r>
+              <a:rPr sz="650" b="0" i="0">
+                <a:solidFill>
+                  <a:srgbClr val="8A938D"/>
+                </a:solidFill>
+                <a:latin typeface="Calibri"/>
+              </a:rPr>
+              <a:t>Термін виробництва</a:t>
+            </a:r>
+          </a:p>
+        </p:txBody>
+      </p:sp>
+      <p:sp>
+        <p:nvSpPr>
+          <p:cNvPr id="35" name="TextBox 34"/>
+          <p:cNvSpPr txBox="1"/>
+          <p:nvPr/>
+        </p:nvSpPr>
+        <p:spPr>
+          <a:xfrm>
+            <a:off x="365760" y="4206240"/>
+            <a:ext cx="2194560" cy="182880"/>
+          </a:xfrm>
+          <a:prstGeom prst="rect">
+            <a:avLst/>
+          </a:prstGeom>
+          <a:noFill/>
+        </p:spPr>
+        <p:txBody>
+          <a:bodyPr wrap="square" lIns="0" rIns="0" tIns="0" bIns="0" anchor="t">
+            <a:spAutoFit/>
+          </a:bodyPr>
+          <a:lstStyle/>
+          <a:p>
+            <a:pPr algn="l">
+              <a:lnSpc>
+                <a:spcPct val="100000"/>
+              </a:lnSpc>
+            </a:pPr>
+            <a:r>
+              <a:rPr sz="900" b="1" i="0">
+                <a:solidFill>
+                  <a:srgbClr val="14241F"/>
+                </a:solidFill>
+                <a:latin typeface="Calibri"/>
+              </a:rPr>
+              <a:t>45 – 60 днів</a:t>
+            </a:r>
+          </a:p>
+        </p:txBody>
+      </p:sp>
+      <p:sp>
+        <p:nvSpPr>
+          <p:cNvPr id="36" name="Rectangle 35"/>
+          <p:cNvSpPr/>
+          <p:nvPr/>
+        </p:nvSpPr>
+        <p:spPr>
+          <a:xfrm>
+            <a:off x="2743200" y="4023360"/>
+            <a:ext cx="2194560" cy="9144"/>
+          </a:xfrm>
+          <a:prstGeom prst="rect">
+            <a:avLst/>
+          </a:prstGeom>
+          <a:solidFill>
+            <a:srgbClr val="E6E1D8"/>
+          </a:solidFill>
+          <a:ln>
+            <a:noFill/>
+          </a:ln>
+          <a:effectLst/>
+        </p:spPr>
+        <p:style>
+          <a:lnRef idx="1">
+            <a:schemeClr val="accent1"/>
+          </a:lnRef>
+          <a:fillRef idx="3">
+            <a:schemeClr val="accent1"/>
+          </a:fillRef>
+          <a:effectRef idx="2">
+            <a:schemeClr val="accent1"/>
+          </a:effectRef>
+          <a:fontRef idx="minor">
+            <a:schemeClr val="lt1"/>
+          </a:fontRef>
+        </p:style>
+        <p:txBody>
+          <a:bodyPr rtlCol="0" anchor="ctr"/>
+          <a:lstStyle/>
+          <a:p/>
+        </p:txBody>
+      </p:sp>
+      <p:sp>
+        <p:nvSpPr>
+          <p:cNvPr id="37" name="TextBox 36"/>
+          <p:cNvSpPr txBox="1"/>
+          <p:nvPr/>
+        </p:nvSpPr>
+        <p:spPr>
+          <a:xfrm>
+            <a:off x="2743200" y="4078224"/>
+            <a:ext cx="2194560" cy="146304"/>
+          </a:xfrm>
+          <a:prstGeom prst="rect">
+            <a:avLst/>
+          </a:prstGeom>
+          <a:noFill/>
+        </p:spPr>
+        <p:txBody>
+          <a:bodyPr wrap="square" lIns="0" rIns="0" tIns="0" bIns="0" anchor="t">
+            <a:spAutoFit/>
+          </a:bodyPr>
+          <a:lstStyle/>
+          <a:p>
+            <a:pPr algn="l">
+              <a:lnSpc>
+                <a:spcPct val="100000"/>
+              </a:lnSpc>
+            </a:pPr>
+            <a:r>
+              <a:rPr sz="650" b="0" i="0">
+                <a:solidFill>
+                  <a:srgbClr val="8A938D"/>
+                </a:solidFill>
+                <a:latin typeface="Calibri"/>
+              </a:rPr>
+              <a:t>Оплата</a:t>
+            </a:r>
+          </a:p>
+        </p:txBody>
+      </p:sp>
+      <p:sp>
+        <p:nvSpPr>
+          <p:cNvPr id="38" name="TextBox 37"/>
+          <p:cNvSpPr txBox="1"/>
+          <p:nvPr/>
+        </p:nvSpPr>
+        <p:spPr>
+          <a:xfrm>
+            <a:off x="2743200" y="4206240"/>
+            <a:ext cx="2194560" cy="182880"/>
+          </a:xfrm>
+          <a:prstGeom prst="rect">
+            <a:avLst/>
+          </a:prstGeom>
+          <a:noFill/>
+        </p:spPr>
+        <p:txBody>
+          <a:bodyPr wrap="square" lIns="0" rIns="0" tIns="0" bIns="0" anchor="t">
+            <a:spAutoFit/>
+          </a:bodyPr>
+          <a:lstStyle/>
+          <a:p>
+            <a:pPr algn="l">
+              <a:lnSpc>
+                <a:spcPct val="100000"/>
+              </a:lnSpc>
+            </a:pPr>
+            <a:r>
+              <a:rPr sz="900" b="1" i="0">
+                <a:solidFill>
+                  <a:srgbClr val="14241F"/>
+                </a:solidFill>
+                <a:latin typeface="Calibri"/>
+              </a:rPr>
+              <a:t>50% депозит + 50% до ETD</a:t>
+            </a:r>
+          </a:p>
+        </p:txBody>
+      </p:sp>
+      <p:sp>
+        <p:nvSpPr>
+          <p:cNvPr id="39" name="Rectangle 38"/>
+          <p:cNvSpPr/>
+          <p:nvPr/>
+        </p:nvSpPr>
+        <p:spPr>
+          <a:xfrm>
+            <a:off x="365760" y="4425696"/>
+            <a:ext cx="2194560" cy="9144"/>
+          </a:xfrm>
+          <a:prstGeom prst="rect">
+            <a:avLst/>
+          </a:prstGeom>
+          <a:solidFill>
+            <a:srgbClr val="E6E1D8"/>
+          </a:solidFill>
+          <a:ln>
+            <a:noFill/>
+          </a:ln>
+          <a:effectLst/>
+        </p:spPr>
+        <p:style>
+          <a:lnRef idx="1">
+            <a:schemeClr val="accent1"/>
+          </a:lnRef>
+          <a:fillRef idx="3">
+            <a:schemeClr val="accent1"/>
+          </a:fillRef>
+          <a:effectRef idx="2">
+            <a:schemeClr val="accent1"/>
+          </a:effectRef>
+          <a:fontRef idx="minor">
+            <a:schemeClr val="lt1"/>
+          </a:fontRef>
+        </p:style>
+        <p:txBody>
+          <a:bodyPr rtlCol="0" anchor="ctr"/>
+          <a:lstStyle/>
+          <a:p/>
+        </p:txBody>
+      </p:sp>
+      <p:sp>
+        <p:nvSpPr>
+          <p:cNvPr id="40" name="TextBox 39"/>
+          <p:cNvSpPr txBox="1"/>
+          <p:nvPr/>
+        </p:nvSpPr>
+        <p:spPr>
+          <a:xfrm>
+            <a:off x="365760" y="4480560"/>
+            <a:ext cx="2194560" cy="146304"/>
+          </a:xfrm>
+          <a:prstGeom prst="rect">
+            <a:avLst/>
+          </a:prstGeom>
+          <a:noFill/>
+        </p:spPr>
+        <p:txBody>
+          <a:bodyPr wrap="square" lIns="0" rIns="0" tIns="0" bIns="0" anchor="t">
+            <a:spAutoFit/>
+          </a:bodyPr>
+          <a:lstStyle/>
+          <a:p>
+            <a:pPr algn="l">
+              <a:lnSpc>
+                <a:spcPct val="100000"/>
+              </a:lnSpc>
+            </a:pPr>
+            <a:r>
+              <a:rPr sz="650" b="0" i="0">
+                <a:solidFill>
+                  <a:srgbClr val="8A938D"/>
+                </a:solidFill>
+                <a:latin typeface="Calibri"/>
+              </a:rPr>
+              <a:t>Місткість 20′</a:t>
+            </a:r>
+          </a:p>
+        </p:txBody>
+      </p:sp>
+      <p:sp>
+        <p:nvSpPr>
+          <p:cNvPr id="41" name="TextBox 40"/>
+          <p:cNvSpPr txBox="1"/>
+          <p:nvPr/>
+        </p:nvSpPr>
+        <p:spPr>
+          <a:xfrm>
+            <a:off x="365760" y="4608576"/>
+            <a:ext cx="2194560" cy="182880"/>
+          </a:xfrm>
+          <a:prstGeom prst="rect">
+            <a:avLst/>
+          </a:prstGeom>
+          <a:noFill/>
+        </p:spPr>
+        <p:txBody>
+          <a:bodyPr wrap="square" lIns="0" rIns="0" tIns="0" bIns="0" anchor="t">
+            <a:spAutoFit/>
+          </a:bodyPr>
+          <a:lstStyle/>
+          <a:p>
+            <a:pPr algn="l">
+              <a:lnSpc>
+                <a:spcPct val="100000"/>
+              </a:lnSpc>
+            </a:pPr>
+            <a:r>
+              <a:rPr sz="900" b="1" i="0">
+                <a:solidFill>
+                  <a:srgbClr val="14241F"/>
+                </a:solidFill>
+                <a:latin typeface="Calibri"/>
+              </a:rPr>
+              <a:t>425 – 1 499 картонів</a:t>
+            </a:r>
+          </a:p>
+        </p:txBody>
+      </p:sp>
+      <p:sp>
+        <p:nvSpPr>
+          <p:cNvPr id="42" name="Rectangle 41"/>
+          <p:cNvSpPr/>
+          <p:nvPr/>
+        </p:nvSpPr>
+        <p:spPr>
+          <a:xfrm>
+            <a:off x="2743200" y="4425696"/>
+            <a:ext cx="2194560" cy="9144"/>
+          </a:xfrm>
+          <a:prstGeom prst="rect">
+            <a:avLst/>
+          </a:prstGeom>
+          <a:solidFill>
+            <a:srgbClr val="E6E1D8"/>
+          </a:solidFill>
+          <a:ln>
+            <a:noFill/>
+          </a:ln>
+          <a:effectLst/>
+        </p:spPr>
+        <p:style>
+          <a:lnRef idx="1">
+            <a:schemeClr val="accent1"/>
+          </a:lnRef>
+          <a:fillRef idx="3">
+            <a:schemeClr val="accent1"/>
+          </a:fillRef>
+          <a:effectRef idx="2">
+            <a:schemeClr val="accent1"/>
+          </a:effectRef>
+          <a:fontRef idx="minor">
+            <a:schemeClr val="lt1"/>
+          </a:fontRef>
+        </p:style>
+        <p:txBody>
+          <a:bodyPr rtlCol="0" anchor="ctr"/>
+          <a:lstStyle/>
+          <a:p/>
+        </p:txBody>
+      </p:sp>
+      <p:sp>
+        <p:nvSpPr>
+          <p:cNvPr id="43" name="TextBox 42"/>
+          <p:cNvSpPr txBox="1"/>
+          <p:nvPr/>
+        </p:nvSpPr>
+        <p:spPr>
+          <a:xfrm>
+            <a:off x="2743200" y="4480560"/>
+            <a:ext cx="2194560" cy="146304"/>
+          </a:xfrm>
+          <a:prstGeom prst="rect">
+            <a:avLst/>
+          </a:prstGeom>
+          <a:noFill/>
+        </p:spPr>
+        <p:txBody>
+          <a:bodyPr wrap="square" lIns="0" rIns="0" tIns="0" bIns="0" anchor="t">
+            <a:spAutoFit/>
+          </a:bodyPr>
+          <a:lstStyle/>
+          <a:p>
+            <a:pPr algn="l">
+              <a:lnSpc>
+                <a:spcPct val="100000"/>
+              </a:lnSpc>
+            </a:pPr>
+            <a:r>
+              <a:rPr sz="650" b="0" i="0">
+                <a:solidFill>
+                  <a:srgbClr val="8A938D"/>
+                </a:solidFill>
+                <a:latin typeface="Calibri"/>
+              </a:rPr>
+              <a:t>Місткість 40′HQ</a:t>
+            </a:r>
+          </a:p>
+        </p:txBody>
+      </p:sp>
+      <p:sp>
+        <p:nvSpPr>
+          <p:cNvPr id="44" name="TextBox 43"/>
+          <p:cNvSpPr txBox="1"/>
+          <p:nvPr/>
+        </p:nvSpPr>
+        <p:spPr>
+          <a:xfrm>
+            <a:off x="2743200" y="4608576"/>
+            <a:ext cx="2194560" cy="182880"/>
+          </a:xfrm>
+          <a:prstGeom prst="rect">
+            <a:avLst/>
+          </a:prstGeom>
+          <a:noFill/>
+        </p:spPr>
+        <p:txBody>
+          <a:bodyPr wrap="square" lIns="0" rIns="0" tIns="0" bIns="0" anchor="t">
+            <a:spAutoFit/>
+          </a:bodyPr>
+          <a:lstStyle/>
+          <a:p>
+            <a:pPr algn="l">
+              <a:lnSpc>
+                <a:spcPct val="100000"/>
+              </a:lnSpc>
+            </a:pPr>
+            <a:r>
+              <a:rPr sz="900" b="1" i="0">
+                <a:solidFill>
+                  <a:srgbClr val="14241F"/>
+                </a:solidFill>
+                <a:latin typeface="Calibri"/>
+              </a:rPr>
+              <a:t>959 – 3 431 картонів</a:t>
+            </a:r>
+          </a:p>
+        </p:txBody>
+      </p:sp>
+      <p:sp>
+        <p:nvSpPr>
+          <p:cNvPr id="45" name="Rectangle 44"/>
+          <p:cNvSpPr/>
+          <p:nvPr/>
+        </p:nvSpPr>
+        <p:spPr>
+          <a:xfrm>
+            <a:off x="365760" y="4809744"/>
+            <a:ext cx="8412480" cy="9144"/>
+          </a:xfrm>
+          <a:prstGeom prst="rect">
+            <a:avLst/>
+          </a:prstGeom>
+          <a:solidFill>
+            <a:srgbClr val="E6E1D8"/>
+          </a:solidFill>
+          <a:ln>
+            <a:noFill/>
+          </a:ln>
+          <a:effectLst/>
+        </p:spPr>
+        <p:style>
+          <a:lnRef idx="1">
+            <a:schemeClr val="accent1"/>
+          </a:lnRef>
+          <a:fillRef idx="3">
+            <a:schemeClr val="accent1"/>
+          </a:fillRef>
+          <a:effectRef idx="2">
+            <a:schemeClr val="accent1"/>
+          </a:effectRef>
+          <a:fontRef idx="minor">
+            <a:schemeClr val="lt1"/>
+          </a:fontRef>
+        </p:style>
+        <p:txBody>
+          <a:bodyPr rtlCol="0" anchor="ctr"/>
+          <a:lstStyle/>
+          <a:p/>
+        </p:txBody>
+      </p:sp>
+      <p:sp>
+        <p:nvSpPr>
+          <p:cNvPr id="46" name="TextBox 45"/>
           <p:cNvSpPr txBox="1"/>
           <p:nvPr/>
         </p:nvSpPr>

--- a/presentation/Постачальники_снеків_собівартість.pptx
+++ b/presentation/Постачальники_снеків_собівартість.pptx
@@ -3991,8 +3991,8 @@
         </p:nvSpPr>
         <p:spPr>
           <a:xfrm>
-            <a:off x="0" y="0"/>
-            <a:ext cx="9144000" cy="64008"/>
+            <a:off x="5349240" y="0"/>
+            <a:ext cx="3794760" cy="5143500"/>
           </a:xfrm>
           <a:prstGeom prst="rect">
             <a:avLst/>
@@ -4027,14 +4027,97 @@
       </p:sp>
       <p:sp>
         <p:nvSpPr>
-          <p:cNvPr id="4" name="Rectangle 3"/>
+          <p:cNvPr id="4" name="Rounded Rectangle 3"/>
           <p:cNvSpPr/>
           <p:nvPr/>
         </p:nvSpPr>
         <p:spPr>
           <a:xfrm>
-            <a:off x="0" y="0"/>
-            <a:ext cx="9144000" cy="2670048"/>
+            <a:off x="5806440" y="1005840"/>
+            <a:ext cx="2880360" cy="2331720"/>
+          </a:xfrm>
+          <a:prstGeom prst="roundRect">
+            <a:avLst>
+              <a:gd name="adj" fmla="val 5000"/>
+            </a:avLst>
+          </a:prstGeom>
+          <a:solidFill>
+            <a:srgbClr val="FFFFFF"/>
+          </a:solidFill>
+          <a:ln>
+            <a:noFill/>
+          </a:ln>
+          <a:effectLst/>
+        </p:spPr>
+        <p:style>
+          <a:lnRef idx="1">
+            <a:schemeClr val="accent1"/>
+          </a:lnRef>
+          <a:fillRef idx="3">
+            <a:schemeClr val="accent1"/>
+          </a:fillRef>
+          <a:effectRef idx="2">
+            <a:schemeClr val="accent1"/>
+          </a:effectRef>
+          <a:fontRef idx="minor">
+            <a:schemeClr val="lt1"/>
+          </a:fontRef>
+        </p:style>
+        <p:txBody>
+          <a:bodyPr rtlCol="0" anchor="ctr"/>
+          <a:lstStyle/>
+          <a:p/>
+        </p:txBody>
+      </p:sp>
+      <p:sp>
+        <p:nvSpPr>
+          <p:cNvPr id="5" name="TextBox 4"/>
+          <p:cNvSpPr txBox="1"/>
+          <p:nvPr/>
+        </p:nvSpPr>
+        <p:spPr>
+          <a:xfrm>
+            <a:off x="5952744" y="1298448"/>
+            <a:ext cx="2587752" cy="914400"/>
+          </a:xfrm>
+          <a:prstGeom prst="rect">
+            <a:avLst/>
+          </a:prstGeom>
+          <a:noFill/>
+        </p:spPr>
+        <p:txBody>
+          <a:bodyPr wrap="square" lIns="0" rIns="0" tIns="0" bIns="0" anchor="ctr">
+            <a:spAutoFit/>
+          </a:bodyPr>
+          <a:lstStyle/>
+          <a:p>
+            <a:pPr algn="ctr">
+              <a:lnSpc>
+                <a:spcPct val="108000"/>
+              </a:lnSpc>
+            </a:pPr>
+            <a:r>
+              <a:rPr sz="2500" b="1" i="0">
+                <a:solidFill>
+                  <a:srgbClr val="AA3922"/>
+                </a:solidFill>
+                <a:latin typeface="Cambria"/>
+              </a:rPr>
+              <a:t>ZEK</a:t>
+            </a:r>
+          </a:p>
+        </p:txBody>
+      </p:sp>
+      <p:sp>
+        <p:nvSpPr>
+          <p:cNvPr id="6" name="Rectangle 5"/>
+          <p:cNvSpPr/>
+          <p:nvPr/>
+        </p:nvSpPr>
+        <p:spPr>
+          <a:xfrm>
+            <a:off x="6944868" y="2450592"/>
+            <a:ext cx="603504" cy="32004"/>
           </a:xfrm>
           <a:prstGeom prst="rect">
             <a:avLst/>
@@ -4069,22 +4152,137 @@
       </p:sp>
       <p:sp>
         <p:nvSpPr>
-          <p:cNvPr id="5" name="Rounded Rectangle 4"/>
+          <p:cNvPr id="7" name="TextBox 6"/>
+          <p:cNvSpPr txBox="1"/>
+          <p:nvPr/>
+        </p:nvSpPr>
+        <p:spPr>
+          <a:xfrm>
+            <a:off x="5952744" y="2633472"/>
+            <a:ext cx="2587752" cy="274320"/>
+          </a:xfrm>
+          <a:prstGeom prst="rect">
+            <a:avLst/>
+          </a:prstGeom>
+          <a:noFill/>
+        </p:spPr>
+        <p:txBody>
+          <a:bodyPr wrap="square" lIns="0" rIns="0" tIns="0" bIns="0" anchor="t">
+            <a:spAutoFit/>
+          </a:bodyPr>
+          <a:lstStyle/>
+          <a:p>
+            <a:pPr algn="ctr">
+              <a:lnSpc>
+                <a:spcPct val="100000"/>
+              </a:lnSpc>
+            </a:pPr>
+            <a:r>
+              <a:rPr sz="1050" b="0" i="0">
+                <a:solidFill>
+                  <a:srgbClr val="8A938D"/>
+                </a:solidFill>
+                <a:latin typeface="Calibri"/>
+              </a:rPr>
+              <a:t>HanJin Food Co. Ltd</a:t>
+            </a:r>
+          </a:p>
+        </p:txBody>
+      </p:sp>
+      <p:sp>
+        <p:nvSpPr>
+          <p:cNvPr id="8" name="TextBox 7"/>
+          <p:cNvSpPr txBox="1"/>
+          <p:nvPr/>
+        </p:nvSpPr>
+        <p:spPr>
+          <a:xfrm>
+            <a:off x="5349240" y="3694176"/>
+            <a:ext cx="3794760" cy="182880"/>
+          </a:xfrm>
+          <a:prstGeom prst="rect">
+            <a:avLst/>
+          </a:prstGeom>
+          <a:noFill/>
+        </p:spPr>
+        <p:txBody>
+          <a:bodyPr wrap="square" lIns="0" rIns="0" tIns="0" bIns="0" anchor="t">
+            <a:spAutoFit/>
+          </a:bodyPr>
+          <a:lstStyle/>
+          <a:p>
+            <a:pPr algn="ctr">
+              <a:lnSpc>
+                <a:spcPct val="100000"/>
+              </a:lnSpc>
+            </a:pPr>
+            <a:r>
+              <a:rPr sz="700" b="1" i="0" spc="90">
+                <a:solidFill>
+                  <a:srgbClr val="E9C8C1"/>
+                </a:solidFill>
+                <a:latin typeface="Calibri"/>
+              </a:rPr>
+              <a:t>ВИРОБНИЦТВО</a:t>
+            </a:r>
+          </a:p>
+        </p:txBody>
+      </p:sp>
+      <p:sp>
+        <p:nvSpPr>
+          <p:cNvPr id="9" name="TextBox 8"/>
+          <p:cNvSpPr txBox="1"/>
+          <p:nvPr/>
+        </p:nvSpPr>
+        <p:spPr>
+          <a:xfrm>
+            <a:off x="5349240" y="3895344"/>
+            <a:ext cx="3794760" cy="274320"/>
+          </a:xfrm>
+          <a:prstGeom prst="rect">
+            <a:avLst/>
+          </a:prstGeom>
+          <a:noFill/>
+        </p:spPr>
+        <p:txBody>
+          <a:bodyPr wrap="square" lIns="0" rIns="0" tIns="0" bIns="0" anchor="t">
+            <a:spAutoFit/>
+          </a:bodyPr>
+          <a:lstStyle/>
+          <a:p>
+            <a:pPr algn="ctr">
+              <a:lnSpc>
+                <a:spcPct val="100000"/>
+              </a:lnSpc>
+            </a:pPr>
+            <a:r>
+              <a:rPr sz="1300" b="1" i="0">
+                <a:solidFill>
+                  <a:srgbClr val="FFFFFF"/>
+                </a:solidFill>
+                <a:latin typeface="Cambria"/>
+              </a:rPr>
+              <a:t>Китай</a:t>
+            </a:r>
+          </a:p>
+        </p:txBody>
+      </p:sp>
+      <p:sp>
+        <p:nvSpPr>
+          <p:cNvPr id="10" name="Rectangle 9"/>
           <p:cNvSpPr/>
           <p:nvPr/>
         </p:nvSpPr>
         <p:spPr>
           <a:xfrm>
             <a:off x="365760" y="475488"/>
-            <a:ext cx="402336" cy="402336"/>
-          </a:xfrm>
-          <a:prstGeom prst="roundRect">
-            <a:avLst>
-              <a:gd name="adj" fmla="val 10000"/>
-            </a:avLst>
+            <a:ext cx="237744" cy="237744"/>
+          </a:xfrm>
+          <a:prstGeom prst="rect">
+            <a:avLst/>
           </a:prstGeom>
           <a:solidFill>
-            <a:srgbClr val="FFFFFF"/>
+            <a:srgbClr val="B23A22"/>
           </a:solidFill>
           <a:ln>
             <a:noFill/>
@@ -4113,53 +4311,108 @@
       </p:sp>
       <p:sp>
         <p:nvSpPr>
-          <p:cNvPr id="6" name="TextBox 5"/>
-          <p:cNvSpPr txBox="1"/>
-          <p:nvPr/>
-        </p:nvSpPr>
-        <p:spPr>
-          <a:xfrm>
-            <a:off x="365760" y="475488"/>
-            <a:ext cx="402336" cy="402336"/>
-          </a:xfrm>
-          <a:prstGeom prst="rect">
-            <a:avLst/>
-          </a:prstGeom>
-          <a:noFill/>
-        </p:spPr>
-        <p:txBody>
-          <a:bodyPr wrap="square" lIns="0" rIns="0" tIns="0" bIns="0" anchor="ctr">
-            <a:spAutoFit/>
-          </a:bodyPr>
-          <a:lstStyle/>
-          <a:p>
-            <a:pPr algn="ctr">
-              <a:lnSpc>
-                <a:spcPct val="100000"/>
-              </a:lnSpc>
-            </a:pPr>
-            <a:r>
-              <a:rPr sz="1400" b="1" i="0">
-                <a:solidFill>
-                  <a:srgbClr val="AA3922"/>
+          <p:cNvPr id="11" name="TextBox 10"/>
+          <p:cNvSpPr txBox="1"/>
+          <p:nvPr/>
+        </p:nvSpPr>
+        <p:spPr>
+          <a:xfrm>
+            <a:off x="749808" y="475488"/>
+            <a:ext cx="4023360" cy="237744"/>
+          </a:xfrm>
+          <a:prstGeom prst="rect">
+            <a:avLst/>
+          </a:prstGeom>
+          <a:noFill/>
+        </p:spPr>
+        <p:txBody>
+          <a:bodyPr wrap="square" lIns="0" rIns="0" tIns="0" bIns="0" anchor="t">
+            <a:spAutoFit/>
+          </a:bodyPr>
+          <a:lstStyle/>
+          <a:p>
+            <a:pPr algn="l">
+              <a:lnSpc>
+                <a:spcPct val="100000"/>
+              </a:lnSpc>
+            </a:pPr>
+            <a:r>
+              <a:rPr sz="800" b="1" i="0" spc="90">
+                <a:solidFill>
+                  <a:srgbClr val="A23822"/>
+                </a:solidFill>
+                <a:latin typeface="Calibri"/>
+              </a:rPr>
+              <a:t>ПРОФІЛЬ ПОСТАЧАЛЬНИКА · 04</a:t>
+            </a:r>
+          </a:p>
+        </p:txBody>
+      </p:sp>
+      <p:sp>
+        <p:nvSpPr>
+          <p:cNvPr id="12" name="TextBox 11"/>
+          <p:cNvSpPr txBox="1"/>
+          <p:nvPr/>
+        </p:nvSpPr>
+        <p:spPr>
+          <a:xfrm>
+            <a:off x="365760" y="859536"/>
+            <a:ext cx="4617720" cy="914400"/>
+          </a:xfrm>
+          <a:prstGeom prst="rect">
+            <a:avLst/>
+          </a:prstGeom>
+          <a:noFill/>
+        </p:spPr>
+        <p:txBody>
+          <a:bodyPr wrap="square" lIns="0" rIns="0" tIns="0" bIns="0" anchor="t">
+            <a:spAutoFit/>
+          </a:bodyPr>
+          <a:lstStyle/>
+          <a:p>
+            <a:pPr algn="l">
+              <a:lnSpc>
+                <a:spcPct val="108000"/>
+              </a:lnSpc>
+            </a:pPr>
+            <a:r>
+              <a:rPr sz="2600" b="1" i="0">
+                <a:solidFill>
+                  <a:srgbClr val="14241F"/>
                 </a:solidFill>
                 <a:latin typeface="Cambria"/>
               </a:rPr>
-              <a:t>04</a:t>
-            </a:r>
-          </a:p>
-        </p:txBody>
-      </p:sp>
-      <p:sp>
-        <p:nvSpPr>
-          <p:cNvPr id="7" name="TextBox 6"/>
-          <p:cNvSpPr txBox="1"/>
-          <p:nvPr/>
-        </p:nvSpPr>
-        <p:spPr>
-          <a:xfrm>
-            <a:off x="914400" y="493776"/>
-            <a:ext cx="4023360" cy="182880"/>
+              <a:t>HanJin Food Co. Ltd</a:t>
+            </a:r>
+          </a:p>
+          <a:p>
+            <a:pPr algn="l">
+              <a:lnSpc>
+                <a:spcPct val="108000"/>
+              </a:lnSpc>
+            </a:pPr>
+            <a:r>
+              <a:rPr sz="2600" b="1" i="0">
+                <a:solidFill>
+                  <a:srgbClr val="14241F"/>
+                </a:solidFill>
+                <a:latin typeface="Cambria"/>
+              </a:rPr>
+              <a:t>бренд ZEK</a:t>
+            </a:r>
+          </a:p>
+        </p:txBody>
+      </p:sp>
+      <p:sp>
+        <p:nvSpPr>
+          <p:cNvPr id="13" name="TextBox 12"/>
+          <p:cNvSpPr txBox="1"/>
+          <p:nvPr/>
+        </p:nvSpPr>
+        <p:spPr>
+          <a:xfrm>
+            <a:off x="365760" y="1920240"/>
+            <a:ext cx="4617720" cy="274320"/>
           </a:xfrm>
           <a:prstGeom prst="rect">
             <a:avLst/>
@@ -4178,168 +4431,35 @@
               </a:lnSpc>
             </a:pPr>
             <a:r>
-              <a:rPr sz="700" b="1" i="0" spc="90">
-                <a:solidFill>
-                  <a:srgbClr val="E8C4BD"/>
-                </a:solidFill>
-                <a:latin typeface="Calibri"/>
-              </a:rPr>
-              <a:t>ПОСТАЧАЛЬНИК</a:t>
-            </a:r>
-          </a:p>
-        </p:txBody>
-      </p:sp>
-      <p:sp>
-        <p:nvSpPr>
-          <p:cNvPr id="8" name="TextBox 7"/>
-          <p:cNvSpPr txBox="1"/>
-          <p:nvPr/>
-        </p:nvSpPr>
-        <p:spPr>
-          <a:xfrm>
-            <a:off x="914400" y="676656"/>
-            <a:ext cx="4023360" cy="201168"/>
-          </a:xfrm>
-          <a:prstGeom prst="rect">
-            <a:avLst/>
-          </a:prstGeom>
-          <a:noFill/>
-        </p:spPr>
-        <p:txBody>
-          <a:bodyPr wrap="square" lIns="0" rIns="0" tIns="0" bIns="0" anchor="t">
-            <a:spAutoFit/>
-          </a:bodyPr>
-          <a:lstStyle/>
-          <a:p>
-            <a:pPr algn="l">
-              <a:lnSpc>
-                <a:spcPct val="100000"/>
-              </a:lnSpc>
-            </a:pPr>
-            <a:r>
-              <a:rPr sz="900" b="1" i="0" spc="90">
-                <a:solidFill>
-                  <a:srgbClr val="FFFFFF"/>
-                </a:solidFill>
-                <a:latin typeface="Calibri"/>
-              </a:rPr>
-              <a:t>ZEK</a:t>
-            </a:r>
-          </a:p>
-        </p:txBody>
-      </p:sp>
-      <p:sp>
-        <p:nvSpPr>
-          <p:cNvPr id="9" name="TextBox 8"/>
-          <p:cNvSpPr txBox="1"/>
-          <p:nvPr/>
-        </p:nvSpPr>
-        <p:spPr>
-          <a:xfrm>
-            <a:off x="365760" y="914400"/>
-            <a:ext cx="4663440" cy="804672"/>
-          </a:xfrm>
-          <a:prstGeom prst="rect">
-            <a:avLst/>
-          </a:prstGeom>
-          <a:noFill/>
-        </p:spPr>
-        <p:txBody>
-          <a:bodyPr wrap="square" lIns="0" rIns="0" tIns="0" bIns="0" anchor="t">
-            <a:spAutoFit/>
-          </a:bodyPr>
-          <a:lstStyle/>
-          <a:p>
-            <a:pPr algn="l">
-              <a:lnSpc>
-                <a:spcPct val="106000"/>
-              </a:lnSpc>
-            </a:pPr>
-            <a:r>
-              <a:rPr sz="2600" b="1" i="0">
-                <a:solidFill>
-                  <a:srgbClr val="FFFFFF"/>
-                </a:solidFill>
-                <a:latin typeface="Cambria"/>
-              </a:rPr>
-              <a:t>HanJin Food Co. Ltd</a:t>
-            </a:r>
-          </a:p>
-          <a:p>
-            <a:pPr algn="l">
-              <a:lnSpc>
-                <a:spcPct val="106000"/>
-              </a:lnSpc>
-            </a:pPr>
-            <a:r>
-              <a:rPr sz="2600" b="1" i="0">
-                <a:solidFill>
-                  <a:srgbClr val="FFFFFF"/>
-                </a:solidFill>
-                <a:latin typeface="Cambria"/>
-              </a:rPr>
-              <a:t>бренд ZEK</a:t>
-            </a:r>
-          </a:p>
-        </p:txBody>
-      </p:sp>
-      <p:sp>
-        <p:nvSpPr>
-          <p:cNvPr id="10" name="TextBox 9"/>
-          <p:cNvSpPr txBox="1"/>
-          <p:nvPr/>
-        </p:nvSpPr>
-        <p:spPr>
-          <a:xfrm>
-            <a:off x="365760" y="1901952"/>
-            <a:ext cx="2743200" cy="146304"/>
-          </a:xfrm>
-          <a:prstGeom prst="rect">
-            <a:avLst/>
-          </a:prstGeom>
-          <a:noFill/>
-        </p:spPr>
-        <p:txBody>
-          <a:bodyPr wrap="square" lIns="0" rIns="0" tIns="0" bIns="0" anchor="t">
-            <a:spAutoFit/>
-          </a:bodyPr>
-          <a:lstStyle/>
-          <a:p>
-            <a:pPr algn="l">
-              <a:lnSpc>
-                <a:spcPct val="100000"/>
-              </a:lnSpc>
-            </a:pPr>
-            <a:r>
-              <a:rPr sz="650" b="1" i="0" spc="90">
-                <a:solidFill>
-                  <a:srgbClr val="E9C8C1"/>
-                </a:solidFill>
-                <a:latin typeface="Calibri"/>
-              </a:rPr>
-              <a:t>МАРШРУТ ПОСТАЧАННЯ</a:t>
-            </a:r>
-          </a:p>
-        </p:txBody>
-      </p:sp>
-      <p:sp>
-        <p:nvSpPr>
-          <p:cNvPr id="11" name="Rounded Rectangle 10"/>
+              <a:rPr sz="1100" b="0" i="0">
+                <a:solidFill>
+                  <a:srgbClr val="A23822"/>
+                </a:solidFill>
+                <a:latin typeface="Calibri"/>
+              </a:rPr>
+              <a:t>Темпура, сендвічі та присипка з норі · Retail</a:t>
+            </a:r>
+          </a:p>
+        </p:txBody>
+      </p:sp>
+      <p:sp>
+        <p:nvSpPr>
+          <p:cNvPr id="14" name="Rounded Rectangle 13"/>
           <p:cNvSpPr/>
           <p:nvPr/>
         </p:nvSpPr>
         <p:spPr>
           <a:xfrm>
-            <a:off x="411480" y="2212848"/>
-            <a:ext cx="128016" cy="128016"/>
+            <a:off x="365760" y="2286000"/>
+            <a:ext cx="1025956" cy="274320"/>
           </a:xfrm>
           <a:prstGeom prst="roundRect">
             <a:avLst>
-              <a:gd name="adj" fmla="val 50000"/>
+              <a:gd name="adj" fmla="val 24000"/>
             </a:avLst>
           </a:prstGeom>
           <a:solidFill>
-            <a:srgbClr val="FFFFFF"/>
+            <a:srgbClr val="F6E7E4"/>
           </a:solidFill>
           <a:ln>
             <a:noFill/>
@@ -4368,598 +4488,131 @@
       </p:sp>
       <p:sp>
         <p:nvSpPr>
-          <p:cNvPr id="12" name="Rectangle 11"/>
+          <p:cNvPr id="15" name="TextBox 14"/>
+          <p:cNvSpPr txBox="1"/>
+          <p:nvPr/>
+        </p:nvSpPr>
+        <p:spPr>
+          <a:xfrm>
+            <a:off x="365760" y="2286000"/>
+            <a:ext cx="1025956" cy="274320"/>
+          </a:xfrm>
+          <a:prstGeom prst="rect">
+            <a:avLst/>
+          </a:prstGeom>
+          <a:noFill/>
+        </p:spPr>
+        <p:txBody>
+          <a:bodyPr wrap="square" lIns="0" rIns="0" tIns="0" bIns="0" anchor="ctr">
+            <a:spAutoFit/>
+          </a:bodyPr>
+          <a:lstStyle/>
+          <a:p>
+            <a:pPr algn="ctr">
+              <a:lnSpc>
+                <a:spcPct val="100000"/>
+              </a:lnSpc>
+            </a:pPr>
+            <a:r>
+              <a:rPr sz="850" b="1" i="0">
+                <a:solidFill>
+                  <a:srgbClr val="AA3922"/>
+                </a:solidFill>
+                <a:latin typeface="Calibri"/>
+              </a:rPr>
+              <a:t>FOB Qingdao</a:t>
+            </a:r>
+          </a:p>
+        </p:txBody>
+      </p:sp>
+      <p:sp>
+        <p:nvSpPr>
+          <p:cNvPr id="16" name="TextBox 15"/>
+          <p:cNvSpPr txBox="1"/>
+          <p:nvPr/>
+        </p:nvSpPr>
+        <p:spPr>
+          <a:xfrm>
+            <a:off x="365760" y="2779776"/>
+            <a:ext cx="4617720" cy="146304"/>
+          </a:xfrm>
+          <a:prstGeom prst="rect">
+            <a:avLst/>
+          </a:prstGeom>
+          <a:noFill/>
+        </p:spPr>
+        <p:txBody>
+          <a:bodyPr wrap="square" lIns="0" rIns="0" tIns="0" bIns="0" anchor="t">
+            <a:spAutoFit/>
+          </a:bodyPr>
+          <a:lstStyle/>
+          <a:p>
+            <a:pPr algn="l">
+              <a:lnSpc>
+                <a:spcPct val="100000"/>
+              </a:lnSpc>
+            </a:pPr>
+            <a:r>
+              <a:rPr sz="700" b="1" i="0" spc="90">
+                <a:solidFill>
+                  <a:srgbClr val="A23822"/>
+                </a:solidFill>
+                <a:latin typeface="Calibri"/>
+              </a:rPr>
+              <a:t>ПРО КОМПАНІЮ</a:t>
+            </a:r>
+          </a:p>
+        </p:txBody>
+      </p:sp>
+      <p:sp>
+        <p:nvSpPr>
+          <p:cNvPr id="17" name="TextBox 16"/>
+          <p:cNvSpPr txBox="1"/>
+          <p:nvPr/>
+        </p:nvSpPr>
+        <p:spPr>
+          <a:xfrm>
+            <a:off x="365760" y="2962656"/>
+            <a:ext cx="4617720" cy="731520"/>
+          </a:xfrm>
+          <a:prstGeom prst="rect">
+            <a:avLst/>
+          </a:prstGeom>
+          <a:noFill/>
+        </p:spPr>
+        <p:txBody>
+          <a:bodyPr wrap="square" lIns="0" rIns="0" tIns="0" bIns="0" anchor="t">
+            <a:spAutoFit/>
+          </a:bodyPr>
+          <a:lstStyle/>
+          <a:p>
+            <a:pPr algn="l">
+              <a:lnSpc>
+                <a:spcPct val="132000"/>
+              </a:lnSpc>
+            </a:pPr>
+            <a:r>
+              <a:rPr sz="1000" b="0" i="0">
+                <a:solidFill>
+                  <a:srgbClr val="44524C"/>
+                </a:solidFill>
+                <a:latin typeface="Calibri"/>
+              </a:rPr>
+              <a:t>Найбільший за глибиною розрахунку постачальник: 14 позицій у трьох напрямках — темпура, сендвіч і присипка з норі. Єдиний постачальник з відвантаженням із Циндао.</a:t>
+            </a:r>
+          </a:p>
+        </p:txBody>
+      </p:sp>
+      <p:sp>
+        <p:nvSpPr>
+          <p:cNvPr id="18" name="Rounded Rectangle 17"/>
           <p:cNvSpPr/>
           <p:nvPr/>
         </p:nvSpPr>
         <p:spPr>
           <a:xfrm>
-            <a:off x="676656" y="2263140"/>
-            <a:ext cx="91440" cy="27432"/>
-          </a:xfrm>
-          <a:prstGeom prst="rect">
-            <a:avLst/>
-          </a:prstGeom>
-          <a:solidFill>
-            <a:srgbClr val="D59385"/>
-          </a:solidFill>
-          <a:ln>
-            <a:noFill/>
-          </a:ln>
-          <a:effectLst/>
-        </p:spPr>
-        <p:style>
-          <a:lnRef idx="1">
-            <a:schemeClr val="accent1"/>
-          </a:lnRef>
-          <a:fillRef idx="3">
-            <a:schemeClr val="accent1"/>
-          </a:fillRef>
-          <a:effectRef idx="2">
-            <a:schemeClr val="accent1"/>
-          </a:effectRef>
-          <a:fontRef idx="minor">
-            <a:schemeClr val="lt1"/>
-          </a:fontRef>
-        </p:style>
-        <p:txBody>
-          <a:bodyPr rtlCol="0" anchor="ctr"/>
-          <a:lstStyle/>
-          <a:p/>
-        </p:txBody>
-      </p:sp>
-      <p:sp>
-        <p:nvSpPr>
-          <p:cNvPr id="13" name="Rectangle 12"/>
-          <p:cNvSpPr/>
-          <p:nvPr/>
-        </p:nvSpPr>
-        <p:spPr>
-          <a:xfrm>
-            <a:off x="859536" y="2263140"/>
-            <a:ext cx="91440" cy="27432"/>
-          </a:xfrm>
-          <a:prstGeom prst="rect">
-            <a:avLst/>
-          </a:prstGeom>
-          <a:solidFill>
-            <a:srgbClr val="D59385"/>
-          </a:solidFill>
-          <a:ln>
-            <a:noFill/>
-          </a:ln>
-          <a:effectLst/>
-        </p:spPr>
-        <p:style>
-          <a:lnRef idx="1">
-            <a:schemeClr val="accent1"/>
-          </a:lnRef>
-          <a:fillRef idx="3">
-            <a:schemeClr val="accent1"/>
-          </a:fillRef>
-          <a:effectRef idx="2">
-            <a:schemeClr val="accent1"/>
-          </a:effectRef>
-          <a:fontRef idx="minor">
-            <a:schemeClr val="lt1"/>
-          </a:fontRef>
-        </p:style>
-        <p:txBody>
-          <a:bodyPr rtlCol="0" anchor="ctr"/>
-          <a:lstStyle/>
-          <a:p/>
-        </p:txBody>
-      </p:sp>
-      <p:sp>
-        <p:nvSpPr>
-          <p:cNvPr id="14" name="Rectangle 13"/>
-          <p:cNvSpPr/>
-          <p:nvPr/>
-        </p:nvSpPr>
-        <p:spPr>
-          <a:xfrm>
-            <a:off x="1042416" y="2263140"/>
-            <a:ext cx="91440" cy="27432"/>
-          </a:xfrm>
-          <a:prstGeom prst="rect">
-            <a:avLst/>
-          </a:prstGeom>
-          <a:solidFill>
-            <a:srgbClr val="D59385"/>
-          </a:solidFill>
-          <a:ln>
-            <a:noFill/>
-          </a:ln>
-          <a:effectLst/>
-        </p:spPr>
-        <p:style>
-          <a:lnRef idx="1">
-            <a:schemeClr val="accent1"/>
-          </a:lnRef>
-          <a:fillRef idx="3">
-            <a:schemeClr val="accent1"/>
-          </a:fillRef>
-          <a:effectRef idx="2">
-            <a:schemeClr val="accent1"/>
-          </a:effectRef>
-          <a:fontRef idx="minor">
-            <a:schemeClr val="lt1"/>
-          </a:fontRef>
-        </p:style>
-        <p:txBody>
-          <a:bodyPr rtlCol="0" anchor="ctr"/>
-          <a:lstStyle/>
-          <a:p/>
-        </p:txBody>
-      </p:sp>
-      <p:sp>
-        <p:nvSpPr>
-          <p:cNvPr id="15" name="Rectangle 14"/>
-          <p:cNvSpPr/>
-          <p:nvPr/>
-        </p:nvSpPr>
-        <p:spPr>
-          <a:xfrm>
-            <a:off x="1225296" y="2263140"/>
-            <a:ext cx="91440" cy="27432"/>
-          </a:xfrm>
-          <a:prstGeom prst="rect">
-            <a:avLst/>
-          </a:prstGeom>
-          <a:solidFill>
-            <a:srgbClr val="D59385"/>
-          </a:solidFill>
-          <a:ln>
-            <a:noFill/>
-          </a:ln>
-          <a:effectLst/>
-        </p:spPr>
-        <p:style>
-          <a:lnRef idx="1">
-            <a:schemeClr val="accent1"/>
-          </a:lnRef>
-          <a:fillRef idx="3">
-            <a:schemeClr val="accent1"/>
-          </a:fillRef>
-          <a:effectRef idx="2">
-            <a:schemeClr val="accent1"/>
-          </a:effectRef>
-          <a:fontRef idx="minor">
-            <a:schemeClr val="lt1"/>
-          </a:fontRef>
-        </p:style>
-        <p:txBody>
-          <a:bodyPr rtlCol="0" anchor="ctr"/>
-          <a:lstStyle/>
-          <a:p/>
-        </p:txBody>
-      </p:sp>
-      <p:sp>
-        <p:nvSpPr>
-          <p:cNvPr id="16" name="Rectangle 15"/>
-          <p:cNvSpPr/>
-          <p:nvPr/>
-        </p:nvSpPr>
-        <p:spPr>
-          <a:xfrm>
-            <a:off x="1408176" y="2263140"/>
-            <a:ext cx="91440" cy="27432"/>
-          </a:xfrm>
-          <a:prstGeom prst="rect">
-            <a:avLst/>
-          </a:prstGeom>
-          <a:solidFill>
-            <a:srgbClr val="D59385"/>
-          </a:solidFill>
-          <a:ln>
-            <a:noFill/>
-          </a:ln>
-          <a:effectLst/>
-        </p:spPr>
-        <p:style>
-          <a:lnRef idx="1">
-            <a:schemeClr val="accent1"/>
-          </a:lnRef>
-          <a:fillRef idx="3">
-            <a:schemeClr val="accent1"/>
-          </a:fillRef>
-          <a:effectRef idx="2">
-            <a:schemeClr val="accent1"/>
-          </a:effectRef>
-          <a:fontRef idx="minor">
-            <a:schemeClr val="lt1"/>
-          </a:fontRef>
-        </p:style>
-        <p:txBody>
-          <a:bodyPr rtlCol="0" anchor="ctr"/>
-          <a:lstStyle/>
-          <a:p/>
-        </p:txBody>
-      </p:sp>
-      <p:sp>
-        <p:nvSpPr>
-          <p:cNvPr id="17" name="Rectangle 16"/>
-          <p:cNvSpPr/>
-          <p:nvPr/>
-        </p:nvSpPr>
-        <p:spPr>
-          <a:xfrm>
-            <a:off x="1591056" y="2263140"/>
-            <a:ext cx="91440" cy="27432"/>
-          </a:xfrm>
-          <a:prstGeom prst="rect">
-            <a:avLst/>
-          </a:prstGeom>
-          <a:solidFill>
-            <a:srgbClr val="D59385"/>
-          </a:solidFill>
-          <a:ln>
-            <a:noFill/>
-          </a:ln>
-          <a:effectLst/>
-        </p:spPr>
-        <p:style>
-          <a:lnRef idx="1">
-            <a:schemeClr val="accent1"/>
-          </a:lnRef>
-          <a:fillRef idx="3">
-            <a:schemeClr val="accent1"/>
-          </a:fillRef>
-          <a:effectRef idx="2">
-            <a:schemeClr val="accent1"/>
-          </a:effectRef>
-          <a:fontRef idx="minor">
-            <a:schemeClr val="lt1"/>
-          </a:fontRef>
-        </p:style>
-        <p:txBody>
-          <a:bodyPr rtlCol="0" anchor="ctr"/>
-          <a:lstStyle/>
-          <a:p/>
-        </p:txBody>
-      </p:sp>
-      <p:sp>
-        <p:nvSpPr>
-          <p:cNvPr id="18" name="Rectangle 17"/>
-          <p:cNvSpPr/>
-          <p:nvPr/>
-        </p:nvSpPr>
-        <p:spPr>
-          <a:xfrm>
-            <a:off x="1773936" y="2263140"/>
-            <a:ext cx="91440" cy="27432"/>
-          </a:xfrm>
-          <a:prstGeom prst="rect">
-            <a:avLst/>
-          </a:prstGeom>
-          <a:solidFill>
-            <a:srgbClr val="D59385"/>
-          </a:solidFill>
-          <a:ln>
-            <a:noFill/>
-          </a:ln>
-          <a:effectLst/>
-        </p:spPr>
-        <p:style>
-          <a:lnRef idx="1">
-            <a:schemeClr val="accent1"/>
-          </a:lnRef>
-          <a:fillRef idx="3">
-            <a:schemeClr val="accent1"/>
-          </a:fillRef>
-          <a:effectRef idx="2">
-            <a:schemeClr val="accent1"/>
-          </a:effectRef>
-          <a:fontRef idx="minor">
-            <a:schemeClr val="lt1"/>
-          </a:fontRef>
-        </p:style>
-        <p:txBody>
-          <a:bodyPr rtlCol="0" anchor="ctr"/>
-          <a:lstStyle/>
-          <a:p/>
-        </p:txBody>
-      </p:sp>
-      <p:sp>
-        <p:nvSpPr>
-          <p:cNvPr id="19" name="Rectangle 18"/>
-          <p:cNvSpPr/>
-          <p:nvPr/>
-        </p:nvSpPr>
-        <p:spPr>
-          <a:xfrm>
-            <a:off x="1956816" y="2263140"/>
-            <a:ext cx="91440" cy="27432"/>
-          </a:xfrm>
-          <a:prstGeom prst="rect">
-            <a:avLst/>
-          </a:prstGeom>
-          <a:solidFill>
-            <a:srgbClr val="D59385"/>
-          </a:solidFill>
-          <a:ln>
-            <a:noFill/>
-          </a:ln>
-          <a:effectLst/>
-        </p:spPr>
-        <p:style>
-          <a:lnRef idx="1">
-            <a:schemeClr val="accent1"/>
-          </a:lnRef>
-          <a:fillRef idx="3">
-            <a:schemeClr val="accent1"/>
-          </a:fillRef>
-          <a:effectRef idx="2">
-            <a:schemeClr val="accent1"/>
-          </a:effectRef>
-          <a:fontRef idx="minor">
-            <a:schemeClr val="lt1"/>
-          </a:fontRef>
-        </p:style>
-        <p:txBody>
-          <a:bodyPr rtlCol="0" anchor="ctr"/>
-          <a:lstStyle/>
-          <a:p/>
-        </p:txBody>
-      </p:sp>
-      <p:sp>
-        <p:nvSpPr>
-          <p:cNvPr id="20" name="Rectangle 19"/>
-          <p:cNvSpPr/>
-          <p:nvPr/>
-        </p:nvSpPr>
-        <p:spPr>
-          <a:xfrm>
-            <a:off x="2139696" y="2263140"/>
-            <a:ext cx="91440" cy="27432"/>
-          </a:xfrm>
-          <a:prstGeom prst="rect">
-            <a:avLst/>
-          </a:prstGeom>
-          <a:solidFill>
-            <a:srgbClr val="D59385"/>
-          </a:solidFill>
-          <a:ln>
-            <a:noFill/>
-          </a:ln>
-          <a:effectLst/>
-        </p:spPr>
-        <p:style>
-          <a:lnRef idx="1">
-            <a:schemeClr val="accent1"/>
-          </a:lnRef>
-          <a:fillRef idx="3">
-            <a:schemeClr val="accent1"/>
-          </a:fillRef>
-          <a:effectRef idx="2">
-            <a:schemeClr val="accent1"/>
-          </a:effectRef>
-          <a:fontRef idx="minor">
-            <a:schemeClr val="lt1"/>
-          </a:fontRef>
-        </p:style>
-        <p:txBody>
-          <a:bodyPr rtlCol="0" anchor="ctr"/>
-          <a:lstStyle/>
-          <a:p/>
-        </p:txBody>
-      </p:sp>
-      <p:sp>
-        <p:nvSpPr>
-          <p:cNvPr id="21" name="Rectangle 20"/>
-          <p:cNvSpPr/>
-          <p:nvPr/>
-        </p:nvSpPr>
-        <p:spPr>
-          <a:xfrm>
-            <a:off x="2322576" y="2263140"/>
-            <a:ext cx="91440" cy="27432"/>
-          </a:xfrm>
-          <a:prstGeom prst="rect">
-            <a:avLst/>
-          </a:prstGeom>
-          <a:solidFill>
-            <a:srgbClr val="D59385"/>
-          </a:solidFill>
-          <a:ln>
-            <a:noFill/>
-          </a:ln>
-          <a:effectLst/>
-        </p:spPr>
-        <p:style>
-          <a:lnRef idx="1">
-            <a:schemeClr val="accent1"/>
-          </a:lnRef>
-          <a:fillRef idx="3">
-            <a:schemeClr val="accent1"/>
-          </a:fillRef>
-          <a:effectRef idx="2">
-            <a:schemeClr val="accent1"/>
-          </a:effectRef>
-          <a:fontRef idx="minor">
-            <a:schemeClr val="lt1"/>
-          </a:fontRef>
-        </p:style>
-        <p:txBody>
-          <a:bodyPr rtlCol="0" anchor="ctr"/>
-          <a:lstStyle/>
-          <a:p/>
-        </p:txBody>
-      </p:sp>
-      <p:sp>
-        <p:nvSpPr>
-          <p:cNvPr id="22" name="Rectangle 21"/>
-          <p:cNvSpPr/>
-          <p:nvPr/>
-        </p:nvSpPr>
-        <p:spPr>
-          <a:xfrm>
-            <a:off x="2505456" y="2263140"/>
-            <a:ext cx="91440" cy="27432"/>
-          </a:xfrm>
-          <a:prstGeom prst="rect">
-            <a:avLst/>
-          </a:prstGeom>
-          <a:solidFill>
-            <a:srgbClr val="D59385"/>
-          </a:solidFill>
-          <a:ln>
-            <a:noFill/>
-          </a:ln>
-          <a:effectLst/>
-        </p:spPr>
-        <p:style>
-          <a:lnRef idx="1">
-            <a:schemeClr val="accent1"/>
-          </a:lnRef>
-          <a:fillRef idx="3">
-            <a:schemeClr val="accent1"/>
-          </a:fillRef>
-          <a:effectRef idx="2">
-            <a:schemeClr val="accent1"/>
-          </a:effectRef>
-          <a:fontRef idx="minor">
-            <a:schemeClr val="lt1"/>
-          </a:fontRef>
-        </p:style>
-        <p:txBody>
-          <a:bodyPr rtlCol="0" anchor="ctr"/>
-          <a:lstStyle/>
-          <a:p/>
-        </p:txBody>
-      </p:sp>
-      <p:sp>
-        <p:nvSpPr>
-          <p:cNvPr id="23" name="Rounded Rectangle 22"/>
-          <p:cNvSpPr/>
-          <p:nvPr/>
-        </p:nvSpPr>
-        <p:spPr>
-          <a:xfrm>
-            <a:off x="2670048" y="2212848"/>
-            <a:ext cx="128016" cy="128016"/>
-          </a:xfrm>
-          <a:prstGeom prst="roundRect">
-            <a:avLst>
-              <a:gd name="adj" fmla="val 50000"/>
-            </a:avLst>
-          </a:prstGeom>
-          <a:solidFill>
-            <a:srgbClr val="FFFFFF"/>
-          </a:solidFill>
-          <a:ln>
-            <a:noFill/>
-          </a:ln>
-          <a:effectLst/>
-        </p:spPr>
-        <p:style>
-          <a:lnRef idx="1">
-            <a:schemeClr val="accent1"/>
-          </a:lnRef>
-          <a:fillRef idx="3">
-            <a:schemeClr val="accent1"/>
-          </a:fillRef>
-          <a:effectRef idx="2">
-            <a:schemeClr val="accent1"/>
-          </a:effectRef>
-          <a:fontRef idx="minor">
-            <a:schemeClr val="lt1"/>
-          </a:fontRef>
-        </p:style>
-        <p:txBody>
-          <a:bodyPr rtlCol="0" anchor="ctr"/>
-          <a:lstStyle/>
-          <a:p/>
-        </p:txBody>
-      </p:sp>
-      <p:sp>
-        <p:nvSpPr>
-          <p:cNvPr id="24" name="TextBox 23"/>
-          <p:cNvSpPr txBox="1"/>
-          <p:nvPr/>
-        </p:nvSpPr>
-        <p:spPr>
-          <a:xfrm>
-            <a:off x="365760" y="2432304"/>
-            <a:ext cx="1371600" cy="182880"/>
-          </a:xfrm>
-          <a:prstGeom prst="rect">
-            <a:avLst/>
-          </a:prstGeom>
-          <a:noFill/>
-        </p:spPr>
-        <p:txBody>
-          <a:bodyPr wrap="square" lIns="0" rIns="0" tIns="0" bIns="0" anchor="t">
-            <a:spAutoFit/>
-          </a:bodyPr>
-          <a:lstStyle/>
-          <a:p>
-            <a:pPr algn="l">
-              <a:lnSpc>
-                <a:spcPct val="100000"/>
-              </a:lnSpc>
-            </a:pPr>
-            <a:r>
-              <a:rPr sz="800" b="1" i="0">
-                <a:solidFill>
-                  <a:srgbClr val="FFFFFF"/>
-                </a:solidFill>
-                <a:latin typeface="Calibri"/>
-              </a:rPr>
-              <a:t>FOB Qingdao</a:t>
-            </a:r>
-          </a:p>
-        </p:txBody>
-      </p:sp>
-      <p:sp>
-        <p:nvSpPr>
-          <p:cNvPr id="25" name="TextBox 24"/>
-          <p:cNvSpPr txBox="1"/>
-          <p:nvPr/>
-        </p:nvSpPr>
-        <p:spPr>
-          <a:xfrm>
-            <a:off x="1920240" y="2432304"/>
-            <a:ext cx="914400" cy="182880"/>
-          </a:xfrm>
-          <a:prstGeom prst="rect">
-            <a:avLst/>
-          </a:prstGeom>
-          <a:noFill/>
-        </p:spPr>
-        <p:txBody>
-          <a:bodyPr wrap="square" lIns="0" rIns="0" tIns="0" bIns="0" anchor="t">
-            <a:spAutoFit/>
-          </a:bodyPr>
-          <a:lstStyle/>
-          <a:p>
-            <a:pPr algn="r">
-              <a:lnSpc>
-                <a:spcPct val="100000"/>
-              </a:lnSpc>
-            </a:pPr>
-            <a:r>
-              <a:rPr sz="800" b="1" i="0">
-                <a:solidFill>
-                  <a:srgbClr val="FFFFFF"/>
-                </a:solidFill>
-                <a:latin typeface="Calibri"/>
-              </a:rPr>
-              <a:t>Україна</a:t>
-            </a:r>
-          </a:p>
-        </p:txBody>
-      </p:sp>
-      <p:sp>
-        <p:nvSpPr>
-          <p:cNvPr id="26" name="Rounded Rectangle 25"/>
-          <p:cNvSpPr/>
-          <p:nvPr/>
-        </p:nvSpPr>
-        <p:spPr>
-          <a:xfrm>
-            <a:off x="5120640" y="1300601"/>
-            <a:ext cx="1755648" cy="2208784"/>
+            <a:off x="365760" y="3803904"/>
+            <a:ext cx="1481328" cy="859536"/>
           </a:xfrm>
           <a:prstGeom prst="roundRect">
             <a:avLst>
@@ -4996,40 +4649,152 @@
           <a:p/>
         </p:txBody>
       </p:sp>
-      <p:pic>
-        <p:nvPicPr>
-          <p:cNvPr id="27" name="Picture 26" descr="zek_tempura_corn30.png"/>
-          <p:cNvPicPr>
-            <a:picLocks noChangeAspect="1"/>
-          </p:cNvPicPr>
-          <p:nvPr/>
-        </p:nvPicPr>
-        <p:blipFill>
-          <a:blip r:embed="rId2"/>
-          <a:stretch>
-            <a:fillRect/>
-          </a:stretch>
-        </p:blipFill>
-        <p:spPr>
-          <a:xfrm>
-            <a:off x="5241544" y="1419473"/>
-            <a:ext cx="1513840" cy="1971040"/>
-          </a:xfrm>
-          <a:prstGeom prst="rect">
-            <a:avLst/>
-          </a:prstGeom>
-        </p:spPr>
-      </p:pic>
-      <p:sp>
-        <p:nvSpPr>
-          <p:cNvPr id="28" name="Rounded Rectangle 27"/>
+      <p:sp>
+        <p:nvSpPr>
+          <p:cNvPr id="19" name="Rectangle 18"/>
           <p:cNvSpPr/>
           <p:nvPr/>
         </p:nvSpPr>
         <p:spPr>
           <a:xfrm>
-            <a:off x="7022592" y="1300601"/>
-            <a:ext cx="1755648" cy="2208784"/>
+            <a:off x="365760" y="3803904"/>
+            <a:ext cx="1481328" cy="45720"/>
+          </a:xfrm>
+          <a:prstGeom prst="rect">
+            <a:avLst/>
+          </a:prstGeom>
+          <a:solidFill>
+            <a:srgbClr val="B23A22"/>
+          </a:solidFill>
+          <a:ln>
+            <a:noFill/>
+          </a:ln>
+          <a:effectLst/>
+        </p:spPr>
+        <p:style>
+          <a:lnRef idx="1">
+            <a:schemeClr val="accent1"/>
+          </a:lnRef>
+          <a:fillRef idx="3">
+            <a:schemeClr val="accent1"/>
+          </a:fillRef>
+          <a:effectRef idx="2">
+            <a:schemeClr val="accent1"/>
+          </a:effectRef>
+          <a:fontRef idx="minor">
+            <a:schemeClr val="lt1"/>
+          </a:fontRef>
+        </p:style>
+        <p:txBody>
+          <a:bodyPr rtlCol="0" anchor="ctr"/>
+          <a:lstStyle/>
+          <a:p/>
+        </p:txBody>
+      </p:sp>
+      <p:sp>
+        <p:nvSpPr>
+          <p:cNvPr id="20" name="TextBox 19"/>
+          <p:cNvSpPr txBox="1"/>
+          <p:nvPr/>
+        </p:nvSpPr>
+        <p:spPr>
+          <a:xfrm>
+            <a:off x="365760" y="3950208"/>
+            <a:ext cx="1481328" cy="292608"/>
+          </a:xfrm>
+          <a:prstGeom prst="rect">
+            <a:avLst/>
+          </a:prstGeom>
+          <a:noFill/>
+        </p:spPr>
+        <p:txBody>
+          <a:bodyPr wrap="square" lIns="0" rIns="0" tIns="0" bIns="0" anchor="t">
+            <a:spAutoFit/>
+          </a:bodyPr>
+          <a:lstStyle/>
+          <a:p>
+            <a:pPr algn="ctr">
+              <a:lnSpc>
+                <a:spcPct val="100000"/>
+              </a:lnSpc>
+            </a:pPr>
+            <a:r>
+              <a:rPr sz="1700" b="1" i="0">
+                <a:solidFill>
+                  <a:srgbClr val="AA3922"/>
+                </a:solidFill>
+                <a:latin typeface="Cambria"/>
+              </a:rPr>
+              <a:t>14</a:t>
+            </a:r>
+          </a:p>
+        </p:txBody>
+      </p:sp>
+      <p:sp>
+        <p:nvSpPr>
+          <p:cNvPr id="21" name="TextBox 20"/>
+          <p:cNvSpPr txBox="1"/>
+          <p:nvPr/>
+        </p:nvSpPr>
+        <p:spPr>
+          <a:xfrm>
+            <a:off x="457200" y="4279392"/>
+            <a:ext cx="1298448" cy="329184"/>
+          </a:xfrm>
+          <a:prstGeom prst="rect">
+            <a:avLst/>
+          </a:prstGeom>
+          <a:noFill/>
+        </p:spPr>
+        <p:txBody>
+          <a:bodyPr wrap="square" lIns="0" rIns="0" tIns="0" bIns="0" anchor="t">
+            <a:spAutoFit/>
+          </a:bodyPr>
+          <a:lstStyle/>
+          <a:p>
+            <a:pPr algn="ctr">
+              <a:lnSpc>
+                <a:spcPct val="114000"/>
+              </a:lnSpc>
+            </a:pPr>
+            <a:r>
+              <a:rPr sz="700" b="0" i="0">
+                <a:solidFill>
+                  <a:srgbClr val="8A938D"/>
+                </a:solidFill>
+                <a:latin typeface="Calibri"/>
+              </a:rPr>
+              <a:t>SKU із розрахованою</a:t>
+            </a:r>
+          </a:p>
+          <a:p>
+            <a:pPr algn="ctr">
+              <a:lnSpc>
+                <a:spcPct val="114000"/>
+              </a:lnSpc>
+            </a:pPr>
+            <a:r>
+              <a:rPr sz="700" b="0" i="0">
+                <a:solidFill>
+                  <a:srgbClr val="8A938D"/>
+                </a:solidFill>
+                <a:latin typeface="Calibri"/>
+              </a:rPr>
+              <a:t>собівартістю</a:t>
+            </a:r>
+          </a:p>
+        </p:txBody>
+      </p:sp>
+      <p:sp>
+        <p:nvSpPr>
+          <p:cNvPr id="22" name="Rounded Rectangle 21"/>
+          <p:cNvSpPr/>
+          <p:nvPr/>
+        </p:nvSpPr>
+        <p:spPr>
+          <a:xfrm>
+            <a:off x="1979676" y="3803904"/>
+            <a:ext cx="1481328" cy="859536"/>
           </a:xfrm>
           <a:prstGeom prst="roundRect">
             <a:avLst>
@@ -5066,163 +4831,22 @@
           <a:p/>
         </p:txBody>
       </p:sp>
-      <p:pic>
-        <p:nvPicPr>
-          <p:cNvPr id="29" name="Picture 28" descr="zek_topping_veg35.png"/>
-          <p:cNvPicPr>
-            <a:picLocks noChangeAspect="1"/>
-          </p:cNvPicPr>
-          <p:nvPr/>
-        </p:nvPicPr>
-        <p:blipFill>
-          <a:blip r:embed="rId3"/>
-          <a:stretch>
-            <a:fillRect/>
-          </a:stretch>
-        </p:blipFill>
-        <p:spPr>
-          <a:xfrm>
-            <a:off x="7179056" y="1429633"/>
-            <a:ext cx="1442720" cy="1950720"/>
-          </a:xfrm>
-          <a:prstGeom prst="rect">
-            <a:avLst/>
-          </a:prstGeom>
-        </p:spPr>
-      </p:pic>
-      <p:sp>
-        <p:nvSpPr>
-          <p:cNvPr id="30" name="TextBox 29"/>
-          <p:cNvSpPr txBox="1"/>
-          <p:nvPr/>
-        </p:nvSpPr>
-        <p:spPr>
-          <a:xfrm>
-            <a:off x="5120640" y="3637401"/>
-            <a:ext cx="3657600" cy="182880"/>
-          </a:xfrm>
-          <a:prstGeom prst="rect">
-            <a:avLst/>
-          </a:prstGeom>
-          <a:noFill/>
-        </p:spPr>
-        <p:txBody>
-          <a:bodyPr wrap="square" lIns="0" rIns="0" tIns="0" bIns="0" anchor="t">
-            <a:spAutoFit/>
-          </a:bodyPr>
-          <a:lstStyle/>
-          <a:p>
-            <a:pPr algn="ctr">
-              <a:lnSpc>
-                <a:spcPct val="100000"/>
-              </a:lnSpc>
-            </a:pPr>
-            <a:r>
-              <a:rPr sz="750" b="0" i="0">
-                <a:solidFill>
-                  <a:srgbClr val="8A938D"/>
-                </a:solidFill>
-                <a:latin typeface="Calibri"/>
-              </a:rPr>
-              <a:t>14 позицій із розрахованою собівартістю</a:t>
-            </a:r>
-          </a:p>
-        </p:txBody>
-      </p:sp>
-      <p:sp>
-        <p:nvSpPr>
-          <p:cNvPr id="31" name="TextBox 30"/>
-          <p:cNvSpPr txBox="1"/>
-          <p:nvPr/>
-        </p:nvSpPr>
-        <p:spPr>
-          <a:xfrm>
-            <a:off x="365760" y="2926080"/>
-            <a:ext cx="4617720" cy="822960"/>
-          </a:xfrm>
-          <a:prstGeom prst="rect">
-            <a:avLst/>
-          </a:prstGeom>
-          <a:noFill/>
-        </p:spPr>
-        <p:txBody>
-          <a:bodyPr wrap="square" lIns="0" rIns="0" tIns="0" bIns="0" anchor="t">
-            <a:spAutoFit/>
-          </a:bodyPr>
-          <a:lstStyle/>
-          <a:p>
-            <a:pPr algn="l">
-              <a:lnSpc>
-                <a:spcPct val="134000"/>
-              </a:lnSpc>
-            </a:pPr>
-            <a:r>
-              <a:rPr sz="1050" b="0" i="0">
-                <a:solidFill>
-                  <a:srgbClr val="44524C"/>
-                </a:solidFill>
-                <a:latin typeface="Calibri"/>
-              </a:rPr>
-              <a:t>Найбільший за глибиною розрахунку постачальник: 14 позицій у трьох напрямках — темпура, сендвіч і присипка з норі. Єдиний постачальник з відвантаженням із Циндао.</a:t>
-            </a:r>
-          </a:p>
-        </p:txBody>
-      </p:sp>
-      <p:sp>
-        <p:nvSpPr>
-          <p:cNvPr id="32" name="TextBox 31"/>
-          <p:cNvSpPr txBox="1"/>
-          <p:nvPr/>
-        </p:nvSpPr>
-        <p:spPr>
-          <a:xfrm>
-            <a:off x="365760" y="3803904"/>
-            <a:ext cx="4617720" cy="146304"/>
-          </a:xfrm>
-          <a:prstGeom prst="rect">
-            <a:avLst/>
-          </a:prstGeom>
-          <a:noFill/>
-        </p:spPr>
-        <p:txBody>
-          <a:bodyPr wrap="square" lIns="0" rIns="0" tIns="0" bIns="0" anchor="t">
-            <a:spAutoFit/>
-          </a:bodyPr>
-          <a:lstStyle/>
-          <a:p>
-            <a:pPr algn="l">
-              <a:lnSpc>
-                <a:spcPct val="100000"/>
-              </a:lnSpc>
-            </a:pPr>
-            <a:r>
-              <a:rPr sz="700" b="1" i="0" spc="90">
-                <a:solidFill>
-                  <a:srgbClr val="A23822"/>
-                </a:solidFill>
-                <a:latin typeface="Calibri"/>
-              </a:rPr>
-              <a:t>ВИРОБНИЦТВО І УМОВИ ПОСТАВКИ</a:t>
-            </a:r>
-          </a:p>
-        </p:txBody>
-      </p:sp>
-      <p:sp>
-        <p:nvSpPr>
-          <p:cNvPr id="33" name="Rectangle 32"/>
+      <p:sp>
+        <p:nvSpPr>
+          <p:cNvPr id="23" name="Rectangle 22"/>
           <p:cNvSpPr/>
           <p:nvPr/>
         </p:nvSpPr>
         <p:spPr>
           <a:xfrm>
-            <a:off x="365760" y="4023360"/>
-            <a:ext cx="2194560" cy="9144"/>
+            <a:off x="1979676" y="3803904"/>
+            <a:ext cx="1481328" cy="45720"/>
           </a:xfrm>
           <a:prstGeom prst="rect">
             <a:avLst/>
           </a:prstGeom>
           <a:solidFill>
-            <a:srgbClr val="E6E1D8"/>
+            <a:srgbClr val="B23A22"/>
           </a:solidFill>
           <a:ln>
             <a:noFill/>
@@ -5251,14 +4875,14 @@
       </p:sp>
       <p:sp>
         <p:nvSpPr>
-          <p:cNvPr id="34" name="TextBox 33"/>
-          <p:cNvSpPr txBox="1"/>
-          <p:nvPr/>
-        </p:nvSpPr>
-        <p:spPr>
-          <a:xfrm>
-            <a:off x="365760" y="4078224"/>
-            <a:ext cx="2194560" cy="146304"/>
+          <p:cNvPr id="24" name="TextBox 23"/>
+          <p:cNvSpPr txBox="1"/>
+          <p:nvPr/>
+        </p:nvSpPr>
+        <p:spPr>
+          <a:xfrm>
+            <a:off x="1979676" y="3950208"/>
+            <a:ext cx="1481328" cy="292608"/>
           </a:xfrm>
           <a:prstGeom prst="rect">
             <a:avLst/>
@@ -5271,78 +4895,140 @@
           </a:bodyPr>
           <a:lstStyle/>
           <a:p>
-            <a:pPr algn="l">
-              <a:lnSpc>
-                <a:spcPct val="100000"/>
-              </a:lnSpc>
-            </a:pPr>
-            <a:r>
-              <a:rPr sz="650" b="0" i="0">
+            <a:pPr algn="ctr">
+              <a:lnSpc>
+                <a:spcPct val="100000"/>
+              </a:lnSpc>
+            </a:pPr>
+            <a:r>
+              <a:rPr sz="1700" b="1" i="0">
+                <a:solidFill>
+                  <a:srgbClr val="AA3922"/>
+                </a:solidFill>
+                <a:latin typeface="Cambria"/>
+              </a:rPr>
+              <a:t>3</a:t>
+            </a:r>
+          </a:p>
+        </p:txBody>
+      </p:sp>
+      <p:sp>
+        <p:nvSpPr>
+          <p:cNvPr id="25" name="TextBox 24"/>
+          <p:cNvSpPr txBox="1"/>
+          <p:nvPr/>
+        </p:nvSpPr>
+        <p:spPr>
+          <a:xfrm>
+            <a:off x="2071116" y="4279392"/>
+            <a:ext cx="1298448" cy="329184"/>
+          </a:xfrm>
+          <a:prstGeom prst="rect">
+            <a:avLst/>
+          </a:prstGeom>
+          <a:noFill/>
+        </p:spPr>
+        <p:txBody>
+          <a:bodyPr wrap="square" lIns="0" rIns="0" tIns="0" bIns="0" anchor="t">
+            <a:spAutoFit/>
+          </a:bodyPr>
+          <a:lstStyle/>
+          <a:p>
+            <a:pPr algn="ctr">
+              <a:lnSpc>
+                <a:spcPct val="114000"/>
+              </a:lnSpc>
+            </a:pPr>
+            <a:r>
+              <a:rPr sz="700" b="0" i="0">
                 <a:solidFill>
                   <a:srgbClr val="8A938D"/>
                 </a:solidFill>
                 <a:latin typeface="Calibri"/>
               </a:rPr>
-              <a:t>Фасовка</a:t>
-            </a:r>
-          </a:p>
-        </p:txBody>
-      </p:sp>
-      <p:sp>
-        <p:nvSpPr>
-          <p:cNvPr id="35" name="TextBox 34"/>
-          <p:cNvSpPr txBox="1"/>
-          <p:nvPr/>
-        </p:nvSpPr>
-        <p:spPr>
-          <a:xfrm>
-            <a:off x="365760" y="4206240"/>
-            <a:ext cx="2194560" cy="182880"/>
-          </a:xfrm>
-          <a:prstGeom prst="rect">
-            <a:avLst/>
-          </a:prstGeom>
-          <a:noFill/>
-        </p:spPr>
-        <p:txBody>
-          <a:bodyPr wrap="square" lIns="0" rIns="0" tIns="0" bIns="0" anchor="t">
-            <a:spAutoFit/>
-          </a:bodyPr>
-          <a:lstStyle/>
-          <a:p>
-            <a:pPr algn="l">
-              <a:lnSpc>
-                <a:spcPct val="100000"/>
-              </a:lnSpc>
-            </a:pPr>
-            <a:r>
-              <a:rPr sz="900" b="1" i="0">
-                <a:solidFill>
-                  <a:srgbClr val="14241F"/>
-                </a:solidFill>
-                <a:latin typeface="Calibri"/>
-              </a:rPr>
-              <a:t>8 – 36 шт / картон</a:t>
-            </a:r>
-          </a:p>
-        </p:txBody>
-      </p:sp>
-      <p:sp>
-        <p:nvSpPr>
-          <p:cNvPr id="36" name="Rectangle 35"/>
+              <a:t>продуктові</a:t>
+            </a:r>
+          </a:p>
+          <a:p>
+            <a:pPr algn="ctr">
+              <a:lnSpc>
+                <a:spcPct val="114000"/>
+              </a:lnSpc>
+            </a:pPr>
+            <a:r>
+              <a:rPr sz="700" b="0" i="0">
+                <a:solidFill>
+                  <a:srgbClr val="8A938D"/>
+                </a:solidFill>
+                <a:latin typeface="Calibri"/>
+              </a:rPr>
+              <a:t>напрямки</a:t>
+            </a:r>
+          </a:p>
+        </p:txBody>
+      </p:sp>
+      <p:sp>
+        <p:nvSpPr>
+          <p:cNvPr id="26" name="Rounded Rectangle 25"/>
           <p:cNvSpPr/>
           <p:nvPr/>
         </p:nvSpPr>
         <p:spPr>
           <a:xfrm>
-            <a:off x="2743200" y="4023360"/>
-            <a:ext cx="2194560" cy="9144"/>
-          </a:xfrm>
-          <a:prstGeom prst="rect">
-            <a:avLst/>
+            <a:off x="3593592" y="3803904"/>
+            <a:ext cx="1481328" cy="859536"/>
+          </a:xfrm>
+          <a:prstGeom prst="roundRect">
+            <a:avLst>
+              <a:gd name="adj" fmla="val 6000"/>
+            </a:avLst>
           </a:prstGeom>
           <a:solidFill>
-            <a:srgbClr val="E6E1D8"/>
+            <a:srgbClr val="FFFFFF"/>
+          </a:solidFill>
+          <a:ln w="9525">
+            <a:solidFill>
+              <a:srgbClr val="E6E1D8"/>
+            </a:solidFill>
+          </a:ln>
+          <a:effectLst/>
+        </p:spPr>
+        <p:style>
+          <a:lnRef idx="1">
+            <a:schemeClr val="accent1"/>
+          </a:lnRef>
+          <a:fillRef idx="3">
+            <a:schemeClr val="accent1"/>
+          </a:fillRef>
+          <a:effectRef idx="2">
+            <a:schemeClr val="accent1"/>
+          </a:effectRef>
+          <a:fontRef idx="minor">
+            <a:schemeClr val="lt1"/>
+          </a:fontRef>
+        </p:style>
+        <p:txBody>
+          <a:bodyPr rtlCol="0" anchor="ctr"/>
+          <a:lstStyle/>
+          <a:p/>
+        </p:txBody>
+      </p:sp>
+      <p:sp>
+        <p:nvSpPr>
+          <p:cNvPr id="27" name="Rectangle 26"/>
+          <p:cNvSpPr/>
+          <p:nvPr/>
+        </p:nvSpPr>
+        <p:spPr>
+          <a:xfrm>
+            <a:off x="3593592" y="3803904"/>
+            <a:ext cx="1481328" cy="45720"/>
+          </a:xfrm>
+          <a:prstGeom prst="rect">
+            <a:avLst/>
+          </a:prstGeom>
+          <a:solidFill>
+            <a:srgbClr val="B23A22"/>
           </a:solidFill>
           <a:ln>
             <a:noFill/>
@@ -5371,14 +5057,14 @@
       </p:sp>
       <p:sp>
         <p:nvSpPr>
-          <p:cNvPr id="37" name="TextBox 36"/>
-          <p:cNvSpPr txBox="1"/>
-          <p:nvPr/>
-        </p:nvSpPr>
-        <p:spPr>
-          <a:xfrm>
-            <a:off x="2743200" y="4078224"/>
-            <a:ext cx="2194560" cy="146304"/>
+          <p:cNvPr id="28" name="TextBox 27"/>
+          <p:cNvSpPr txBox="1"/>
+          <p:nvPr/>
+        </p:nvSpPr>
+        <p:spPr>
+          <a:xfrm>
+            <a:off x="3593592" y="3950208"/>
+            <a:ext cx="1481328" cy="292608"/>
           </a:xfrm>
           <a:prstGeom prst="rect">
             <a:avLst/>
@@ -5391,347 +5077,81 @@
           </a:bodyPr>
           <a:lstStyle/>
           <a:p>
-            <a:pPr algn="l">
-              <a:lnSpc>
-                <a:spcPct val="100000"/>
-              </a:lnSpc>
-            </a:pPr>
-            <a:r>
-              <a:rPr sz="650" b="0" i="0">
+            <a:pPr algn="ctr">
+              <a:lnSpc>
+                <a:spcPct val="100000"/>
+              </a:lnSpc>
+            </a:pPr>
+            <a:r>
+              <a:rPr sz="1700" b="1" i="0">
+                <a:solidFill>
+                  <a:srgbClr val="AA3922"/>
+                </a:solidFill>
+                <a:latin typeface="Cambria"/>
+              </a:rPr>
+              <a:t>2 370</a:t>
+            </a:r>
+          </a:p>
+        </p:txBody>
+      </p:sp>
+      <p:sp>
+        <p:nvSpPr>
+          <p:cNvPr id="29" name="TextBox 28"/>
+          <p:cNvSpPr txBox="1"/>
+          <p:nvPr/>
+        </p:nvSpPr>
+        <p:spPr>
+          <a:xfrm>
+            <a:off x="3685032" y="4279392"/>
+            <a:ext cx="1298448" cy="329184"/>
+          </a:xfrm>
+          <a:prstGeom prst="rect">
+            <a:avLst/>
+          </a:prstGeom>
+          <a:noFill/>
+        </p:spPr>
+        <p:txBody>
+          <a:bodyPr wrap="square" lIns="0" rIns="0" tIns="0" bIns="0" anchor="t">
+            <a:spAutoFit/>
+          </a:bodyPr>
+          <a:lstStyle/>
+          <a:p>
+            <a:pPr algn="ctr">
+              <a:lnSpc>
+                <a:spcPct val="114000"/>
+              </a:lnSpc>
+            </a:pPr>
+            <a:r>
+              <a:rPr sz="700" b="0" i="0">
                 <a:solidFill>
                   <a:srgbClr val="8A938D"/>
                 </a:solidFill>
                 <a:latin typeface="Calibri"/>
               </a:rPr>
-              <a:t>Термін придатності</a:t>
-            </a:r>
-          </a:p>
-        </p:txBody>
-      </p:sp>
-      <p:sp>
-        <p:nvSpPr>
-          <p:cNvPr id="38" name="TextBox 37"/>
-          <p:cNvSpPr txBox="1"/>
-          <p:nvPr/>
-        </p:nvSpPr>
-        <p:spPr>
-          <a:xfrm>
-            <a:off x="2743200" y="4206240"/>
-            <a:ext cx="2194560" cy="182880"/>
-          </a:xfrm>
-          <a:prstGeom prst="rect">
-            <a:avLst/>
-          </a:prstGeom>
-          <a:noFill/>
-        </p:spPr>
-        <p:txBody>
-          <a:bodyPr wrap="square" lIns="0" rIns="0" tIns="0" bIns="0" anchor="t">
-            <a:spAutoFit/>
-          </a:bodyPr>
-          <a:lstStyle/>
-          <a:p>
-            <a:pPr algn="l">
-              <a:lnSpc>
-                <a:spcPct val="100000"/>
-              </a:lnSpc>
-            </a:pPr>
-            <a:r>
-              <a:rPr sz="900" b="1" i="0">
-                <a:solidFill>
-                  <a:srgbClr val="14241F"/>
-                </a:solidFill>
-                <a:latin typeface="Calibri"/>
-              </a:rPr>
-              <a:t>9 – 12 місяців</a:t>
-            </a:r>
-          </a:p>
-        </p:txBody>
-      </p:sp>
-      <p:sp>
-        <p:nvSpPr>
-          <p:cNvPr id="39" name="Rectangle 38"/>
-          <p:cNvSpPr/>
-          <p:nvPr/>
-        </p:nvSpPr>
-        <p:spPr>
-          <a:xfrm>
-            <a:off x="365760" y="4425696"/>
-            <a:ext cx="2194560" cy="9144"/>
-          </a:xfrm>
-          <a:prstGeom prst="rect">
-            <a:avLst/>
-          </a:prstGeom>
-          <a:solidFill>
-            <a:srgbClr val="E6E1D8"/>
-          </a:solidFill>
-          <a:ln>
-            <a:noFill/>
-          </a:ln>
-          <a:effectLst/>
-        </p:spPr>
-        <p:style>
-          <a:lnRef idx="1">
-            <a:schemeClr val="accent1"/>
-          </a:lnRef>
-          <a:fillRef idx="3">
-            <a:schemeClr val="accent1"/>
-          </a:fillRef>
-          <a:effectRef idx="2">
-            <a:schemeClr val="accent1"/>
-          </a:effectRef>
-          <a:fontRef idx="minor">
-            <a:schemeClr val="lt1"/>
-          </a:fontRef>
-        </p:style>
-        <p:txBody>
-          <a:bodyPr rtlCol="0" anchor="ctr"/>
-          <a:lstStyle/>
-          <a:p/>
-        </p:txBody>
-      </p:sp>
-      <p:sp>
-        <p:nvSpPr>
-          <p:cNvPr id="40" name="TextBox 39"/>
-          <p:cNvSpPr txBox="1"/>
-          <p:nvPr/>
-        </p:nvSpPr>
-        <p:spPr>
-          <a:xfrm>
-            <a:off x="365760" y="4480560"/>
-            <a:ext cx="2194560" cy="146304"/>
-          </a:xfrm>
-          <a:prstGeom prst="rect">
-            <a:avLst/>
-          </a:prstGeom>
-          <a:noFill/>
-        </p:spPr>
-        <p:txBody>
-          <a:bodyPr wrap="square" lIns="0" rIns="0" tIns="0" bIns="0" anchor="t">
-            <a:spAutoFit/>
-          </a:bodyPr>
-          <a:lstStyle/>
-          <a:p>
-            <a:pPr algn="l">
-              <a:lnSpc>
-                <a:spcPct val="100000"/>
-              </a:lnSpc>
-            </a:pPr>
-            <a:r>
-              <a:rPr sz="650" b="0" i="0">
+              <a:t>картонів</a:t>
+            </a:r>
+          </a:p>
+          <a:p>
+            <a:pPr algn="ctr">
+              <a:lnSpc>
+                <a:spcPct val="114000"/>
+              </a:lnSpc>
+            </a:pPr>
+            <a:r>
+              <a:rPr sz="700" b="0" i="0">
                 <a:solidFill>
                   <a:srgbClr val="8A938D"/>
                 </a:solidFill>
                 <a:latin typeface="Calibri"/>
               </a:rPr>
-              <a:t>Місткість 20′</a:t>
-            </a:r>
-          </a:p>
-        </p:txBody>
-      </p:sp>
-      <p:sp>
-        <p:nvSpPr>
-          <p:cNvPr id="41" name="TextBox 40"/>
-          <p:cNvSpPr txBox="1"/>
-          <p:nvPr/>
-        </p:nvSpPr>
-        <p:spPr>
-          <a:xfrm>
-            <a:off x="365760" y="4608576"/>
-            <a:ext cx="2194560" cy="182880"/>
-          </a:xfrm>
-          <a:prstGeom prst="rect">
-            <a:avLst/>
-          </a:prstGeom>
-          <a:noFill/>
-        </p:spPr>
-        <p:txBody>
-          <a:bodyPr wrap="square" lIns="0" rIns="0" tIns="0" bIns="0" anchor="t">
-            <a:spAutoFit/>
-          </a:bodyPr>
-          <a:lstStyle/>
-          <a:p>
-            <a:pPr algn="l">
-              <a:lnSpc>
-                <a:spcPct val="100000"/>
-              </a:lnSpc>
-            </a:pPr>
-            <a:r>
-              <a:rPr sz="900" b="1" i="0">
-                <a:solidFill>
-                  <a:srgbClr val="14241F"/>
-                </a:solidFill>
-                <a:latin typeface="Calibri"/>
-              </a:rPr>
-              <a:t>350 – 4 000 картонів</a:t>
-            </a:r>
-          </a:p>
-        </p:txBody>
-      </p:sp>
-      <p:sp>
-        <p:nvSpPr>
-          <p:cNvPr id="42" name="Rectangle 41"/>
-          <p:cNvSpPr/>
-          <p:nvPr/>
-        </p:nvSpPr>
-        <p:spPr>
-          <a:xfrm>
-            <a:off x="2743200" y="4425696"/>
-            <a:ext cx="2194560" cy="9144"/>
-          </a:xfrm>
-          <a:prstGeom prst="rect">
-            <a:avLst/>
-          </a:prstGeom>
-          <a:solidFill>
-            <a:srgbClr val="E6E1D8"/>
-          </a:solidFill>
-          <a:ln>
-            <a:noFill/>
-          </a:ln>
-          <a:effectLst/>
-        </p:spPr>
-        <p:style>
-          <a:lnRef idx="1">
-            <a:schemeClr val="accent1"/>
-          </a:lnRef>
-          <a:fillRef idx="3">
-            <a:schemeClr val="accent1"/>
-          </a:fillRef>
-          <a:effectRef idx="2">
-            <a:schemeClr val="accent1"/>
-          </a:effectRef>
-          <a:fontRef idx="minor">
-            <a:schemeClr val="lt1"/>
-          </a:fontRef>
-        </p:style>
-        <p:txBody>
-          <a:bodyPr rtlCol="0" anchor="ctr"/>
-          <a:lstStyle/>
-          <a:p/>
-        </p:txBody>
-      </p:sp>
-      <p:sp>
-        <p:nvSpPr>
-          <p:cNvPr id="43" name="TextBox 42"/>
-          <p:cNvSpPr txBox="1"/>
-          <p:nvPr/>
-        </p:nvSpPr>
-        <p:spPr>
-          <a:xfrm>
-            <a:off x="2743200" y="4480560"/>
-            <a:ext cx="2194560" cy="146304"/>
-          </a:xfrm>
-          <a:prstGeom prst="rect">
-            <a:avLst/>
-          </a:prstGeom>
-          <a:noFill/>
-        </p:spPr>
-        <p:txBody>
-          <a:bodyPr wrap="square" lIns="0" rIns="0" tIns="0" bIns="0" anchor="t">
-            <a:spAutoFit/>
-          </a:bodyPr>
-          <a:lstStyle/>
-          <a:p>
-            <a:pPr algn="l">
-              <a:lnSpc>
-                <a:spcPct val="100000"/>
-              </a:lnSpc>
-            </a:pPr>
-            <a:r>
-              <a:rPr sz="650" b="0" i="0">
-                <a:solidFill>
-                  <a:srgbClr val="8A938D"/>
-                </a:solidFill>
-                <a:latin typeface="Calibri"/>
-              </a:rPr>
-              <a:t>Місткість 40′HQ</a:t>
-            </a:r>
-          </a:p>
-        </p:txBody>
-      </p:sp>
-      <p:sp>
-        <p:nvSpPr>
-          <p:cNvPr id="44" name="TextBox 43"/>
-          <p:cNvSpPr txBox="1"/>
-          <p:nvPr/>
-        </p:nvSpPr>
-        <p:spPr>
-          <a:xfrm>
-            <a:off x="2743200" y="4608576"/>
-            <a:ext cx="2194560" cy="182880"/>
-          </a:xfrm>
-          <a:prstGeom prst="rect">
-            <a:avLst/>
-          </a:prstGeom>
-          <a:noFill/>
-        </p:spPr>
-        <p:txBody>
-          <a:bodyPr wrap="square" lIns="0" rIns="0" tIns="0" bIns="0" anchor="t">
-            <a:spAutoFit/>
-          </a:bodyPr>
-          <a:lstStyle/>
-          <a:p>
-            <a:pPr algn="l">
-              <a:lnSpc>
-                <a:spcPct val="100000"/>
-              </a:lnSpc>
-            </a:pPr>
-            <a:r>
-              <a:rPr sz="900" b="1" i="0">
-                <a:solidFill>
-                  <a:srgbClr val="14241F"/>
-                </a:solidFill>
-                <a:latin typeface="Calibri"/>
-              </a:rPr>
-              <a:t>500 – 2 370 картонів</a:t>
-            </a:r>
-          </a:p>
-        </p:txBody>
-      </p:sp>
-      <p:sp>
-        <p:nvSpPr>
-          <p:cNvPr id="45" name="Rectangle 44"/>
-          <p:cNvSpPr/>
-          <p:nvPr/>
-        </p:nvSpPr>
-        <p:spPr>
-          <a:xfrm>
-            <a:off x="365760" y="4809744"/>
-            <a:ext cx="8412480" cy="9144"/>
-          </a:xfrm>
-          <a:prstGeom prst="rect">
-            <a:avLst/>
-          </a:prstGeom>
-          <a:solidFill>
-            <a:srgbClr val="E6E1D8"/>
-          </a:solidFill>
-          <a:ln>
-            <a:noFill/>
-          </a:ln>
-          <a:effectLst/>
-        </p:spPr>
-        <p:style>
-          <a:lnRef idx="1">
-            <a:schemeClr val="accent1"/>
-          </a:lnRef>
-          <a:fillRef idx="3">
-            <a:schemeClr val="accent1"/>
-          </a:fillRef>
-          <a:effectRef idx="2">
-            <a:schemeClr val="accent1"/>
-          </a:effectRef>
-          <a:fontRef idx="minor">
-            <a:schemeClr val="lt1"/>
-          </a:fontRef>
-        </p:style>
-        <p:txBody>
-          <a:bodyPr rtlCol="0" anchor="ctr"/>
-          <a:lstStyle/>
-          <a:p/>
-        </p:txBody>
-      </p:sp>
-      <p:sp>
-        <p:nvSpPr>
-          <p:cNvPr id="46" name="TextBox 45"/>
+              <a:t>у 40′HQ</a:t>
+            </a:r>
+          </a:p>
+        </p:txBody>
+      </p:sp>
+      <p:sp>
+        <p:nvSpPr>
+          <p:cNvPr id="30" name="TextBox 29"/>
           <p:cNvSpPr txBox="1"/>
           <p:nvPr/>
         </p:nvSpPr>
@@ -5759,7 +5179,7 @@
             <a:r>
               <a:rPr sz="700" b="1" i="0">
                 <a:solidFill>
-                  <a:srgbClr val="8A938D"/>
+                  <a:srgbClr val="E8C4BD"/>
                 </a:solidFill>
                 <a:latin typeface="Calibri"/>
               </a:rPr>
@@ -21472,8 +20892,8 @@
         </p:nvSpPr>
         <p:spPr>
           <a:xfrm>
-            <a:off x="0" y="0"/>
-            <a:ext cx="9144000" cy="64008"/>
+            <a:off x="5349240" y="0"/>
+            <a:ext cx="3794760" cy="5143500"/>
           </a:xfrm>
           <a:prstGeom prst="rect">
             <a:avLst/>
@@ -21508,14 +20928,113 @@
       </p:sp>
       <p:sp>
         <p:nvSpPr>
-          <p:cNvPr id="4" name="Rectangle 3"/>
+          <p:cNvPr id="4" name="Rounded Rectangle 3"/>
           <p:cNvSpPr/>
           <p:nvPr/>
         </p:nvSpPr>
         <p:spPr>
           <a:xfrm>
-            <a:off x="0" y="0"/>
-            <a:ext cx="9144000" cy="2670048"/>
+            <a:off x="5806440" y="1005840"/>
+            <a:ext cx="2880360" cy="2331720"/>
+          </a:xfrm>
+          <a:prstGeom prst="roundRect">
+            <a:avLst>
+              <a:gd name="adj" fmla="val 5000"/>
+            </a:avLst>
+          </a:prstGeom>
+          <a:solidFill>
+            <a:srgbClr val="FFFFFF"/>
+          </a:solidFill>
+          <a:ln>
+            <a:noFill/>
+          </a:ln>
+          <a:effectLst/>
+        </p:spPr>
+        <p:style>
+          <a:lnRef idx="1">
+            <a:schemeClr val="accent1"/>
+          </a:lnRef>
+          <a:fillRef idx="3">
+            <a:schemeClr val="accent1"/>
+          </a:fillRef>
+          <a:effectRef idx="2">
+            <a:schemeClr val="accent1"/>
+          </a:effectRef>
+          <a:fontRef idx="minor">
+            <a:schemeClr val="lt1"/>
+          </a:fontRef>
+        </p:style>
+        <p:txBody>
+          <a:bodyPr rtlCol="0" anchor="ctr"/>
+          <a:lstStyle/>
+          <a:p/>
+        </p:txBody>
+      </p:sp>
+      <p:sp>
+        <p:nvSpPr>
+          <p:cNvPr id="5" name="TextBox 4"/>
+          <p:cNvSpPr txBox="1"/>
+          <p:nvPr/>
+        </p:nvSpPr>
+        <p:spPr>
+          <a:xfrm>
+            <a:off x="5952744" y="1298448"/>
+            <a:ext cx="2587752" cy="914400"/>
+          </a:xfrm>
+          <a:prstGeom prst="rect">
+            <a:avLst/>
+          </a:prstGeom>
+          <a:noFill/>
+        </p:spPr>
+        <p:txBody>
+          <a:bodyPr wrap="square" lIns="0" rIns="0" tIns="0" bIns="0" anchor="ctr">
+            <a:spAutoFit/>
+          </a:bodyPr>
+          <a:lstStyle/>
+          <a:p>
+            <a:pPr algn="ctr">
+              <a:lnSpc>
+                <a:spcPct val="108000"/>
+              </a:lnSpc>
+            </a:pPr>
+            <a:r>
+              <a:rPr sz="2500" b="1" i="0">
+                <a:solidFill>
+                  <a:srgbClr val="AB5F15"/>
+                </a:solidFill>
+                <a:latin typeface="Cambria"/>
+              </a:rPr>
+              <a:t>SINGHA</a:t>
+            </a:r>
+          </a:p>
+          <a:p>
+            <a:pPr algn="ctr">
+              <a:lnSpc>
+                <a:spcPct val="108000"/>
+              </a:lnSpc>
+            </a:pPr>
+            <a:r>
+              <a:rPr sz="2500" b="1" i="0">
+                <a:solidFill>
+                  <a:srgbClr val="AB5F15"/>
+                </a:solidFill>
+                <a:latin typeface="Cambria"/>
+              </a:rPr>
+              <a:t>KAMEDA</a:t>
+            </a:r>
+          </a:p>
+        </p:txBody>
+      </p:sp>
+      <p:sp>
+        <p:nvSpPr>
+          <p:cNvPr id="6" name="Rectangle 5"/>
+          <p:cNvSpPr/>
+          <p:nvPr/>
+        </p:nvSpPr>
+        <p:spPr>
+          <a:xfrm>
+            <a:off x="6944868" y="2450592"/>
+            <a:ext cx="603504" cy="32004"/>
           </a:xfrm>
           <a:prstGeom prst="rect">
             <a:avLst/>
@@ -21550,22 +21069,137 @@
       </p:sp>
       <p:sp>
         <p:nvSpPr>
-          <p:cNvPr id="5" name="Rounded Rectangle 4"/>
+          <p:cNvPr id="7" name="TextBox 6"/>
+          <p:cNvSpPr txBox="1"/>
+          <p:nvPr/>
+        </p:nvSpPr>
+        <p:spPr>
+          <a:xfrm>
+            <a:off x="5952744" y="2633472"/>
+            <a:ext cx="2587752" cy="274320"/>
+          </a:xfrm>
+          <a:prstGeom prst="rect">
+            <a:avLst/>
+          </a:prstGeom>
+          <a:noFill/>
+        </p:spPr>
+        <p:txBody>
+          <a:bodyPr wrap="square" lIns="0" rIns="0" tIns="0" bIns="0" anchor="t">
+            <a:spAutoFit/>
+          </a:bodyPr>
+          <a:lstStyle/>
+          <a:p>
+            <a:pPr algn="ctr">
+              <a:lnSpc>
+                <a:spcPct val="100000"/>
+              </a:lnSpc>
+            </a:pPr>
+            <a:r>
+              <a:rPr sz="1050" b="0" i="0">
+                <a:solidFill>
+                  <a:srgbClr val="8A938D"/>
+                </a:solidFill>
+                <a:latin typeface="Calibri"/>
+              </a:rPr>
+              <a:t>Arare Norimaki</a:t>
+            </a:r>
+          </a:p>
+        </p:txBody>
+      </p:sp>
+      <p:sp>
+        <p:nvSpPr>
+          <p:cNvPr id="8" name="TextBox 7"/>
+          <p:cNvSpPr txBox="1"/>
+          <p:nvPr/>
+        </p:nvSpPr>
+        <p:spPr>
+          <a:xfrm>
+            <a:off x="5349240" y="3694176"/>
+            <a:ext cx="3794760" cy="182880"/>
+          </a:xfrm>
+          <a:prstGeom prst="rect">
+            <a:avLst/>
+          </a:prstGeom>
+          <a:noFill/>
+        </p:spPr>
+        <p:txBody>
+          <a:bodyPr wrap="square" lIns="0" rIns="0" tIns="0" bIns="0" anchor="t">
+            <a:spAutoFit/>
+          </a:bodyPr>
+          <a:lstStyle/>
+          <a:p>
+            <a:pPr algn="ctr">
+              <a:lnSpc>
+                <a:spcPct val="100000"/>
+              </a:lnSpc>
+            </a:pPr>
+            <a:r>
+              <a:rPr sz="700" b="1" i="0" spc="90">
+                <a:solidFill>
+                  <a:srgbClr val="EAD3BD"/>
+                </a:solidFill>
+                <a:latin typeface="Calibri"/>
+              </a:rPr>
+              <a:t>ВИРОБНИЦТВО</a:t>
+            </a:r>
+          </a:p>
+        </p:txBody>
+      </p:sp>
+      <p:sp>
+        <p:nvSpPr>
+          <p:cNvPr id="9" name="TextBox 8"/>
+          <p:cNvSpPr txBox="1"/>
+          <p:nvPr/>
+        </p:nvSpPr>
+        <p:spPr>
+          <a:xfrm>
+            <a:off x="5349240" y="3895344"/>
+            <a:ext cx="3794760" cy="274320"/>
+          </a:xfrm>
+          <a:prstGeom prst="rect">
+            <a:avLst/>
+          </a:prstGeom>
+          <a:noFill/>
+        </p:spPr>
+        <p:txBody>
+          <a:bodyPr wrap="square" lIns="0" rIns="0" tIns="0" bIns="0" anchor="t">
+            <a:spAutoFit/>
+          </a:bodyPr>
+          <a:lstStyle/>
+          <a:p>
+            <a:pPr algn="ctr">
+              <a:lnSpc>
+                <a:spcPct val="100000"/>
+              </a:lnSpc>
+            </a:pPr>
+            <a:r>
+              <a:rPr sz="1300" b="1" i="0">
+                <a:solidFill>
+                  <a:srgbClr val="FFFFFF"/>
+                </a:solidFill>
+                <a:latin typeface="Cambria"/>
+              </a:rPr>
+              <a:t>Таїланд</a:t>
+            </a:r>
+          </a:p>
+        </p:txBody>
+      </p:sp>
+      <p:sp>
+        <p:nvSpPr>
+          <p:cNvPr id="10" name="Rectangle 9"/>
           <p:cNvSpPr/>
           <p:nvPr/>
         </p:nvSpPr>
         <p:spPr>
           <a:xfrm>
             <a:off x="365760" y="475488"/>
-            <a:ext cx="402336" cy="402336"/>
-          </a:xfrm>
-          <a:prstGeom prst="roundRect">
-            <a:avLst>
-              <a:gd name="adj" fmla="val 10000"/>
-            </a:avLst>
+            <a:ext cx="237744" cy="237744"/>
+          </a:xfrm>
+          <a:prstGeom prst="rect">
+            <a:avLst/>
           </a:prstGeom>
           <a:solidFill>
-            <a:srgbClr val="FFFFFF"/>
+            <a:srgbClr val="B36214"/>
           </a:solidFill>
           <a:ln>
             <a:noFill/>
@@ -21594,53 +21228,108 @@
       </p:sp>
       <p:sp>
         <p:nvSpPr>
-          <p:cNvPr id="6" name="TextBox 5"/>
-          <p:cNvSpPr txBox="1"/>
-          <p:nvPr/>
-        </p:nvSpPr>
-        <p:spPr>
-          <a:xfrm>
-            <a:off x="365760" y="475488"/>
-            <a:ext cx="402336" cy="402336"/>
-          </a:xfrm>
-          <a:prstGeom prst="rect">
-            <a:avLst/>
-          </a:prstGeom>
-          <a:noFill/>
-        </p:spPr>
-        <p:txBody>
-          <a:bodyPr wrap="square" lIns="0" rIns="0" tIns="0" bIns="0" anchor="ctr">
-            <a:spAutoFit/>
-          </a:bodyPr>
-          <a:lstStyle/>
-          <a:p>
-            <a:pPr algn="ctr">
-              <a:lnSpc>
-                <a:spcPct val="100000"/>
-              </a:lnSpc>
-            </a:pPr>
-            <a:r>
-              <a:rPr sz="1400" b="1" i="0">
-                <a:solidFill>
-                  <a:srgbClr val="AB5F15"/>
+          <p:cNvPr id="11" name="TextBox 10"/>
+          <p:cNvSpPr txBox="1"/>
+          <p:nvPr/>
+        </p:nvSpPr>
+        <p:spPr>
+          <a:xfrm>
+            <a:off x="749808" y="475488"/>
+            <a:ext cx="4023360" cy="237744"/>
+          </a:xfrm>
+          <a:prstGeom prst="rect">
+            <a:avLst/>
+          </a:prstGeom>
+          <a:noFill/>
+        </p:spPr>
+        <p:txBody>
+          <a:bodyPr wrap="square" lIns="0" rIns="0" tIns="0" bIns="0" anchor="t">
+            <a:spAutoFit/>
+          </a:bodyPr>
+          <a:lstStyle/>
+          <a:p>
+            <a:pPr algn="l">
+              <a:lnSpc>
+                <a:spcPct val="100000"/>
+              </a:lnSpc>
+            </a:pPr>
+            <a:r>
+              <a:rPr sz="800" b="1" i="0" spc="90">
+                <a:solidFill>
+                  <a:srgbClr val="A35C15"/>
+                </a:solidFill>
+                <a:latin typeface="Calibri"/>
+              </a:rPr>
+              <a:t>ПРОФІЛЬ ПОСТАЧАЛЬНИКА · 01</a:t>
+            </a:r>
+          </a:p>
+        </p:txBody>
+      </p:sp>
+      <p:sp>
+        <p:nvSpPr>
+          <p:cNvPr id="12" name="TextBox 11"/>
+          <p:cNvSpPr txBox="1"/>
+          <p:nvPr/>
+        </p:nvSpPr>
+        <p:spPr>
+          <a:xfrm>
+            <a:off x="365760" y="859536"/>
+            <a:ext cx="4617720" cy="914400"/>
+          </a:xfrm>
+          <a:prstGeom prst="rect">
+            <a:avLst/>
+          </a:prstGeom>
+          <a:noFill/>
+        </p:spPr>
+        <p:txBody>
+          <a:bodyPr wrap="square" lIns="0" rIns="0" tIns="0" bIns="0" anchor="t">
+            <a:spAutoFit/>
+          </a:bodyPr>
+          <a:lstStyle/>
+          <a:p>
+            <a:pPr algn="l">
+              <a:lnSpc>
+                <a:spcPct val="108000"/>
+              </a:lnSpc>
+            </a:pPr>
+            <a:r>
+              <a:rPr sz="2600" b="1" i="0">
+                <a:solidFill>
+                  <a:srgbClr val="14241F"/>
                 </a:solidFill>
                 <a:latin typeface="Cambria"/>
               </a:rPr>
-              <a:t>01</a:t>
-            </a:r>
-          </a:p>
-        </p:txBody>
-      </p:sp>
-      <p:sp>
-        <p:nvSpPr>
-          <p:cNvPr id="7" name="TextBox 6"/>
-          <p:cNvSpPr txBox="1"/>
-          <p:nvPr/>
-        </p:nvSpPr>
-        <p:spPr>
-          <a:xfrm>
-            <a:off x="914400" y="493776"/>
-            <a:ext cx="4023360" cy="182880"/>
+              <a:t>Singha Kameda</a:t>
+            </a:r>
+          </a:p>
+          <a:p>
+            <a:pPr algn="l">
+              <a:lnSpc>
+                <a:spcPct val="108000"/>
+              </a:lnSpc>
+            </a:pPr>
+            <a:r>
+              <a:rPr sz="2600" b="1" i="0">
+                <a:solidFill>
+                  <a:srgbClr val="14241F"/>
+                </a:solidFill>
+                <a:latin typeface="Cambria"/>
+              </a:rPr>
+              <a:t>(Thailand) Co., Ltd.</a:t>
+            </a:r>
+          </a:p>
+        </p:txBody>
+      </p:sp>
+      <p:sp>
+        <p:nvSpPr>
+          <p:cNvPr id="13" name="TextBox 12"/>
+          <p:cNvSpPr txBox="1"/>
+          <p:nvPr/>
+        </p:nvSpPr>
+        <p:spPr>
+          <a:xfrm>
+            <a:off x="365760" y="1920240"/>
+            <a:ext cx="4617720" cy="274320"/>
           </a:xfrm>
           <a:prstGeom prst="rect">
             <a:avLst/>
@@ -21659,168 +21348,35 @@
               </a:lnSpc>
             </a:pPr>
             <a:r>
-              <a:rPr sz="700" b="1" i="0" spc="90">
-                <a:solidFill>
-                  <a:srgbClr val="E8D0B8"/>
-                </a:solidFill>
-                <a:latin typeface="Calibri"/>
-              </a:rPr>
-              <a:t>ПОСТАЧАЛЬНИК</a:t>
-            </a:r>
-          </a:p>
-        </p:txBody>
-      </p:sp>
-      <p:sp>
-        <p:nvSpPr>
-          <p:cNvPr id="8" name="TextBox 7"/>
-          <p:cNvSpPr txBox="1"/>
-          <p:nvPr/>
-        </p:nvSpPr>
-        <p:spPr>
-          <a:xfrm>
-            <a:off x="914400" y="676656"/>
-            <a:ext cx="4023360" cy="201168"/>
-          </a:xfrm>
-          <a:prstGeom prst="rect">
-            <a:avLst/>
-          </a:prstGeom>
-          <a:noFill/>
-        </p:spPr>
-        <p:txBody>
-          <a:bodyPr wrap="square" lIns="0" rIns="0" tIns="0" bIns="0" anchor="t">
-            <a:spAutoFit/>
-          </a:bodyPr>
-          <a:lstStyle/>
-          <a:p>
-            <a:pPr algn="l">
-              <a:lnSpc>
-                <a:spcPct val="100000"/>
-              </a:lnSpc>
-            </a:pPr>
-            <a:r>
-              <a:rPr sz="900" b="1" i="0" spc="90">
-                <a:solidFill>
-                  <a:srgbClr val="FFFFFF"/>
-                </a:solidFill>
-                <a:latin typeface="Calibri"/>
-              </a:rPr>
-              <a:t>ARARE NORIMAKI</a:t>
-            </a:r>
-          </a:p>
-        </p:txBody>
-      </p:sp>
-      <p:sp>
-        <p:nvSpPr>
-          <p:cNvPr id="9" name="TextBox 8"/>
-          <p:cNvSpPr txBox="1"/>
-          <p:nvPr/>
-        </p:nvSpPr>
-        <p:spPr>
-          <a:xfrm>
-            <a:off x="365760" y="914400"/>
-            <a:ext cx="4663440" cy="804672"/>
-          </a:xfrm>
-          <a:prstGeom prst="rect">
-            <a:avLst/>
-          </a:prstGeom>
-          <a:noFill/>
-        </p:spPr>
-        <p:txBody>
-          <a:bodyPr wrap="square" lIns="0" rIns="0" tIns="0" bIns="0" anchor="t">
-            <a:spAutoFit/>
-          </a:bodyPr>
-          <a:lstStyle/>
-          <a:p>
-            <a:pPr algn="l">
-              <a:lnSpc>
-                <a:spcPct val="106000"/>
-              </a:lnSpc>
-            </a:pPr>
-            <a:r>
-              <a:rPr sz="2600" b="1" i="0">
-                <a:solidFill>
-                  <a:srgbClr val="FFFFFF"/>
-                </a:solidFill>
-                <a:latin typeface="Cambria"/>
-              </a:rPr>
-              <a:t>Singha Kameda</a:t>
-            </a:r>
-          </a:p>
-          <a:p>
-            <a:pPr algn="l">
-              <a:lnSpc>
-                <a:spcPct val="106000"/>
-              </a:lnSpc>
-            </a:pPr>
-            <a:r>
-              <a:rPr sz="2600" b="1" i="0">
-                <a:solidFill>
-                  <a:srgbClr val="FFFFFF"/>
-                </a:solidFill>
-                <a:latin typeface="Cambria"/>
-              </a:rPr>
-              <a:t>(Thailand) Co., Ltd.</a:t>
-            </a:r>
-          </a:p>
-        </p:txBody>
-      </p:sp>
-      <p:sp>
-        <p:nvSpPr>
-          <p:cNvPr id="10" name="TextBox 9"/>
-          <p:cNvSpPr txBox="1"/>
-          <p:nvPr/>
-        </p:nvSpPr>
-        <p:spPr>
-          <a:xfrm>
-            <a:off x="365760" y="1901952"/>
-            <a:ext cx="2743200" cy="146304"/>
-          </a:xfrm>
-          <a:prstGeom prst="rect">
-            <a:avLst/>
-          </a:prstGeom>
-          <a:noFill/>
-        </p:spPr>
-        <p:txBody>
-          <a:bodyPr wrap="square" lIns="0" rIns="0" tIns="0" bIns="0" anchor="t">
-            <a:spAutoFit/>
-          </a:bodyPr>
-          <a:lstStyle/>
-          <a:p>
-            <a:pPr algn="l">
-              <a:lnSpc>
-                <a:spcPct val="100000"/>
-              </a:lnSpc>
-            </a:pPr>
-            <a:r>
-              <a:rPr sz="650" b="1" i="0" spc="90">
-                <a:solidFill>
-                  <a:srgbClr val="EAD3BD"/>
-                </a:solidFill>
-                <a:latin typeface="Calibri"/>
-              </a:rPr>
-              <a:t>МАРШРУТ ПОСТАЧАННЯ</a:t>
-            </a:r>
-          </a:p>
-        </p:txBody>
-      </p:sp>
-      <p:sp>
-        <p:nvSpPr>
-          <p:cNvPr id="11" name="Rounded Rectangle 10"/>
+              <a:rPr sz="1100" b="0" i="0">
+                <a:solidFill>
+                  <a:srgbClr val="A35C15"/>
+                </a:solidFill>
+                <a:latin typeface="Calibri"/>
+              </a:rPr>
+              <a:t>Рисові крекери арарe в норі · Retail</a:t>
+            </a:r>
+          </a:p>
+        </p:txBody>
+      </p:sp>
+      <p:sp>
+        <p:nvSpPr>
+          <p:cNvPr id="14" name="Rounded Rectangle 13"/>
           <p:cNvSpPr/>
           <p:nvPr/>
         </p:nvSpPr>
         <p:spPr>
           <a:xfrm>
-            <a:off x="411480" y="2212848"/>
-            <a:ext cx="128016" cy="128016"/>
+            <a:off x="365760" y="2286000"/>
+            <a:ext cx="1025956" cy="274320"/>
           </a:xfrm>
           <a:prstGeom prst="roundRect">
             <a:avLst>
-              <a:gd name="adj" fmla="val 50000"/>
+              <a:gd name="adj" fmla="val 24000"/>
             </a:avLst>
           </a:prstGeom>
           <a:solidFill>
-            <a:srgbClr val="FFFFFF"/>
+            <a:srgbClr val="F6ECE3"/>
           </a:solidFill>
           <a:ln>
             <a:noFill/>
@@ -21849,598 +21405,131 @@
       </p:sp>
       <p:sp>
         <p:nvSpPr>
-          <p:cNvPr id="12" name="Rectangle 11"/>
+          <p:cNvPr id="15" name="TextBox 14"/>
+          <p:cNvSpPr txBox="1"/>
+          <p:nvPr/>
+        </p:nvSpPr>
+        <p:spPr>
+          <a:xfrm>
+            <a:off x="365760" y="2286000"/>
+            <a:ext cx="1025956" cy="274320"/>
+          </a:xfrm>
+          <a:prstGeom prst="rect">
+            <a:avLst/>
+          </a:prstGeom>
+          <a:noFill/>
+        </p:spPr>
+        <p:txBody>
+          <a:bodyPr wrap="square" lIns="0" rIns="0" tIns="0" bIns="0" anchor="ctr">
+            <a:spAutoFit/>
+          </a:bodyPr>
+          <a:lstStyle/>
+          <a:p>
+            <a:pPr algn="ctr">
+              <a:lnSpc>
+                <a:spcPct val="100000"/>
+              </a:lnSpc>
+            </a:pPr>
+            <a:r>
+              <a:rPr sz="850" b="1" i="0">
+                <a:solidFill>
+                  <a:srgbClr val="AB5F15"/>
+                </a:solidFill>
+                <a:latin typeface="Calibri"/>
+              </a:rPr>
+              <a:t>FOB Bangkok</a:t>
+            </a:r>
+          </a:p>
+        </p:txBody>
+      </p:sp>
+      <p:sp>
+        <p:nvSpPr>
+          <p:cNvPr id="16" name="TextBox 15"/>
+          <p:cNvSpPr txBox="1"/>
+          <p:nvPr/>
+        </p:nvSpPr>
+        <p:spPr>
+          <a:xfrm>
+            <a:off x="365760" y="2779776"/>
+            <a:ext cx="4617720" cy="146304"/>
+          </a:xfrm>
+          <a:prstGeom prst="rect">
+            <a:avLst/>
+          </a:prstGeom>
+          <a:noFill/>
+        </p:spPr>
+        <p:txBody>
+          <a:bodyPr wrap="square" lIns="0" rIns="0" tIns="0" bIns="0" anchor="t">
+            <a:spAutoFit/>
+          </a:bodyPr>
+          <a:lstStyle/>
+          <a:p>
+            <a:pPr algn="l">
+              <a:lnSpc>
+                <a:spcPct val="100000"/>
+              </a:lnSpc>
+            </a:pPr>
+            <a:r>
+              <a:rPr sz="700" b="1" i="0" spc="90">
+                <a:solidFill>
+                  <a:srgbClr val="A35C15"/>
+                </a:solidFill>
+                <a:latin typeface="Calibri"/>
+              </a:rPr>
+              <a:t>ПРО КОМПАНІЮ</a:t>
+            </a:r>
+          </a:p>
+        </p:txBody>
+      </p:sp>
+      <p:sp>
+        <p:nvSpPr>
+          <p:cNvPr id="17" name="TextBox 16"/>
+          <p:cNvSpPr txBox="1"/>
+          <p:nvPr/>
+        </p:nvSpPr>
+        <p:spPr>
+          <a:xfrm>
+            <a:off x="365760" y="2962656"/>
+            <a:ext cx="4617720" cy="731520"/>
+          </a:xfrm>
+          <a:prstGeom prst="rect">
+            <a:avLst/>
+          </a:prstGeom>
+          <a:noFill/>
+        </p:spPr>
+        <p:txBody>
+          <a:bodyPr wrap="square" lIns="0" rIns="0" tIns="0" bIns="0" anchor="t">
+            <a:spAutoFit/>
+          </a:bodyPr>
+          <a:lstStyle/>
+          <a:p>
+            <a:pPr algn="l">
+              <a:lnSpc>
+                <a:spcPct val="132000"/>
+              </a:lnSpc>
+            </a:pPr>
+            <a:r>
+              <a:rPr sz="1000" b="0" i="0">
+                <a:solidFill>
+                  <a:srgbClr val="44524C"/>
+                </a:solidFill>
+                <a:latin typeface="Calibri"/>
+              </a:rPr>
+              <a:t>Спільне підприємство японської Kameda Seika — світового лідера ринку рисових крекерів — та тайської групи Singha. Виробництво в Таїланді за японськими стандартами.</a:t>
+            </a:r>
+          </a:p>
+        </p:txBody>
+      </p:sp>
+      <p:sp>
+        <p:nvSpPr>
+          <p:cNvPr id="18" name="Rounded Rectangle 17"/>
           <p:cNvSpPr/>
           <p:nvPr/>
         </p:nvSpPr>
         <p:spPr>
           <a:xfrm>
-            <a:off x="676656" y="2263140"/>
-            <a:ext cx="91440" cy="27432"/>
-          </a:xfrm>
-          <a:prstGeom prst="rect">
-            <a:avLst/>
-          </a:prstGeom>
-          <a:solidFill>
-            <a:srgbClr val="D5A97E"/>
-          </a:solidFill>
-          <a:ln>
-            <a:noFill/>
-          </a:ln>
-          <a:effectLst/>
-        </p:spPr>
-        <p:style>
-          <a:lnRef idx="1">
-            <a:schemeClr val="accent1"/>
-          </a:lnRef>
-          <a:fillRef idx="3">
-            <a:schemeClr val="accent1"/>
-          </a:fillRef>
-          <a:effectRef idx="2">
-            <a:schemeClr val="accent1"/>
-          </a:effectRef>
-          <a:fontRef idx="minor">
-            <a:schemeClr val="lt1"/>
-          </a:fontRef>
-        </p:style>
-        <p:txBody>
-          <a:bodyPr rtlCol="0" anchor="ctr"/>
-          <a:lstStyle/>
-          <a:p/>
-        </p:txBody>
-      </p:sp>
-      <p:sp>
-        <p:nvSpPr>
-          <p:cNvPr id="13" name="Rectangle 12"/>
-          <p:cNvSpPr/>
-          <p:nvPr/>
-        </p:nvSpPr>
-        <p:spPr>
-          <a:xfrm>
-            <a:off x="859536" y="2263140"/>
-            <a:ext cx="91440" cy="27432"/>
-          </a:xfrm>
-          <a:prstGeom prst="rect">
-            <a:avLst/>
-          </a:prstGeom>
-          <a:solidFill>
-            <a:srgbClr val="D5A97E"/>
-          </a:solidFill>
-          <a:ln>
-            <a:noFill/>
-          </a:ln>
-          <a:effectLst/>
-        </p:spPr>
-        <p:style>
-          <a:lnRef idx="1">
-            <a:schemeClr val="accent1"/>
-          </a:lnRef>
-          <a:fillRef idx="3">
-            <a:schemeClr val="accent1"/>
-          </a:fillRef>
-          <a:effectRef idx="2">
-            <a:schemeClr val="accent1"/>
-          </a:effectRef>
-          <a:fontRef idx="minor">
-            <a:schemeClr val="lt1"/>
-          </a:fontRef>
-        </p:style>
-        <p:txBody>
-          <a:bodyPr rtlCol="0" anchor="ctr"/>
-          <a:lstStyle/>
-          <a:p/>
-        </p:txBody>
-      </p:sp>
-      <p:sp>
-        <p:nvSpPr>
-          <p:cNvPr id="14" name="Rectangle 13"/>
-          <p:cNvSpPr/>
-          <p:nvPr/>
-        </p:nvSpPr>
-        <p:spPr>
-          <a:xfrm>
-            <a:off x="1042416" y="2263140"/>
-            <a:ext cx="91440" cy="27432"/>
-          </a:xfrm>
-          <a:prstGeom prst="rect">
-            <a:avLst/>
-          </a:prstGeom>
-          <a:solidFill>
-            <a:srgbClr val="D5A97E"/>
-          </a:solidFill>
-          <a:ln>
-            <a:noFill/>
-          </a:ln>
-          <a:effectLst/>
-        </p:spPr>
-        <p:style>
-          <a:lnRef idx="1">
-            <a:schemeClr val="accent1"/>
-          </a:lnRef>
-          <a:fillRef idx="3">
-            <a:schemeClr val="accent1"/>
-          </a:fillRef>
-          <a:effectRef idx="2">
-            <a:schemeClr val="accent1"/>
-          </a:effectRef>
-          <a:fontRef idx="minor">
-            <a:schemeClr val="lt1"/>
-          </a:fontRef>
-        </p:style>
-        <p:txBody>
-          <a:bodyPr rtlCol="0" anchor="ctr"/>
-          <a:lstStyle/>
-          <a:p/>
-        </p:txBody>
-      </p:sp>
-      <p:sp>
-        <p:nvSpPr>
-          <p:cNvPr id="15" name="Rectangle 14"/>
-          <p:cNvSpPr/>
-          <p:nvPr/>
-        </p:nvSpPr>
-        <p:spPr>
-          <a:xfrm>
-            <a:off x="1225296" y="2263140"/>
-            <a:ext cx="91440" cy="27432"/>
-          </a:xfrm>
-          <a:prstGeom prst="rect">
-            <a:avLst/>
-          </a:prstGeom>
-          <a:solidFill>
-            <a:srgbClr val="D5A97E"/>
-          </a:solidFill>
-          <a:ln>
-            <a:noFill/>
-          </a:ln>
-          <a:effectLst/>
-        </p:spPr>
-        <p:style>
-          <a:lnRef idx="1">
-            <a:schemeClr val="accent1"/>
-          </a:lnRef>
-          <a:fillRef idx="3">
-            <a:schemeClr val="accent1"/>
-          </a:fillRef>
-          <a:effectRef idx="2">
-            <a:schemeClr val="accent1"/>
-          </a:effectRef>
-          <a:fontRef idx="minor">
-            <a:schemeClr val="lt1"/>
-          </a:fontRef>
-        </p:style>
-        <p:txBody>
-          <a:bodyPr rtlCol="0" anchor="ctr"/>
-          <a:lstStyle/>
-          <a:p/>
-        </p:txBody>
-      </p:sp>
-      <p:sp>
-        <p:nvSpPr>
-          <p:cNvPr id="16" name="Rectangle 15"/>
-          <p:cNvSpPr/>
-          <p:nvPr/>
-        </p:nvSpPr>
-        <p:spPr>
-          <a:xfrm>
-            <a:off x="1408176" y="2263140"/>
-            <a:ext cx="91440" cy="27432"/>
-          </a:xfrm>
-          <a:prstGeom prst="rect">
-            <a:avLst/>
-          </a:prstGeom>
-          <a:solidFill>
-            <a:srgbClr val="D5A97E"/>
-          </a:solidFill>
-          <a:ln>
-            <a:noFill/>
-          </a:ln>
-          <a:effectLst/>
-        </p:spPr>
-        <p:style>
-          <a:lnRef idx="1">
-            <a:schemeClr val="accent1"/>
-          </a:lnRef>
-          <a:fillRef idx="3">
-            <a:schemeClr val="accent1"/>
-          </a:fillRef>
-          <a:effectRef idx="2">
-            <a:schemeClr val="accent1"/>
-          </a:effectRef>
-          <a:fontRef idx="minor">
-            <a:schemeClr val="lt1"/>
-          </a:fontRef>
-        </p:style>
-        <p:txBody>
-          <a:bodyPr rtlCol="0" anchor="ctr"/>
-          <a:lstStyle/>
-          <a:p/>
-        </p:txBody>
-      </p:sp>
-      <p:sp>
-        <p:nvSpPr>
-          <p:cNvPr id="17" name="Rectangle 16"/>
-          <p:cNvSpPr/>
-          <p:nvPr/>
-        </p:nvSpPr>
-        <p:spPr>
-          <a:xfrm>
-            <a:off x="1591056" y="2263140"/>
-            <a:ext cx="91440" cy="27432"/>
-          </a:xfrm>
-          <a:prstGeom prst="rect">
-            <a:avLst/>
-          </a:prstGeom>
-          <a:solidFill>
-            <a:srgbClr val="D5A97E"/>
-          </a:solidFill>
-          <a:ln>
-            <a:noFill/>
-          </a:ln>
-          <a:effectLst/>
-        </p:spPr>
-        <p:style>
-          <a:lnRef idx="1">
-            <a:schemeClr val="accent1"/>
-          </a:lnRef>
-          <a:fillRef idx="3">
-            <a:schemeClr val="accent1"/>
-          </a:fillRef>
-          <a:effectRef idx="2">
-            <a:schemeClr val="accent1"/>
-          </a:effectRef>
-          <a:fontRef idx="minor">
-            <a:schemeClr val="lt1"/>
-          </a:fontRef>
-        </p:style>
-        <p:txBody>
-          <a:bodyPr rtlCol="0" anchor="ctr"/>
-          <a:lstStyle/>
-          <a:p/>
-        </p:txBody>
-      </p:sp>
-      <p:sp>
-        <p:nvSpPr>
-          <p:cNvPr id="18" name="Rectangle 17"/>
-          <p:cNvSpPr/>
-          <p:nvPr/>
-        </p:nvSpPr>
-        <p:spPr>
-          <a:xfrm>
-            <a:off x="1773936" y="2263140"/>
-            <a:ext cx="91440" cy="27432"/>
-          </a:xfrm>
-          <a:prstGeom prst="rect">
-            <a:avLst/>
-          </a:prstGeom>
-          <a:solidFill>
-            <a:srgbClr val="D5A97E"/>
-          </a:solidFill>
-          <a:ln>
-            <a:noFill/>
-          </a:ln>
-          <a:effectLst/>
-        </p:spPr>
-        <p:style>
-          <a:lnRef idx="1">
-            <a:schemeClr val="accent1"/>
-          </a:lnRef>
-          <a:fillRef idx="3">
-            <a:schemeClr val="accent1"/>
-          </a:fillRef>
-          <a:effectRef idx="2">
-            <a:schemeClr val="accent1"/>
-          </a:effectRef>
-          <a:fontRef idx="minor">
-            <a:schemeClr val="lt1"/>
-          </a:fontRef>
-        </p:style>
-        <p:txBody>
-          <a:bodyPr rtlCol="0" anchor="ctr"/>
-          <a:lstStyle/>
-          <a:p/>
-        </p:txBody>
-      </p:sp>
-      <p:sp>
-        <p:nvSpPr>
-          <p:cNvPr id="19" name="Rectangle 18"/>
-          <p:cNvSpPr/>
-          <p:nvPr/>
-        </p:nvSpPr>
-        <p:spPr>
-          <a:xfrm>
-            <a:off x="1956816" y="2263140"/>
-            <a:ext cx="91440" cy="27432"/>
-          </a:xfrm>
-          <a:prstGeom prst="rect">
-            <a:avLst/>
-          </a:prstGeom>
-          <a:solidFill>
-            <a:srgbClr val="D5A97E"/>
-          </a:solidFill>
-          <a:ln>
-            <a:noFill/>
-          </a:ln>
-          <a:effectLst/>
-        </p:spPr>
-        <p:style>
-          <a:lnRef idx="1">
-            <a:schemeClr val="accent1"/>
-          </a:lnRef>
-          <a:fillRef idx="3">
-            <a:schemeClr val="accent1"/>
-          </a:fillRef>
-          <a:effectRef idx="2">
-            <a:schemeClr val="accent1"/>
-          </a:effectRef>
-          <a:fontRef idx="minor">
-            <a:schemeClr val="lt1"/>
-          </a:fontRef>
-        </p:style>
-        <p:txBody>
-          <a:bodyPr rtlCol="0" anchor="ctr"/>
-          <a:lstStyle/>
-          <a:p/>
-        </p:txBody>
-      </p:sp>
-      <p:sp>
-        <p:nvSpPr>
-          <p:cNvPr id="20" name="Rectangle 19"/>
-          <p:cNvSpPr/>
-          <p:nvPr/>
-        </p:nvSpPr>
-        <p:spPr>
-          <a:xfrm>
-            <a:off x="2139696" y="2263140"/>
-            <a:ext cx="91440" cy="27432"/>
-          </a:xfrm>
-          <a:prstGeom prst="rect">
-            <a:avLst/>
-          </a:prstGeom>
-          <a:solidFill>
-            <a:srgbClr val="D5A97E"/>
-          </a:solidFill>
-          <a:ln>
-            <a:noFill/>
-          </a:ln>
-          <a:effectLst/>
-        </p:spPr>
-        <p:style>
-          <a:lnRef idx="1">
-            <a:schemeClr val="accent1"/>
-          </a:lnRef>
-          <a:fillRef idx="3">
-            <a:schemeClr val="accent1"/>
-          </a:fillRef>
-          <a:effectRef idx="2">
-            <a:schemeClr val="accent1"/>
-          </a:effectRef>
-          <a:fontRef idx="minor">
-            <a:schemeClr val="lt1"/>
-          </a:fontRef>
-        </p:style>
-        <p:txBody>
-          <a:bodyPr rtlCol="0" anchor="ctr"/>
-          <a:lstStyle/>
-          <a:p/>
-        </p:txBody>
-      </p:sp>
-      <p:sp>
-        <p:nvSpPr>
-          <p:cNvPr id="21" name="Rectangle 20"/>
-          <p:cNvSpPr/>
-          <p:nvPr/>
-        </p:nvSpPr>
-        <p:spPr>
-          <a:xfrm>
-            <a:off x="2322576" y="2263140"/>
-            <a:ext cx="91440" cy="27432"/>
-          </a:xfrm>
-          <a:prstGeom prst="rect">
-            <a:avLst/>
-          </a:prstGeom>
-          <a:solidFill>
-            <a:srgbClr val="D5A97E"/>
-          </a:solidFill>
-          <a:ln>
-            <a:noFill/>
-          </a:ln>
-          <a:effectLst/>
-        </p:spPr>
-        <p:style>
-          <a:lnRef idx="1">
-            <a:schemeClr val="accent1"/>
-          </a:lnRef>
-          <a:fillRef idx="3">
-            <a:schemeClr val="accent1"/>
-          </a:fillRef>
-          <a:effectRef idx="2">
-            <a:schemeClr val="accent1"/>
-          </a:effectRef>
-          <a:fontRef idx="minor">
-            <a:schemeClr val="lt1"/>
-          </a:fontRef>
-        </p:style>
-        <p:txBody>
-          <a:bodyPr rtlCol="0" anchor="ctr"/>
-          <a:lstStyle/>
-          <a:p/>
-        </p:txBody>
-      </p:sp>
-      <p:sp>
-        <p:nvSpPr>
-          <p:cNvPr id="22" name="Rectangle 21"/>
-          <p:cNvSpPr/>
-          <p:nvPr/>
-        </p:nvSpPr>
-        <p:spPr>
-          <a:xfrm>
-            <a:off x="2505456" y="2263140"/>
-            <a:ext cx="91440" cy="27432"/>
-          </a:xfrm>
-          <a:prstGeom prst="rect">
-            <a:avLst/>
-          </a:prstGeom>
-          <a:solidFill>
-            <a:srgbClr val="D5A97E"/>
-          </a:solidFill>
-          <a:ln>
-            <a:noFill/>
-          </a:ln>
-          <a:effectLst/>
-        </p:spPr>
-        <p:style>
-          <a:lnRef idx="1">
-            <a:schemeClr val="accent1"/>
-          </a:lnRef>
-          <a:fillRef idx="3">
-            <a:schemeClr val="accent1"/>
-          </a:fillRef>
-          <a:effectRef idx="2">
-            <a:schemeClr val="accent1"/>
-          </a:effectRef>
-          <a:fontRef idx="minor">
-            <a:schemeClr val="lt1"/>
-          </a:fontRef>
-        </p:style>
-        <p:txBody>
-          <a:bodyPr rtlCol="0" anchor="ctr"/>
-          <a:lstStyle/>
-          <a:p/>
-        </p:txBody>
-      </p:sp>
-      <p:sp>
-        <p:nvSpPr>
-          <p:cNvPr id="23" name="Rounded Rectangle 22"/>
-          <p:cNvSpPr/>
-          <p:nvPr/>
-        </p:nvSpPr>
-        <p:spPr>
-          <a:xfrm>
-            <a:off x="2670048" y="2212848"/>
-            <a:ext cx="128016" cy="128016"/>
-          </a:xfrm>
-          <a:prstGeom prst="roundRect">
-            <a:avLst>
-              <a:gd name="adj" fmla="val 50000"/>
-            </a:avLst>
-          </a:prstGeom>
-          <a:solidFill>
-            <a:srgbClr val="FFFFFF"/>
-          </a:solidFill>
-          <a:ln>
-            <a:noFill/>
-          </a:ln>
-          <a:effectLst/>
-        </p:spPr>
-        <p:style>
-          <a:lnRef idx="1">
-            <a:schemeClr val="accent1"/>
-          </a:lnRef>
-          <a:fillRef idx="3">
-            <a:schemeClr val="accent1"/>
-          </a:fillRef>
-          <a:effectRef idx="2">
-            <a:schemeClr val="accent1"/>
-          </a:effectRef>
-          <a:fontRef idx="minor">
-            <a:schemeClr val="lt1"/>
-          </a:fontRef>
-        </p:style>
-        <p:txBody>
-          <a:bodyPr rtlCol="0" anchor="ctr"/>
-          <a:lstStyle/>
-          <a:p/>
-        </p:txBody>
-      </p:sp>
-      <p:sp>
-        <p:nvSpPr>
-          <p:cNvPr id="24" name="TextBox 23"/>
-          <p:cNvSpPr txBox="1"/>
-          <p:nvPr/>
-        </p:nvSpPr>
-        <p:spPr>
-          <a:xfrm>
-            <a:off x="365760" y="2432304"/>
-            <a:ext cx="1371600" cy="182880"/>
-          </a:xfrm>
-          <a:prstGeom prst="rect">
-            <a:avLst/>
-          </a:prstGeom>
-          <a:noFill/>
-        </p:spPr>
-        <p:txBody>
-          <a:bodyPr wrap="square" lIns="0" rIns="0" tIns="0" bIns="0" anchor="t">
-            <a:spAutoFit/>
-          </a:bodyPr>
-          <a:lstStyle/>
-          <a:p>
-            <a:pPr algn="l">
-              <a:lnSpc>
-                <a:spcPct val="100000"/>
-              </a:lnSpc>
-            </a:pPr>
-            <a:r>
-              <a:rPr sz="800" b="1" i="0">
-                <a:solidFill>
-                  <a:srgbClr val="FFFFFF"/>
-                </a:solidFill>
-                <a:latin typeface="Calibri"/>
-              </a:rPr>
-              <a:t>FOB Bangkok</a:t>
-            </a:r>
-          </a:p>
-        </p:txBody>
-      </p:sp>
-      <p:sp>
-        <p:nvSpPr>
-          <p:cNvPr id="25" name="TextBox 24"/>
-          <p:cNvSpPr txBox="1"/>
-          <p:nvPr/>
-        </p:nvSpPr>
-        <p:spPr>
-          <a:xfrm>
-            <a:off x="1920240" y="2432304"/>
-            <a:ext cx="914400" cy="182880"/>
-          </a:xfrm>
-          <a:prstGeom prst="rect">
-            <a:avLst/>
-          </a:prstGeom>
-          <a:noFill/>
-        </p:spPr>
-        <p:txBody>
-          <a:bodyPr wrap="square" lIns="0" rIns="0" tIns="0" bIns="0" anchor="t">
-            <a:spAutoFit/>
-          </a:bodyPr>
-          <a:lstStyle/>
-          <a:p>
-            <a:pPr algn="r">
-              <a:lnSpc>
-                <a:spcPct val="100000"/>
-              </a:lnSpc>
-            </a:pPr>
-            <a:r>
-              <a:rPr sz="800" b="1" i="0">
-                <a:solidFill>
-                  <a:srgbClr val="FFFFFF"/>
-                </a:solidFill>
-                <a:latin typeface="Calibri"/>
-              </a:rPr>
-              <a:t>Україна</a:t>
-            </a:r>
-          </a:p>
-        </p:txBody>
-      </p:sp>
-      <p:sp>
-        <p:nvSpPr>
-          <p:cNvPr id="26" name="Rounded Rectangle 25"/>
-          <p:cNvSpPr/>
-          <p:nvPr/>
-        </p:nvSpPr>
-        <p:spPr>
-          <a:xfrm>
-            <a:off x="5120640" y="1476979"/>
-            <a:ext cx="1755648" cy="1924304"/>
+            <a:off x="365760" y="3803904"/>
+            <a:ext cx="1481328" cy="859536"/>
           </a:xfrm>
           <a:prstGeom prst="roundRect">
             <a:avLst>
@@ -22477,40 +21566,152 @@
           <a:p/>
         </p:txBody>
       </p:sp>
-      <p:pic>
-        <p:nvPicPr>
-          <p:cNvPr id="27" name="Picture 26" descr="sk_original.png"/>
-          <p:cNvPicPr>
-            <a:picLocks noChangeAspect="1"/>
-          </p:cNvPicPr>
-          <p:nvPr/>
-        </p:nvPicPr>
-        <p:blipFill>
-          <a:blip r:embed="rId2"/>
-          <a:stretch>
-            <a:fillRect/>
-          </a:stretch>
-        </p:blipFill>
-        <p:spPr>
-          <a:xfrm>
-            <a:off x="5363464" y="1636491"/>
-            <a:ext cx="1270000" cy="1605280"/>
-          </a:xfrm>
-          <a:prstGeom prst="rect">
-            <a:avLst/>
-          </a:prstGeom>
-        </p:spPr>
-      </p:pic>
-      <p:sp>
-        <p:nvSpPr>
-          <p:cNvPr id="28" name="Rounded Rectangle 27"/>
+      <p:sp>
+        <p:nvSpPr>
+          <p:cNvPr id="19" name="Rectangle 18"/>
           <p:cNvSpPr/>
           <p:nvPr/>
         </p:nvSpPr>
         <p:spPr>
           <a:xfrm>
-            <a:off x="7022592" y="1476979"/>
-            <a:ext cx="1755648" cy="1924304"/>
+            <a:off x="365760" y="3803904"/>
+            <a:ext cx="1481328" cy="45720"/>
+          </a:xfrm>
+          <a:prstGeom prst="rect">
+            <a:avLst/>
+          </a:prstGeom>
+          <a:solidFill>
+            <a:srgbClr val="B36214"/>
+          </a:solidFill>
+          <a:ln>
+            <a:noFill/>
+          </a:ln>
+          <a:effectLst/>
+        </p:spPr>
+        <p:style>
+          <a:lnRef idx="1">
+            <a:schemeClr val="accent1"/>
+          </a:lnRef>
+          <a:fillRef idx="3">
+            <a:schemeClr val="accent1"/>
+          </a:fillRef>
+          <a:effectRef idx="2">
+            <a:schemeClr val="accent1"/>
+          </a:effectRef>
+          <a:fontRef idx="minor">
+            <a:schemeClr val="lt1"/>
+          </a:fontRef>
+        </p:style>
+        <p:txBody>
+          <a:bodyPr rtlCol="0" anchor="ctr"/>
+          <a:lstStyle/>
+          <a:p/>
+        </p:txBody>
+      </p:sp>
+      <p:sp>
+        <p:nvSpPr>
+          <p:cNvPr id="20" name="TextBox 19"/>
+          <p:cNvSpPr txBox="1"/>
+          <p:nvPr/>
+        </p:nvSpPr>
+        <p:spPr>
+          <a:xfrm>
+            <a:off x="365760" y="3950208"/>
+            <a:ext cx="1481328" cy="292608"/>
+          </a:xfrm>
+          <a:prstGeom prst="rect">
+            <a:avLst/>
+          </a:prstGeom>
+          <a:noFill/>
+        </p:spPr>
+        <p:txBody>
+          <a:bodyPr wrap="square" lIns="0" rIns="0" tIns="0" bIns="0" anchor="t">
+            <a:spAutoFit/>
+          </a:bodyPr>
+          <a:lstStyle/>
+          <a:p>
+            <a:pPr algn="ctr">
+              <a:lnSpc>
+                <a:spcPct val="100000"/>
+              </a:lnSpc>
+            </a:pPr>
+            <a:r>
+              <a:rPr sz="1700" b="1" i="0">
+                <a:solidFill>
+                  <a:srgbClr val="AB5F15"/>
+                </a:solidFill>
+                <a:latin typeface="Cambria"/>
+              </a:rPr>
+              <a:t>2</a:t>
+            </a:r>
+          </a:p>
+        </p:txBody>
+      </p:sp>
+      <p:sp>
+        <p:nvSpPr>
+          <p:cNvPr id="21" name="TextBox 20"/>
+          <p:cNvSpPr txBox="1"/>
+          <p:nvPr/>
+        </p:nvSpPr>
+        <p:spPr>
+          <a:xfrm>
+            <a:off x="457200" y="4279392"/>
+            <a:ext cx="1298448" cy="329184"/>
+          </a:xfrm>
+          <a:prstGeom prst="rect">
+            <a:avLst/>
+          </a:prstGeom>
+          <a:noFill/>
+        </p:spPr>
+        <p:txBody>
+          <a:bodyPr wrap="square" lIns="0" rIns="0" tIns="0" bIns="0" anchor="t">
+            <a:spAutoFit/>
+          </a:bodyPr>
+          <a:lstStyle/>
+          <a:p>
+            <a:pPr algn="ctr">
+              <a:lnSpc>
+                <a:spcPct val="114000"/>
+              </a:lnSpc>
+            </a:pPr>
+            <a:r>
+              <a:rPr sz="700" b="0" i="0">
+                <a:solidFill>
+                  <a:srgbClr val="8A938D"/>
+                </a:solidFill>
+                <a:latin typeface="Calibri"/>
+              </a:rPr>
+              <a:t>SKU із розрахованою</a:t>
+            </a:r>
+          </a:p>
+          <a:p>
+            <a:pPr algn="ctr">
+              <a:lnSpc>
+                <a:spcPct val="114000"/>
+              </a:lnSpc>
+            </a:pPr>
+            <a:r>
+              <a:rPr sz="700" b="0" i="0">
+                <a:solidFill>
+                  <a:srgbClr val="8A938D"/>
+                </a:solidFill>
+                <a:latin typeface="Calibri"/>
+              </a:rPr>
+              <a:t>собівартістю</a:t>
+            </a:r>
+          </a:p>
+        </p:txBody>
+      </p:sp>
+      <p:sp>
+        <p:nvSpPr>
+          <p:cNvPr id="22" name="Rounded Rectangle 21"/>
+          <p:cNvSpPr/>
+          <p:nvPr/>
+        </p:nvSpPr>
+        <p:spPr>
+          <a:xfrm>
+            <a:off x="1979676" y="3803904"/>
+            <a:ext cx="1481328" cy="859536"/>
           </a:xfrm>
           <a:prstGeom prst="roundRect">
             <a:avLst>
@@ -22547,163 +21748,22 @@
           <a:p/>
         </p:txBody>
       </p:sp>
-      <p:pic>
-        <p:nvPicPr>
-          <p:cNvPr id="29" name="Picture 28" descr="sk_wasabi.png"/>
-          <p:cNvPicPr>
-            <a:picLocks noChangeAspect="1"/>
-          </p:cNvPicPr>
-          <p:nvPr/>
-        </p:nvPicPr>
-        <p:blipFill>
-          <a:blip r:embed="rId3"/>
-          <a:stretch>
-            <a:fillRect/>
-          </a:stretch>
-        </p:blipFill>
-        <p:spPr>
-          <a:xfrm>
-            <a:off x="7260336" y="1595851"/>
-            <a:ext cx="1280160" cy="1686560"/>
-          </a:xfrm>
-          <a:prstGeom prst="rect">
-            <a:avLst/>
-          </a:prstGeom>
-        </p:spPr>
-      </p:pic>
-      <p:sp>
-        <p:nvSpPr>
-          <p:cNvPr id="30" name="TextBox 29"/>
-          <p:cNvSpPr txBox="1"/>
-          <p:nvPr/>
-        </p:nvSpPr>
-        <p:spPr>
-          <a:xfrm>
-            <a:off x="5120640" y="3529299"/>
-            <a:ext cx="3657600" cy="182880"/>
-          </a:xfrm>
-          <a:prstGeom prst="rect">
-            <a:avLst/>
-          </a:prstGeom>
-          <a:noFill/>
-        </p:spPr>
-        <p:txBody>
-          <a:bodyPr wrap="square" lIns="0" rIns="0" tIns="0" bIns="0" anchor="t">
-            <a:spAutoFit/>
-          </a:bodyPr>
-          <a:lstStyle/>
-          <a:p>
-            <a:pPr algn="ctr">
-              <a:lnSpc>
-                <a:spcPct val="100000"/>
-              </a:lnSpc>
-            </a:pPr>
-            <a:r>
-              <a:rPr sz="750" b="0" i="0">
-                <a:solidFill>
-                  <a:srgbClr val="8A938D"/>
-                </a:solidFill>
-                <a:latin typeface="Calibri"/>
-              </a:rPr>
-              <a:t>2 позиції із розрахованою собівартістю</a:t>
-            </a:r>
-          </a:p>
-        </p:txBody>
-      </p:sp>
-      <p:sp>
-        <p:nvSpPr>
-          <p:cNvPr id="31" name="TextBox 30"/>
-          <p:cNvSpPr txBox="1"/>
-          <p:nvPr/>
-        </p:nvSpPr>
-        <p:spPr>
-          <a:xfrm>
-            <a:off x="365760" y="2926080"/>
-            <a:ext cx="4617720" cy="822960"/>
-          </a:xfrm>
-          <a:prstGeom prst="rect">
-            <a:avLst/>
-          </a:prstGeom>
-          <a:noFill/>
-        </p:spPr>
-        <p:txBody>
-          <a:bodyPr wrap="square" lIns="0" rIns="0" tIns="0" bIns="0" anchor="t">
-            <a:spAutoFit/>
-          </a:bodyPr>
-          <a:lstStyle/>
-          <a:p>
-            <a:pPr algn="l">
-              <a:lnSpc>
-                <a:spcPct val="134000"/>
-              </a:lnSpc>
-            </a:pPr>
-            <a:r>
-              <a:rPr sz="1050" b="0" i="0">
-                <a:solidFill>
-                  <a:srgbClr val="44524C"/>
-                </a:solidFill>
-                <a:latin typeface="Calibri"/>
-              </a:rPr>
-              <a:t>Спільне підприємство японської Kameda Seika — світового лідера ринку рисових крекерів — та тайської групи Singha. Виробництво в Таїланді за японськими стандартами.</a:t>
-            </a:r>
-          </a:p>
-        </p:txBody>
-      </p:sp>
-      <p:sp>
-        <p:nvSpPr>
-          <p:cNvPr id="32" name="TextBox 31"/>
-          <p:cNvSpPr txBox="1"/>
-          <p:nvPr/>
-        </p:nvSpPr>
-        <p:spPr>
-          <a:xfrm>
-            <a:off x="365760" y="3803904"/>
-            <a:ext cx="4617720" cy="146304"/>
-          </a:xfrm>
-          <a:prstGeom prst="rect">
-            <a:avLst/>
-          </a:prstGeom>
-          <a:noFill/>
-        </p:spPr>
-        <p:txBody>
-          <a:bodyPr wrap="square" lIns="0" rIns="0" tIns="0" bIns="0" anchor="t">
-            <a:spAutoFit/>
-          </a:bodyPr>
-          <a:lstStyle/>
-          <a:p>
-            <a:pPr algn="l">
-              <a:lnSpc>
-                <a:spcPct val="100000"/>
-              </a:lnSpc>
-            </a:pPr>
-            <a:r>
-              <a:rPr sz="700" b="1" i="0" spc="90">
-                <a:solidFill>
-                  <a:srgbClr val="A35C15"/>
-                </a:solidFill>
-                <a:latin typeface="Calibri"/>
-              </a:rPr>
-              <a:t>ВИРОБНИЦТВО І УМОВИ ПОСТАВКИ</a:t>
-            </a:r>
-          </a:p>
-        </p:txBody>
-      </p:sp>
-      <p:sp>
-        <p:nvSpPr>
-          <p:cNvPr id="33" name="Rectangle 32"/>
+      <p:sp>
+        <p:nvSpPr>
+          <p:cNvPr id="23" name="Rectangle 22"/>
           <p:cNvSpPr/>
           <p:nvPr/>
         </p:nvSpPr>
         <p:spPr>
           <a:xfrm>
-            <a:off x="365760" y="4023360"/>
-            <a:ext cx="2194560" cy="9144"/>
+            <a:off x="1979676" y="3803904"/>
+            <a:ext cx="1481328" cy="45720"/>
           </a:xfrm>
           <a:prstGeom prst="rect">
             <a:avLst/>
           </a:prstGeom>
           <a:solidFill>
-            <a:srgbClr val="E6E1D8"/>
+            <a:srgbClr val="B36214"/>
           </a:solidFill>
           <a:ln>
             <a:noFill/>
@@ -22732,14 +21792,14 @@
       </p:sp>
       <p:sp>
         <p:nvSpPr>
-          <p:cNvPr id="34" name="TextBox 33"/>
-          <p:cNvSpPr txBox="1"/>
-          <p:nvPr/>
-        </p:nvSpPr>
-        <p:spPr>
-          <a:xfrm>
-            <a:off x="365760" y="4078224"/>
-            <a:ext cx="2194560" cy="146304"/>
+          <p:cNvPr id="24" name="TextBox 23"/>
+          <p:cNvSpPr txBox="1"/>
+          <p:nvPr/>
+        </p:nvSpPr>
+        <p:spPr>
+          <a:xfrm>
+            <a:off x="1979676" y="3950208"/>
+            <a:ext cx="1481328" cy="292608"/>
           </a:xfrm>
           <a:prstGeom prst="rect">
             <a:avLst/>
@@ -22752,78 +21812,140 @@
           </a:bodyPr>
           <a:lstStyle/>
           <a:p>
-            <a:pPr algn="l">
-              <a:lnSpc>
-                <a:spcPct val="100000"/>
-              </a:lnSpc>
-            </a:pPr>
-            <a:r>
-              <a:rPr sz="650" b="0" i="0">
+            <a:pPr algn="ctr">
+              <a:lnSpc>
+                <a:spcPct val="100000"/>
+              </a:lnSpc>
+            </a:pPr>
+            <a:r>
+              <a:rPr sz="1700" b="1" i="0">
+                <a:solidFill>
+                  <a:srgbClr val="AB5F15"/>
+                </a:solidFill>
+                <a:latin typeface="Cambria"/>
+              </a:rPr>
+              <a:t>12</a:t>
+            </a:r>
+          </a:p>
+        </p:txBody>
+      </p:sp>
+      <p:sp>
+        <p:nvSpPr>
+          <p:cNvPr id="25" name="TextBox 24"/>
+          <p:cNvSpPr txBox="1"/>
+          <p:nvPr/>
+        </p:nvSpPr>
+        <p:spPr>
+          <a:xfrm>
+            <a:off x="2071116" y="4279392"/>
+            <a:ext cx="1298448" cy="329184"/>
+          </a:xfrm>
+          <a:prstGeom prst="rect">
+            <a:avLst/>
+          </a:prstGeom>
+          <a:noFill/>
+        </p:spPr>
+        <p:txBody>
+          <a:bodyPr wrap="square" lIns="0" rIns="0" tIns="0" bIns="0" anchor="t">
+            <a:spAutoFit/>
+          </a:bodyPr>
+          <a:lstStyle/>
+          <a:p>
+            <a:pPr algn="ctr">
+              <a:lnSpc>
+                <a:spcPct val="114000"/>
+              </a:lnSpc>
+            </a:pPr>
+            <a:r>
+              <a:rPr sz="700" b="0" i="0">
                 <a:solidFill>
                   <a:srgbClr val="8A938D"/>
                 </a:solidFill>
                 <a:latin typeface="Calibri"/>
               </a:rPr>
-              <a:t>Фасовка</a:t>
-            </a:r>
-          </a:p>
-        </p:txBody>
-      </p:sp>
-      <p:sp>
-        <p:nvSpPr>
-          <p:cNvPr id="35" name="TextBox 34"/>
-          <p:cNvSpPr txBox="1"/>
-          <p:nvPr/>
-        </p:nvSpPr>
-        <p:spPr>
-          <a:xfrm>
-            <a:off x="365760" y="4206240"/>
-            <a:ext cx="2194560" cy="182880"/>
-          </a:xfrm>
-          <a:prstGeom prst="rect">
-            <a:avLst/>
-          </a:prstGeom>
-          <a:noFill/>
-        </p:spPr>
-        <p:txBody>
-          <a:bodyPr wrap="square" lIns="0" rIns="0" tIns="0" bIns="0" anchor="t">
-            <a:spAutoFit/>
-          </a:bodyPr>
-          <a:lstStyle/>
-          <a:p>
-            <a:pPr algn="l">
-              <a:lnSpc>
-                <a:spcPct val="100000"/>
-              </a:lnSpc>
-            </a:pPr>
-            <a:r>
-              <a:rPr sz="900" b="1" i="0">
-                <a:solidFill>
-                  <a:srgbClr val="14241F"/>
-                </a:solidFill>
-                <a:latin typeface="Calibri"/>
-              </a:rPr>
-              <a:t>24 шт / картон</a:t>
-            </a:r>
-          </a:p>
-        </p:txBody>
-      </p:sp>
-      <p:sp>
-        <p:nvSpPr>
-          <p:cNvPr id="36" name="Rectangle 35"/>
+              <a:t>місяців термін</a:t>
+            </a:r>
+          </a:p>
+          <a:p>
+            <a:pPr algn="ctr">
+              <a:lnSpc>
+                <a:spcPct val="114000"/>
+              </a:lnSpc>
+            </a:pPr>
+            <a:r>
+              <a:rPr sz="700" b="0" i="0">
+                <a:solidFill>
+                  <a:srgbClr val="8A938D"/>
+                </a:solidFill>
+                <a:latin typeface="Calibri"/>
+              </a:rPr>
+              <a:t>придатності</a:t>
+            </a:r>
+          </a:p>
+        </p:txBody>
+      </p:sp>
+      <p:sp>
+        <p:nvSpPr>
+          <p:cNvPr id="26" name="Rounded Rectangle 25"/>
           <p:cNvSpPr/>
           <p:nvPr/>
         </p:nvSpPr>
         <p:spPr>
           <a:xfrm>
-            <a:off x="2743200" y="4023360"/>
-            <a:ext cx="2194560" cy="9144"/>
-          </a:xfrm>
-          <a:prstGeom prst="rect">
-            <a:avLst/>
+            <a:off x="3593592" y="3803904"/>
+            <a:ext cx="1481328" cy="859536"/>
+          </a:xfrm>
+          <a:prstGeom prst="roundRect">
+            <a:avLst>
+              <a:gd name="adj" fmla="val 6000"/>
+            </a:avLst>
           </a:prstGeom>
           <a:solidFill>
-            <a:srgbClr val="E6E1D8"/>
+            <a:srgbClr val="FFFFFF"/>
+          </a:solidFill>
+          <a:ln w="9525">
+            <a:solidFill>
+              <a:srgbClr val="E6E1D8"/>
+            </a:solidFill>
+          </a:ln>
+          <a:effectLst/>
+        </p:spPr>
+        <p:style>
+          <a:lnRef idx="1">
+            <a:schemeClr val="accent1"/>
+          </a:lnRef>
+          <a:fillRef idx="3">
+            <a:schemeClr val="accent1"/>
+          </a:fillRef>
+          <a:effectRef idx="2">
+            <a:schemeClr val="accent1"/>
+          </a:effectRef>
+          <a:fontRef idx="minor">
+            <a:schemeClr val="lt1"/>
+          </a:fontRef>
+        </p:style>
+        <p:txBody>
+          <a:bodyPr rtlCol="0" anchor="ctr"/>
+          <a:lstStyle/>
+          <a:p/>
+        </p:txBody>
+      </p:sp>
+      <p:sp>
+        <p:nvSpPr>
+          <p:cNvPr id="27" name="Rectangle 26"/>
+          <p:cNvSpPr/>
+          <p:nvPr/>
+        </p:nvSpPr>
+        <p:spPr>
+          <a:xfrm>
+            <a:off x="3593592" y="3803904"/>
+            <a:ext cx="1481328" cy="45720"/>
+          </a:xfrm>
+          <a:prstGeom prst="rect">
+            <a:avLst/>
+          </a:prstGeom>
+          <a:solidFill>
+            <a:srgbClr val="B36214"/>
           </a:solidFill>
           <a:ln>
             <a:noFill/>
@@ -22852,14 +21974,14 @@
       </p:sp>
       <p:sp>
         <p:nvSpPr>
-          <p:cNvPr id="37" name="TextBox 36"/>
-          <p:cNvSpPr txBox="1"/>
-          <p:nvPr/>
-        </p:nvSpPr>
-        <p:spPr>
-          <a:xfrm>
-            <a:off x="2743200" y="4078224"/>
-            <a:ext cx="2194560" cy="146304"/>
+          <p:cNvPr id="28" name="TextBox 27"/>
+          <p:cNvSpPr txBox="1"/>
+          <p:nvPr/>
+        </p:nvSpPr>
+        <p:spPr>
+          <a:xfrm>
+            <a:off x="3593592" y="3950208"/>
+            <a:ext cx="1481328" cy="292608"/>
           </a:xfrm>
           <a:prstGeom prst="rect">
             <a:avLst/>
@@ -22872,347 +21994,81 @@
           </a:bodyPr>
           <a:lstStyle/>
           <a:p>
-            <a:pPr algn="l">
-              <a:lnSpc>
-                <a:spcPct val="100000"/>
-              </a:lnSpc>
-            </a:pPr>
-            <a:r>
-              <a:rPr sz="650" b="0" i="0">
+            <a:pPr algn="ctr">
+              <a:lnSpc>
+                <a:spcPct val="100000"/>
+              </a:lnSpc>
+            </a:pPr>
+            <a:r>
+              <a:rPr sz="1700" b="1" i="0">
+                <a:solidFill>
+                  <a:srgbClr val="AB5F15"/>
+                </a:solidFill>
+                <a:latin typeface="Cambria"/>
+              </a:rPr>
+              <a:t>3 626</a:t>
+            </a:r>
+          </a:p>
+        </p:txBody>
+      </p:sp>
+      <p:sp>
+        <p:nvSpPr>
+          <p:cNvPr id="29" name="TextBox 28"/>
+          <p:cNvSpPr txBox="1"/>
+          <p:nvPr/>
+        </p:nvSpPr>
+        <p:spPr>
+          <a:xfrm>
+            <a:off x="3685032" y="4279392"/>
+            <a:ext cx="1298448" cy="329184"/>
+          </a:xfrm>
+          <a:prstGeom prst="rect">
+            <a:avLst/>
+          </a:prstGeom>
+          <a:noFill/>
+        </p:spPr>
+        <p:txBody>
+          <a:bodyPr wrap="square" lIns="0" rIns="0" tIns="0" bIns="0" anchor="t">
+            <a:spAutoFit/>
+          </a:bodyPr>
+          <a:lstStyle/>
+          <a:p>
+            <a:pPr algn="ctr">
+              <a:lnSpc>
+                <a:spcPct val="114000"/>
+              </a:lnSpc>
+            </a:pPr>
+            <a:r>
+              <a:rPr sz="700" b="0" i="0">
                 <a:solidFill>
                   <a:srgbClr val="8A938D"/>
                 </a:solidFill>
                 <a:latin typeface="Calibri"/>
               </a:rPr>
-              <a:t>Термін придатності</a:t>
-            </a:r>
-          </a:p>
-        </p:txBody>
-      </p:sp>
-      <p:sp>
-        <p:nvSpPr>
-          <p:cNvPr id="38" name="TextBox 37"/>
-          <p:cNvSpPr txBox="1"/>
-          <p:nvPr/>
-        </p:nvSpPr>
-        <p:spPr>
-          <a:xfrm>
-            <a:off x="2743200" y="4206240"/>
-            <a:ext cx="2194560" cy="182880"/>
-          </a:xfrm>
-          <a:prstGeom prst="rect">
-            <a:avLst/>
-          </a:prstGeom>
-          <a:noFill/>
-        </p:spPr>
-        <p:txBody>
-          <a:bodyPr wrap="square" lIns="0" rIns="0" tIns="0" bIns="0" anchor="t">
-            <a:spAutoFit/>
-          </a:bodyPr>
-          <a:lstStyle/>
-          <a:p>
-            <a:pPr algn="l">
-              <a:lnSpc>
-                <a:spcPct val="100000"/>
-              </a:lnSpc>
-            </a:pPr>
-            <a:r>
-              <a:rPr sz="900" b="1" i="0">
-                <a:solidFill>
-                  <a:srgbClr val="14241F"/>
-                </a:solidFill>
-                <a:latin typeface="Calibri"/>
-              </a:rPr>
-              <a:t>12 місяців</a:t>
-            </a:r>
-          </a:p>
-        </p:txBody>
-      </p:sp>
-      <p:sp>
-        <p:nvSpPr>
-          <p:cNvPr id="39" name="Rectangle 38"/>
-          <p:cNvSpPr/>
-          <p:nvPr/>
-        </p:nvSpPr>
-        <p:spPr>
-          <a:xfrm>
-            <a:off x="365760" y="4425696"/>
-            <a:ext cx="2194560" cy="9144"/>
-          </a:xfrm>
-          <a:prstGeom prst="rect">
-            <a:avLst/>
-          </a:prstGeom>
-          <a:solidFill>
-            <a:srgbClr val="E6E1D8"/>
-          </a:solidFill>
-          <a:ln>
-            <a:noFill/>
-          </a:ln>
-          <a:effectLst/>
-        </p:spPr>
-        <p:style>
-          <a:lnRef idx="1">
-            <a:schemeClr val="accent1"/>
-          </a:lnRef>
-          <a:fillRef idx="3">
-            <a:schemeClr val="accent1"/>
-          </a:fillRef>
-          <a:effectRef idx="2">
-            <a:schemeClr val="accent1"/>
-          </a:effectRef>
-          <a:fontRef idx="minor">
-            <a:schemeClr val="lt1"/>
-          </a:fontRef>
-        </p:style>
-        <p:txBody>
-          <a:bodyPr rtlCol="0" anchor="ctr"/>
-          <a:lstStyle/>
-          <a:p/>
-        </p:txBody>
-      </p:sp>
-      <p:sp>
-        <p:nvSpPr>
-          <p:cNvPr id="40" name="TextBox 39"/>
-          <p:cNvSpPr txBox="1"/>
-          <p:nvPr/>
-        </p:nvSpPr>
-        <p:spPr>
-          <a:xfrm>
-            <a:off x="365760" y="4480560"/>
-            <a:ext cx="2194560" cy="146304"/>
-          </a:xfrm>
-          <a:prstGeom prst="rect">
-            <a:avLst/>
-          </a:prstGeom>
-          <a:noFill/>
-        </p:spPr>
-        <p:txBody>
-          <a:bodyPr wrap="square" lIns="0" rIns="0" tIns="0" bIns="0" anchor="t">
-            <a:spAutoFit/>
-          </a:bodyPr>
-          <a:lstStyle/>
-          <a:p>
-            <a:pPr algn="l">
-              <a:lnSpc>
-                <a:spcPct val="100000"/>
-              </a:lnSpc>
-            </a:pPr>
-            <a:r>
-              <a:rPr sz="650" b="0" i="0">
+              <a:t>картонів</a:t>
+            </a:r>
+          </a:p>
+          <a:p>
+            <a:pPr algn="ctr">
+              <a:lnSpc>
+                <a:spcPct val="114000"/>
+              </a:lnSpc>
+            </a:pPr>
+            <a:r>
+              <a:rPr sz="700" b="0" i="0">
                 <a:solidFill>
                   <a:srgbClr val="8A938D"/>
                 </a:solidFill>
                 <a:latin typeface="Calibri"/>
               </a:rPr>
-              <a:t>Місткість 20′</a:t>
-            </a:r>
-          </a:p>
-        </p:txBody>
-      </p:sp>
-      <p:sp>
-        <p:nvSpPr>
-          <p:cNvPr id="41" name="TextBox 40"/>
-          <p:cNvSpPr txBox="1"/>
-          <p:nvPr/>
-        </p:nvSpPr>
-        <p:spPr>
-          <a:xfrm>
-            <a:off x="365760" y="4608576"/>
-            <a:ext cx="2194560" cy="182880"/>
-          </a:xfrm>
-          <a:prstGeom prst="rect">
-            <a:avLst/>
-          </a:prstGeom>
-          <a:noFill/>
-        </p:spPr>
-        <p:txBody>
-          <a:bodyPr wrap="square" lIns="0" rIns="0" tIns="0" bIns="0" anchor="t">
-            <a:spAutoFit/>
-          </a:bodyPr>
-          <a:lstStyle/>
-          <a:p>
-            <a:pPr algn="l">
-              <a:lnSpc>
-                <a:spcPct val="100000"/>
-              </a:lnSpc>
-            </a:pPr>
-            <a:r>
-              <a:rPr sz="900" b="1" i="0">
-                <a:solidFill>
-                  <a:srgbClr val="14241F"/>
-                </a:solidFill>
-                <a:latin typeface="Calibri"/>
-              </a:rPr>
-              <a:t>1 485 картонів</a:t>
-            </a:r>
-          </a:p>
-        </p:txBody>
-      </p:sp>
-      <p:sp>
-        <p:nvSpPr>
-          <p:cNvPr id="42" name="Rectangle 41"/>
-          <p:cNvSpPr/>
-          <p:nvPr/>
-        </p:nvSpPr>
-        <p:spPr>
-          <a:xfrm>
-            <a:off x="2743200" y="4425696"/>
-            <a:ext cx="2194560" cy="9144"/>
-          </a:xfrm>
-          <a:prstGeom prst="rect">
-            <a:avLst/>
-          </a:prstGeom>
-          <a:solidFill>
-            <a:srgbClr val="E6E1D8"/>
-          </a:solidFill>
-          <a:ln>
-            <a:noFill/>
-          </a:ln>
-          <a:effectLst/>
-        </p:spPr>
-        <p:style>
-          <a:lnRef idx="1">
-            <a:schemeClr val="accent1"/>
-          </a:lnRef>
-          <a:fillRef idx="3">
-            <a:schemeClr val="accent1"/>
-          </a:fillRef>
-          <a:effectRef idx="2">
-            <a:schemeClr val="accent1"/>
-          </a:effectRef>
-          <a:fontRef idx="minor">
-            <a:schemeClr val="lt1"/>
-          </a:fontRef>
-        </p:style>
-        <p:txBody>
-          <a:bodyPr rtlCol="0" anchor="ctr"/>
-          <a:lstStyle/>
-          <a:p/>
-        </p:txBody>
-      </p:sp>
-      <p:sp>
-        <p:nvSpPr>
-          <p:cNvPr id="43" name="TextBox 42"/>
-          <p:cNvSpPr txBox="1"/>
-          <p:nvPr/>
-        </p:nvSpPr>
-        <p:spPr>
-          <a:xfrm>
-            <a:off x="2743200" y="4480560"/>
-            <a:ext cx="2194560" cy="146304"/>
-          </a:xfrm>
-          <a:prstGeom prst="rect">
-            <a:avLst/>
-          </a:prstGeom>
-          <a:noFill/>
-        </p:spPr>
-        <p:txBody>
-          <a:bodyPr wrap="square" lIns="0" rIns="0" tIns="0" bIns="0" anchor="t">
-            <a:spAutoFit/>
-          </a:bodyPr>
-          <a:lstStyle/>
-          <a:p>
-            <a:pPr algn="l">
-              <a:lnSpc>
-                <a:spcPct val="100000"/>
-              </a:lnSpc>
-            </a:pPr>
-            <a:r>
-              <a:rPr sz="650" b="0" i="0">
-                <a:solidFill>
-                  <a:srgbClr val="8A938D"/>
-                </a:solidFill>
-                <a:latin typeface="Calibri"/>
-              </a:rPr>
-              <a:t>Місткість 40′HC</a:t>
-            </a:r>
-          </a:p>
-        </p:txBody>
-      </p:sp>
-      <p:sp>
-        <p:nvSpPr>
-          <p:cNvPr id="44" name="TextBox 43"/>
-          <p:cNvSpPr txBox="1"/>
-          <p:nvPr/>
-        </p:nvSpPr>
-        <p:spPr>
-          <a:xfrm>
-            <a:off x="2743200" y="4608576"/>
-            <a:ext cx="2194560" cy="182880"/>
-          </a:xfrm>
-          <a:prstGeom prst="rect">
-            <a:avLst/>
-          </a:prstGeom>
-          <a:noFill/>
-        </p:spPr>
-        <p:txBody>
-          <a:bodyPr wrap="square" lIns="0" rIns="0" tIns="0" bIns="0" anchor="t">
-            <a:spAutoFit/>
-          </a:bodyPr>
-          <a:lstStyle/>
-          <a:p>
-            <a:pPr algn="l">
-              <a:lnSpc>
-                <a:spcPct val="100000"/>
-              </a:lnSpc>
-            </a:pPr>
-            <a:r>
-              <a:rPr sz="900" b="1" i="0">
-                <a:solidFill>
-                  <a:srgbClr val="14241F"/>
-                </a:solidFill>
-                <a:latin typeface="Calibri"/>
-              </a:rPr>
-              <a:t>3 626 картонів</a:t>
-            </a:r>
-          </a:p>
-        </p:txBody>
-      </p:sp>
-      <p:sp>
-        <p:nvSpPr>
-          <p:cNvPr id="45" name="Rectangle 44"/>
-          <p:cNvSpPr/>
-          <p:nvPr/>
-        </p:nvSpPr>
-        <p:spPr>
-          <a:xfrm>
-            <a:off x="365760" y="4809744"/>
-            <a:ext cx="8412480" cy="9144"/>
-          </a:xfrm>
-          <a:prstGeom prst="rect">
-            <a:avLst/>
-          </a:prstGeom>
-          <a:solidFill>
-            <a:srgbClr val="E6E1D8"/>
-          </a:solidFill>
-          <a:ln>
-            <a:noFill/>
-          </a:ln>
-          <a:effectLst/>
-        </p:spPr>
-        <p:style>
-          <a:lnRef idx="1">
-            <a:schemeClr val="accent1"/>
-          </a:lnRef>
-          <a:fillRef idx="3">
-            <a:schemeClr val="accent1"/>
-          </a:fillRef>
-          <a:effectRef idx="2">
-            <a:schemeClr val="accent1"/>
-          </a:effectRef>
-          <a:fontRef idx="minor">
-            <a:schemeClr val="lt1"/>
-          </a:fontRef>
-        </p:style>
-        <p:txBody>
-          <a:bodyPr rtlCol="0" anchor="ctr"/>
-          <a:lstStyle/>
-          <a:p/>
-        </p:txBody>
-      </p:sp>
-      <p:sp>
-        <p:nvSpPr>
-          <p:cNvPr id="46" name="TextBox 45"/>
+              <a:t>у 40′HC</a:t>
+            </a:r>
+          </a:p>
+        </p:txBody>
+      </p:sp>
+      <p:sp>
+        <p:nvSpPr>
+          <p:cNvPr id="30" name="TextBox 29"/>
           <p:cNvSpPr txBox="1"/>
           <p:nvPr/>
         </p:nvSpPr>
@@ -23240,7 +22096,7 @@
             <a:r>
               <a:rPr sz="700" b="1" i="0">
                 <a:solidFill>
-                  <a:srgbClr val="8A938D"/>
+                  <a:srgbClr val="E8D0B8"/>
                 </a:solidFill>
                 <a:latin typeface="Calibri"/>
               </a:rPr>
@@ -25846,8 +24702,8 @@
         </p:nvSpPr>
         <p:spPr>
           <a:xfrm>
-            <a:off x="0" y="0"/>
-            <a:ext cx="9144000" cy="64008"/>
+            <a:off x="5349240" y="0"/>
+            <a:ext cx="3794760" cy="5143500"/>
           </a:xfrm>
           <a:prstGeom prst="rect">
             <a:avLst/>
@@ -25882,14 +24738,113 @@
       </p:sp>
       <p:sp>
         <p:nvSpPr>
-          <p:cNvPr id="4" name="Rectangle 3"/>
+          <p:cNvPr id="4" name="Rounded Rectangle 3"/>
           <p:cNvSpPr/>
           <p:nvPr/>
         </p:nvSpPr>
         <p:spPr>
           <a:xfrm>
-            <a:off x="0" y="0"/>
-            <a:ext cx="9144000" cy="2670048"/>
+            <a:off x="5806440" y="1005840"/>
+            <a:ext cx="2880360" cy="2331720"/>
+          </a:xfrm>
+          <a:prstGeom prst="roundRect">
+            <a:avLst>
+              <a:gd name="adj" fmla="val 5000"/>
+            </a:avLst>
+          </a:prstGeom>
+          <a:solidFill>
+            <a:srgbClr val="FFFFFF"/>
+          </a:solidFill>
+          <a:ln>
+            <a:noFill/>
+          </a:ln>
+          <a:effectLst/>
+        </p:spPr>
+        <p:style>
+          <a:lnRef idx="1">
+            <a:schemeClr val="accent1"/>
+          </a:lnRef>
+          <a:fillRef idx="3">
+            <a:schemeClr val="accent1"/>
+          </a:fillRef>
+          <a:effectRef idx="2">
+            <a:schemeClr val="accent1"/>
+          </a:effectRef>
+          <a:fontRef idx="minor">
+            <a:schemeClr val="lt1"/>
+          </a:fontRef>
+        </p:style>
+        <p:txBody>
+          <a:bodyPr rtlCol="0" anchor="ctr"/>
+          <a:lstStyle/>
+          <a:p/>
+        </p:txBody>
+      </p:sp>
+      <p:sp>
+        <p:nvSpPr>
+          <p:cNvPr id="5" name="TextBox 4"/>
+          <p:cNvSpPr txBox="1"/>
+          <p:nvPr/>
+        </p:nvSpPr>
+        <p:spPr>
+          <a:xfrm>
+            <a:off x="5952744" y="1298448"/>
+            <a:ext cx="2587752" cy="914400"/>
+          </a:xfrm>
+          <a:prstGeom prst="rect">
+            <a:avLst/>
+          </a:prstGeom>
+          <a:noFill/>
+        </p:spPr>
+        <p:txBody>
+          <a:bodyPr wrap="square" lIns="0" rIns="0" tIns="0" bIns="0" anchor="ctr">
+            <a:spAutoFit/>
+          </a:bodyPr>
+          <a:lstStyle/>
+          <a:p>
+            <a:pPr algn="ctr">
+              <a:lnSpc>
+                <a:spcPct val="108000"/>
+              </a:lnSpc>
+            </a:pPr>
+            <a:r>
+              <a:rPr sz="2500" b="1" i="0">
+                <a:solidFill>
+                  <a:srgbClr val="1D5860"/>
+                </a:solidFill>
+                <a:latin typeface="Cambria"/>
+              </a:rPr>
+              <a:t>THAI</a:t>
+            </a:r>
+          </a:p>
+          <a:p>
+            <a:pPr algn="ctr">
+              <a:lnSpc>
+                <a:spcPct val="108000"/>
+              </a:lnSpc>
+            </a:pPr>
+            <a:r>
+              <a:rPr sz="2500" b="1" i="0">
+                <a:solidFill>
+                  <a:srgbClr val="1D5860"/>
+                </a:solidFill>
+                <a:latin typeface="Cambria"/>
+              </a:rPr>
+              <a:t>NICHI</a:t>
+            </a:r>
+          </a:p>
+        </p:txBody>
+      </p:sp>
+      <p:sp>
+        <p:nvSpPr>
+          <p:cNvPr id="6" name="Rectangle 5"/>
+          <p:cNvSpPr/>
+          <p:nvPr/>
+        </p:nvSpPr>
+        <p:spPr>
+          <a:xfrm>
+            <a:off x="6944868" y="2450592"/>
+            <a:ext cx="603504" cy="32004"/>
           </a:xfrm>
           <a:prstGeom prst="rect">
             <a:avLst/>
@@ -25924,22 +24879,137 @@
       </p:sp>
       <p:sp>
         <p:nvSpPr>
-          <p:cNvPr id="5" name="Rounded Rectangle 4"/>
+          <p:cNvPr id="7" name="TextBox 6"/>
+          <p:cNvSpPr txBox="1"/>
+          <p:nvPr/>
+        </p:nvSpPr>
+        <p:spPr>
+          <a:xfrm>
+            <a:off x="5952744" y="2633472"/>
+            <a:ext cx="2587752" cy="274320"/>
+          </a:xfrm>
+          <a:prstGeom prst="rect">
+            <a:avLst/>
+          </a:prstGeom>
+          <a:noFill/>
+        </p:spPr>
+        <p:txBody>
+          <a:bodyPr wrap="square" lIns="0" rIns="0" tIns="0" bIns="0" anchor="t">
+            <a:spAutoFit/>
+          </a:bodyPr>
+          <a:lstStyle/>
+          <a:p>
+            <a:pPr algn="ctr">
+              <a:lnSpc>
+                <a:spcPct val="100000"/>
+              </a:lnSpc>
+            </a:pPr>
+            <a:r>
+              <a:rPr sz="1050" b="0" i="0">
+                <a:solidFill>
+                  <a:srgbClr val="8A938D"/>
+                </a:solidFill>
+                <a:latin typeface="Calibri"/>
+              </a:rPr>
+              <a:t>Mizuho · Norimaki</a:t>
+            </a:r>
+          </a:p>
+        </p:txBody>
+      </p:sp>
+      <p:sp>
+        <p:nvSpPr>
+          <p:cNvPr id="8" name="TextBox 7"/>
+          <p:cNvSpPr txBox="1"/>
+          <p:nvPr/>
+        </p:nvSpPr>
+        <p:spPr>
+          <a:xfrm>
+            <a:off x="5349240" y="3694176"/>
+            <a:ext cx="3794760" cy="182880"/>
+          </a:xfrm>
+          <a:prstGeom prst="rect">
+            <a:avLst/>
+          </a:prstGeom>
+          <a:noFill/>
+        </p:spPr>
+        <p:txBody>
+          <a:bodyPr wrap="square" lIns="0" rIns="0" tIns="0" bIns="0" anchor="t">
+            <a:spAutoFit/>
+          </a:bodyPr>
+          <a:lstStyle/>
+          <a:p>
+            <a:pPr algn="ctr">
+              <a:lnSpc>
+                <a:spcPct val="100000"/>
+              </a:lnSpc>
+            </a:pPr>
+            <a:r>
+              <a:rPr sz="700" b="1" i="0" spc="90">
+                <a:solidFill>
+                  <a:srgbClr val="C0D1D3"/>
+                </a:solidFill>
+                <a:latin typeface="Calibri"/>
+              </a:rPr>
+              <a:t>ВИРОБНИЦТВО</a:t>
+            </a:r>
+          </a:p>
+        </p:txBody>
+      </p:sp>
+      <p:sp>
+        <p:nvSpPr>
+          <p:cNvPr id="9" name="TextBox 8"/>
+          <p:cNvSpPr txBox="1"/>
+          <p:nvPr/>
+        </p:nvSpPr>
+        <p:spPr>
+          <a:xfrm>
+            <a:off x="5349240" y="3895344"/>
+            <a:ext cx="3794760" cy="274320"/>
+          </a:xfrm>
+          <a:prstGeom prst="rect">
+            <a:avLst/>
+          </a:prstGeom>
+          <a:noFill/>
+        </p:spPr>
+        <p:txBody>
+          <a:bodyPr wrap="square" lIns="0" rIns="0" tIns="0" bIns="0" anchor="t">
+            <a:spAutoFit/>
+          </a:bodyPr>
+          <a:lstStyle/>
+          <a:p>
+            <a:pPr algn="ctr">
+              <a:lnSpc>
+                <a:spcPct val="100000"/>
+              </a:lnSpc>
+            </a:pPr>
+            <a:r>
+              <a:rPr sz="1300" b="1" i="0">
+                <a:solidFill>
+                  <a:srgbClr val="FFFFFF"/>
+                </a:solidFill>
+                <a:latin typeface="Cambria"/>
+              </a:rPr>
+              <a:t>Таїланд</a:t>
+            </a:r>
+          </a:p>
+        </p:txBody>
+      </p:sp>
+      <p:sp>
+        <p:nvSpPr>
+          <p:cNvPr id="10" name="Rectangle 9"/>
           <p:cNvSpPr/>
           <p:nvPr/>
         </p:nvSpPr>
         <p:spPr>
           <a:xfrm>
             <a:off x="365760" y="475488"/>
-            <a:ext cx="402336" cy="402336"/>
-          </a:xfrm>
-          <a:prstGeom prst="roundRect">
-            <a:avLst>
-              <a:gd name="adj" fmla="val 10000"/>
-            </a:avLst>
+            <a:ext cx="237744" cy="237744"/>
+          </a:xfrm>
+          <a:prstGeom prst="rect">
+            <a:avLst/>
           </a:prstGeom>
           <a:solidFill>
-            <a:srgbClr val="FFFFFF"/>
+            <a:srgbClr val="1D5B63"/>
           </a:solidFill>
           <a:ln>
             <a:noFill/>
@@ -25968,53 +25038,108 @@
       </p:sp>
       <p:sp>
         <p:nvSpPr>
-          <p:cNvPr id="6" name="TextBox 5"/>
-          <p:cNvSpPr txBox="1"/>
-          <p:nvPr/>
-        </p:nvSpPr>
-        <p:spPr>
-          <a:xfrm>
-            <a:off x="365760" y="475488"/>
-            <a:ext cx="402336" cy="402336"/>
-          </a:xfrm>
-          <a:prstGeom prst="rect">
-            <a:avLst/>
-          </a:prstGeom>
-          <a:noFill/>
-        </p:spPr>
-        <p:txBody>
-          <a:bodyPr wrap="square" lIns="0" rIns="0" tIns="0" bIns="0" anchor="ctr">
-            <a:spAutoFit/>
-          </a:bodyPr>
-          <a:lstStyle/>
-          <a:p>
-            <a:pPr algn="ctr">
-              <a:lnSpc>
-                <a:spcPct val="100000"/>
-              </a:lnSpc>
-            </a:pPr>
-            <a:r>
-              <a:rPr sz="1400" b="1" i="0">
-                <a:solidFill>
-                  <a:srgbClr val="1D5860"/>
+          <p:cNvPr id="11" name="TextBox 10"/>
+          <p:cNvSpPr txBox="1"/>
+          <p:nvPr/>
+        </p:nvSpPr>
+        <p:spPr>
+          <a:xfrm>
+            <a:off x="749808" y="475488"/>
+            <a:ext cx="4023360" cy="237744"/>
+          </a:xfrm>
+          <a:prstGeom prst="rect">
+            <a:avLst/>
+          </a:prstGeom>
+          <a:noFill/>
+        </p:spPr>
+        <p:txBody>
+          <a:bodyPr wrap="square" lIns="0" rIns="0" tIns="0" bIns="0" anchor="t">
+            <a:spAutoFit/>
+          </a:bodyPr>
+          <a:lstStyle/>
+          <a:p>
+            <a:pPr algn="l">
+              <a:lnSpc>
+                <a:spcPct val="100000"/>
+              </a:lnSpc>
+            </a:pPr>
+            <a:r>
+              <a:rPr sz="800" b="1" i="0" spc="90">
+                <a:solidFill>
+                  <a:srgbClr val="1C565C"/>
+                </a:solidFill>
+                <a:latin typeface="Calibri"/>
+              </a:rPr>
+              <a:t>ПРОФІЛЬ ПОСТАЧАЛЬНИКА · 02</a:t>
+            </a:r>
+          </a:p>
+        </p:txBody>
+      </p:sp>
+      <p:sp>
+        <p:nvSpPr>
+          <p:cNvPr id="12" name="TextBox 11"/>
+          <p:cNvSpPr txBox="1"/>
+          <p:nvPr/>
+        </p:nvSpPr>
+        <p:spPr>
+          <a:xfrm>
+            <a:off x="365760" y="859536"/>
+            <a:ext cx="4617720" cy="914400"/>
+          </a:xfrm>
+          <a:prstGeom prst="rect">
+            <a:avLst/>
+          </a:prstGeom>
+          <a:noFill/>
+        </p:spPr>
+        <p:txBody>
+          <a:bodyPr wrap="square" lIns="0" rIns="0" tIns="0" bIns="0" anchor="t">
+            <a:spAutoFit/>
+          </a:bodyPr>
+          <a:lstStyle/>
+          <a:p>
+            <a:pPr algn="l">
+              <a:lnSpc>
+                <a:spcPct val="108000"/>
+              </a:lnSpc>
+            </a:pPr>
+            <a:r>
+              <a:rPr sz="2600" b="1" i="0">
+                <a:solidFill>
+                  <a:srgbClr val="14241F"/>
                 </a:solidFill>
                 <a:latin typeface="Cambria"/>
               </a:rPr>
-              <a:t>02</a:t>
-            </a:r>
-          </a:p>
-        </p:txBody>
-      </p:sp>
-      <p:sp>
-        <p:nvSpPr>
-          <p:cNvPr id="7" name="TextBox 6"/>
-          <p:cNvSpPr txBox="1"/>
-          <p:nvPr/>
-        </p:nvSpPr>
-        <p:spPr>
-          <a:xfrm>
-            <a:off x="914400" y="493776"/>
-            <a:ext cx="4023360" cy="182880"/>
+              <a:t>Thai-Nichi</a:t>
+            </a:r>
+          </a:p>
+          <a:p>
+            <a:pPr algn="l">
+              <a:lnSpc>
+                <a:spcPct val="108000"/>
+              </a:lnSpc>
+            </a:pPr>
+            <a:r>
+              <a:rPr sz="2600" b="1" i="0">
+                <a:solidFill>
+                  <a:srgbClr val="14241F"/>
+                </a:solidFill>
+                <a:latin typeface="Cambria"/>
+              </a:rPr>
+              <a:t>Industries Co., Ltd.</a:t>
+            </a:r>
+          </a:p>
+        </p:txBody>
+      </p:sp>
+      <p:sp>
+        <p:nvSpPr>
+          <p:cNvPr id="13" name="TextBox 12"/>
+          <p:cNvSpPr txBox="1"/>
+          <p:nvPr/>
+        </p:nvSpPr>
+        <p:spPr>
+          <a:xfrm>
+            <a:off x="365760" y="1920240"/>
+            <a:ext cx="4617720" cy="274320"/>
           </a:xfrm>
           <a:prstGeom prst="rect">
             <a:avLst/>
@@ -26033,168 +25158,35 @@
               </a:lnSpc>
             </a:pPr>
             <a:r>
-              <a:rPr sz="700" b="1" i="0" spc="90">
-                <a:solidFill>
-                  <a:srgbClr val="BBCED0"/>
-                </a:solidFill>
-                <a:latin typeface="Calibri"/>
-              </a:rPr>
-              <a:t>ПОСТАЧАЛЬНИК</a:t>
-            </a:r>
-          </a:p>
-        </p:txBody>
-      </p:sp>
-      <p:sp>
-        <p:nvSpPr>
-          <p:cNvPr id="8" name="TextBox 7"/>
-          <p:cNvSpPr txBox="1"/>
-          <p:nvPr/>
-        </p:nvSpPr>
-        <p:spPr>
-          <a:xfrm>
-            <a:off x="914400" y="676656"/>
-            <a:ext cx="4023360" cy="201168"/>
-          </a:xfrm>
-          <a:prstGeom prst="rect">
-            <a:avLst/>
-          </a:prstGeom>
-          <a:noFill/>
-        </p:spPr>
-        <p:txBody>
-          <a:bodyPr wrap="square" lIns="0" rIns="0" tIns="0" bIns="0" anchor="t">
-            <a:spAutoFit/>
-          </a:bodyPr>
-          <a:lstStyle/>
-          <a:p>
-            <a:pPr algn="l">
-              <a:lnSpc>
-                <a:spcPct val="100000"/>
-              </a:lnSpc>
-            </a:pPr>
-            <a:r>
-              <a:rPr sz="900" b="1" i="0" spc="90">
-                <a:solidFill>
-                  <a:srgbClr val="FFFFFF"/>
-                </a:solidFill>
-                <a:latin typeface="Calibri"/>
-              </a:rPr>
-              <a:t>MIZUHO · NORIMAKI</a:t>
-            </a:r>
-          </a:p>
-        </p:txBody>
-      </p:sp>
-      <p:sp>
-        <p:nvSpPr>
-          <p:cNvPr id="9" name="TextBox 8"/>
-          <p:cNvSpPr txBox="1"/>
-          <p:nvPr/>
-        </p:nvSpPr>
-        <p:spPr>
-          <a:xfrm>
-            <a:off x="365760" y="914400"/>
-            <a:ext cx="4663440" cy="804672"/>
-          </a:xfrm>
-          <a:prstGeom prst="rect">
-            <a:avLst/>
-          </a:prstGeom>
-          <a:noFill/>
-        </p:spPr>
-        <p:txBody>
-          <a:bodyPr wrap="square" lIns="0" rIns="0" tIns="0" bIns="0" anchor="t">
-            <a:spAutoFit/>
-          </a:bodyPr>
-          <a:lstStyle/>
-          <a:p>
-            <a:pPr algn="l">
-              <a:lnSpc>
-                <a:spcPct val="106000"/>
-              </a:lnSpc>
-            </a:pPr>
-            <a:r>
-              <a:rPr sz="2600" b="1" i="0">
-                <a:solidFill>
-                  <a:srgbClr val="FFFFFF"/>
-                </a:solidFill>
-                <a:latin typeface="Cambria"/>
-              </a:rPr>
-              <a:t>Thai-Nichi</a:t>
-            </a:r>
-          </a:p>
-          <a:p>
-            <a:pPr algn="l">
-              <a:lnSpc>
-                <a:spcPct val="106000"/>
-              </a:lnSpc>
-            </a:pPr>
-            <a:r>
-              <a:rPr sz="2600" b="1" i="0">
-                <a:solidFill>
-                  <a:srgbClr val="FFFFFF"/>
-                </a:solidFill>
-                <a:latin typeface="Cambria"/>
-              </a:rPr>
-              <a:t>Industries Co., Ltd.</a:t>
-            </a:r>
-          </a:p>
-        </p:txBody>
-      </p:sp>
-      <p:sp>
-        <p:nvSpPr>
-          <p:cNvPr id="10" name="TextBox 9"/>
-          <p:cNvSpPr txBox="1"/>
-          <p:nvPr/>
-        </p:nvSpPr>
-        <p:spPr>
-          <a:xfrm>
-            <a:off x="365760" y="1901952"/>
-            <a:ext cx="2743200" cy="146304"/>
-          </a:xfrm>
-          <a:prstGeom prst="rect">
-            <a:avLst/>
-          </a:prstGeom>
-          <a:noFill/>
-        </p:spPr>
-        <p:txBody>
-          <a:bodyPr wrap="square" lIns="0" rIns="0" tIns="0" bIns="0" anchor="t">
-            <a:spAutoFit/>
-          </a:bodyPr>
-          <a:lstStyle/>
-          <a:p>
-            <a:pPr algn="l">
-              <a:lnSpc>
-                <a:spcPct val="100000"/>
-              </a:lnSpc>
-            </a:pPr>
-            <a:r>
-              <a:rPr sz="650" b="1" i="0" spc="90">
-                <a:solidFill>
-                  <a:srgbClr val="C0D1D3"/>
-                </a:solidFill>
-                <a:latin typeface="Calibri"/>
-              </a:rPr>
-              <a:t>МАРШРУТ ПОСТАЧАННЯ</a:t>
-            </a:r>
-          </a:p>
-        </p:txBody>
-      </p:sp>
-      <p:sp>
-        <p:nvSpPr>
-          <p:cNvPr id="11" name="Rounded Rectangle 10"/>
+              <a:rPr sz="1100" b="0" i="0">
+                <a:solidFill>
+                  <a:srgbClr val="1C565C"/>
+                </a:solidFill>
+                <a:latin typeface="Calibri"/>
+              </a:rPr>
+              <a:t>Рисові крекери, чипси та протеїнові снеки · Retail</a:t>
+            </a:r>
+          </a:p>
+        </p:txBody>
+      </p:sp>
+      <p:sp>
+        <p:nvSpPr>
+          <p:cNvPr id="14" name="Rounded Rectangle 13"/>
           <p:cNvSpPr/>
           <p:nvPr/>
         </p:nvSpPr>
         <p:spPr>
           <a:xfrm>
-            <a:off x="411480" y="2212848"/>
-            <a:ext cx="128016" cy="128016"/>
+            <a:off x="365760" y="2286000"/>
+            <a:ext cx="1025956" cy="274320"/>
           </a:xfrm>
           <a:prstGeom prst="roundRect">
             <a:avLst>
-              <a:gd name="adj" fmla="val 50000"/>
+              <a:gd name="adj" fmla="val 24000"/>
             </a:avLst>
           </a:prstGeom>
           <a:solidFill>
-            <a:srgbClr val="FFFFFF"/>
+            <a:srgbClr val="E4EBEC"/>
           </a:solidFill>
           <a:ln>
             <a:noFill/>
@@ -26223,598 +25215,131 @@
       </p:sp>
       <p:sp>
         <p:nvSpPr>
-          <p:cNvPr id="12" name="Rectangle 11"/>
+          <p:cNvPr id="15" name="TextBox 14"/>
+          <p:cNvSpPr txBox="1"/>
+          <p:nvPr/>
+        </p:nvSpPr>
+        <p:spPr>
+          <a:xfrm>
+            <a:off x="365760" y="2286000"/>
+            <a:ext cx="1025956" cy="274320"/>
+          </a:xfrm>
+          <a:prstGeom prst="rect">
+            <a:avLst/>
+          </a:prstGeom>
+          <a:noFill/>
+        </p:spPr>
+        <p:txBody>
+          <a:bodyPr wrap="square" lIns="0" rIns="0" tIns="0" bIns="0" anchor="ctr">
+            <a:spAutoFit/>
+          </a:bodyPr>
+          <a:lstStyle/>
+          <a:p>
+            <a:pPr algn="ctr">
+              <a:lnSpc>
+                <a:spcPct val="100000"/>
+              </a:lnSpc>
+            </a:pPr>
+            <a:r>
+              <a:rPr sz="850" b="1" i="0">
+                <a:solidFill>
+                  <a:srgbClr val="1D5860"/>
+                </a:solidFill>
+                <a:latin typeface="Calibri"/>
+              </a:rPr>
+              <a:t>FOB Bangkok</a:t>
+            </a:r>
+          </a:p>
+        </p:txBody>
+      </p:sp>
+      <p:sp>
+        <p:nvSpPr>
+          <p:cNvPr id="16" name="TextBox 15"/>
+          <p:cNvSpPr txBox="1"/>
+          <p:nvPr/>
+        </p:nvSpPr>
+        <p:spPr>
+          <a:xfrm>
+            <a:off x="365760" y="2779776"/>
+            <a:ext cx="4617720" cy="146304"/>
+          </a:xfrm>
+          <a:prstGeom prst="rect">
+            <a:avLst/>
+          </a:prstGeom>
+          <a:noFill/>
+        </p:spPr>
+        <p:txBody>
+          <a:bodyPr wrap="square" lIns="0" rIns="0" tIns="0" bIns="0" anchor="t">
+            <a:spAutoFit/>
+          </a:bodyPr>
+          <a:lstStyle/>
+          <a:p>
+            <a:pPr algn="l">
+              <a:lnSpc>
+                <a:spcPct val="100000"/>
+              </a:lnSpc>
+            </a:pPr>
+            <a:r>
+              <a:rPr sz="700" b="1" i="0" spc="90">
+                <a:solidFill>
+                  <a:srgbClr val="1C565C"/>
+                </a:solidFill>
+                <a:latin typeface="Calibri"/>
+              </a:rPr>
+              <a:t>ПРО КОМПАНІЮ</a:t>
+            </a:r>
+          </a:p>
+        </p:txBody>
+      </p:sp>
+      <p:sp>
+        <p:nvSpPr>
+          <p:cNvPr id="17" name="TextBox 16"/>
+          <p:cNvSpPr txBox="1"/>
+          <p:nvPr/>
+        </p:nvSpPr>
+        <p:spPr>
+          <a:xfrm>
+            <a:off x="365760" y="2962656"/>
+            <a:ext cx="4617720" cy="731520"/>
+          </a:xfrm>
+          <a:prstGeom prst="rect">
+            <a:avLst/>
+          </a:prstGeom>
+          <a:noFill/>
+        </p:spPr>
+        <p:txBody>
+          <a:bodyPr wrap="square" lIns="0" rIns="0" tIns="0" bIns="0" anchor="t">
+            <a:spAutoFit/>
+          </a:bodyPr>
+          <a:lstStyle/>
+          <a:p>
+            <a:pPr algn="l">
+              <a:lnSpc>
+                <a:spcPct val="132000"/>
+              </a:lnSpc>
+            </a:pPr>
+            <a:r>
+              <a:rPr sz="1000" b="0" i="0">
+                <a:solidFill>
+                  <a:srgbClr val="44524C"/>
+                </a:solidFill>
+                <a:latin typeface="Calibri"/>
+              </a:rPr>
+              <a:t>Тайсько-японський виробник рисових снеків із найширшим прайсом серед усіх постачальників — 28 позицій. Одна фабрика закриває і крекери, і чипси, і протеїнові снеки.</a:t>
+            </a:r>
+          </a:p>
+        </p:txBody>
+      </p:sp>
+      <p:sp>
+        <p:nvSpPr>
+          <p:cNvPr id="18" name="Rounded Rectangle 17"/>
           <p:cNvSpPr/>
           <p:nvPr/>
         </p:nvSpPr>
         <p:spPr>
           <a:xfrm>
-            <a:off x="676656" y="2263140"/>
-            <a:ext cx="91440" cy="27432"/>
-          </a:xfrm>
-          <a:prstGeom prst="rect">
-            <a:avLst/>
-          </a:prstGeom>
-          <a:solidFill>
-            <a:srgbClr val="83A5A9"/>
-          </a:solidFill>
-          <a:ln>
-            <a:noFill/>
-          </a:ln>
-          <a:effectLst/>
-        </p:spPr>
-        <p:style>
-          <a:lnRef idx="1">
-            <a:schemeClr val="accent1"/>
-          </a:lnRef>
-          <a:fillRef idx="3">
-            <a:schemeClr val="accent1"/>
-          </a:fillRef>
-          <a:effectRef idx="2">
-            <a:schemeClr val="accent1"/>
-          </a:effectRef>
-          <a:fontRef idx="minor">
-            <a:schemeClr val="lt1"/>
-          </a:fontRef>
-        </p:style>
-        <p:txBody>
-          <a:bodyPr rtlCol="0" anchor="ctr"/>
-          <a:lstStyle/>
-          <a:p/>
-        </p:txBody>
-      </p:sp>
-      <p:sp>
-        <p:nvSpPr>
-          <p:cNvPr id="13" name="Rectangle 12"/>
-          <p:cNvSpPr/>
-          <p:nvPr/>
-        </p:nvSpPr>
-        <p:spPr>
-          <a:xfrm>
-            <a:off x="859536" y="2263140"/>
-            <a:ext cx="91440" cy="27432"/>
-          </a:xfrm>
-          <a:prstGeom prst="rect">
-            <a:avLst/>
-          </a:prstGeom>
-          <a:solidFill>
-            <a:srgbClr val="83A5A9"/>
-          </a:solidFill>
-          <a:ln>
-            <a:noFill/>
-          </a:ln>
-          <a:effectLst/>
-        </p:spPr>
-        <p:style>
-          <a:lnRef idx="1">
-            <a:schemeClr val="accent1"/>
-          </a:lnRef>
-          <a:fillRef idx="3">
-            <a:schemeClr val="accent1"/>
-          </a:fillRef>
-          <a:effectRef idx="2">
-            <a:schemeClr val="accent1"/>
-          </a:effectRef>
-          <a:fontRef idx="minor">
-            <a:schemeClr val="lt1"/>
-          </a:fontRef>
-        </p:style>
-        <p:txBody>
-          <a:bodyPr rtlCol="0" anchor="ctr"/>
-          <a:lstStyle/>
-          <a:p/>
-        </p:txBody>
-      </p:sp>
-      <p:sp>
-        <p:nvSpPr>
-          <p:cNvPr id="14" name="Rectangle 13"/>
-          <p:cNvSpPr/>
-          <p:nvPr/>
-        </p:nvSpPr>
-        <p:spPr>
-          <a:xfrm>
-            <a:off x="1042416" y="2263140"/>
-            <a:ext cx="91440" cy="27432"/>
-          </a:xfrm>
-          <a:prstGeom prst="rect">
-            <a:avLst/>
-          </a:prstGeom>
-          <a:solidFill>
-            <a:srgbClr val="83A5A9"/>
-          </a:solidFill>
-          <a:ln>
-            <a:noFill/>
-          </a:ln>
-          <a:effectLst/>
-        </p:spPr>
-        <p:style>
-          <a:lnRef idx="1">
-            <a:schemeClr val="accent1"/>
-          </a:lnRef>
-          <a:fillRef idx="3">
-            <a:schemeClr val="accent1"/>
-          </a:fillRef>
-          <a:effectRef idx="2">
-            <a:schemeClr val="accent1"/>
-          </a:effectRef>
-          <a:fontRef idx="minor">
-            <a:schemeClr val="lt1"/>
-          </a:fontRef>
-        </p:style>
-        <p:txBody>
-          <a:bodyPr rtlCol="0" anchor="ctr"/>
-          <a:lstStyle/>
-          <a:p/>
-        </p:txBody>
-      </p:sp>
-      <p:sp>
-        <p:nvSpPr>
-          <p:cNvPr id="15" name="Rectangle 14"/>
-          <p:cNvSpPr/>
-          <p:nvPr/>
-        </p:nvSpPr>
-        <p:spPr>
-          <a:xfrm>
-            <a:off x="1225296" y="2263140"/>
-            <a:ext cx="91440" cy="27432"/>
-          </a:xfrm>
-          <a:prstGeom prst="rect">
-            <a:avLst/>
-          </a:prstGeom>
-          <a:solidFill>
-            <a:srgbClr val="83A5A9"/>
-          </a:solidFill>
-          <a:ln>
-            <a:noFill/>
-          </a:ln>
-          <a:effectLst/>
-        </p:spPr>
-        <p:style>
-          <a:lnRef idx="1">
-            <a:schemeClr val="accent1"/>
-          </a:lnRef>
-          <a:fillRef idx="3">
-            <a:schemeClr val="accent1"/>
-          </a:fillRef>
-          <a:effectRef idx="2">
-            <a:schemeClr val="accent1"/>
-          </a:effectRef>
-          <a:fontRef idx="minor">
-            <a:schemeClr val="lt1"/>
-          </a:fontRef>
-        </p:style>
-        <p:txBody>
-          <a:bodyPr rtlCol="0" anchor="ctr"/>
-          <a:lstStyle/>
-          <a:p/>
-        </p:txBody>
-      </p:sp>
-      <p:sp>
-        <p:nvSpPr>
-          <p:cNvPr id="16" name="Rectangle 15"/>
-          <p:cNvSpPr/>
-          <p:nvPr/>
-        </p:nvSpPr>
-        <p:spPr>
-          <a:xfrm>
-            <a:off x="1408176" y="2263140"/>
-            <a:ext cx="91440" cy="27432"/>
-          </a:xfrm>
-          <a:prstGeom prst="rect">
-            <a:avLst/>
-          </a:prstGeom>
-          <a:solidFill>
-            <a:srgbClr val="83A5A9"/>
-          </a:solidFill>
-          <a:ln>
-            <a:noFill/>
-          </a:ln>
-          <a:effectLst/>
-        </p:spPr>
-        <p:style>
-          <a:lnRef idx="1">
-            <a:schemeClr val="accent1"/>
-          </a:lnRef>
-          <a:fillRef idx="3">
-            <a:schemeClr val="accent1"/>
-          </a:fillRef>
-          <a:effectRef idx="2">
-            <a:schemeClr val="accent1"/>
-          </a:effectRef>
-          <a:fontRef idx="minor">
-            <a:schemeClr val="lt1"/>
-          </a:fontRef>
-        </p:style>
-        <p:txBody>
-          <a:bodyPr rtlCol="0" anchor="ctr"/>
-          <a:lstStyle/>
-          <a:p/>
-        </p:txBody>
-      </p:sp>
-      <p:sp>
-        <p:nvSpPr>
-          <p:cNvPr id="17" name="Rectangle 16"/>
-          <p:cNvSpPr/>
-          <p:nvPr/>
-        </p:nvSpPr>
-        <p:spPr>
-          <a:xfrm>
-            <a:off x="1591056" y="2263140"/>
-            <a:ext cx="91440" cy="27432"/>
-          </a:xfrm>
-          <a:prstGeom prst="rect">
-            <a:avLst/>
-          </a:prstGeom>
-          <a:solidFill>
-            <a:srgbClr val="83A5A9"/>
-          </a:solidFill>
-          <a:ln>
-            <a:noFill/>
-          </a:ln>
-          <a:effectLst/>
-        </p:spPr>
-        <p:style>
-          <a:lnRef idx="1">
-            <a:schemeClr val="accent1"/>
-          </a:lnRef>
-          <a:fillRef idx="3">
-            <a:schemeClr val="accent1"/>
-          </a:fillRef>
-          <a:effectRef idx="2">
-            <a:schemeClr val="accent1"/>
-          </a:effectRef>
-          <a:fontRef idx="minor">
-            <a:schemeClr val="lt1"/>
-          </a:fontRef>
-        </p:style>
-        <p:txBody>
-          <a:bodyPr rtlCol="0" anchor="ctr"/>
-          <a:lstStyle/>
-          <a:p/>
-        </p:txBody>
-      </p:sp>
-      <p:sp>
-        <p:nvSpPr>
-          <p:cNvPr id="18" name="Rectangle 17"/>
-          <p:cNvSpPr/>
-          <p:nvPr/>
-        </p:nvSpPr>
-        <p:spPr>
-          <a:xfrm>
-            <a:off x="1773936" y="2263140"/>
-            <a:ext cx="91440" cy="27432"/>
-          </a:xfrm>
-          <a:prstGeom prst="rect">
-            <a:avLst/>
-          </a:prstGeom>
-          <a:solidFill>
-            <a:srgbClr val="83A5A9"/>
-          </a:solidFill>
-          <a:ln>
-            <a:noFill/>
-          </a:ln>
-          <a:effectLst/>
-        </p:spPr>
-        <p:style>
-          <a:lnRef idx="1">
-            <a:schemeClr val="accent1"/>
-          </a:lnRef>
-          <a:fillRef idx="3">
-            <a:schemeClr val="accent1"/>
-          </a:fillRef>
-          <a:effectRef idx="2">
-            <a:schemeClr val="accent1"/>
-          </a:effectRef>
-          <a:fontRef idx="minor">
-            <a:schemeClr val="lt1"/>
-          </a:fontRef>
-        </p:style>
-        <p:txBody>
-          <a:bodyPr rtlCol="0" anchor="ctr"/>
-          <a:lstStyle/>
-          <a:p/>
-        </p:txBody>
-      </p:sp>
-      <p:sp>
-        <p:nvSpPr>
-          <p:cNvPr id="19" name="Rectangle 18"/>
-          <p:cNvSpPr/>
-          <p:nvPr/>
-        </p:nvSpPr>
-        <p:spPr>
-          <a:xfrm>
-            <a:off x="1956816" y="2263140"/>
-            <a:ext cx="91440" cy="27432"/>
-          </a:xfrm>
-          <a:prstGeom prst="rect">
-            <a:avLst/>
-          </a:prstGeom>
-          <a:solidFill>
-            <a:srgbClr val="83A5A9"/>
-          </a:solidFill>
-          <a:ln>
-            <a:noFill/>
-          </a:ln>
-          <a:effectLst/>
-        </p:spPr>
-        <p:style>
-          <a:lnRef idx="1">
-            <a:schemeClr val="accent1"/>
-          </a:lnRef>
-          <a:fillRef idx="3">
-            <a:schemeClr val="accent1"/>
-          </a:fillRef>
-          <a:effectRef idx="2">
-            <a:schemeClr val="accent1"/>
-          </a:effectRef>
-          <a:fontRef idx="minor">
-            <a:schemeClr val="lt1"/>
-          </a:fontRef>
-        </p:style>
-        <p:txBody>
-          <a:bodyPr rtlCol="0" anchor="ctr"/>
-          <a:lstStyle/>
-          <a:p/>
-        </p:txBody>
-      </p:sp>
-      <p:sp>
-        <p:nvSpPr>
-          <p:cNvPr id="20" name="Rectangle 19"/>
-          <p:cNvSpPr/>
-          <p:nvPr/>
-        </p:nvSpPr>
-        <p:spPr>
-          <a:xfrm>
-            <a:off x="2139696" y="2263140"/>
-            <a:ext cx="91440" cy="27432"/>
-          </a:xfrm>
-          <a:prstGeom prst="rect">
-            <a:avLst/>
-          </a:prstGeom>
-          <a:solidFill>
-            <a:srgbClr val="83A5A9"/>
-          </a:solidFill>
-          <a:ln>
-            <a:noFill/>
-          </a:ln>
-          <a:effectLst/>
-        </p:spPr>
-        <p:style>
-          <a:lnRef idx="1">
-            <a:schemeClr val="accent1"/>
-          </a:lnRef>
-          <a:fillRef idx="3">
-            <a:schemeClr val="accent1"/>
-          </a:fillRef>
-          <a:effectRef idx="2">
-            <a:schemeClr val="accent1"/>
-          </a:effectRef>
-          <a:fontRef idx="minor">
-            <a:schemeClr val="lt1"/>
-          </a:fontRef>
-        </p:style>
-        <p:txBody>
-          <a:bodyPr rtlCol="0" anchor="ctr"/>
-          <a:lstStyle/>
-          <a:p/>
-        </p:txBody>
-      </p:sp>
-      <p:sp>
-        <p:nvSpPr>
-          <p:cNvPr id="21" name="Rectangle 20"/>
-          <p:cNvSpPr/>
-          <p:nvPr/>
-        </p:nvSpPr>
-        <p:spPr>
-          <a:xfrm>
-            <a:off x="2322576" y="2263140"/>
-            <a:ext cx="91440" cy="27432"/>
-          </a:xfrm>
-          <a:prstGeom prst="rect">
-            <a:avLst/>
-          </a:prstGeom>
-          <a:solidFill>
-            <a:srgbClr val="83A5A9"/>
-          </a:solidFill>
-          <a:ln>
-            <a:noFill/>
-          </a:ln>
-          <a:effectLst/>
-        </p:spPr>
-        <p:style>
-          <a:lnRef idx="1">
-            <a:schemeClr val="accent1"/>
-          </a:lnRef>
-          <a:fillRef idx="3">
-            <a:schemeClr val="accent1"/>
-          </a:fillRef>
-          <a:effectRef idx="2">
-            <a:schemeClr val="accent1"/>
-          </a:effectRef>
-          <a:fontRef idx="minor">
-            <a:schemeClr val="lt1"/>
-          </a:fontRef>
-        </p:style>
-        <p:txBody>
-          <a:bodyPr rtlCol="0" anchor="ctr"/>
-          <a:lstStyle/>
-          <a:p/>
-        </p:txBody>
-      </p:sp>
-      <p:sp>
-        <p:nvSpPr>
-          <p:cNvPr id="22" name="Rectangle 21"/>
-          <p:cNvSpPr/>
-          <p:nvPr/>
-        </p:nvSpPr>
-        <p:spPr>
-          <a:xfrm>
-            <a:off x="2505456" y="2263140"/>
-            <a:ext cx="91440" cy="27432"/>
-          </a:xfrm>
-          <a:prstGeom prst="rect">
-            <a:avLst/>
-          </a:prstGeom>
-          <a:solidFill>
-            <a:srgbClr val="83A5A9"/>
-          </a:solidFill>
-          <a:ln>
-            <a:noFill/>
-          </a:ln>
-          <a:effectLst/>
-        </p:spPr>
-        <p:style>
-          <a:lnRef idx="1">
-            <a:schemeClr val="accent1"/>
-          </a:lnRef>
-          <a:fillRef idx="3">
-            <a:schemeClr val="accent1"/>
-          </a:fillRef>
-          <a:effectRef idx="2">
-            <a:schemeClr val="accent1"/>
-          </a:effectRef>
-          <a:fontRef idx="minor">
-            <a:schemeClr val="lt1"/>
-          </a:fontRef>
-        </p:style>
-        <p:txBody>
-          <a:bodyPr rtlCol="0" anchor="ctr"/>
-          <a:lstStyle/>
-          <a:p/>
-        </p:txBody>
-      </p:sp>
-      <p:sp>
-        <p:nvSpPr>
-          <p:cNvPr id="23" name="Rounded Rectangle 22"/>
-          <p:cNvSpPr/>
-          <p:nvPr/>
-        </p:nvSpPr>
-        <p:spPr>
-          <a:xfrm>
-            <a:off x="2670048" y="2212848"/>
-            <a:ext cx="128016" cy="128016"/>
-          </a:xfrm>
-          <a:prstGeom prst="roundRect">
-            <a:avLst>
-              <a:gd name="adj" fmla="val 50000"/>
-            </a:avLst>
-          </a:prstGeom>
-          <a:solidFill>
-            <a:srgbClr val="FFFFFF"/>
-          </a:solidFill>
-          <a:ln>
-            <a:noFill/>
-          </a:ln>
-          <a:effectLst/>
-        </p:spPr>
-        <p:style>
-          <a:lnRef idx="1">
-            <a:schemeClr val="accent1"/>
-          </a:lnRef>
-          <a:fillRef idx="3">
-            <a:schemeClr val="accent1"/>
-          </a:fillRef>
-          <a:effectRef idx="2">
-            <a:schemeClr val="accent1"/>
-          </a:effectRef>
-          <a:fontRef idx="minor">
-            <a:schemeClr val="lt1"/>
-          </a:fontRef>
-        </p:style>
-        <p:txBody>
-          <a:bodyPr rtlCol="0" anchor="ctr"/>
-          <a:lstStyle/>
-          <a:p/>
-        </p:txBody>
-      </p:sp>
-      <p:sp>
-        <p:nvSpPr>
-          <p:cNvPr id="24" name="TextBox 23"/>
-          <p:cNvSpPr txBox="1"/>
-          <p:nvPr/>
-        </p:nvSpPr>
-        <p:spPr>
-          <a:xfrm>
-            <a:off x="365760" y="2432304"/>
-            <a:ext cx="1371600" cy="182880"/>
-          </a:xfrm>
-          <a:prstGeom prst="rect">
-            <a:avLst/>
-          </a:prstGeom>
-          <a:noFill/>
-        </p:spPr>
-        <p:txBody>
-          <a:bodyPr wrap="square" lIns="0" rIns="0" tIns="0" bIns="0" anchor="t">
-            <a:spAutoFit/>
-          </a:bodyPr>
-          <a:lstStyle/>
-          <a:p>
-            <a:pPr algn="l">
-              <a:lnSpc>
-                <a:spcPct val="100000"/>
-              </a:lnSpc>
-            </a:pPr>
-            <a:r>
-              <a:rPr sz="800" b="1" i="0">
-                <a:solidFill>
-                  <a:srgbClr val="FFFFFF"/>
-                </a:solidFill>
-                <a:latin typeface="Calibri"/>
-              </a:rPr>
-              <a:t>FOB Bangkok</a:t>
-            </a:r>
-          </a:p>
-        </p:txBody>
-      </p:sp>
-      <p:sp>
-        <p:nvSpPr>
-          <p:cNvPr id="25" name="TextBox 24"/>
-          <p:cNvSpPr txBox="1"/>
-          <p:nvPr/>
-        </p:nvSpPr>
-        <p:spPr>
-          <a:xfrm>
-            <a:off x="1920240" y="2432304"/>
-            <a:ext cx="914400" cy="182880"/>
-          </a:xfrm>
-          <a:prstGeom prst="rect">
-            <a:avLst/>
-          </a:prstGeom>
-          <a:noFill/>
-        </p:spPr>
-        <p:txBody>
-          <a:bodyPr wrap="square" lIns="0" rIns="0" tIns="0" bIns="0" anchor="t">
-            <a:spAutoFit/>
-          </a:bodyPr>
-          <a:lstStyle/>
-          <a:p>
-            <a:pPr algn="r">
-              <a:lnSpc>
-                <a:spcPct val="100000"/>
-              </a:lnSpc>
-            </a:pPr>
-            <a:r>
-              <a:rPr sz="800" b="1" i="0">
-                <a:solidFill>
-                  <a:srgbClr val="FFFFFF"/>
-                </a:solidFill>
-                <a:latin typeface="Calibri"/>
-              </a:rPr>
-              <a:t>Україна</a:t>
-            </a:r>
-          </a:p>
-        </p:txBody>
-      </p:sp>
-      <p:sp>
-        <p:nvSpPr>
-          <p:cNvPr id="26" name="Rounded Rectangle 25"/>
-          <p:cNvSpPr/>
-          <p:nvPr/>
-        </p:nvSpPr>
-        <p:spPr>
-          <a:xfrm>
-            <a:off x="5120640" y="1350359"/>
-            <a:ext cx="1755648" cy="2128529"/>
+            <a:off x="365760" y="3803904"/>
+            <a:ext cx="1481328" cy="859536"/>
           </a:xfrm>
           <a:prstGeom prst="roundRect">
             <a:avLst>
@@ -26851,40 +25376,152 @@
           <a:p/>
         </p:txBody>
       </p:sp>
-      <p:pic>
-        <p:nvPicPr>
-          <p:cNvPr id="27" name="Picture 26" descr="tn_original.png"/>
-          <p:cNvPicPr>
-            <a:picLocks noChangeAspect="1"/>
-          </p:cNvPicPr>
-          <p:nvPr/>
-        </p:nvPicPr>
-        <p:blipFill>
-          <a:blip r:embed="rId2"/>
-          <a:stretch>
-            <a:fillRect/>
-          </a:stretch>
-        </p:blipFill>
-        <p:spPr>
-          <a:xfrm>
-            <a:off x="5221224" y="1480441"/>
-            <a:ext cx="1554480" cy="1868365"/>
-          </a:xfrm>
-          <a:prstGeom prst="rect">
-            <a:avLst/>
-          </a:prstGeom>
-        </p:spPr>
-      </p:pic>
-      <p:sp>
-        <p:nvSpPr>
-          <p:cNvPr id="28" name="Rounded Rectangle 27"/>
+      <p:sp>
+        <p:nvSpPr>
+          <p:cNvPr id="19" name="Rectangle 18"/>
           <p:cNvSpPr/>
           <p:nvPr/>
         </p:nvSpPr>
         <p:spPr>
           <a:xfrm>
-            <a:off x="7022592" y="1350359"/>
-            <a:ext cx="1755648" cy="2128529"/>
+            <a:off x="365760" y="3803904"/>
+            <a:ext cx="1481328" cy="45720"/>
+          </a:xfrm>
+          <a:prstGeom prst="rect">
+            <a:avLst/>
+          </a:prstGeom>
+          <a:solidFill>
+            <a:srgbClr val="1D5B63"/>
+          </a:solidFill>
+          <a:ln>
+            <a:noFill/>
+          </a:ln>
+          <a:effectLst/>
+        </p:spPr>
+        <p:style>
+          <a:lnRef idx="1">
+            <a:schemeClr val="accent1"/>
+          </a:lnRef>
+          <a:fillRef idx="3">
+            <a:schemeClr val="accent1"/>
+          </a:fillRef>
+          <a:effectRef idx="2">
+            <a:schemeClr val="accent1"/>
+          </a:effectRef>
+          <a:fontRef idx="minor">
+            <a:schemeClr val="lt1"/>
+          </a:fontRef>
+        </p:style>
+        <p:txBody>
+          <a:bodyPr rtlCol="0" anchor="ctr"/>
+          <a:lstStyle/>
+          <a:p/>
+        </p:txBody>
+      </p:sp>
+      <p:sp>
+        <p:nvSpPr>
+          <p:cNvPr id="20" name="TextBox 19"/>
+          <p:cNvSpPr txBox="1"/>
+          <p:nvPr/>
+        </p:nvSpPr>
+        <p:spPr>
+          <a:xfrm>
+            <a:off x="365760" y="3950208"/>
+            <a:ext cx="1481328" cy="292608"/>
+          </a:xfrm>
+          <a:prstGeom prst="rect">
+            <a:avLst/>
+          </a:prstGeom>
+          <a:noFill/>
+        </p:spPr>
+        <p:txBody>
+          <a:bodyPr wrap="square" lIns="0" rIns="0" tIns="0" bIns="0" anchor="t">
+            <a:spAutoFit/>
+          </a:bodyPr>
+          <a:lstStyle/>
+          <a:p>
+            <a:pPr algn="ctr">
+              <a:lnSpc>
+                <a:spcPct val="100000"/>
+              </a:lnSpc>
+            </a:pPr>
+            <a:r>
+              <a:rPr sz="1700" b="1" i="0">
+                <a:solidFill>
+                  <a:srgbClr val="1D5860"/>
+                </a:solidFill>
+                <a:latin typeface="Cambria"/>
+              </a:rPr>
+              <a:t>2</a:t>
+            </a:r>
+          </a:p>
+        </p:txBody>
+      </p:sp>
+      <p:sp>
+        <p:nvSpPr>
+          <p:cNvPr id="21" name="TextBox 20"/>
+          <p:cNvSpPr txBox="1"/>
+          <p:nvPr/>
+        </p:nvSpPr>
+        <p:spPr>
+          <a:xfrm>
+            <a:off x="457200" y="4279392"/>
+            <a:ext cx="1298448" cy="329184"/>
+          </a:xfrm>
+          <a:prstGeom prst="rect">
+            <a:avLst/>
+          </a:prstGeom>
+          <a:noFill/>
+        </p:spPr>
+        <p:txBody>
+          <a:bodyPr wrap="square" lIns="0" rIns="0" tIns="0" bIns="0" anchor="t">
+            <a:spAutoFit/>
+          </a:bodyPr>
+          <a:lstStyle/>
+          <a:p>
+            <a:pPr algn="ctr">
+              <a:lnSpc>
+                <a:spcPct val="114000"/>
+              </a:lnSpc>
+            </a:pPr>
+            <a:r>
+              <a:rPr sz="700" b="0" i="0">
+                <a:solidFill>
+                  <a:srgbClr val="8A938D"/>
+                </a:solidFill>
+                <a:latin typeface="Calibri"/>
+              </a:rPr>
+              <a:t>SKU із розрахованою</a:t>
+            </a:r>
+          </a:p>
+          <a:p>
+            <a:pPr algn="ctr">
+              <a:lnSpc>
+                <a:spcPct val="114000"/>
+              </a:lnSpc>
+            </a:pPr>
+            <a:r>
+              <a:rPr sz="700" b="0" i="0">
+                <a:solidFill>
+                  <a:srgbClr val="8A938D"/>
+                </a:solidFill>
+                <a:latin typeface="Calibri"/>
+              </a:rPr>
+              <a:t>собівартістю</a:t>
+            </a:r>
+          </a:p>
+        </p:txBody>
+      </p:sp>
+      <p:sp>
+        <p:nvSpPr>
+          <p:cNvPr id="22" name="Rounded Rectangle 21"/>
+          <p:cNvSpPr/>
+          <p:nvPr/>
+        </p:nvSpPr>
+        <p:spPr>
+          <a:xfrm>
+            <a:off x="1979676" y="3803904"/>
+            <a:ext cx="1481328" cy="859536"/>
           </a:xfrm>
           <a:prstGeom prst="roundRect">
             <a:avLst>
@@ -26921,163 +25558,22 @@
           <a:p/>
         </p:txBody>
       </p:sp>
-      <p:pic>
-        <p:nvPicPr>
-          <p:cNvPr id="29" name="Picture 28" descr="tn_wasabi.png"/>
-          <p:cNvPicPr>
-            <a:picLocks noChangeAspect="1"/>
-          </p:cNvPicPr>
-          <p:nvPr/>
-        </p:nvPicPr>
-        <p:blipFill>
-          <a:blip r:embed="rId3"/>
-          <a:stretch>
-            <a:fillRect/>
-          </a:stretch>
-        </p:blipFill>
-        <p:spPr>
-          <a:xfrm>
-            <a:off x="7123176" y="1469231"/>
-            <a:ext cx="1554480" cy="1890785"/>
-          </a:xfrm>
-          <a:prstGeom prst="rect">
-            <a:avLst/>
-          </a:prstGeom>
-        </p:spPr>
-      </p:pic>
-      <p:sp>
-        <p:nvSpPr>
-          <p:cNvPr id="30" name="TextBox 29"/>
-          <p:cNvSpPr txBox="1"/>
-          <p:nvPr/>
-        </p:nvSpPr>
-        <p:spPr>
-          <a:xfrm>
-            <a:off x="5120640" y="3606905"/>
-            <a:ext cx="3657600" cy="182880"/>
-          </a:xfrm>
-          <a:prstGeom prst="rect">
-            <a:avLst/>
-          </a:prstGeom>
-          <a:noFill/>
-        </p:spPr>
-        <p:txBody>
-          <a:bodyPr wrap="square" lIns="0" rIns="0" tIns="0" bIns="0" anchor="t">
-            <a:spAutoFit/>
-          </a:bodyPr>
-          <a:lstStyle/>
-          <a:p>
-            <a:pPr algn="ctr">
-              <a:lnSpc>
-                <a:spcPct val="100000"/>
-              </a:lnSpc>
-            </a:pPr>
-            <a:r>
-              <a:rPr sz="750" b="0" i="0">
-                <a:solidFill>
-                  <a:srgbClr val="8A938D"/>
-                </a:solidFill>
-                <a:latin typeface="Calibri"/>
-              </a:rPr>
-              <a:t>2 позиції із розрахованою собівартістю</a:t>
-            </a:r>
-          </a:p>
-        </p:txBody>
-      </p:sp>
-      <p:sp>
-        <p:nvSpPr>
-          <p:cNvPr id="31" name="TextBox 30"/>
-          <p:cNvSpPr txBox="1"/>
-          <p:nvPr/>
-        </p:nvSpPr>
-        <p:spPr>
-          <a:xfrm>
-            <a:off x="365760" y="2926080"/>
-            <a:ext cx="4617720" cy="822960"/>
-          </a:xfrm>
-          <a:prstGeom prst="rect">
-            <a:avLst/>
-          </a:prstGeom>
-          <a:noFill/>
-        </p:spPr>
-        <p:txBody>
-          <a:bodyPr wrap="square" lIns="0" rIns="0" tIns="0" bIns="0" anchor="t">
-            <a:spAutoFit/>
-          </a:bodyPr>
-          <a:lstStyle/>
-          <a:p>
-            <a:pPr algn="l">
-              <a:lnSpc>
-                <a:spcPct val="134000"/>
-              </a:lnSpc>
-            </a:pPr>
-            <a:r>
-              <a:rPr sz="1050" b="0" i="0">
-                <a:solidFill>
-                  <a:srgbClr val="44524C"/>
-                </a:solidFill>
-                <a:latin typeface="Calibri"/>
-              </a:rPr>
-              <a:t>Тайсько-японський виробник рисових снеків із найширшим прайсом серед усіх постачальників — 28 позицій. Одна фабрика закриває і крекери, і чипси, і протеїнові снеки.</a:t>
-            </a:r>
-          </a:p>
-        </p:txBody>
-      </p:sp>
-      <p:sp>
-        <p:nvSpPr>
-          <p:cNvPr id="32" name="TextBox 31"/>
-          <p:cNvSpPr txBox="1"/>
-          <p:nvPr/>
-        </p:nvSpPr>
-        <p:spPr>
-          <a:xfrm>
-            <a:off x="365760" y="3803904"/>
-            <a:ext cx="4617720" cy="146304"/>
-          </a:xfrm>
-          <a:prstGeom prst="rect">
-            <a:avLst/>
-          </a:prstGeom>
-          <a:noFill/>
-        </p:spPr>
-        <p:txBody>
-          <a:bodyPr wrap="square" lIns="0" rIns="0" tIns="0" bIns="0" anchor="t">
-            <a:spAutoFit/>
-          </a:bodyPr>
-          <a:lstStyle/>
-          <a:p>
-            <a:pPr algn="l">
-              <a:lnSpc>
-                <a:spcPct val="100000"/>
-              </a:lnSpc>
-            </a:pPr>
-            <a:r>
-              <a:rPr sz="700" b="1" i="0" spc="90">
-                <a:solidFill>
-                  <a:srgbClr val="1C565C"/>
-                </a:solidFill>
-                <a:latin typeface="Calibri"/>
-              </a:rPr>
-              <a:t>ВИРОБНИЦТВО І УМОВИ ПОСТАВКИ</a:t>
-            </a:r>
-          </a:p>
-        </p:txBody>
-      </p:sp>
-      <p:sp>
-        <p:nvSpPr>
-          <p:cNvPr id="33" name="Rectangle 32"/>
+      <p:sp>
+        <p:nvSpPr>
+          <p:cNvPr id="23" name="Rectangle 22"/>
           <p:cNvSpPr/>
           <p:nvPr/>
         </p:nvSpPr>
         <p:spPr>
           <a:xfrm>
-            <a:off x="365760" y="4023360"/>
-            <a:ext cx="2194560" cy="9144"/>
+            <a:off x="1979676" y="3803904"/>
+            <a:ext cx="1481328" cy="45720"/>
           </a:xfrm>
           <a:prstGeom prst="rect">
             <a:avLst/>
           </a:prstGeom>
           <a:solidFill>
-            <a:srgbClr val="E6E1D8"/>
+            <a:srgbClr val="1D5B63"/>
           </a:solidFill>
           <a:ln>
             <a:noFill/>
@@ -27106,14 +25602,14 @@
       </p:sp>
       <p:sp>
         <p:nvSpPr>
-          <p:cNvPr id="34" name="TextBox 33"/>
-          <p:cNvSpPr txBox="1"/>
-          <p:nvPr/>
-        </p:nvSpPr>
-        <p:spPr>
-          <a:xfrm>
-            <a:off x="365760" y="4078224"/>
-            <a:ext cx="2194560" cy="146304"/>
+          <p:cNvPr id="24" name="TextBox 23"/>
+          <p:cNvSpPr txBox="1"/>
+          <p:nvPr/>
+        </p:nvSpPr>
+        <p:spPr>
+          <a:xfrm>
+            <a:off x="1979676" y="3950208"/>
+            <a:ext cx="1481328" cy="292608"/>
           </a:xfrm>
           <a:prstGeom prst="rect">
             <a:avLst/>
@@ -27126,78 +25622,140 @@
           </a:bodyPr>
           <a:lstStyle/>
           <a:p>
-            <a:pPr algn="l">
-              <a:lnSpc>
-                <a:spcPct val="100000"/>
-              </a:lnSpc>
-            </a:pPr>
-            <a:r>
-              <a:rPr sz="650" b="0" i="0">
+            <a:pPr algn="ctr">
+              <a:lnSpc>
+                <a:spcPct val="100000"/>
+              </a:lnSpc>
+            </a:pPr>
+            <a:r>
+              <a:rPr sz="1700" b="1" i="0">
+                <a:solidFill>
+                  <a:srgbClr val="1D5860"/>
+                </a:solidFill>
+                <a:latin typeface="Cambria"/>
+              </a:rPr>
+              <a:t>28</a:t>
+            </a:r>
+          </a:p>
+        </p:txBody>
+      </p:sp>
+      <p:sp>
+        <p:nvSpPr>
+          <p:cNvPr id="25" name="TextBox 24"/>
+          <p:cNvSpPr txBox="1"/>
+          <p:nvPr/>
+        </p:nvSpPr>
+        <p:spPr>
+          <a:xfrm>
+            <a:off x="2071116" y="4279392"/>
+            <a:ext cx="1298448" cy="329184"/>
+          </a:xfrm>
+          <a:prstGeom prst="rect">
+            <a:avLst/>
+          </a:prstGeom>
+          <a:noFill/>
+        </p:spPr>
+        <p:txBody>
+          <a:bodyPr wrap="square" lIns="0" rIns="0" tIns="0" bIns="0" anchor="t">
+            <a:spAutoFit/>
+          </a:bodyPr>
+          <a:lstStyle/>
+          <a:p>
+            <a:pPr algn="ctr">
+              <a:lnSpc>
+                <a:spcPct val="114000"/>
+              </a:lnSpc>
+            </a:pPr>
+            <a:r>
+              <a:rPr sz="700" b="0" i="0">
                 <a:solidFill>
                   <a:srgbClr val="8A938D"/>
                 </a:solidFill>
                 <a:latin typeface="Calibri"/>
               </a:rPr>
-              <a:t>Фасовка</a:t>
-            </a:r>
-          </a:p>
-        </p:txBody>
-      </p:sp>
-      <p:sp>
-        <p:nvSpPr>
-          <p:cNvPr id="35" name="TextBox 34"/>
-          <p:cNvSpPr txBox="1"/>
-          <p:nvPr/>
-        </p:nvSpPr>
-        <p:spPr>
-          <a:xfrm>
-            <a:off x="365760" y="4206240"/>
-            <a:ext cx="2194560" cy="182880"/>
-          </a:xfrm>
-          <a:prstGeom prst="rect">
-            <a:avLst/>
-          </a:prstGeom>
-          <a:noFill/>
-        </p:spPr>
-        <p:txBody>
-          <a:bodyPr wrap="square" lIns="0" rIns="0" tIns="0" bIns="0" anchor="t">
-            <a:spAutoFit/>
-          </a:bodyPr>
-          <a:lstStyle/>
-          <a:p>
-            <a:pPr algn="l">
-              <a:lnSpc>
-                <a:spcPct val="100000"/>
-              </a:lnSpc>
-            </a:pPr>
-            <a:r>
-              <a:rPr sz="900" b="1" i="0">
-                <a:solidFill>
-                  <a:srgbClr val="14241F"/>
-                </a:solidFill>
-                <a:latin typeface="Calibri"/>
-              </a:rPr>
-              <a:t>12 – 96 шт / картон</a:t>
-            </a:r>
-          </a:p>
-        </p:txBody>
-      </p:sp>
-      <p:sp>
-        <p:nvSpPr>
-          <p:cNvPr id="36" name="Rectangle 35"/>
+              <a:t>позицій</a:t>
+            </a:r>
+          </a:p>
+          <a:p>
+            <a:pPr algn="ctr">
+              <a:lnSpc>
+                <a:spcPct val="114000"/>
+              </a:lnSpc>
+            </a:pPr>
+            <a:r>
+              <a:rPr sz="700" b="0" i="0">
+                <a:solidFill>
+                  <a:srgbClr val="8A938D"/>
+                </a:solidFill>
+                <a:latin typeface="Calibri"/>
+              </a:rPr>
+              <a:t>у прайс-листі</a:t>
+            </a:r>
+          </a:p>
+        </p:txBody>
+      </p:sp>
+      <p:sp>
+        <p:nvSpPr>
+          <p:cNvPr id="26" name="Rounded Rectangle 25"/>
           <p:cNvSpPr/>
           <p:nvPr/>
         </p:nvSpPr>
         <p:spPr>
           <a:xfrm>
-            <a:off x="2743200" y="4023360"/>
-            <a:ext cx="2194560" cy="9144"/>
-          </a:xfrm>
-          <a:prstGeom prst="rect">
-            <a:avLst/>
+            <a:off x="3593592" y="3803904"/>
+            <a:ext cx="1481328" cy="859536"/>
+          </a:xfrm>
+          <a:prstGeom prst="roundRect">
+            <a:avLst>
+              <a:gd name="adj" fmla="val 6000"/>
+            </a:avLst>
           </a:prstGeom>
           <a:solidFill>
-            <a:srgbClr val="E6E1D8"/>
+            <a:srgbClr val="FFFFFF"/>
+          </a:solidFill>
+          <a:ln w="9525">
+            <a:solidFill>
+              <a:srgbClr val="E6E1D8"/>
+            </a:solidFill>
+          </a:ln>
+          <a:effectLst/>
+        </p:spPr>
+        <p:style>
+          <a:lnRef idx="1">
+            <a:schemeClr val="accent1"/>
+          </a:lnRef>
+          <a:fillRef idx="3">
+            <a:schemeClr val="accent1"/>
+          </a:fillRef>
+          <a:effectRef idx="2">
+            <a:schemeClr val="accent1"/>
+          </a:effectRef>
+          <a:fontRef idx="minor">
+            <a:schemeClr val="lt1"/>
+          </a:fontRef>
+        </p:style>
+        <p:txBody>
+          <a:bodyPr rtlCol="0" anchor="ctr"/>
+          <a:lstStyle/>
+          <a:p/>
+        </p:txBody>
+      </p:sp>
+      <p:sp>
+        <p:nvSpPr>
+          <p:cNvPr id="27" name="Rectangle 26"/>
+          <p:cNvSpPr/>
+          <p:nvPr/>
+        </p:nvSpPr>
+        <p:spPr>
+          <a:xfrm>
+            <a:off x="3593592" y="3803904"/>
+            <a:ext cx="1481328" cy="45720"/>
+          </a:xfrm>
+          <a:prstGeom prst="rect">
+            <a:avLst/>
+          </a:prstGeom>
+          <a:solidFill>
+            <a:srgbClr val="1D5B63"/>
           </a:solidFill>
           <a:ln>
             <a:noFill/>
@@ -27226,14 +25784,14 @@
       </p:sp>
       <p:sp>
         <p:nvSpPr>
-          <p:cNvPr id="37" name="TextBox 36"/>
-          <p:cNvSpPr txBox="1"/>
-          <p:nvPr/>
-        </p:nvSpPr>
-        <p:spPr>
-          <a:xfrm>
-            <a:off x="2743200" y="4078224"/>
-            <a:ext cx="2194560" cy="146304"/>
+          <p:cNvPr id="28" name="TextBox 27"/>
+          <p:cNvSpPr txBox="1"/>
+          <p:nvPr/>
+        </p:nvSpPr>
+        <p:spPr>
+          <a:xfrm>
+            <a:off x="3593592" y="3950208"/>
+            <a:ext cx="1481328" cy="292608"/>
           </a:xfrm>
           <a:prstGeom prst="rect">
             <a:avLst/>
@@ -27246,347 +25804,81 @@
           </a:bodyPr>
           <a:lstStyle/>
           <a:p>
-            <a:pPr algn="l">
-              <a:lnSpc>
-                <a:spcPct val="100000"/>
-              </a:lnSpc>
-            </a:pPr>
-            <a:r>
-              <a:rPr sz="650" b="0" i="0">
+            <a:pPr algn="ctr">
+              <a:lnSpc>
+                <a:spcPct val="100000"/>
+              </a:lnSpc>
+            </a:pPr>
+            <a:r>
+              <a:rPr sz="1700" b="1" i="0">
+                <a:solidFill>
+                  <a:srgbClr val="1D5860"/>
+                </a:solidFill>
+                <a:latin typeface="Cambria"/>
+              </a:rPr>
+              <a:t>1 013</a:t>
+            </a:r>
+          </a:p>
+        </p:txBody>
+      </p:sp>
+      <p:sp>
+        <p:nvSpPr>
+          <p:cNvPr id="29" name="TextBox 28"/>
+          <p:cNvSpPr txBox="1"/>
+          <p:nvPr/>
+        </p:nvSpPr>
+        <p:spPr>
+          <a:xfrm>
+            <a:off x="3685032" y="4279392"/>
+            <a:ext cx="1298448" cy="329184"/>
+          </a:xfrm>
+          <a:prstGeom prst="rect">
+            <a:avLst/>
+          </a:prstGeom>
+          <a:noFill/>
+        </p:spPr>
+        <p:txBody>
+          <a:bodyPr wrap="square" lIns="0" rIns="0" tIns="0" bIns="0" anchor="t">
+            <a:spAutoFit/>
+          </a:bodyPr>
+          <a:lstStyle/>
+          <a:p>
+            <a:pPr algn="ctr">
+              <a:lnSpc>
+                <a:spcPct val="114000"/>
+              </a:lnSpc>
+            </a:pPr>
+            <a:r>
+              <a:rPr sz="700" b="0" i="0">
                 <a:solidFill>
                   <a:srgbClr val="8A938D"/>
                 </a:solidFill>
                 <a:latin typeface="Calibri"/>
               </a:rPr>
-              <a:t>Термін придатності</a:t>
-            </a:r>
-          </a:p>
-        </p:txBody>
-      </p:sp>
-      <p:sp>
-        <p:nvSpPr>
-          <p:cNvPr id="38" name="TextBox 37"/>
-          <p:cNvSpPr txBox="1"/>
-          <p:nvPr/>
-        </p:nvSpPr>
-        <p:spPr>
-          <a:xfrm>
-            <a:off x="2743200" y="4206240"/>
-            <a:ext cx="2194560" cy="182880"/>
-          </a:xfrm>
-          <a:prstGeom prst="rect">
-            <a:avLst/>
-          </a:prstGeom>
-          <a:noFill/>
-        </p:spPr>
-        <p:txBody>
-          <a:bodyPr wrap="square" lIns="0" rIns="0" tIns="0" bIns="0" anchor="t">
-            <a:spAutoFit/>
-          </a:bodyPr>
-          <a:lstStyle/>
-          <a:p>
-            <a:pPr algn="l">
-              <a:lnSpc>
-                <a:spcPct val="100000"/>
-              </a:lnSpc>
-            </a:pPr>
-            <a:r>
-              <a:rPr sz="900" b="1" i="0">
-                <a:solidFill>
-                  <a:srgbClr val="14241F"/>
-                </a:solidFill>
-                <a:latin typeface="Calibri"/>
-              </a:rPr>
-              <a:t>8 – 12 місяців</a:t>
-            </a:r>
-          </a:p>
-        </p:txBody>
-      </p:sp>
-      <p:sp>
-        <p:nvSpPr>
-          <p:cNvPr id="39" name="Rectangle 38"/>
-          <p:cNvSpPr/>
-          <p:nvPr/>
-        </p:nvSpPr>
-        <p:spPr>
-          <a:xfrm>
-            <a:off x="365760" y="4425696"/>
-            <a:ext cx="2194560" cy="9144"/>
-          </a:xfrm>
-          <a:prstGeom prst="rect">
-            <a:avLst/>
-          </a:prstGeom>
-          <a:solidFill>
-            <a:srgbClr val="E6E1D8"/>
-          </a:solidFill>
-          <a:ln>
-            <a:noFill/>
-          </a:ln>
-          <a:effectLst/>
-        </p:spPr>
-        <p:style>
-          <a:lnRef idx="1">
-            <a:schemeClr val="accent1"/>
-          </a:lnRef>
-          <a:fillRef idx="3">
-            <a:schemeClr val="accent1"/>
-          </a:fillRef>
-          <a:effectRef idx="2">
-            <a:schemeClr val="accent1"/>
-          </a:effectRef>
-          <a:fontRef idx="minor">
-            <a:schemeClr val="lt1"/>
-          </a:fontRef>
-        </p:style>
-        <p:txBody>
-          <a:bodyPr rtlCol="0" anchor="ctr"/>
-          <a:lstStyle/>
-          <a:p/>
-        </p:txBody>
-      </p:sp>
-      <p:sp>
-        <p:nvSpPr>
-          <p:cNvPr id="40" name="TextBox 39"/>
-          <p:cNvSpPr txBox="1"/>
-          <p:nvPr/>
-        </p:nvSpPr>
-        <p:spPr>
-          <a:xfrm>
-            <a:off x="365760" y="4480560"/>
-            <a:ext cx="2194560" cy="146304"/>
-          </a:xfrm>
-          <a:prstGeom prst="rect">
-            <a:avLst/>
-          </a:prstGeom>
-          <a:noFill/>
-        </p:spPr>
-        <p:txBody>
-          <a:bodyPr wrap="square" lIns="0" rIns="0" tIns="0" bIns="0" anchor="t">
-            <a:spAutoFit/>
-          </a:bodyPr>
-          <a:lstStyle/>
-          <a:p>
-            <a:pPr algn="l">
-              <a:lnSpc>
-                <a:spcPct val="100000"/>
-              </a:lnSpc>
-            </a:pPr>
-            <a:r>
-              <a:rPr sz="650" b="0" i="0">
+              <a:t>картонів</a:t>
+            </a:r>
+          </a:p>
+          <a:p>
+            <a:pPr algn="ctr">
+              <a:lnSpc>
+                <a:spcPct val="114000"/>
+              </a:lnSpc>
+            </a:pPr>
+            <a:r>
+              <a:rPr sz="700" b="0" i="0">
                 <a:solidFill>
                   <a:srgbClr val="8A938D"/>
                 </a:solidFill>
                 <a:latin typeface="Calibri"/>
               </a:rPr>
-              <a:t>Місткість 20′</a:t>
-            </a:r>
-          </a:p>
-        </p:txBody>
-      </p:sp>
-      <p:sp>
-        <p:nvSpPr>
-          <p:cNvPr id="41" name="TextBox 40"/>
-          <p:cNvSpPr txBox="1"/>
-          <p:nvPr/>
-        </p:nvSpPr>
-        <p:spPr>
-          <a:xfrm>
-            <a:off x="365760" y="4608576"/>
-            <a:ext cx="2194560" cy="182880"/>
-          </a:xfrm>
-          <a:prstGeom prst="rect">
-            <a:avLst/>
-          </a:prstGeom>
-          <a:noFill/>
-        </p:spPr>
-        <p:txBody>
-          <a:bodyPr wrap="square" lIns="0" rIns="0" tIns="0" bIns="0" anchor="t">
-            <a:spAutoFit/>
-          </a:bodyPr>
-          <a:lstStyle/>
-          <a:p>
-            <a:pPr algn="l">
-              <a:lnSpc>
-                <a:spcPct val="100000"/>
-              </a:lnSpc>
-            </a:pPr>
-            <a:r>
-              <a:rPr sz="900" b="1" i="0">
-                <a:solidFill>
-                  <a:srgbClr val="14241F"/>
-                </a:solidFill>
-                <a:latin typeface="Calibri"/>
-              </a:rPr>
-              <a:t>1 013 картонів</a:t>
-            </a:r>
-          </a:p>
-        </p:txBody>
-      </p:sp>
-      <p:sp>
-        <p:nvSpPr>
-          <p:cNvPr id="42" name="Rectangle 41"/>
-          <p:cNvSpPr/>
-          <p:nvPr/>
-        </p:nvSpPr>
-        <p:spPr>
-          <a:xfrm>
-            <a:off x="2743200" y="4425696"/>
-            <a:ext cx="2194560" cy="9144"/>
-          </a:xfrm>
-          <a:prstGeom prst="rect">
-            <a:avLst/>
-          </a:prstGeom>
-          <a:solidFill>
-            <a:srgbClr val="E6E1D8"/>
-          </a:solidFill>
-          <a:ln>
-            <a:noFill/>
-          </a:ln>
-          <a:effectLst/>
-        </p:spPr>
-        <p:style>
-          <a:lnRef idx="1">
-            <a:schemeClr val="accent1"/>
-          </a:lnRef>
-          <a:fillRef idx="3">
-            <a:schemeClr val="accent1"/>
-          </a:fillRef>
-          <a:effectRef idx="2">
-            <a:schemeClr val="accent1"/>
-          </a:effectRef>
-          <a:fontRef idx="minor">
-            <a:schemeClr val="lt1"/>
-          </a:fontRef>
-        </p:style>
-        <p:txBody>
-          <a:bodyPr rtlCol="0" anchor="ctr"/>
-          <a:lstStyle/>
-          <a:p/>
-        </p:txBody>
-      </p:sp>
-      <p:sp>
-        <p:nvSpPr>
-          <p:cNvPr id="43" name="TextBox 42"/>
-          <p:cNvSpPr txBox="1"/>
-          <p:nvPr/>
-        </p:nvSpPr>
-        <p:spPr>
-          <a:xfrm>
-            <a:off x="2743200" y="4480560"/>
-            <a:ext cx="2194560" cy="146304"/>
-          </a:xfrm>
-          <a:prstGeom prst="rect">
-            <a:avLst/>
-          </a:prstGeom>
-          <a:noFill/>
-        </p:spPr>
-        <p:txBody>
-          <a:bodyPr wrap="square" lIns="0" rIns="0" tIns="0" bIns="0" anchor="t">
-            <a:spAutoFit/>
-          </a:bodyPr>
-          <a:lstStyle/>
-          <a:p>
-            <a:pPr algn="l">
-              <a:lnSpc>
-                <a:spcPct val="100000"/>
-              </a:lnSpc>
-            </a:pPr>
-            <a:r>
-              <a:rPr sz="650" b="0" i="0">
-                <a:solidFill>
-                  <a:srgbClr val="8A938D"/>
-                </a:solidFill>
-                <a:latin typeface="Calibri"/>
-              </a:rPr>
-              <a:t>MOQ</a:t>
-            </a:r>
-          </a:p>
-        </p:txBody>
-      </p:sp>
-      <p:sp>
-        <p:nvSpPr>
-          <p:cNvPr id="44" name="TextBox 43"/>
-          <p:cNvSpPr txBox="1"/>
-          <p:nvPr/>
-        </p:nvSpPr>
-        <p:spPr>
-          <a:xfrm>
-            <a:off x="2743200" y="4608576"/>
-            <a:ext cx="2194560" cy="182880"/>
-          </a:xfrm>
-          <a:prstGeom prst="rect">
-            <a:avLst/>
-          </a:prstGeom>
-          <a:noFill/>
-        </p:spPr>
-        <p:txBody>
-          <a:bodyPr wrap="square" lIns="0" rIns="0" tIns="0" bIns="0" anchor="t">
-            <a:spAutoFit/>
-          </a:bodyPr>
-          <a:lstStyle/>
-          <a:p>
-            <a:pPr algn="l">
-              <a:lnSpc>
-                <a:spcPct val="100000"/>
-              </a:lnSpc>
-            </a:pPr>
-            <a:r>
-              <a:rPr sz="900" b="1" i="0">
-                <a:solidFill>
-                  <a:srgbClr val="14241F"/>
-                </a:solidFill>
-                <a:latin typeface="Calibri"/>
-              </a:rPr>
-              <a:t>від 300 картонів</a:t>
-            </a:r>
-          </a:p>
-        </p:txBody>
-      </p:sp>
-      <p:sp>
-        <p:nvSpPr>
-          <p:cNvPr id="45" name="Rectangle 44"/>
-          <p:cNvSpPr/>
-          <p:nvPr/>
-        </p:nvSpPr>
-        <p:spPr>
-          <a:xfrm>
-            <a:off x="365760" y="4809744"/>
-            <a:ext cx="8412480" cy="9144"/>
-          </a:xfrm>
-          <a:prstGeom prst="rect">
-            <a:avLst/>
-          </a:prstGeom>
-          <a:solidFill>
-            <a:srgbClr val="E6E1D8"/>
-          </a:solidFill>
-          <a:ln>
-            <a:noFill/>
-          </a:ln>
-          <a:effectLst/>
-        </p:spPr>
-        <p:style>
-          <a:lnRef idx="1">
-            <a:schemeClr val="accent1"/>
-          </a:lnRef>
-          <a:fillRef idx="3">
-            <a:schemeClr val="accent1"/>
-          </a:fillRef>
-          <a:effectRef idx="2">
-            <a:schemeClr val="accent1"/>
-          </a:effectRef>
-          <a:fontRef idx="minor">
-            <a:schemeClr val="lt1"/>
-          </a:fontRef>
-        </p:style>
-        <p:txBody>
-          <a:bodyPr rtlCol="0" anchor="ctr"/>
-          <a:lstStyle/>
-          <a:p/>
-        </p:txBody>
-      </p:sp>
-      <p:sp>
-        <p:nvSpPr>
-          <p:cNvPr id="46" name="TextBox 45"/>
+              <a:t>у 20′</a:t>
+            </a:r>
+          </a:p>
+        </p:txBody>
+      </p:sp>
+      <p:sp>
+        <p:nvSpPr>
+          <p:cNvPr id="30" name="TextBox 29"/>
           <p:cNvSpPr txBox="1"/>
           <p:nvPr/>
         </p:nvSpPr>
@@ -27614,7 +25906,7 @@
             <a:r>
               <a:rPr sz="700" b="1" i="0">
                 <a:solidFill>
-                  <a:srgbClr val="8A938D"/>
+                  <a:srgbClr val="BBCED0"/>
                 </a:solidFill>
                 <a:latin typeface="Calibri"/>
               </a:rPr>
@@ -30220,8 +28512,8 @@
         </p:nvSpPr>
         <p:spPr>
           <a:xfrm>
-            <a:off x="0" y="0"/>
-            <a:ext cx="9144000" cy="64008"/>
+            <a:off x="5349240" y="0"/>
+            <a:ext cx="3794760" cy="5143500"/>
           </a:xfrm>
           <a:prstGeom prst="rect">
             <a:avLst/>
@@ -30256,14 +28548,82 @@
       </p:sp>
       <p:sp>
         <p:nvSpPr>
-          <p:cNvPr id="4" name="Rectangle 3"/>
+          <p:cNvPr id="4" name="Rounded Rectangle 3"/>
           <p:cNvSpPr/>
           <p:nvPr/>
         </p:nvSpPr>
         <p:spPr>
           <a:xfrm>
-            <a:off x="0" y="0"/>
-            <a:ext cx="9144000" cy="2670048"/>
+            <a:off x="5806440" y="1005840"/>
+            <a:ext cx="2880360" cy="2331720"/>
+          </a:xfrm>
+          <a:prstGeom prst="roundRect">
+            <a:avLst>
+              <a:gd name="adj" fmla="val 5000"/>
+            </a:avLst>
+          </a:prstGeom>
+          <a:solidFill>
+            <a:srgbClr val="FFFFFF"/>
+          </a:solidFill>
+          <a:ln>
+            <a:noFill/>
+          </a:ln>
+          <a:effectLst/>
+        </p:spPr>
+        <p:style>
+          <a:lnRef idx="1">
+            <a:schemeClr val="accent1"/>
+          </a:lnRef>
+          <a:fillRef idx="3">
+            <a:schemeClr val="accent1"/>
+          </a:fillRef>
+          <a:effectRef idx="2">
+            <a:schemeClr val="accent1"/>
+          </a:effectRef>
+          <a:fontRef idx="minor">
+            <a:schemeClr val="lt1"/>
+          </a:fontRef>
+        </p:style>
+        <p:txBody>
+          <a:bodyPr rtlCol="0" anchor="ctr"/>
+          <a:lstStyle/>
+          <a:p/>
+        </p:txBody>
+      </p:sp>
+      <p:pic>
+        <p:nvPicPr>
+          <p:cNvPr id="5" name="Picture 4" descr="logo_kokiri.png"/>
+          <p:cNvPicPr>
+            <a:picLocks noChangeAspect="1"/>
+          </p:cNvPicPr>
+          <p:nvPr/>
+        </p:nvPicPr>
+        <p:blipFill>
+          <a:blip r:embed="rId2"/>
+          <a:stretch>
+            <a:fillRect/>
+          </a:stretch>
+        </p:blipFill>
+        <p:spPr>
+          <a:xfrm>
+            <a:off x="6499859" y="1516888"/>
+            <a:ext cx="1493520" cy="477520"/>
+          </a:xfrm>
+          <a:prstGeom prst="rect">
+            <a:avLst/>
+          </a:prstGeom>
+        </p:spPr>
+      </p:pic>
+      <p:sp>
+        <p:nvSpPr>
+          <p:cNvPr id="6" name="Rectangle 5"/>
+          <p:cNvSpPr/>
+          <p:nvPr/>
+        </p:nvSpPr>
+        <p:spPr>
+          <a:xfrm>
+            <a:off x="6944868" y="2450592"/>
+            <a:ext cx="603504" cy="32004"/>
           </a:xfrm>
           <a:prstGeom prst="rect">
             <a:avLst/>
@@ -30298,22 +28658,137 @@
       </p:sp>
       <p:sp>
         <p:nvSpPr>
-          <p:cNvPr id="5" name="Rounded Rectangle 4"/>
+          <p:cNvPr id="7" name="TextBox 6"/>
+          <p:cNvSpPr txBox="1"/>
+          <p:nvPr/>
+        </p:nvSpPr>
+        <p:spPr>
+          <a:xfrm>
+            <a:off x="5952744" y="2633472"/>
+            <a:ext cx="2587752" cy="274320"/>
+          </a:xfrm>
+          <a:prstGeom prst="rect">
+            <a:avLst/>
+          </a:prstGeom>
+          <a:noFill/>
+        </p:spPr>
+        <p:txBody>
+          <a:bodyPr wrap="square" lIns="0" rIns="0" tIns="0" bIns="0" anchor="t">
+            <a:spAutoFit/>
+          </a:bodyPr>
+          <a:lstStyle/>
+          <a:p>
+            <a:pPr algn="ctr">
+              <a:lnSpc>
+                <a:spcPct val="100000"/>
+              </a:lnSpc>
+            </a:pPr>
+            <a:r>
+              <a:rPr sz="1050" b="0" i="0">
+                <a:solidFill>
+                  <a:srgbClr val="8A938D"/>
+                </a:solidFill>
+                <a:latin typeface="Calibri"/>
+              </a:rPr>
+              <a:t>KOKIRI Wow</a:t>
+            </a:r>
+          </a:p>
+        </p:txBody>
+      </p:sp>
+      <p:sp>
+        <p:nvSpPr>
+          <p:cNvPr id="8" name="TextBox 7"/>
+          <p:cNvSpPr txBox="1"/>
+          <p:nvPr/>
+        </p:nvSpPr>
+        <p:spPr>
+          <a:xfrm>
+            <a:off x="5349240" y="3694176"/>
+            <a:ext cx="3794760" cy="182880"/>
+          </a:xfrm>
+          <a:prstGeom prst="rect">
+            <a:avLst/>
+          </a:prstGeom>
+          <a:noFill/>
+        </p:spPr>
+        <p:txBody>
+          <a:bodyPr wrap="square" lIns="0" rIns="0" tIns="0" bIns="0" anchor="t">
+            <a:spAutoFit/>
+          </a:bodyPr>
+          <a:lstStyle/>
+          <a:p>
+            <a:pPr algn="ctr">
+              <a:lnSpc>
+                <a:spcPct val="100000"/>
+              </a:lnSpc>
+            </a:pPr>
+            <a:r>
+              <a:rPr sz="700" b="1" i="0" spc="90">
+                <a:solidFill>
+                  <a:srgbClr val="C5DAC9"/>
+                </a:solidFill>
+                <a:latin typeface="Calibri"/>
+              </a:rPr>
+              <a:t>ВИРОБНИЦТВО</a:t>
+            </a:r>
+          </a:p>
+        </p:txBody>
+      </p:sp>
+      <p:sp>
+        <p:nvSpPr>
+          <p:cNvPr id="9" name="TextBox 8"/>
+          <p:cNvSpPr txBox="1"/>
+          <p:nvPr/>
+        </p:nvSpPr>
+        <p:spPr>
+          <a:xfrm>
+            <a:off x="5349240" y="3895344"/>
+            <a:ext cx="3794760" cy="274320"/>
+          </a:xfrm>
+          <a:prstGeom prst="rect">
+            <a:avLst/>
+          </a:prstGeom>
+          <a:noFill/>
+        </p:spPr>
+        <p:txBody>
+          <a:bodyPr wrap="square" lIns="0" rIns="0" tIns="0" bIns="0" anchor="t">
+            <a:spAutoFit/>
+          </a:bodyPr>
+          <a:lstStyle/>
+          <a:p>
+            <a:pPr algn="ctr">
+              <a:lnSpc>
+                <a:spcPct val="100000"/>
+              </a:lnSpc>
+            </a:pPr>
+            <a:r>
+              <a:rPr sz="1300" b="1" i="0">
+                <a:solidFill>
+                  <a:srgbClr val="FFFFFF"/>
+                </a:solidFill>
+                <a:latin typeface="Cambria"/>
+              </a:rPr>
+              <a:t>Таїланд</a:t>
+            </a:r>
+          </a:p>
+        </p:txBody>
+      </p:sp>
+      <p:sp>
+        <p:nvSpPr>
+          <p:cNvPr id="10" name="Rectangle 9"/>
           <p:cNvSpPr/>
           <p:nvPr/>
         </p:nvSpPr>
         <p:spPr>
           <a:xfrm>
             <a:off x="365760" y="475488"/>
-            <a:ext cx="402336" cy="402336"/>
-          </a:xfrm>
-          <a:prstGeom prst="roundRect">
-            <a:avLst>
-              <a:gd name="adj" fmla="val 10000"/>
-            </a:avLst>
+            <a:ext cx="237744" cy="237744"/>
+          </a:xfrm>
+          <a:prstGeom prst="rect">
+            <a:avLst/>
           </a:prstGeom>
           <a:solidFill>
-            <a:srgbClr val="FFFFFF"/>
+            <a:srgbClr val="2F7A3E"/>
           </a:solidFill>
           <a:ln>
             <a:noFill/>
@@ -30342,53 +28817,108 @@
       </p:sp>
       <p:sp>
         <p:nvSpPr>
-          <p:cNvPr id="6" name="TextBox 5"/>
-          <p:cNvSpPr txBox="1"/>
-          <p:nvPr/>
-        </p:nvSpPr>
-        <p:spPr>
-          <a:xfrm>
-            <a:off x="365760" y="475488"/>
-            <a:ext cx="402336" cy="402336"/>
-          </a:xfrm>
-          <a:prstGeom prst="rect">
-            <a:avLst/>
-          </a:prstGeom>
-          <a:noFill/>
-        </p:spPr>
-        <p:txBody>
-          <a:bodyPr wrap="square" lIns="0" rIns="0" tIns="0" bIns="0" anchor="ctr">
-            <a:spAutoFit/>
-          </a:bodyPr>
-          <a:lstStyle/>
-          <a:p>
-            <a:pPr algn="ctr">
-              <a:lnSpc>
-                <a:spcPct val="100000"/>
-              </a:lnSpc>
-            </a:pPr>
-            <a:r>
-              <a:rPr sz="1400" b="1" i="0">
-                <a:solidFill>
-                  <a:srgbClr val="2E763C"/>
+          <p:cNvPr id="11" name="TextBox 10"/>
+          <p:cNvSpPr txBox="1"/>
+          <p:nvPr/>
+        </p:nvSpPr>
+        <p:spPr>
+          <a:xfrm>
+            <a:off x="749808" y="475488"/>
+            <a:ext cx="4023360" cy="237744"/>
+          </a:xfrm>
+          <a:prstGeom prst="rect">
+            <a:avLst/>
+          </a:prstGeom>
+          <a:noFill/>
+        </p:spPr>
+        <p:txBody>
+          <a:bodyPr wrap="square" lIns="0" rIns="0" tIns="0" bIns="0" anchor="t">
+            <a:spAutoFit/>
+          </a:bodyPr>
+          <a:lstStyle/>
+          <a:p>
+            <a:pPr algn="l">
+              <a:lnSpc>
+                <a:spcPct val="100000"/>
+              </a:lnSpc>
+            </a:pPr>
+            <a:r>
+              <a:rPr sz="800" b="1" i="0" spc="90">
+                <a:solidFill>
+                  <a:srgbClr val="2C713B"/>
+                </a:solidFill>
+                <a:latin typeface="Calibri"/>
+              </a:rPr>
+              <a:t>ПРОФІЛЬ ПОСТАЧАЛЬНИКА · 03</a:t>
+            </a:r>
+          </a:p>
+        </p:txBody>
+      </p:sp>
+      <p:sp>
+        <p:nvSpPr>
+          <p:cNvPr id="12" name="TextBox 11"/>
+          <p:cNvSpPr txBox="1"/>
+          <p:nvPr/>
+        </p:nvSpPr>
+        <p:spPr>
+          <a:xfrm>
+            <a:off x="365760" y="859536"/>
+            <a:ext cx="4617720" cy="914400"/>
+          </a:xfrm>
+          <a:prstGeom prst="rect">
+            <a:avLst/>
+          </a:prstGeom>
+          <a:noFill/>
+        </p:spPr>
+        <p:txBody>
+          <a:bodyPr wrap="square" lIns="0" rIns="0" tIns="0" bIns="0" anchor="t">
+            <a:spAutoFit/>
+          </a:bodyPr>
+          <a:lstStyle/>
+          <a:p>
+            <a:pPr algn="l">
+              <a:lnSpc>
+                <a:spcPct val="108000"/>
+              </a:lnSpc>
+            </a:pPr>
+            <a:r>
+              <a:rPr sz="2600" b="1" i="0">
+                <a:solidFill>
+                  <a:srgbClr val="14241F"/>
                 </a:solidFill>
                 <a:latin typeface="Cambria"/>
               </a:rPr>
-              <a:t>03</a:t>
-            </a:r>
-          </a:p>
-        </p:txBody>
-      </p:sp>
-      <p:sp>
-        <p:nvSpPr>
-          <p:cNvPr id="7" name="TextBox 6"/>
-          <p:cNvSpPr txBox="1"/>
-          <p:nvPr/>
-        </p:nvSpPr>
-        <p:spPr>
-          <a:xfrm>
-            <a:off x="914400" y="493776"/>
-            <a:ext cx="4023360" cy="182880"/>
+              <a:t>TMK (Thailand)</a:t>
+            </a:r>
+          </a:p>
+          <a:p>
+            <a:pPr algn="l">
+              <a:lnSpc>
+                <a:spcPct val="108000"/>
+              </a:lnSpc>
+            </a:pPr>
+            <a:r>
+              <a:rPr sz="2600" b="1" i="0">
+                <a:solidFill>
+                  <a:srgbClr val="14241F"/>
+                </a:solidFill>
+                <a:latin typeface="Cambria"/>
+              </a:rPr>
+              <a:t>Co., Ltd.</a:t>
+            </a:r>
+          </a:p>
+        </p:txBody>
+      </p:sp>
+      <p:sp>
+        <p:nvSpPr>
+          <p:cNvPr id="13" name="TextBox 12"/>
+          <p:cNvSpPr txBox="1"/>
+          <p:nvPr/>
+        </p:nvSpPr>
+        <p:spPr>
+          <a:xfrm>
+            <a:off x="365760" y="1920240"/>
+            <a:ext cx="4617720" cy="274320"/>
           </a:xfrm>
           <a:prstGeom prst="rect">
             <a:avLst/>
@@ -30407,168 +28937,35 @@
               </a:lnSpc>
             </a:pPr>
             <a:r>
-              <a:rPr sz="700" b="1" i="0" spc="90">
-                <a:solidFill>
-                  <a:srgbClr val="C1D7C5"/>
-                </a:solidFill>
-                <a:latin typeface="Calibri"/>
-              </a:rPr>
-              <a:t>ПОСТАЧАЛЬНИК</a:t>
-            </a:r>
-          </a:p>
-        </p:txBody>
-      </p:sp>
-      <p:sp>
-        <p:nvSpPr>
-          <p:cNvPr id="8" name="TextBox 7"/>
-          <p:cNvSpPr txBox="1"/>
-          <p:nvPr/>
-        </p:nvSpPr>
-        <p:spPr>
-          <a:xfrm>
-            <a:off x="914400" y="676656"/>
-            <a:ext cx="4023360" cy="201168"/>
-          </a:xfrm>
-          <a:prstGeom prst="rect">
-            <a:avLst/>
-          </a:prstGeom>
-          <a:noFill/>
-        </p:spPr>
-        <p:txBody>
-          <a:bodyPr wrap="square" lIns="0" rIns="0" tIns="0" bIns="0" anchor="t">
-            <a:spAutoFit/>
-          </a:bodyPr>
-          <a:lstStyle/>
-          <a:p>
-            <a:pPr algn="l">
-              <a:lnSpc>
-                <a:spcPct val="100000"/>
-              </a:lnSpc>
-            </a:pPr>
-            <a:r>
-              <a:rPr sz="900" b="1" i="0" spc="90">
-                <a:solidFill>
-                  <a:srgbClr val="FFFFFF"/>
-                </a:solidFill>
-                <a:latin typeface="Calibri"/>
-              </a:rPr>
-              <a:t>KOKIRI WOW</a:t>
-            </a:r>
-          </a:p>
-        </p:txBody>
-      </p:sp>
-      <p:sp>
-        <p:nvSpPr>
-          <p:cNvPr id="9" name="TextBox 8"/>
-          <p:cNvSpPr txBox="1"/>
-          <p:nvPr/>
-        </p:nvSpPr>
-        <p:spPr>
-          <a:xfrm>
-            <a:off x="365760" y="914400"/>
-            <a:ext cx="4663440" cy="804672"/>
-          </a:xfrm>
-          <a:prstGeom prst="rect">
-            <a:avLst/>
-          </a:prstGeom>
-          <a:noFill/>
-        </p:spPr>
-        <p:txBody>
-          <a:bodyPr wrap="square" lIns="0" rIns="0" tIns="0" bIns="0" anchor="t">
-            <a:spAutoFit/>
-          </a:bodyPr>
-          <a:lstStyle/>
-          <a:p>
-            <a:pPr algn="l">
-              <a:lnSpc>
-                <a:spcPct val="106000"/>
-              </a:lnSpc>
-            </a:pPr>
-            <a:r>
-              <a:rPr sz="2600" b="1" i="0">
-                <a:solidFill>
-                  <a:srgbClr val="FFFFFF"/>
-                </a:solidFill>
-                <a:latin typeface="Cambria"/>
-              </a:rPr>
-              <a:t>TMK (Thailand)</a:t>
-            </a:r>
-          </a:p>
-          <a:p>
-            <a:pPr algn="l">
-              <a:lnSpc>
-                <a:spcPct val="106000"/>
-              </a:lnSpc>
-            </a:pPr>
-            <a:r>
-              <a:rPr sz="2600" b="1" i="0">
-                <a:solidFill>
-                  <a:srgbClr val="FFFFFF"/>
-                </a:solidFill>
-                <a:latin typeface="Cambria"/>
-              </a:rPr>
-              <a:t>Co., Ltd.</a:t>
-            </a:r>
-          </a:p>
-        </p:txBody>
-      </p:sp>
-      <p:sp>
-        <p:nvSpPr>
-          <p:cNvPr id="10" name="TextBox 9"/>
-          <p:cNvSpPr txBox="1"/>
-          <p:nvPr/>
-        </p:nvSpPr>
-        <p:spPr>
-          <a:xfrm>
-            <a:off x="365760" y="1901952"/>
-            <a:ext cx="2743200" cy="146304"/>
-          </a:xfrm>
-          <a:prstGeom prst="rect">
-            <a:avLst/>
-          </a:prstGeom>
-          <a:noFill/>
-        </p:spPr>
-        <p:txBody>
-          <a:bodyPr wrap="square" lIns="0" rIns="0" tIns="0" bIns="0" anchor="t">
-            <a:spAutoFit/>
-          </a:bodyPr>
-          <a:lstStyle/>
-          <a:p>
-            <a:pPr algn="l">
-              <a:lnSpc>
-                <a:spcPct val="100000"/>
-              </a:lnSpc>
-            </a:pPr>
-            <a:r>
-              <a:rPr sz="650" b="1" i="0" spc="90">
-                <a:solidFill>
-                  <a:srgbClr val="C5DAC9"/>
-                </a:solidFill>
-                <a:latin typeface="Calibri"/>
-              </a:rPr>
-              <a:t>МАРШРУТ ПОСТАЧАННЯ</a:t>
-            </a:r>
-          </a:p>
-        </p:txBody>
-      </p:sp>
-      <p:sp>
-        <p:nvSpPr>
-          <p:cNvPr id="11" name="Rounded Rectangle 10"/>
+              <a:rPr sz="1100" b="0" i="0">
+                <a:solidFill>
+                  <a:srgbClr val="2C713B"/>
+                </a:solidFill>
+                <a:latin typeface="Calibri"/>
+              </a:rPr>
+              <a:t>Снеки з водорості норі · Retail і дитячий формат</a:t>
+            </a:r>
+          </a:p>
+        </p:txBody>
+      </p:sp>
+      <p:sp>
+        <p:nvSpPr>
+          <p:cNvPr id="14" name="Rounded Rectangle 13"/>
           <p:cNvSpPr/>
           <p:nvPr/>
         </p:nvSpPr>
         <p:spPr>
           <a:xfrm>
-            <a:off x="411480" y="2212848"/>
-            <a:ext cx="128016" cy="128016"/>
+            <a:off x="365760" y="2286000"/>
+            <a:ext cx="1025956" cy="274320"/>
           </a:xfrm>
           <a:prstGeom prst="roundRect">
             <a:avLst>
-              <a:gd name="adj" fmla="val 50000"/>
+              <a:gd name="adj" fmla="val 24000"/>
             </a:avLst>
           </a:prstGeom>
           <a:solidFill>
-            <a:srgbClr val="FFFFFF"/>
+            <a:srgbClr val="E6EFE8"/>
           </a:solidFill>
           <a:ln>
             <a:noFill/>
@@ -30597,598 +28994,131 @@
       </p:sp>
       <p:sp>
         <p:nvSpPr>
-          <p:cNvPr id="12" name="Rectangle 11"/>
+          <p:cNvPr id="15" name="TextBox 14"/>
+          <p:cNvSpPr txBox="1"/>
+          <p:nvPr/>
+        </p:nvSpPr>
+        <p:spPr>
+          <a:xfrm>
+            <a:off x="365760" y="2286000"/>
+            <a:ext cx="1025956" cy="274320"/>
+          </a:xfrm>
+          <a:prstGeom prst="rect">
+            <a:avLst/>
+          </a:prstGeom>
+          <a:noFill/>
+        </p:spPr>
+        <p:txBody>
+          <a:bodyPr wrap="square" lIns="0" rIns="0" tIns="0" bIns="0" anchor="ctr">
+            <a:spAutoFit/>
+          </a:bodyPr>
+          <a:lstStyle/>
+          <a:p>
+            <a:pPr algn="ctr">
+              <a:lnSpc>
+                <a:spcPct val="100000"/>
+              </a:lnSpc>
+            </a:pPr>
+            <a:r>
+              <a:rPr sz="850" b="1" i="0">
+                <a:solidFill>
+                  <a:srgbClr val="2E763C"/>
+                </a:solidFill>
+                <a:latin typeface="Calibri"/>
+              </a:rPr>
+              <a:t>FOB Bangkok</a:t>
+            </a:r>
+          </a:p>
+        </p:txBody>
+      </p:sp>
+      <p:sp>
+        <p:nvSpPr>
+          <p:cNvPr id="16" name="TextBox 15"/>
+          <p:cNvSpPr txBox="1"/>
+          <p:nvPr/>
+        </p:nvSpPr>
+        <p:spPr>
+          <a:xfrm>
+            <a:off x="365760" y="2779776"/>
+            <a:ext cx="4617720" cy="146304"/>
+          </a:xfrm>
+          <a:prstGeom prst="rect">
+            <a:avLst/>
+          </a:prstGeom>
+          <a:noFill/>
+        </p:spPr>
+        <p:txBody>
+          <a:bodyPr wrap="square" lIns="0" rIns="0" tIns="0" bIns="0" anchor="t">
+            <a:spAutoFit/>
+          </a:bodyPr>
+          <a:lstStyle/>
+          <a:p>
+            <a:pPr algn="l">
+              <a:lnSpc>
+                <a:spcPct val="100000"/>
+              </a:lnSpc>
+            </a:pPr>
+            <a:r>
+              <a:rPr sz="700" b="1" i="0" spc="90">
+                <a:solidFill>
+                  <a:srgbClr val="2C713B"/>
+                </a:solidFill>
+                <a:latin typeface="Calibri"/>
+              </a:rPr>
+              <a:t>ПРО КОМПАНІЮ</a:t>
+            </a:r>
+          </a:p>
+        </p:txBody>
+      </p:sp>
+      <p:sp>
+        <p:nvSpPr>
+          <p:cNvPr id="17" name="TextBox 16"/>
+          <p:cNvSpPr txBox="1"/>
+          <p:nvPr/>
+        </p:nvSpPr>
+        <p:spPr>
+          <a:xfrm>
+            <a:off x="365760" y="2962656"/>
+            <a:ext cx="4617720" cy="731520"/>
+          </a:xfrm>
+          <a:prstGeom prst="rect">
+            <a:avLst/>
+          </a:prstGeom>
+          <a:noFill/>
+        </p:spPr>
+        <p:txBody>
+          <a:bodyPr wrap="square" lIns="0" rIns="0" tIns="0" bIns="0" anchor="t">
+            <a:spAutoFit/>
+          </a:bodyPr>
+          <a:lstStyle/>
+          <a:p>
+            <a:pPr algn="l">
+              <a:lnSpc>
+                <a:spcPct val="132000"/>
+              </a:lnSpc>
+            </a:pPr>
+            <a:r>
+              <a:rPr sz="1000" b="0" i="0">
+                <a:solidFill>
+                  <a:srgbClr val="44524C"/>
+                </a:solidFill>
+                <a:latin typeface="Calibri"/>
+              </a:rPr>
+              <a:t>Тайський виробник снеків із водоростей під брендом KOKIRI Wow. Найнижча собівартість одиниці в каталозі — за рахунок мінімальної фасовки та дитячого позиціонування.</a:t>
+            </a:r>
+          </a:p>
+        </p:txBody>
+      </p:sp>
+      <p:sp>
+        <p:nvSpPr>
+          <p:cNvPr id="18" name="Rounded Rectangle 17"/>
           <p:cNvSpPr/>
           <p:nvPr/>
         </p:nvSpPr>
         <p:spPr>
           <a:xfrm>
-            <a:off x="676656" y="2263140"/>
-            <a:ext cx="91440" cy="27432"/>
-          </a:xfrm>
-          <a:prstGeom prst="rect">
-            <a:avLst/>
-          </a:prstGeom>
-          <a:solidFill>
-            <a:srgbClr val="8DB695"/>
-          </a:solidFill>
-          <a:ln>
-            <a:noFill/>
-          </a:ln>
-          <a:effectLst/>
-        </p:spPr>
-        <p:style>
-          <a:lnRef idx="1">
-            <a:schemeClr val="accent1"/>
-          </a:lnRef>
-          <a:fillRef idx="3">
-            <a:schemeClr val="accent1"/>
-          </a:fillRef>
-          <a:effectRef idx="2">
-            <a:schemeClr val="accent1"/>
-          </a:effectRef>
-          <a:fontRef idx="minor">
-            <a:schemeClr val="lt1"/>
-          </a:fontRef>
-        </p:style>
-        <p:txBody>
-          <a:bodyPr rtlCol="0" anchor="ctr"/>
-          <a:lstStyle/>
-          <a:p/>
-        </p:txBody>
-      </p:sp>
-      <p:sp>
-        <p:nvSpPr>
-          <p:cNvPr id="13" name="Rectangle 12"/>
-          <p:cNvSpPr/>
-          <p:nvPr/>
-        </p:nvSpPr>
-        <p:spPr>
-          <a:xfrm>
-            <a:off x="859536" y="2263140"/>
-            <a:ext cx="91440" cy="27432"/>
-          </a:xfrm>
-          <a:prstGeom prst="rect">
-            <a:avLst/>
-          </a:prstGeom>
-          <a:solidFill>
-            <a:srgbClr val="8DB695"/>
-          </a:solidFill>
-          <a:ln>
-            <a:noFill/>
-          </a:ln>
-          <a:effectLst/>
-        </p:spPr>
-        <p:style>
-          <a:lnRef idx="1">
-            <a:schemeClr val="accent1"/>
-          </a:lnRef>
-          <a:fillRef idx="3">
-            <a:schemeClr val="accent1"/>
-          </a:fillRef>
-          <a:effectRef idx="2">
-            <a:schemeClr val="accent1"/>
-          </a:effectRef>
-          <a:fontRef idx="minor">
-            <a:schemeClr val="lt1"/>
-          </a:fontRef>
-        </p:style>
-        <p:txBody>
-          <a:bodyPr rtlCol="0" anchor="ctr"/>
-          <a:lstStyle/>
-          <a:p/>
-        </p:txBody>
-      </p:sp>
-      <p:sp>
-        <p:nvSpPr>
-          <p:cNvPr id="14" name="Rectangle 13"/>
-          <p:cNvSpPr/>
-          <p:nvPr/>
-        </p:nvSpPr>
-        <p:spPr>
-          <a:xfrm>
-            <a:off x="1042416" y="2263140"/>
-            <a:ext cx="91440" cy="27432"/>
-          </a:xfrm>
-          <a:prstGeom prst="rect">
-            <a:avLst/>
-          </a:prstGeom>
-          <a:solidFill>
-            <a:srgbClr val="8DB695"/>
-          </a:solidFill>
-          <a:ln>
-            <a:noFill/>
-          </a:ln>
-          <a:effectLst/>
-        </p:spPr>
-        <p:style>
-          <a:lnRef idx="1">
-            <a:schemeClr val="accent1"/>
-          </a:lnRef>
-          <a:fillRef idx="3">
-            <a:schemeClr val="accent1"/>
-          </a:fillRef>
-          <a:effectRef idx="2">
-            <a:schemeClr val="accent1"/>
-          </a:effectRef>
-          <a:fontRef idx="minor">
-            <a:schemeClr val="lt1"/>
-          </a:fontRef>
-        </p:style>
-        <p:txBody>
-          <a:bodyPr rtlCol="0" anchor="ctr"/>
-          <a:lstStyle/>
-          <a:p/>
-        </p:txBody>
-      </p:sp>
-      <p:sp>
-        <p:nvSpPr>
-          <p:cNvPr id="15" name="Rectangle 14"/>
-          <p:cNvSpPr/>
-          <p:nvPr/>
-        </p:nvSpPr>
-        <p:spPr>
-          <a:xfrm>
-            <a:off x="1225296" y="2263140"/>
-            <a:ext cx="91440" cy="27432"/>
-          </a:xfrm>
-          <a:prstGeom prst="rect">
-            <a:avLst/>
-          </a:prstGeom>
-          <a:solidFill>
-            <a:srgbClr val="8DB695"/>
-          </a:solidFill>
-          <a:ln>
-            <a:noFill/>
-          </a:ln>
-          <a:effectLst/>
-        </p:spPr>
-        <p:style>
-          <a:lnRef idx="1">
-            <a:schemeClr val="accent1"/>
-          </a:lnRef>
-          <a:fillRef idx="3">
-            <a:schemeClr val="accent1"/>
-          </a:fillRef>
-          <a:effectRef idx="2">
-            <a:schemeClr val="accent1"/>
-          </a:effectRef>
-          <a:fontRef idx="minor">
-            <a:schemeClr val="lt1"/>
-          </a:fontRef>
-        </p:style>
-        <p:txBody>
-          <a:bodyPr rtlCol="0" anchor="ctr"/>
-          <a:lstStyle/>
-          <a:p/>
-        </p:txBody>
-      </p:sp>
-      <p:sp>
-        <p:nvSpPr>
-          <p:cNvPr id="16" name="Rectangle 15"/>
-          <p:cNvSpPr/>
-          <p:nvPr/>
-        </p:nvSpPr>
-        <p:spPr>
-          <a:xfrm>
-            <a:off x="1408176" y="2263140"/>
-            <a:ext cx="91440" cy="27432"/>
-          </a:xfrm>
-          <a:prstGeom prst="rect">
-            <a:avLst/>
-          </a:prstGeom>
-          <a:solidFill>
-            <a:srgbClr val="8DB695"/>
-          </a:solidFill>
-          <a:ln>
-            <a:noFill/>
-          </a:ln>
-          <a:effectLst/>
-        </p:spPr>
-        <p:style>
-          <a:lnRef idx="1">
-            <a:schemeClr val="accent1"/>
-          </a:lnRef>
-          <a:fillRef idx="3">
-            <a:schemeClr val="accent1"/>
-          </a:fillRef>
-          <a:effectRef idx="2">
-            <a:schemeClr val="accent1"/>
-          </a:effectRef>
-          <a:fontRef idx="minor">
-            <a:schemeClr val="lt1"/>
-          </a:fontRef>
-        </p:style>
-        <p:txBody>
-          <a:bodyPr rtlCol="0" anchor="ctr"/>
-          <a:lstStyle/>
-          <a:p/>
-        </p:txBody>
-      </p:sp>
-      <p:sp>
-        <p:nvSpPr>
-          <p:cNvPr id="17" name="Rectangle 16"/>
-          <p:cNvSpPr/>
-          <p:nvPr/>
-        </p:nvSpPr>
-        <p:spPr>
-          <a:xfrm>
-            <a:off x="1591056" y="2263140"/>
-            <a:ext cx="91440" cy="27432"/>
-          </a:xfrm>
-          <a:prstGeom prst="rect">
-            <a:avLst/>
-          </a:prstGeom>
-          <a:solidFill>
-            <a:srgbClr val="8DB695"/>
-          </a:solidFill>
-          <a:ln>
-            <a:noFill/>
-          </a:ln>
-          <a:effectLst/>
-        </p:spPr>
-        <p:style>
-          <a:lnRef idx="1">
-            <a:schemeClr val="accent1"/>
-          </a:lnRef>
-          <a:fillRef idx="3">
-            <a:schemeClr val="accent1"/>
-          </a:fillRef>
-          <a:effectRef idx="2">
-            <a:schemeClr val="accent1"/>
-          </a:effectRef>
-          <a:fontRef idx="minor">
-            <a:schemeClr val="lt1"/>
-          </a:fontRef>
-        </p:style>
-        <p:txBody>
-          <a:bodyPr rtlCol="0" anchor="ctr"/>
-          <a:lstStyle/>
-          <a:p/>
-        </p:txBody>
-      </p:sp>
-      <p:sp>
-        <p:nvSpPr>
-          <p:cNvPr id="18" name="Rectangle 17"/>
-          <p:cNvSpPr/>
-          <p:nvPr/>
-        </p:nvSpPr>
-        <p:spPr>
-          <a:xfrm>
-            <a:off x="1773936" y="2263140"/>
-            <a:ext cx="91440" cy="27432"/>
-          </a:xfrm>
-          <a:prstGeom prst="rect">
-            <a:avLst/>
-          </a:prstGeom>
-          <a:solidFill>
-            <a:srgbClr val="8DB695"/>
-          </a:solidFill>
-          <a:ln>
-            <a:noFill/>
-          </a:ln>
-          <a:effectLst/>
-        </p:spPr>
-        <p:style>
-          <a:lnRef idx="1">
-            <a:schemeClr val="accent1"/>
-          </a:lnRef>
-          <a:fillRef idx="3">
-            <a:schemeClr val="accent1"/>
-          </a:fillRef>
-          <a:effectRef idx="2">
-            <a:schemeClr val="accent1"/>
-          </a:effectRef>
-          <a:fontRef idx="minor">
-            <a:schemeClr val="lt1"/>
-          </a:fontRef>
-        </p:style>
-        <p:txBody>
-          <a:bodyPr rtlCol="0" anchor="ctr"/>
-          <a:lstStyle/>
-          <a:p/>
-        </p:txBody>
-      </p:sp>
-      <p:sp>
-        <p:nvSpPr>
-          <p:cNvPr id="19" name="Rectangle 18"/>
-          <p:cNvSpPr/>
-          <p:nvPr/>
-        </p:nvSpPr>
-        <p:spPr>
-          <a:xfrm>
-            <a:off x="1956816" y="2263140"/>
-            <a:ext cx="91440" cy="27432"/>
-          </a:xfrm>
-          <a:prstGeom prst="rect">
-            <a:avLst/>
-          </a:prstGeom>
-          <a:solidFill>
-            <a:srgbClr val="8DB695"/>
-          </a:solidFill>
-          <a:ln>
-            <a:noFill/>
-          </a:ln>
-          <a:effectLst/>
-        </p:spPr>
-        <p:style>
-          <a:lnRef idx="1">
-            <a:schemeClr val="accent1"/>
-          </a:lnRef>
-          <a:fillRef idx="3">
-            <a:schemeClr val="accent1"/>
-          </a:fillRef>
-          <a:effectRef idx="2">
-            <a:schemeClr val="accent1"/>
-          </a:effectRef>
-          <a:fontRef idx="minor">
-            <a:schemeClr val="lt1"/>
-          </a:fontRef>
-        </p:style>
-        <p:txBody>
-          <a:bodyPr rtlCol="0" anchor="ctr"/>
-          <a:lstStyle/>
-          <a:p/>
-        </p:txBody>
-      </p:sp>
-      <p:sp>
-        <p:nvSpPr>
-          <p:cNvPr id="20" name="Rectangle 19"/>
-          <p:cNvSpPr/>
-          <p:nvPr/>
-        </p:nvSpPr>
-        <p:spPr>
-          <a:xfrm>
-            <a:off x="2139696" y="2263140"/>
-            <a:ext cx="91440" cy="27432"/>
-          </a:xfrm>
-          <a:prstGeom prst="rect">
-            <a:avLst/>
-          </a:prstGeom>
-          <a:solidFill>
-            <a:srgbClr val="8DB695"/>
-          </a:solidFill>
-          <a:ln>
-            <a:noFill/>
-          </a:ln>
-          <a:effectLst/>
-        </p:spPr>
-        <p:style>
-          <a:lnRef idx="1">
-            <a:schemeClr val="accent1"/>
-          </a:lnRef>
-          <a:fillRef idx="3">
-            <a:schemeClr val="accent1"/>
-          </a:fillRef>
-          <a:effectRef idx="2">
-            <a:schemeClr val="accent1"/>
-          </a:effectRef>
-          <a:fontRef idx="minor">
-            <a:schemeClr val="lt1"/>
-          </a:fontRef>
-        </p:style>
-        <p:txBody>
-          <a:bodyPr rtlCol="0" anchor="ctr"/>
-          <a:lstStyle/>
-          <a:p/>
-        </p:txBody>
-      </p:sp>
-      <p:sp>
-        <p:nvSpPr>
-          <p:cNvPr id="21" name="Rectangle 20"/>
-          <p:cNvSpPr/>
-          <p:nvPr/>
-        </p:nvSpPr>
-        <p:spPr>
-          <a:xfrm>
-            <a:off x="2322576" y="2263140"/>
-            <a:ext cx="91440" cy="27432"/>
-          </a:xfrm>
-          <a:prstGeom prst="rect">
-            <a:avLst/>
-          </a:prstGeom>
-          <a:solidFill>
-            <a:srgbClr val="8DB695"/>
-          </a:solidFill>
-          <a:ln>
-            <a:noFill/>
-          </a:ln>
-          <a:effectLst/>
-        </p:spPr>
-        <p:style>
-          <a:lnRef idx="1">
-            <a:schemeClr val="accent1"/>
-          </a:lnRef>
-          <a:fillRef idx="3">
-            <a:schemeClr val="accent1"/>
-          </a:fillRef>
-          <a:effectRef idx="2">
-            <a:schemeClr val="accent1"/>
-          </a:effectRef>
-          <a:fontRef idx="minor">
-            <a:schemeClr val="lt1"/>
-          </a:fontRef>
-        </p:style>
-        <p:txBody>
-          <a:bodyPr rtlCol="0" anchor="ctr"/>
-          <a:lstStyle/>
-          <a:p/>
-        </p:txBody>
-      </p:sp>
-      <p:sp>
-        <p:nvSpPr>
-          <p:cNvPr id="22" name="Rectangle 21"/>
-          <p:cNvSpPr/>
-          <p:nvPr/>
-        </p:nvSpPr>
-        <p:spPr>
-          <a:xfrm>
-            <a:off x="2505456" y="2263140"/>
-            <a:ext cx="91440" cy="27432"/>
-          </a:xfrm>
-          <a:prstGeom prst="rect">
-            <a:avLst/>
-          </a:prstGeom>
-          <a:solidFill>
-            <a:srgbClr val="8DB695"/>
-          </a:solidFill>
-          <a:ln>
-            <a:noFill/>
-          </a:ln>
-          <a:effectLst/>
-        </p:spPr>
-        <p:style>
-          <a:lnRef idx="1">
-            <a:schemeClr val="accent1"/>
-          </a:lnRef>
-          <a:fillRef idx="3">
-            <a:schemeClr val="accent1"/>
-          </a:fillRef>
-          <a:effectRef idx="2">
-            <a:schemeClr val="accent1"/>
-          </a:effectRef>
-          <a:fontRef idx="minor">
-            <a:schemeClr val="lt1"/>
-          </a:fontRef>
-        </p:style>
-        <p:txBody>
-          <a:bodyPr rtlCol="0" anchor="ctr"/>
-          <a:lstStyle/>
-          <a:p/>
-        </p:txBody>
-      </p:sp>
-      <p:sp>
-        <p:nvSpPr>
-          <p:cNvPr id="23" name="Rounded Rectangle 22"/>
-          <p:cNvSpPr/>
-          <p:nvPr/>
-        </p:nvSpPr>
-        <p:spPr>
-          <a:xfrm>
-            <a:off x="2670048" y="2212848"/>
-            <a:ext cx="128016" cy="128016"/>
-          </a:xfrm>
-          <a:prstGeom prst="roundRect">
-            <a:avLst>
-              <a:gd name="adj" fmla="val 50000"/>
-            </a:avLst>
-          </a:prstGeom>
-          <a:solidFill>
-            <a:srgbClr val="FFFFFF"/>
-          </a:solidFill>
-          <a:ln>
-            <a:noFill/>
-          </a:ln>
-          <a:effectLst/>
-        </p:spPr>
-        <p:style>
-          <a:lnRef idx="1">
-            <a:schemeClr val="accent1"/>
-          </a:lnRef>
-          <a:fillRef idx="3">
-            <a:schemeClr val="accent1"/>
-          </a:fillRef>
-          <a:effectRef idx="2">
-            <a:schemeClr val="accent1"/>
-          </a:effectRef>
-          <a:fontRef idx="minor">
-            <a:schemeClr val="lt1"/>
-          </a:fontRef>
-        </p:style>
-        <p:txBody>
-          <a:bodyPr rtlCol="0" anchor="ctr"/>
-          <a:lstStyle/>
-          <a:p/>
-        </p:txBody>
-      </p:sp>
-      <p:sp>
-        <p:nvSpPr>
-          <p:cNvPr id="24" name="TextBox 23"/>
-          <p:cNvSpPr txBox="1"/>
-          <p:nvPr/>
-        </p:nvSpPr>
-        <p:spPr>
-          <a:xfrm>
-            <a:off x="365760" y="2432304"/>
-            <a:ext cx="1371600" cy="182880"/>
-          </a:xfrm>
-          <a:prstGeom prst="rect">
-            <a:avLst/>
-          </a:prstGeom>
-          <a:noFill/>
-        </p:spPr>
-        <p:txBody>
-          <a:bodyPr wrap="square" lIns="0" rIns="0" tIns="0" bIns="0" anchor="t">
-            <a:spAutoFit/>
-          </a:bodyPr>
-          <a:lstStyle/>
-          <a:p>
-            <a:pPr algn="l">
-              <a:lnSpc>
-                <a:spcPct val="100000"/>
-              </a:lnSpc>
-            </a:pPr>
-            <a:r>
-              <a:rPr sz="800" b="1" i="0">
-                <a:solidFill>
-                  <a:srgbClr val="FFFFFF"/>
-                </a:solidFill>
-                <a:latin typeface="Calibri"/>
-              </a:rPr>
-              <a:t>FOB Bangkok</a:t>
-            </a:r>
-          </a:p>
-        </p:txBody>
-      </p:sp>
-      <p:sp>
-        <p:nvSpPr>
-          <p:cNvPr id="25" name="TextBox 24"/>
-          <p:cNvSpPr txBox="1"/>
-          <p:nvPr/>
-        </p:nvSpPr>
-        <p:spPr>
-          <a:xfrm>
-            <a:off x="1920240" y="2432304"/>
-            <a:ext cx="914400" cy="182880"/>
-          </a:xfrm>
-          <a:prstGeom prst="rect">
-            <a:avLst/>
-          </a:prstGeom>
-          <a:noFill/>
-        </p:spPr>
-        <p:txBody>
-          <a:bodyPr wrap="square" lIns="0" rIns="0" tIns="0" bIns="0" anchor="t">
-            <a:spAutoFit/>
-          </a:bodyPr>
-          <a:lstStyle/>
-          <a:p>
-            <a:pPr algn="r">
-              <a:lnSpc>
-                <a:spcPct val="100000"/>
-              </a:lnSpc>
-            </a:pPr>
-            <a:r>
-              <a:rPr sz="800" b="1" i="0">
-                <a:solidFill>
-                  <a:srgbClr val="FFFFFF"/>
-                </a:solidFill>
-                <a:latin typeface="Calibri"/>
-              </a:rPr>
-              <a:t>Україна</a:t>
-            </a:r>
-          </a:p>
-        </p:txBody>
-      </p:sp>
-      <p:sp>
-        <p:nvSpPr>
-          <p:cNvPr id="26" name="Rounded Rectangle 25"/>
-          <p:cNvSpPr/>
-          <p:nvPr/>
-        </p:nvSpPr>
-        <p:spPr>
-          <a:xfrm>
-            <a:off x="5120640" y="1936821"/>
-            <a:ext cx="1755648" cy="1182624"/>
+            <a:off x="365760" y="3803904"/>
+            <a:ext cx="1481328" cy="859536"/>
           </a:xfrm>
           <a:prstGeom prst="roundRect">
             <a:avLst>
@@ -31225,40 +29155,152 @@
           <a:p/>
         </p:txBody>
       </p:sp>
-      <p:pic>
-        <p:nvPicPr>
-          <p:cNvPr id="27" name="Picture 26" descr="tmk_roll_orig.png"/>
-          <p:cNvPicPr>
-            <a:picLocks noChangeAspect="1"/>
-          </p:cNvPicPr>
-          <p:nvPr/>
-        </p:nvPicPr>
-        <p:blipFill>
-          <a:blip r:embed="rId2"/>
-          <a:stretch>
-            <a:fillRect/>
-          </a:stretch>
-        </p:blipFill>
-        <p:spPr>
-          <a:xfrm>
-            <a:off x="5724144" y="2055693"/>
-            <a:ext cx="548640" cy="944880"/>
-          </a:xfrm>
-          <a:prstGeom prst="rect">
-            <a:avLst/>
-          </a:prstGeom>
-        </p:spPr>
-      </p:pic>
-      <p:sp>
-        <p:nvSpPr>
-          <p:cNvPr id="28" name="Rounded Rectangle 27"/>
+      <p:sp>
+        <p:nvSpPr>
+          <p:cNvPr id="19" name="Rectangle 18"/>
           <p:cNvSpPr/>
           <p:nvPr/>
         </p:nvSpPr>
         <p:spPr>
           <a:xfrm>
-            <a:off x="7022592" y="1936821"/>
-            <a:ext cx="1755648" cy="1182624"/>
+            <a:off x="365760" y="3803904"/>
+            <a:ext cx="1481328" cy="45720"/>
+          </a:xfrm>
+          <a:prstGeom prst="rect">
+            <a:avLst/>
+          </a:prstGeom>
+          <a:solidFill>
+            <a:srgbClr val="2F7A3E"/>
+          </a:solidFill>
+          <a:ln>
+            <a:noFill/>
+          </a:ln>
+          <a:effectLst/>
+        </p:spPr>
+        <p:style>
+          <a:lnRef idx="1">
+            <a:schemeClr val="accent1"/>
+          </a:lnRef>
+          <a:fillRef idx="3">
+            <a:schemeClr val="accent1"/>
+          </a:fillRef>
+          <a:effectRef idx="2">
+            <a:schemeClr val="accent1"/>
+          </a:effectRef>
+          <a:fontRef idx="minor">
+            <a:schemeClr val="lt1"/>
+          </a:fontRef>
+        </p:style>
+        <p:txBody>
+          <a:bodyPr rtlCol="0" anchor="ctr"/>
+          <a:lstStyle/>
+          <a:p/>
+        </p:txBody>
+      </p:sp>
+      <p:sp>
+        <p:nvSpPr>
+          <p:cNvPr id="20" name="TextBox 19"/>
+          <p:cNvSpPr txBox="1"/>
+          <p:nvPr/>
+        </p:nvSpPr>
+        <p:spPr>
+          <a:xfrm>
+            <a:off x="365760" y="3950208"/>
+            <a:ext cx="1481328" cy="292608"/>
+          </a:xfrm>
+          <a:prstGeom prst="rect">
+            <a:avLst/>
+          </a:prstGeom>
+          <a:noFill/>
+        </p:spPr>
+        <p:txBody>
+          <a:bodyPr wrap="square" lIns="0" rIns="0" tIns="0" bIns="0" anchor="t">
+            <a:spAutoFit/>
+          </a:bodyPr>
+          <a:lstStyle/>
+          <a:p>
+            <a:pPr algn="ctr">
+              <a:lnSpc>
+                <a:spcPct val="100000"/>
+              </a:lnSpc>
+            </a:pPr>
+            <a:r>
+              <a:rPr sz="1700" b="1" i="0">
+                <a:solidFill>
+                  <a:srgbClr val="2E763C"/>
+                </a:solidFill>
+                <a:latin typeface="Cambria"/>
+              </a:rPr>
+              <a:t>10</a:t>
+            </a:r>
+          </a:p>
+        </p:txBody>
+      </p:sp>
+      <p:sp>
+        <p:nvSpPr>
+          <p:cNvPr id="21" name="TextBox 20"/>
+          <p:cNvSpPr txBox="1"/>
+          <p:nvPr/>
+        </p:nvSpPr>
+        <p:spPr>
+          <a:xfrm>
+            <a:off x="457200" y="4279392"/>
+            <a:ext cx="1298448" cy="329184"/>
+          </a:xfrm>
+          <a:prstGeom prst="rect">
+            <a:avLst/>
+          </a:prstGeom>
+          <a:noFill/>
+        </p:spPr>
+        <p:txBody>
+          <a:bodyPr wrap="square" lIns="0" rIns="0" tIns="0" bIns="0" anchor="t">
+            <a:spAutoFit/>
+          </a:bodyPr>
+          <a:lstStyle/>
+          <a:p>
+            <a:pPr algn="ctr">
+              <a:lnSpc>
+                <a:spcPct val="114000"/>
+              </a:lnSpc>
+            </a:pPr>
+            <a:r>
+              <a:rPr sz="700" b="0" i="0">
+                <a:solidFill>
+                  <a:srgbClr val="8A938D"/>
+                </a:solidFill>
+                <a:latin typeface="Calibri"/>
+              </a:rPr>
+              <a:t>SKU із розрахованою</a:t>
+            </a:r>
+          </a:p>
+          <a:p>
+            <a:pPr algn="ctr">
+              <a:lnSpc>
+                <a:spcPct val="114000"/>
+              </a:lnSpc>
+            </a:pPr>
+            <a:r>
+              <a:rPr sz="700" b="0" i="0">
+                <a:solidFill>
+                  <a:srgbClr val="8A938D"/>
+                </a:solidFill>
+                <a:latin typeface="Calibri"/>
+              </a:rPr>
+              <a:t>собівартістю</a:t>
+            </a:r>
+          </a:p>
+        </p:txBody>
+      </p:sp>
+      <p:sp>
+        <p:nvSpPr>
+          <p:cNvPr id="22" name="Rounded Rectangle 21"/>
+          <p:cNvSpPr/>
+          <p:nvPr/>
+        </p:nvSpPr>
+        <p:spPr>
+          <a:xfrm>
+            <a:off x="1979676" y="3803904"/>
+            <a:ext cx="1481328" cy="859536"/>
           </a:xfrm>
           <a:prstGeom prst="roundRect">
             <a:avLst>
@@ -31295,163 +29337,22 @@
           <a:p/>
         </p:txBody>
       </p:sp>
-      <p:pic>
-        <p:nvPicPr>
-          <p:cNvPr id="29" name="Picture 28" descr="tmk_dbl_orig.png"/>
-          <p:cNvPicPr>
-            <a:picLocks noChangeAspect="1"/>
-          </p:cNvPicPr>
-          <p:nvPr/>
-        </p:nvPicPr>
-        <p:blipFill>
-          <a:blip r:embed="rId3"/>
-          <a:stretch>
-            <a:fillRect/>
-          </a:stretch>
-        </p:blipFill>
-        <p:spPr>
-          <a:xfrm>
-            <a:off x="7488936" y="2111573"/>
-            <a:ext cx="822960" cy="833120"/>
-          </a:xfrm>
-          <a:prstGeom prst="rect">
-            <a:avLst/>
-          </a:prstGeom>
-        </p:spPr>
-      </p:pic>
-      <p:sp>
-        <p:nvSpPr>
-          <p:cNvPr id="30" name="TextBox 29"/>
-          <p:cNvSpPr txBox="1"/>
-          <p:nvPr/>
-        </p:nvSpPr>
-        <p:spPr>
-          <a:xfrm>
-            <a:off x="5120640" y="3247461"/>
-            <a:ext cx="3657600" cy="182880"/>
-          </a:xfrm>
-          <a:prstGeom prst="rect">
-            <a:avLst/>
-          </a:prstGeom>
-          <a:noFill/>
-        </p:spPr>
-        <p:txBody>
-          <a:bodyPr wrap="square" lIns="0" rIns="0" tIns="0" bIns="0" anchor="t">
-            <a:spAutoFit/>
-          </a:bodyPr>
-          <a:lstStyle/>
-          <a:p>
-            <a:pPr algn="ctr">
-              <a:lnSpc>
-                <a:spcPct val="100000"/>
-              </a:lnSpc>
-            </a:pPr>
-            <a:r>
-              <a:rPr sz="750" b="0" i="0">
-                <a:solidFill>
-                  <a:srgbClr val="8A938D"/>
-                </a:solidFill>
-                <a:latin typeface="Calibri"/>
-              </a:rPr>
-              <a:t>10 позицій із розрахованою собівартістю</a:t>
-            </a:r>
-          </a:p>
-        </p:txBody>
-      </p:sp>
-      <p:sp>
-        <p:nvSpPr>
-          <p:cNvPr id="31" name="TextBox 30"/>
-          <p:cNvSpPr txBox="1"/>
-          <p:nvPr/>
-        </p:nvSpPr>
-        <p:spPr>
-          <a:xfrm>
-            <a:off x="365760" y="2926080"/>
-            <a:ext cx="4617720" cy="822960"/>
-          </a:xfrm>
-          <a:prstGeom prst="rect">
-            <a:avLst/>
-          </a:prstGeom>
-          <a:noFill/>
-        </p:spPr>
-        <p:txBody>
-          <a:bodyPr wrap="square" lIns="0" rIns="0" tIns="0" bIns="0" anchor="t">
-            <a:spAutoFit/>
-          </a:bodyPr>
-          <a:lstStyle/>
-          <a:p>
-            <a:pPr algn="l">
-              <a:lnSpc>
-                <a:spcPct val="134000"/>
-              </a:lnSpc>
-            </a:pPr>
-            <a:r>
-              <a:rPr sz="1050" b="0" i="0">
-                <a:solidFill>
-                  <a:srgbClr val="44524C"/>
-                </a:solidFill>
-                <a:latin typeface="Calibri"/>
-              </a:rPr>
-              <a:t>Тайський виробник снеків із водоростей під брендом KOKIRI Wow. Найнижча собівартість одиниці в каталозі — за рахунок мінімальної фасовки та дитячого позиціонування.</a:t>
-            </a:r>
-          </a:p>
-        </p:txBody>
-      </p:sp>
-      <p:sp>
-        <p:nvSpPr>
-          <p:cNvPr id="32" name="TextBox 31"/>
-          <p:cNvSpPr txBox="1"/>
-          <p:nvPr/>
-        </p:nvSpPr>
-        <p:spPr>
-          <a:xfrm>
-            <a:off x="365760" y="3803904"/>
-            <a:ext cx="4617720" cy="146304"/>
-          </a:xfrm>
-          <a:prstGeom prst="rect">
-            <a:avLst/>
-          </a:prstGeom>
-          <a:noFill/>
-        </p:spPr>
-        <p:txBody>
-          <a:bodyPr wrap="square" lIns="0" rIns="0" tIns="0" bIns="0" anchor="t">
-            <a:spAutoFit/>
-          </a:bodyPr>
-          <a:lstStyle/>
-          <a:p>
-            <a:pPr algn="l">
-              <a:lnSpc>
-                <a:spcPct val="100000"/>
-              </a:lnSpc>
-            </a:pPr>
-            <a:r>
-              <a:rPr sz="700" b="1" i="0" spc="90">
-                <a:solidFill>
-                  <a:srgbClr val="2C713B"/>
-                </a:solidFill>
-                <a:latin typeface="Calibri"/>
-              </a:rPr>
-              <a:t>ВИРОБНИЦТВО І УМОВИ ПОСТАВКИ</a:t>
-            </a:r>
-          </a:p>
-        </p:txBody>
-      </p:sp>
-      <p:sp>
-        <p:nvSpPr>
-          <p:cNvPr id="33" name="Rectangle 32"/>
+      <p:sp>
+        <p:nvSpPr>
+          <p:cNvPr id="23" name="Rectangle 22"/>
           <p:cNvSpPr/>
           <p:nvPr/>
         </p:nvSpPr>
         <p:spPr>
           <a:xfrm>
-            <a:off x="365760" y="4023360"/>
-            <a:ext cx="2194560" cy="9144"/>
+            <a:off x="1979676" y="3803904"/>
+            <a:ext cx="1481328" cy="45720"/>
           </a:xfrm>
           <a:prstGeom prst="rect">
             <a:avLst/>
           </a:prstGeom>
           <a:solidFill>
-            <a:srgbClr val="E6E1D8"/>
+            <a:srgbClr val="2F7A3E"/>
           </a:solidFill>
           <a:ln>
             <a:noFill/>
@@ -31480,14 +29381,14 @@
       </p:sp>
       <p:sp>
         <p:nvSpPr>
-          <p:cNvPr id="34" name="TextBox 33"/>
-          <p:cNvSpPr txBox="1"/>
-          <p:nvPr/>
-        </p:nvSpPr>
-        <p:spPr>
-          <a:xfrm>
-            <a:off x="365760" y="4078224"/>
-            <a:ext cx="2194560" cy="146304"/>
+          <p:cNvPr id="24" name="TextBox 23"/>
+          <p:cNvSpPr txBox="1"/>
+          <p:nvPr/>
+        </p:nvSpPr>
+        <p:spPr>
+          <a:xfrm>
+            <a:off x="1979676" y="3950208"/>
+            <a:ext cx="1481328" cy="292608"/>
           </a:xfrm>
           <a:prstGeom prst="rect">
             <a:avLst/>
@@ -31500,78 +29401,140 @@
           </a:bodyPr>
           <a:lstStyle/>
           <a:p>
-            <a:pPr algn="l">
-              <a:lnSpc>
-                <a:spcPct val="100000"/>
-              </a:lnSpc>
-            </a:pPr>
-            <a:r>
-              <a:rPr sz="650" b="0" i="0">
+            <a:pPr algn="ctr">
+              <a:lnSpc>
+                <a:spcPct val="100000"/>
+              </a:lnSpc>
+            </a:pPr>
+            <a:r>
+              <a:rPr sz="1700" b="1" i="0">
+                <a:solidFill>
+                  <a:srgbClr val="2E763C"/>
+                </a:solidFill>
+                <a:latin typeface="Cambria"/>
+              </a:rPr>
+              <a:t>45–60</a:t>
+            </a:r>
+          </a:p>
+        </p:txBody>
+      </p:sp>
+      <p:sp>
+        <p:nvSpPr>
+          <p:cNvPr id="25" name="TextBox 24"/>
+          <p:cNvSpPr txBox="1"/>
+          <p:nvPr/>
+        </p:nvSpPr>
+        <p:spPr>
+          <a:xfrm>
+            <a:off x="2071116" y="4279392"/>
+            <a:ext cx="1298448" cy="329184"/>
+          </a:xfrm>
+          <a:prstGeom prst="rect">
+            <a:avLst/>
+          </a:prstGeom>
+          <a:noFill/>
+        </p:spPr>
+        <p:txBody>
+          <a:bodyPr wrap="square" lIns="0" rIns="0" tIns="0" bIns="0" anchor="t">
+            <a:spAutoFit/>
+          </a:bodyPr>
+          <a:lstStyle/>
+          <a:p>
+            <a:pPr algn="ctr">
+              <a:lnSpc>
+                <a:spcPct val="114000"/>
+              </a:lnSpc>
+            </a:pPr>
+            <a:r>
+              <a:rPr sz="700" b="0" i="0">
                 <a:solidFill>
                   <a:srgbClr val="8A938D"/>
                 </a:solidFill>
                 <a:latin typeface="Calibri"/>
               </a:rPr>
-              <a:t>Термін виробництва</a:t>
-            </a:r>
-          </a:p>
-        </p:txBody>
-      </p:sp>
-      <p:sp>
-        <p:nvSpPr>
-          <p:cNvPr id="35" name="TextBox 34"/>
-          <p:cNvSpPr txBox="1"/>
-          <p:nvPr/>
-        </p:nvSpPr>
-        <p:spPr>
-          <a:xfrm>
-            <a:off x="365760" y="4206240"/>
-            <a:ext cx="2194560" cy="182880"/>
-          </a:xfrm>
-          <a:prstGeom prst="rect">
-            <a:avLst/>
-          </a:prstGeom>
-          <a:noFill/>
-        </p:spPr>
-        <p:txBody>
-          <a:bodyPr wrap="square" lIns="0" rIns="0" tIns="0" bIns="0" anchor="t">
-            <a:spAutoFit/>
-          </a:bodyPr>
-          <a:lstStyle/>
-          <a:p>
-            <a:pPr algn="l">
-              <a:lnSpc>
-                <a:spcPct val="100000"/>
-              </a:lnSpc>
-            </a:pPr>
-            <a:r>
-              <a:rPr sz="900" b="1" i="0">
-                <a:solidFill>
-                  <a:srgbClr val="14241F"/>
-                </a:solidFill>
-                <a:latin typeface="Calibri"/>
-              </a:rPr>
-              <a:t>45 – 60 днів</a:t>
-            </a:r>
-          </a:p>
-        </p:txBody>
-      </p:sp>
-      <p:sp>
-        <p:nvSpPr>
-          <p:cNvPr id="36" name="Rectangle 35"/>
+              <a:t>днів</a:t>
+            </a:r>
+          </a:p>
+          <a:p>
+            <a:pPr algn="ctr">
+              <a:lnSpc>
+                <a:spcPct val="114000"/>
+              </a:lnSpc>
+            </a:pPr>
+            <a:r>
+              <a:rPr sz="700" b="0" i="0">
+                <a:solidFill>
+                  <a:srgbClr val="8A938D"/>
+                </a:solidFill>
+                <a:latin typeface="Calibri"/>
+              </a:rPr>
+              <a:t>виробництва</a:t>
+            </a:r>
+          </a:p>
+        </p:txBody>
+      </p:sp>
+      <p:sp>
+        <p:nvSpPr>
+          <p:cNvPr id="26" name="Rounded Rectangle 25"/>
           <p:cNvSpPr/>
           <p:nvPr/>
         </p:nvSpPr>
         <p:spPr>
           <a:xfrm>
-            <a:off x="2743200" y="4023360"/>
-            <a:ext cx="2194560" cy="9144"/>
-          </a:xfrm>
-          <a:prstGeom prst="rect">
-            <a:avLst/>
+            <a:off x="3593592" y="3803904"/>
+            <a:ext cx="1481328" cy="859536"/>
+          </a:xfrm>
+          <a:prstGeom prst="roundRect">
+            <a:avLst>
+              <a:gd name="adj" fmla="val 6000"/>
+            </a:avLst>
           </a:prstGeom>
           <a:solidFill>
-            <a:srgbClr val="E6E1D8"/>
+            <a:srgbClr val="FFFFFF"/>
+          </a:solidFill>
+          <a:ln w="9525">
+            <a:solidFill>
+              <a:srgbClr val="E6E1D8"/>
+            </a:solidFill>
+          </a:ln>
+          <a:effectLst/>
+        </p:spPr>
+        <p:style>
+          <a:lnRef idx="1">
+            <a:schemeClr val="accent1"/>
+          </a:lnRef>
+          <a:fillRef idx="3">
+            <a:schemeClr val="accent1"/>
+          </a:fillRef>
+          <a:effectRef idx="2">
+            <a:schemeClr val="accent1"/>
+          </a:effectRef>
+          <a:fontRef idx="minor">
+            <a:schemeClr val="lt1"/>
+          </a:fontRef>
+        </p:style>
+        <p:txBody>
+          <a:bodyPr rtlCol="0" anchor="ctr"/>
+          <a:lstStyle/>
+          <a:p/>
+        </p:txBody>
+      </p:sp>
+      <p:sp>
+        <p:nvSpPr>
+          <p:cNvPr id="27" name="Rectangle 26"/>
+          <p:cNvSpPr/>
+          <p:nvPr/>
+        </p:nvSpPr>
+        <p:spPr>
+          <a:xfrm>
+            <a:off x="3593592" y="3803904"/>
+            <a:ext cx="1481328" cy="45720"/>
+          </a:xfrm>
+          <a:prstGeom prst="rect">
+            <a:avLst/>
+          </a:prstGeom>
+          <a:solidFill>
+            <a:srgbClr val="2F7A3E"/>
           </a:solidFill>
           <a:ln>
             <a:noFill/>
@@ -31600,14 +29563,14 @@
       </p:sp>
       <p:sp>
         <p:nvSpPr>
-          <p:cNvPr id="37" name="TextBox 36"/>
-          <p:cNvSpPr txBox="1"/>
-          <p:nvPr/>
-        </p:nvSpPr>
-        <p:spPr>
-          <a:xfrm>
-            <a:off x="2743200" y="4078224"/>
-            <a:ext cx="2194560" cy="146304"/>
+          <p:cNvPr id="28" name="TextBox 27"/>
+          <p:cNvSpPr txBox="1"/>
+          <p:nvPr/>
+        </p:nvSpPr>
+        <p:spPr>
+          <a:xfrm>
+            <a:off x="3593592" y="3950208"/>
+            <a:ext cx="1481328" cy="292608"/>
           </a:xfrm>
           <a:prstGeom prst="rect">
             <a:avLst/>
@@ -31620,347 +29583,81 @@
           </a:bodyPr>
           <a:lstStyle/>
           <a:p>
-            <a:pPr algn="l">
-              <a:lnSpc>
-                <a:spcPct val="100000"/>
-              </a:lnSpc>
-            </a:pPr>
-            <a:r>
-              <a:rPr sz="650" b="0" i="0">
+            <a:pPr algn="ctr">
+              <a:lnSpc>
+                <a:spcPct val="100000"/>
+              </a:lnSpc>
+            </a:pPr>
+            <a:r>
+              <a:rPr sz="1700" b="1" i="0">
+                <a:solidFill>
+                  <a:srgbClr val="2E763C"/>
+                </a:solidFill>
+                <a:latin typeface="Cambria"/>
+              </a:rPr>
+              <a:t>3 431</a:t>
+            </a:r>
+          </a:p>
+        </p:txBody>
+      </p:sp>
+      <p:sp>
+        <p:nvSpPr>
+          <p:cNvPr id="29" name="TextBox 28"/>
+          <p:cNvSpPr txBox="1"/>
+          <p:nvPr/>
+        </p:nvSpPr>
+        <p:spPr>
+          <a:xfrm>
+            <a:off x="3685032" y="4279392"/>
+            <a:ext cx="1298448" cy="329184"/>
+          </a:xfrm>
+          <a:prstGeom prst="rect">
+            <a:avLst/>
+          </a:prstGeom>
+          <a:noFill/>
+        </p:spPr>
+        <p:txBody>
+          <a:bodyPr wrap="square" lIns="0" rIns="0" tIns="0" bIns="0" anchor="t">
+            <a:spAutoFit/>
+          </a:bodyPr>
+          <a:lstStyle/>
+          <a:p>
+            <a:pPr algn="ctr">
+              <a:lnSpc>
+                <a:spcPct val="114000"/>
+              </a:lnSpc>
+            </a:pPr>
+            <a:r>
+              <a:rPr sz="700" b="0" i="0">
                 <a:solidFill>
                   <a:srgbClr val="8A938D"/>
                 </a:solidFill>
                 <a:latin typeface="Calibri"/>
               </a:rPr>
-              <a:t>Оплата</a:t>
-            </a:r>
-          </a:p>
-        </p:txBody>
-      </p:sp>
-      <p:sp>
-        <p:nvSpPr>
-          <p:cNvPr id="38" name="TextBox 37"/>
-          <p:cNvSpPr txBox="1"/>
-          <p:nvPr/>
-        </p:nvSpPr>
-        <p:spPr>
-          <a:xfrm>
-            <a:off x="2743200" y="4206240"/>
-            <a:ext cx="2194560" cy="182880"/>
-          </a:xfrm>
-          <a:prstGeom prst="rect">
-            <a:avLst/>
-          </a:prstGeom>
-          <a:noFill/>
-        </p:spPr>
-        <p:txBody>
-          <a:bodyPr wrap="square" lIns="0" rIns="0" tIns="0" bIns="0" anchor="t">
-            <a:spAutoFit/>
-          </a:bodyPr>
-          <a:lstStyle/>
-          <a:p>
-            <a:pPr algn="l">
-              <a:lnSpc>
-                <a:spcPct val="100000"/>
-              </a:lnSpc>
-            </a:pPr>
-            <a:r>
-              <a:rPr sz="900" b="1" i="0">
-                <a:solidFill>
-                  <a:srgbClr val="14241F"/>
-                </a:solidFill>
-                <a:latin typeface="Calibri"/>
-              </a:rPr>
-              <a:t>50% депозит + 50% до ETD</a:t>
-            </a:r>
-          </a:p>
-        </p:txBody>
-      </p:sp>
-      <p:sp>
-        <p:nvSpPr>
-          <p:cNvPr id="39" name="Rectangle 38"/>
-          <p:cNvSpPr/>
-          <p:nvPr/>
-        </p:nvSpPr>
-        <p:spPr>
-          <a:xfrm>
-            <a:off x="365760" y="4425696"/>
-            <a:ext cx="2194560" cy="9144"/>
-          </a:xfrm>
-          <a:prstGeom prst="rect">
-            <a:avLst/>
-          </a:prstGeom>
-          <a:solidFill>
-            <a:srgbClr val="E6E1D8"/>
-          </a:solidFill>
-          <a:ln>
-            <a:noFill/>
-          </a:ln>
-          <a:effectLst/>
-        </p:spPr>
-        <p:style>
-          <a:lnRef idx="1">
-            <a:schemeClr val="accent1"/>
-          </a:lnRef>
-          <a:fillRef idx="3">
-            <a:schemeClr val="accent1"/>
-          </a:fillRef>
-          <a:effectRef idx="2">
-            <a:schemeClr val="accent1"/>
-          </a:effectRef>
-          <a:fontRef idx="minor">
-            <a:schemeClr val="lt1"/>
-          </a:fontRef>
-        </p:style>
-        <p:txBody>
-          <a:bodyPr rtlCol="0" anchor="ctr"/>
-          <a:lstStyle/>
-          <a:p/>
-        </p:txBody>
-      </p:sp>
-      <p:sp>
-        <p:nvSpPr>
-          <p:cNvPr id="40" name="TextBox 39"/>
-          <p:cNvSpPr txBox="1"/>
-          <p:nvPr/>
-        </p:nvSpPr>
-        <p:spPr>
-          <a:xfrm>
-            <a:off x="365760" y="4480560"/>
-            <a:ext cx="2194560" cy="146304"/>
-          </a:xfrm>
-          <a:prstGeom prst="rect">
-            <a:avLst/>
-          </a:prstGeom>
-          <a:noFill/>
-        </p:spPr>
-        <p:txBody>
-          <a:bodyPr wrap="square" lIns="0" rIns="0" tIns="0" bIns="0" anchor="t">
-            <a:spAutoFit/>
-          </a:bodyPr>
-          <a:lstStyle/>
-          <a:p>
-            <a:pPr algn="l">
-              <a:lnSpc>
-                <a:spcPct val="100000"/>
-              </a:lnSpc>
-            </a:pPr>
-            <a:r>
-              <a:rPr sz="650" b="0" i="0">
+              <a:t>картонів</a:t>
+            </a:r>
+          </a:p>
+          <a:p>
+            <a:pPr algn="ctr">
+              <a:lnSpc>
+                <a:spcPct val="114000"/>
+              </a:lnSpc>
+            </a:pPr>
+            <a:r>
+              <a:rPr sz="700" b="0" i="0">
                 <a:solidFill>
                   <a:srgbClr val="8A938D"/>
                 </a:solidFill>
                 <a:latin typeface="Calibri"/>
               </a:rPr>
-              <a:t>Місткість 20′</a:t>
-            </a:r>
-          </a:p>
-        </p:txBody>
-      </p:sp>
-      <p:sp>
-        <p:nvSpPr>
-          <p:cNvPr id="41" name="TextBox 40"/>
-          <p:cNvSpPr txBox="1"/>
-          <p:nvPr/>
-        </p:nvSpPr>
-        <p:spPr>
-          <a:xfrm>
-            <a:off x="365760" y="4608576"/>
-            <a:ext cx="2194560" cy="182880"/>
-          </a:xfrm>
-          <a:prstGeom prst="rect">
-            <a:avLst/>
-          </a:prstGeom>
-          <a:noFill/>
-        </p:spPr>
-        <p:txBody>
-          <a:bodyPr wrap="square" lIns="0" rIns="0" tIns="0" bIns="0" anchor="t">
-            <a:spAutoFit/>
-          </a:bodyPr>
-          <a:lstStyle/>
-          <a:p>
-            <a:pPr algn="l">
-              <a:lnSpc>
-                <a:spcPct val="100000"/>
-              </a:lnSpc>
-            </a:pPr>
-            <a:r>
-              <a:rPr sz="900" b="1" i="0">
-                <a:solidFill>
-                  <a:srgbClr val="14241F"/>
-                </a:solidFill>
-                <a:latin typeface="Calibri"/>
-              </a:rPr>
-              <a:t>425 – 1 499 картонів</a:t>
-            </a:r>
-          </a:p>
-        </p:txBody>
-      </p:sp>
-      <p:sp>
-        <p:nvSpPr>
-          <p:cNvPr id="42" name="Rectangle 41"/>
-          <p:cNvSpPr/>
-          <p:nvPr/>
-        </p:nvSpPr>
-        <p:spPr>
-          <a:xfrm>
-            <a:off x="2743200" y="4425696"/>
-            <a:ext cx="2194560" cy="9144"/>
-          </a:xfrm>
-          <a:prstGeom prst="rect">
-            <a:avLst/>
-          </a:prstGeom>
-          <a:solidFill>
-            <a:srgbClr val="E6E1D8"/>
-          </a:solidFill>
-          <a:ln>
-            <a:noFill/>
-          </a:ln>
-          <a:effectLst/>
-        </p:spPr>
-        <p:style>
-          <a:lnRef idx="1">
-            <a:schemeClr val="accent1"/>
-          </a:lnRef>
-          <a:fillRef idx="3">
-            <a:schemeClr val="accent1"/>
-          </a:fillRef>
-          <a:effectRef idx="2">
-            <a:schemeClr val="accent1"/>
-          </a:effectRef>
-          <a:fontRef idx="minor">
-            <a:schemeClr val="lt1"/>
-          </a:fontRef>
-        </p:style>
-        <p:txBody>
-          <a:bodyPr rtlCol="0" anchor="ctr"/>
-          <a:lstStyle/>
-          <a:p/>
-        </p:txBody>
-      </p:sp>
-      <p:sp>
-        <p:nvSpPr>
-          <p:cNvPr id="43" name="TextBox 42"/>
-          <p:cNvSpPr txBox="1"/>
-          <p:nvPr/>
-        </p:nvSpPr>
-        <p:spPr>
-          <a:xfrm>
-            <a:off x="2743200" y="4480560"/>
-            <a:ext cx="2194560" cy="146304"/>
-          </a:xfrm>
-          <a:prstGeom prst="rect">
-            <a:avLst/>
-          </a:prstGeom>
-          <a:noFill/>
-        </p:spPr>
-        <p:txBody>
-          <a:bodyPr wrap="square" lIns="0" rIns="0" tIns="0" bIns="0" anchor="t">
-            <a:spAutoFit/>
-          </a:bodyPr>
-          <a:lstStyle/>
-          <a:p>
-            <a:pPr algn="l">
-              <a:lnSpc>
-                <a:spcPct val="100000"/>
-              </a:lnSpc>
-            </a:pPr>
-            <a:r>
-              <a:rPr sz="650" b="0" i="0">
-                <a:solidFill>
-                  <a:srgbClr val="8A938D"/>
-                </a:solidFill>
-                <a:latin typeface="Calibri"/>
-              </a:rPr>
-              <a:t>Місткість 40′HQ</a:t>
-            </a:r>
-          </a:p>
-        </p:txBody>
-      </p:sp>
-      <p:sp>
-        <p:nvSpPr>
-          <p:cNvPr id="44" name="TextBox 43"/>
-          <p:cNvSpPr txBox="1"/>
-          <p:nvPr/>
-        </p:nvSpPr>
-        <p:spPr>
-          <a:xfrm>
-            <a:off x="2743200" y="4608576"/>
-            <a:ext cx="2194560" cy="182880"/>
-          </a:xfrm>
-          <a:prstGeom prst="rect">
-            <a:avLst/>
-          </a:prstGeom>
-          <a:noFill/>
-        </p:spPr>
-        <p:txBody>
-          <a:bodyPr wrap="square" lIns="0" rIns="0" tIns="0" bIns="0" anchor="t">
-            <a:spAutoFit/>
-          </a:bodyPr>
-          <a:lstStyle/>
-          <a:p>
-            <a:pPr algn="l">
-              <a:lnSpc>
-                <a:spcPct val="100000"/>
-              </a:lnSpc>
-            </a:pPr>
-            <a:r>
-              <a:rPr sz="900" b="1" i="0">
-                <a:solidFill>
-                  <a:srgbClr val="14241F"/>
-                </a:solidFill>
-                <a:latin typeface="Calibri"/>
-              </a:rPr>
-              <a:t>959 – 3 431 картонів</a:t>
-            </a:r>
-          </a:p>
-        </p:txBody>
-      </p:sp>
-      <p:sp>
-        <p:nvSpPr>
-          <p:cNvPr id="45" name="Rectangle 44"/>
-          <p:cNvSpPr/>
-          <p:nvPr/>
-        </p:nvSpPr>
-        <p:spPr>
-          <a:xfrm>
-            <a:off x="365760" y="4809744"/>
-            <a:ext cx="8412480" cy="9144"/>
-          </a:xfrm>
-          <a:prstGeom prst="rect">
-            <a:avLst/>
-          </a:prstGeom>
-          <a:solidFill>
-            <a:srgbClr val="E6E1D8"/>
-          </a:solidFill>
-          <a:ln>
-            <a:noFill/>
-          </a:ln>
-          <a:effectLst/>
-        </p:spPr>
-        <p:style>
-          <a:lnRef idx="1">
-            <a:schemeClr val="accent1"/>
-          </a:lnRef>
-          <a:fillRef idx="3">
-            <a:schemeClr val="accent1"/>
-          </a:fillRef>
-          <a:effectRef idx="2">
-            <a:schemeClr val="accent1"/>
-          </a:effectRef>
-          <a:fontRef idx="minor">
-            <a:schemeClr val="lt1"/>
-          </a:fontRef>
-        </p:style>
-        <p:txBody>
-          <a:bodyPr rtlCol="0" anchor="ctr"/>
-          <a:lstStyle/>
-          <a:p/>
-        </p:txBody>
-      </p:sp>
-      <p:sp>
-        <p:nvSpPr>
-          <p:cNvPr id="46" name="TextBox 45"/>
+              <a:t>у 40′HQ</a:t>
+            </a:r>
+          </a:p>
+        </p:txBody>
+      </p:sp>
+      <p:sp>
+        <p:nvSpPr>
+          <p:cNvPr id="30" name="TextBox 29"/>
           <p:cNvSpPr txBox="1"/>
           <p:nvPr/>
         </p:nvSpPr>
@@ -31988,7 +29685,7 @@
             <a:r>
               <a:rPr sz="700" b="1" i="0">
                 <a:solidFill>
-                  <a:srgbClr val="8A938D"/>
+                  <a:srgbClr val="C1D7C5"/>
                 </a:solidFill>
                 <a:latin typeface="Calibri"/>
               </a:rPr>

--- a/presentation/Постачальники_снеків_собівартість.pptx
+++ b/presentation/Постачальники_снеків_собівартість.pptx
@@ -10681,8 +10681,8 @@
         </p:nvSpPr>
         <p:spPr>
           <a:xfrm>
-            <a:off x="5806440" y="1005840"/>
-            <a:ext cx="2880360" cy="2331720"/>
+            <a:off x="5806440" y="1225296"/>
+            <a:ext cx="2880360" cy="1463040"/>
           </a:xfrm>
           <a:prstGeom prst="roundRect">
             <a:avLst>
@@ -10725,8 +10725,8 @@
         </p:nvSpPr>
         <p:spPr>
           <a:xfrm>
-            <a:off x="5952744" y="1298448"/>
-            <a:ext cx="2587752" cy="914400"/>
+            <a:off x="5934455" y="1316736"/>
+            <a:ext cx="2624328" cy="1280160"/>
           </a:xfrm>
           <a:prstGeom prst="rect">
             <a:avLst/>
@@ -10745,7 +10745,7 @@
               </a:lnSpc>
             </a:pPr>
             <a:r>
-              <a:rPr sz="2500" b="1" i="0">
+              <a:rPr sz="2400" b="1" i="0">
                 <a:solidFill>
                   <a:srgbClr val="AA3922"/>
                 </a:solidFill>
@@ -10758,14 +10758,131 @@
       </p:sp>
       <p:sp>
         <p:nvSpPr>
-          <p:cNvPr id="6" name="Rectangle 5"/>
+          <p:cNvPr id="6" name="TextBox 5"/>
+          <p:cNvSpPr txBox="1"/>
+          <p:nvPr/>
+        </p:nvSpPr>
+        <p:spPr>
+          <a:xfrm>
+            <a:off x="5806440" y="2834640"/>
+            <a:ext cx="2880360" cy="274320"/>
+          </a:xfrm>
+          <a:prstGeom prst="rect">
+            <a:avLst/>
+          </a:prstGeom>
+          <a:noFill/>
+        </p:spPr>
+        <p:txBody>
+          <a:bodyPr wrap="square" lIns="0" rIns="0" tIns="0" bIns="0" anchor="t">
+            <a:spAutoFit/>
+          </a:bodyPr>
+          <a:lstStyle/>
+          <a:p>
+            <a:pPr algn="ctr">
+              <a:lnSpc>
+                <a:spcPct val="100000"/>
+              </a:lnSpc>
+            </a:pPr>
+            <a:r>
+              <a:rPr sz="1050" b="0" i="0">
+                <a:solidFill>
+                  <a:srgbClr val="F0D8D3"/>
+                </a:solidFill>
+                <a:latin typeface="Calibri"/>
+              </a:rPr>
+              <a:t>HanJin Food Co. Ltd</a:t>
+            </a:r>
+          </a:p>
+        </p:txBody>
+      </p:sp>
+      <p:sp>
+        <p:nvSpPr>
+          <p:cNvPr id="7" name="TextBox 6"/>
+          <p:cNvSpPr txBox="1"/>
+          <p:nvPr/>
+        </p:nvSpPr>
+        <p:spPr>
+          <a:xfrm>
+            <a:off x="5349240" y="3749039"/>
+            <a:ext cx="3794760" cy="182880"/>
+          </a:xfrm>
+          <a:prstGeom prst="rect">
+            <a:avLst/>
+          </a:prstGeom>
+          <a:noFill/>
+        </p:spPr>
+        <p:txBody>
+          <a:bodyPr wrap="square" lIns="0" rIns="0" tIns="0" bIns="0" anchor="t">
+            <a:spAutoFit/>
+          </a:bodyPr>
+          <a:lstStyle/>
+          <a:p>
+            <a:pPr algn="ctr">
+              <a:lnSpc>
+                <a:spcPct val="100000"/>
+              </a:lnSpc>
+            </a:pPr>
+            <a:r>
+              <a:rPr sz="700" b="1" i="0" spc="90">
+                <a:solidFill>
+                  <a:srgbClr val="E8C4BD"/>
+                </a:solidFill>
+                <a:latin typeface="Calibri"/>
+              </a:rPr>
+              <a:t>ВИРОБНИЦТВО</a:t>
+            </a:r>
+          </a:p>
+        </p:txBody>
+      </p:sp>
+      <p:sp>
+        <p:nvSpPr>
+          <p:cNvPr id="8" name="TextBox 7"/>
+          <p:cNvSpPr txBox="1"/>
+          <p:nvPr/>
+        </p:nvSpPr>
+        <p:spPr>
+          <a:xfrm>
+            <a:off x="5349240" y="3950207"/>
+            <a:ext cx="3794760" cy="274320"/>
+          </a:xfrm>
+          <a:prstGeom prst="rect">
+            <a:avLst/>
+          </a:prstGeom>
+          <a:noFill/>
+        </p:spPr>
+        <p:txBody>
+          <a:bodyPr wrap="square" lIns="0" rIns="0" tIns="0" bIns="0" anchor="t">
+            <a:spAutoFit/>
+          </a:bodyPr>
+          <a:lstStyle/>
+          <a:p>
+            <a:pPr algn="ctr">
+              <a:lnSpc>
+                <a:spcPct val="100000"/>
+              </a:lnSpc>
+            </a:pPr>
+            <a:r>
+              <a:rPr sz="1300" b="1" i="0">
+                <a:solidFill>
+                  <a:srgbClr val="FFFFFF"/>
+                </a:solidFill>
+                <a:latin typeface="Cambria"/>
+              </a:rPr>
+              <a:t>Китай</a:t>
+            </a:r>
+          </a:p>
+        </p:txBody>
+      </p:sp>
+      <p:sp>
+        <p:nvSpPr>
+          <p:cNvPr id="9" name="Rectangle 8"/>
           <p:cNvSpPr/>
           <p:nvPr/>
         </p:nvSpPr>
         <p:spPr>
           <a:xfrm>
-            <a:off x="6944868" y="2450592"/>
-            <a:ext cx="603504" cy="32004"/>
+            <a:off x="365760" y="475488"/>
+            <a:ext cx="237744" cy="237744"/>
           </a:xfrm>
           <a:prstGeom prst="rect">
             <a:avLst/>
@@ -10800,166 +10917,7 @@
       </p:sp>
       <p:sp>
         <p:nvSpPr>
-          <p:cNvPr id="7" name="TextBox 6"/>
-          <p:cNvSpPr txBox="1"/>
-          <p:nvPr/>
-        </p:nvSpPr>
-        <p:spPr>
-          <a:xfrm>
-            <a:off x="5952744" y="2633472"/>
-            <a:ext cx="2587752" cy="274320"/>
-          </a:xfrm>
-          <a:prstGeom prst="rect">
-            <a:avLst/>
-          </a:prstGeom>
-          <a:noFill/>
-        </p:spPr>
-        <p:txBody>
-          <a:bodyPr wrap="square" lIns="0" rIns="0" tIns="0" bIns="0" anchor="t">
-            <a:spAutoFit/>
-          </a:bodyPr>
-          <a:lstStyle/>
-          <a:p>
-            <a:pPr algn="ctr">
-              <a:lnSpc>
-                <a:spcPct val="100000"/>
-              </a:lnSpc>
-            </a:pPr>
-            <a:r>
-              <a:rPr sz="1050" b="0" i="0">
-                <a:solidFill>
-                  <a:srgbClr val="8A938D"/>
-                </a:solidFill>
-                <a:latin typeface="Calibri"/>
-              </a:rPr>
-              <a:t>HanJin Food Co. Ltd</a:t>
-            </a:r>
-          </a:p>
-        </p:txBody>
-      </p:sp>
-      <p:sp>
-        <p:nvSpPr>
-          <p:cNvPr id="8" name="TextBox 7"/>
-          <p:cNvSpPr txBox="1"/>
-          <p:nvPr/>
-        </p:nvSpPr>
-        <p:spPr>
-          <a:xfrm>
-            <a:off x="5349240" y="3694176"/>
-            <a:ext cx="3794760" cy="182880"/>
-          </a:xfrm>
-          <a:prstGeom prst="rect">
-            <a:avLst/>
-          </a:prstGeom>
-          <a:noFill/>
-        </p:spPr>
-        <p:txBody>
-          <a:bodyPr wrap="square" lIns="0" rIns="0" tIns="0" bIns="0" anchor="t">
-            <a:spAutoFit/>
-          </a:bodyPr>
-          <a:lstStyle/>
-          <a:p>
-            <a:pPr algn="ctr">
-              <a:lnSpc>
-                <a:spcPct val="100000"/>
-              </a:lnSpc>
-            </a:pPr>
-            <a:r>
-              <a:rPr sz="700" b="1" i="0" spc="90">
-                <a:solidFill>
-                  <a:srgbClr val="E9C8C1"/>
-                </a:solidFill>
-                <a:latin typeface="Calibri"/>
-              </a:rPr>
-              <a:t>ВИРОБНИЦТВО</a:t>
-            </a:r>
-          </a:p>
-        </p:txBody>
-      </p:sp>
-      <p:sp>
-        <p:nvSpPr>
-          <p:cNvPr id="9" name="TextBox 8"/>
-          <p:cNvSpPr txBox="1"/>
-          <p:nvPr/>
-        </p:nvSpPr>
-        <p:spPr>
-          <a:xfrm>
-            <a:off x="5349240" y="3895344"/>
-            <a:ext cx="3794760" cy="274320"/>
-          </a:xfrm>
-          <a:prstGeom prst="rect">
-            <a:avLst/>
-          </a:prstGeom>
-          <a:noFill/>
-        </p:spPr>
-        <p:txBody>
-          <a:bodyPr wrap="square" lIns="0" rIns="0" tIns="0" bIns="0" anchor="t">
-            <a:spAutoFit/>
-          </a:bodyPr>
-          <a:lstStyle/>
-          <a:p>
-            <a:pPr algn="ctr">
-              <a:lnSpc>
-                <a:spcPct val="100000"/>
-              </a:lnSpc>
-            </a:pPr>
-            <a:r>
-              <a:rPr sz="1300" b="1" i="0">
-                <a:solidFill>
-                  <a:srgbClr val="FFFFFF"/>
-                </a:solidFill>
-                <a:latin typeface="Cambria"/>
-              </a:rPr>
-              <a:t>Китай</a:t>
-            </a:r>
-          </a:p>
-        </p:txBody>
-      </p:sp>
-      <p:sp>
-        <p:nvSpPr>
-          <p:cNvPr id="10" name="Rectangle 9"/>
-          <p:cNvSpPr/>
-          <p:nvPr/>
-        </p:nvSpPr>
-        <p:spPr>
-          <a:xfrm>
-            <a:off x="365760" y="475488"/>
-            <a:ext cx="237744" cy="237744"/>
-          </a:xfrm>
-          <a:prstGeom prst="rect">
-            <a:avLst/>
-          </a:prstGeom>
-          <a:solidFill>
-            <a:srgbClr val="B23A22"/>
-          </a:solidFill>
-          <a:ln>
-            <a:noFill/>
-          </a:ln>
-          <a:effectLst/>
-        </p:spPr>
-        <p:style>
-          <a:lnRef idx="1">
-            <a:schemeClr val="accent1"/>
-          </a:lnRef>
-          <a:fillRef idx="3">
-            <a:schemeClr val="accent1"/>
-          </a:fillRef>
-          <a:effectRef idx="2">
-            <a:schemeClr val="accent1"/>
-          </a:effectRef>
-          <a:fontRef idx="minor">
-            <a:schemeClr val="lt1"/>
-          </a:fontRef>
-        </p:style>
-        <p:txBody>
-          <a:bodyPr rtlCol="0" anchor="ctr"/>
-          <a:lstStyle/>
-          <a:p/>
-        </p:txBody>
-      </p:sp>
-      <p:sp>
-        <p:nvSpPr>
-          <p:cNvPr id="11" name="TextBox 10"/>
+          <p:cNvPr id="10" name="TextBox 9"/>
           <p:cNvSpPr txBox="1"/>
           <p:nvPr/>
         </p:nvSpPr>
@@ -10998,14 +10956,69 @@
       </p:sp>
       <p:sp>
         <p:nvSpPr>
+          <p:cNvPr id="11" name="TextBox 10"/>
+          <p:cNvSpPr txBox="1"/>
+          <p:nvPr/>
+        </p:nvSpPr>
+        <p:spPr>
+          <a:xfrm>
+            <a:off x="365760" y="841248"/>
+            <a:ext cx="4617720" cy="914400"/>
+          </a:xfrm>
+          <a:prstGeom prst="rect">
+            <a:avLst/>
+          </a:prstGeom>
+          <a:noFill/>
+        </p:spPr>
+        <p:txBody>
+          <a:bodyPr wrap="square" lIns="0" rIns="0" tIns="0" bIns="0" anchor="t">
+            <a:spAutoFit/>
+          </a:bodyPr>
+          <a:lstStyle/>
+          <a:p>
+            <a:pPr algn="l">
+              <a:lnSpc>
+                <a:spcPct val="108000"/>
+              </a:lnSpc>
+            </a:pPr>
+            <a:r>
+              <a:rPr sz="2600" b="1" i="0">
+                <a:solidFill>
+                  <a:srgbClr val="14241F"/>
+                </a:solidFill>
+                <a:latin typeface="Cambria"/>
+              </a:rPr>
+              <a:t>HanJin Food Co. Ltd</a:t>
+            </a:r>
+          </a:p>
+          <a:p>
+            <a:pPr algn="l">
+              <a:lnSpc>
+                <a:spcPct val="108000"/>
+              </a:lnSpc>
+            </a:pPr>
+            <a:r>
+              <a:rPr sz="2600" b="1" i="0">
+                <a:solidFill>
+                  <a:srgbClr val="14241F"/>
+                </a:solidFill>
+                <a:latin typeface="Cambria"/>
+              </a:rPr>
+              <a:t>бренд ZEK</a:t>
+            </a:r>
+          </a:p>
+        </p:txBody>
+      </p:sp>
+      <p:sp>
+        <p:nvSpPr>
           <p:cNvPr id="12" name="TextBox 11"/>
           <p:cNvSpPr txBox="1"/>
           <p:nvPr/>
         </p:nvSpPr>
         <p:spPr>
           <a:xfrm>
-            <a:off x="365760" y="859536"/>
-            <a:ext cx="4617720" cy="914400"/>
+            <a:off x="365760" y="1901952"/>
+            <a:ext cx="4617720" cy="274320"/>
           </a:xfrm>
           <a:prstGeom prst="rect">
             <a:avLst/>
@@ -11020,61 +11033,6 @@
           <a:p>
             <a:pPr algn="l">
               <a:lnSpc>
-                <a:spcPct val="108000"/>
-              </a:lnSpc>
-            </a:pPr>
-            <a:r>
-              <a:rPr sz="2600" b="1" i="0">
-                <a:solidFill>
-                  <a:srgbClr val="14241F"/>
-                </a:solidFill>
-                <a:latin typeface="Cambria"/>
-              </a:rPr>
-              <a:t>HanJin Food Co. Ltd</a:t>
-            </a:r>
-          </a:p>
-          <a:p>
-            <a:pPr algn="l">
-              <a:lnSpc>
-                <a:spcPct val="108000"/>
-              </a:lnSpc>
-            </a:pPr>
-            <a:r>
-              <a:rPr sz="2600" b="1" i="0">
-                <a:solidFill>
-                  <a:srgbClr val="14241F"/>
-                </a:solidFill>
-                <a:latin typeface="Cambria"/>
-              </a:rPr>
-              <a:t>бренд ZEK</a:t>
-            </a:r>
-          </a:p>
-        </p:txBody>
-      </p:sp>
-      <p:sp>
-        <p:nvSpPr>
-          <p:cNvPr id="13" name="TextBox 12"/>
-          <p:cNvSpPr txBox="1"/>
-          <p:nvPr/>
-        </p:nvSpPr>
-        <p:spPr>
-          <a:xfrm>
-            <a:off x="365760" y="1920240"/>
-            <a:ext cx="4617720" cy="274320"/>
-          </a:xfrm>
-          <a:prstGeom prst="rect">
-            <a:avLst/>
-          </a:prstGeom>
-          <a:noFill/>
-        </p:spPr>
-        <p:txBody>
-          <a:bodyPr wrap="square" lIns="0" rIns="0" tIns="0" bIns="0" anchor="t">
-            <a:spAutoFit/>
-          </a:bodyPr>
-          <a:lstStyle/>
-          <a:p>
-            <a:pPr algn="l">
-              <a:lnSpc>
                 <a:spcPct val="100000"/>
               </a:lnSpc>
             </a:pPr>
@@ -11092,13 +11050,13 @@
       </p:sp>
       <p:sp>
         <p:nvSpPr>
-          <p:cNvPr id="14" name="Rounded Rectangle 13"/>
+          <p:cNvPr id="13" name="Rounded Rectangle 12"/>
           <p:cNvSpPr/>
           <p:nvPr/>
         </p:nvSpPr>
         <p:spPr>
           <a:xfrm>
-            <a:off x="365760" y="2286000"/>
+            <a:off x="365760" y="2249424"/>
             <a:ext cx="1025956" cy="274320"/>
           </a:xfrm>
           <a:prstGeom prst="roundRect">
@@ -11136,39 +11094,78 @@
       </p:sp>
       <p:sp>
         <p:nvSpPr>
+          <p:cNvPr id="14" name="TextBox 13"/>
+          <p:cNvSpPr txBox="1"/>
+          <p:nvPr/>
+        </p:nvSpPr>
+        <p:spPr>
+          <a:xfrm>
+            <a:off x="365760" y="2249424"/>
+            <a:ext cx="1025956" cy="274320"/>
+          </a:xfrm>
+          <a:prstGeom prst="rect">
+            <a:avLst/>
+          </a:prstGeom>
+          <a:noFill/>
+        </p:spPr>
+        <p:txBody>
+          <a:bodyPr wrap="square" lIns="0" rIns="0" tIns="0" bIns="0" anchor="ctr">
+            <a:spAutoFit/>
+          </a:bodyPr>
+          <a:lstStyle/>
+          <a:p>
+            <a:pPr algn="ctr">
+              <a:lnSpc>
+                <a:spcPct val="100000"/>
+              </a:lnSpc>
+            </a:pPr>
+            <a:r>
+              <a:rPr sz="850" b="1" i="0">
+                <a:solidFill>
+                  <a:srgbClr val="AA3922"/>
+                </a:solidFill>
+                <a:latin typeface="Calibri"/>
+              </a:rPr>
+              <a:t>FOB Qingdao</a:t>
+            </a:r>
+          </a:p>
+        </p:txBody>
+      </p:sp>
+      <p:sp>
+        <p:nvSpPr>
           <p:cNvPr id="15" name="TextBox 14"/>
           <p:cNvSpPr txBox="1"/>
           <p:nvPr/>
         </p:nvSpPr>
         <p:spPr>
           <a:xfrm>
-            <a:off x="365760" y="2286000"/>
-            <a:ext cx="1025956" cy="274320"/>
-          </a:xfrm>
-          <a:prstGeom prst="rect">
-            <a:avLst/>
-          </a:prstGeom>
-          <a:noFill/>
-        </p:spPr>
-        <p:txBody>
-          <a:bodyPr wrap="square" lIns="0" rIns="0" tIns="0" bIns="0" anchor="ctr">
-            <a:spAutoFit/>
-          </a:bodyPr>
-          <a:lstStyle/>
-          <a:p>
-            <a:pPr algn="ctr">
-              <a:lnSpc>
-                <a:spcPct val="100000"/>
-              </a:lnSpc>
-            </a:pPr>
-            <a:r>
-              <a:rPr sz="850" b="1" i="0">
-                <a:solidFill>
-                  <a:srgbClr val="AA3922"/>
-                </a:solidFill>
-                <a:latin typeface="Calibri"/>
-              </a:rPr>
-              <a:t>FOB Qingdao</a:t>
+            <a:off x="365760" y="2706624"/>
+            <a:ext cx="4617720" cy="146304"/>
+          </a:xfrm>
+          <a:prstGeom prst="rect">
+            <a:avLst/>
+          </a:prstGeom>
+          <a:noFill/>
+        </p:spPr>
+        <p:txBody>
+          <a:bodyPr wrap="square" lIns="0" rIns="0" tIns="0" bIns="0" anchor="t">
+            <a:spAutoFit/>
+          </a:bodyPr>
+          <a:lstStyle/>
+          <a:p>
+            <a:pPr algn="l">
+              <a:lnSpc>
+                <a:spcPct val="100000"/>
+              </a:lnSpc>
+            </a:pPr>
+            <a:r>
+              <a:rPr sz="700" b="1" i="0" spc="90">
+                <a:solidFill>
+                  <a:srgbClr val="A23822"/>
+                </a:solidFill>
+                <a:latin typeface="Calibri"/>
+              </a:rPr>
+              <a:t>ПРО КОМПАНІЮ</a:t>
             </a:r>
           </a:p>
         </p:txBody>
@@ -11181,8 +11178,8 @@
         </p:nvSpPr>
         <p:spPr>
           <a:xfrm>
-            <a:off x="365760" y="2779776"/>
-            <a:ext cx="4617720" cy="146304"/>
+            <a:off x="365760" y="2889504"/>
+            <a:ext cx="4617720" cy="658368"/>
           </a:xfrm>
           <a:prstGeom prst="rect">
             <a:avLst/>
@@ -11197,46 +11194,7 @@
           <a:p>
             <a:pPr algn="l">
               <a:lnSpc>
-                <a:spcPct val="100000"/>
-              </a:lnSpc>
-            </a:pPr>
-            <a:r>
-              <a:rPr sz="700" b="1" i="0" spc="90">
-                <a:solidFill>
-                  <a:srgbClr val="A23822"/>
-                </a:solidFill>
-                <a:latin typeface="Calibri"/>
-              </a:rPr>
-              <a:t>ПРО КОМПАНІЮ</a:t>
-            </a:r>
-          </a:p>
-        </p:txBody>
-      </p:sp>
-      <p:sp>
-        <p:nvSpPr>
-          <p:cNvPr id="17" name="TextBox 16"/>
-          <p:cNvSpPr txBox="1"/>
-          <p:nvPr/>
-        </p:nvSpPr>
-        <p:spPr>
-          <a:xfrm>
-            <a:off x="365760" y="2962656"/>
-            <a:ext cx="4617720" cy="731520"/>
-          </a:xfrm>
-          <a:prstGeom prst="rect">
-            <a:avLst/>
-          </a:prstGeom>
-          <a:noFill/>
-        </p:spPr>
-        <p:txBody>
-          <a:bodyPr wrap="square" lIns="0" rIns="0" tIns="0" bIns="0" anchor="t">
-            <a:spAutoFit/>
-          </a:bodyPr>
-          <a:lstStyle/>
-          <a:p>
-            <a:pPr algn="l">
-              <a:lnSpc>
-                <a:spcPct val="132000"/>
+                <a:spcPct val="130000"/>
               </a:lnSpc>
             </a:pPr>
             <a:r>
@@ -11253,7 +11211,7 @@
       </p:sp>
       <p:sp>
         <p:nvSpPr>
-          <p:cNvPr id="18" name="Rounded Rectangle 17"/>
+          <p:cNvPr id="17" name="Rounded Rectangle 16"/>
           <p:cNvSpPr/>
           <p:nvPr/>
         </p:nvSpPr>
@@ -11299,7 +11257,7 @@
       </p:sp>
       <p:sp>
         <p:nvSpPr>
-          <p:cNvPr id="19" name="Rectangle 18"/>
+          <p:cNvPr id="18" name="Rectangle 17"/>
           <p:cNvSpPr/>
           <p:nvPr/>
         </p:nvSpPr>
@@ -11341,14 +11299,53 @@
       </p:sp>
       <p:sp>
         <p:nvSpPr>
+          <p:cNvPr id="19" name="TextBox 18"/>
+          <p:cNvSpPr txBox="1"/>
+          <p:nvPr/>
+        </p:nvSpPr>
+        <p:spPr>
+          <a:xfrm>
+            <a:off x="365760" y="3931920"/>
+            <a:ext cx="1481328" cy="274320"/>
+          </a:xfrm>
+          <a:prstGeom prst="rect">
+            <a:avLst/>
+          </a:prstGeom>
+          <a:noFill/>
+        </p:spPr>
+        <p:txBody>
+          <a:bodyPr wrap="square" lIns="0" rIns="0" tIns="0" bIns="0" anchor="t">
+            <a:spAutoFit/>
+          </a:bodyPr>
+          <a:lstStyle/>
+          <a:p>
+            <a:pPr algn="ctr">
+              <a:lnSpc>
+                <a:spcPct val="100000"/>
+              </a:lnSpc>
+            </a:pPr>
+            <a:r>
+              <a:rPr sz="1700" b="1" i="0">
+                <a:solidFill>
+                  <a:srgbClr val="AA3922"/>
+                </a:solidFill>
+                <a:latin typeface="Cambria"/>
+              </a:rPr>
+              <a:t>14</a:t>
+            </a:r>
+          </a:p>
+        </p:txBody>
+      </p:sp>
+      <p:sp>
+        <p:nvSpPr>
           <p:cNvPr id="20" name="TextBox 19"/>
           <p:cNvSpPr txBox="1"/>
           <p:nvPr/>
         </p:nvSpPr>
         <p:spPr>
           <a:xfrm>
-            <a:off x="365760" y="3950208"/>
-            <a:ext cx="1481328" cy="292608"/>
+            <a:off x="457200" y="4206240"/>
+            <a:ext cx="1298448" cy="310896"/>
           </a:xfrm>
           <a:prstGeom prst="rect">
             <a:avLst/>
@@ -11363,46 +11360,23 @@
           <a:p>
             <a:pPr algn="ctr">
               <a:lnSpc>
-                <a:spcPct val="100000"/>
-              </a:lnSpc>
-            </a:pPr>
-            <a:r>
-              <a:rPr sz="1700" b="1" i="0">
-                <a:solidFill>
-                  <a:srgbClr val="AA3922"/>
-                </a:solidFill>
-                <a:latin typeface="Cambria"/>
-              </a:rPr>
-              <a:t>14</a:t>
-            </a:r>
-          </a:p>
-        </p:txBody>
-      </p:sp>
-      <p:sp>
-        <p:nvSpPr>
-          <p:cNvPr id="21" name="TextBox 20"/>
-          <p:cNvSpPr txBox="1"/>
-          <p:nvPr/>
-        </p:nvSpPr>
-        <p:spPr>
-          <a:xfrm>
-            <a:off x="457200" y="4279392"/>
-            <a:ext cx="1298448" cy="329184"/>
-          </a:xfrm>
-          <a:prstGeom prst="rect">
-            <a:avLst/>
-          </a:prstGeom>
-          <a:noFill/>
-        </p:spPr>
-        <p:txBody>
-          <a:bodyPr wrap="square" lIns="0" rIns="0" tIns="0" bIns="0" anchor="t">
-            <a:spAutoFit/>
-          </a:bodyPr>
-          <a:lstStyle/>
+                <a:spcPct val="112000"/>
+              </a:lnSpc>
+            </a:pPr>
+            <a:r>
+              <a:rPr sz="700" b="0" i="0">
+                <a:solidFill>
+                  <a:srgbClr val="8A938D"/>
+                </a:solidFill>
+                <a:latin typeface="Calibri"/>
+              </a:rPr>
+              <a:t>SKU із розрахованою</a:t>
+            </a:r>
+          </a:p>
           <a:p>
             <a:pPr algn="ctr">
               <a:lnSpc>
-                <a:spcPct val="114000"/>
+                <a:spcPct val="112000"/>
               </a:lnSpc>
             </a:pPr>
             <a:r>
@@ -11412,22 +11386,6 @@
                 </a:solidFill>
                 <a:latin typeface="Calibri"/>
               </a:rPr>
-              <a:t>SKU із розрахованою</a:t>
-            </a:r>
-          </a:p>
-          <a:p>
-            <a:pPr algn="ctr">
-              <a:lnSpc>
-                <a:spcPct val="114000"/>
-              </a:lnSpc>
-            </a:pPr>
-            <a:r>
-              <a:rPr sz="700" b="0" i="0">
-                <a:solidFill>
-                  <a:srgbClr val="8A938D"/>
-                </a:solidFill>
-                <a:latin typeface="Calibri"/>
-              </a:rPr>
               <a:t>собівартістю</a:t>
             </a:r>
           </a:p>
@@ -11435,7 +11393,7 @@
       </p:sp>
       <p:sp>
         <p:nvSpPr>
-          <p:cNvPr id="22" name="Rounded Rectangle 21"/>
+          <p:cNvPr id="21" name="Rounded Rectangle 20"/>
           <p:cNvSpPr/>
           <p:nvPr/>
         </p:nvSpPr>
@@ -11481,7 +11439,7 @@
       </p:sp>
       <p:sp>
         <p:nvSpPr>
-          <p:cNvPr id="23" name="Rectangle 22"/>
+          <p:cNvPr id="22" name="Rectangle 21"/>
           <p:cNvSpPr/>
           <p:nvPr/>
         </p:nvSpPr>
@@ -11523,14 +11481,53 @@
       </p:sp>
       <p:sp>
         <p:nvSpPr>
+          <p:cNvPr id="23" name="TextBox 22"/>
+          <p:cNvSpPr txBox="1"/>
+          <p:nvPr/>
+        </p:nvSpPr>
+        <p:spPr>
+          <a:xfrm>
+            <a:off x="1979676" y="3931920"/>
+            <a:ext cx="1481328" cy="274320"/>
+          </a:xfrm>
+          <a:prstGeom prst="rect">
+            <a:avLst/>
+          </a:prstGeom>
+          <a:noFill/>
+        </p:spPr>
+        <p:txBody>
+          <a:bodyPr wrap="square" lIns="0" rIns="0" tIns="0" bIns="0" anchor="t">
+            <a:spAutoFit/>
+          </a:bodyPr>
+          <a:lstStyle/>
+          <a:p>
+            <a:pPr algn="ctr">
+              <a:lnSpc>
+                <a:spcPct val="100000"/>
+              </a:lnSpc>
+            </a:pPr>
+            <a:r>
+              <a:rPr sz="1700" b="1" i="0">
+                <a:solidFill>
+                  <a:srgbClr val="AA3922"/>
+                </a:solidFill>
+                <a:latin typeface="Cambria"/>
+              </a:rPr>
+              <a:t>3</a:t>
+            </a:r>
+          </a:p>
+        </p:txBody>
+      </p:sp>
+      <p:sp>
+        <p:nvSpPr>
           <p:cNvPr id="24" name="TextBox 23"/>
           <p:cNvSpPr txBox="1"/>
           <p:nvPr/>
         </p:nvSpPr>
         <p:spPr>
           <a:xfrm>
-            <a:off x="1979676" y="3950208"/>
-            <a:ext cx="1481328" cy="292608"/>
+            <a:off x="2071116" y="4206240"/>
+            <a:ext cx="1298448" cy="310896"/>
           </a:xfrm>
           <a:prstGeom prst="rect">
             <a:avLst/>
@@ -11545,46 +11542,23 @@
           <a:p>
             <a:pPr algn="ctr">
               <a:lnSpc>
-                <a:spcPct val="100000"/>
-              </a:lnSpc>
-            </a:pPr>
-            <a:r>
-              <a:rPr sz="1700" b="1" i="0">
-                <a:solidFill>
-                  <a:srgbClr val="AA3922"/>
-                </a:solidFill>
-                <a:latin typeface="Cambria"/>
-              </a:rPr>
-              <a:t>3</a:t>
-            </a:r>
-          </a:p>
-        </p:txBody>
-      </p:sp>
-      <p:sp>
-        <p:nvSpPr>
-          <p:cNvPr id="25" name="TextBox 24"/>
-          <p:cNvSpPr txBox="1"/>
-          <p:nvPr/>
-        </p:nvSpPr>
-        <p:spPr>
-          <a:xfrm>
-            <a:off x="2071116" y="4279392"/>
-            <a:ext cx="1298448" cy="329184"/>
-          </a:xfrm>
-          <a:prstGeom prst="rect">
-            <a:avLst/>
-          </a:prstGeom>
-          <a:noFill/>
-        </p:spPr>
-        <p:txBody>
-          <a:bodyPr wrap="square" lIns="0" rIns="0" tIns="0" bIns="0" anchor="t">
-            <a:spAutoFit/>
-          </a:bodyPr>
-          <a:lstStyle/>
+                <a:spcPct val="112000"/>
+              </a:lnSpc>
+            </a:pPr>
+            <a:r>
+              <a:rPr sz="700" b="0" i="0">
+                <a:solidFill>
+                  <a:srgbClr val="8A938D"/>
+                </a:solidFill>
+                <a:latin typeface="Calibri"/>
+              </a:rPr>
+              <a:t>продуктові</a:t>
+            </a:r>
+          </a:p>
           <a:p>
             <a:pPr algn="ctr">
               <a:lnSpc>
-                <a:spcPct val="114000"/>
+                <a:spcPct val="112000"/>
               </a:lnSpc>
             </a:pPr>
             <a:r>
@@ -11594,22 +11568,6 @@
                 </a:solidFill>
                 <a:latin typeface="Calibri"/>
               </a:rPr>
-              <a:t>продуктові</a:t>
-            </a:r>
-          </a:p>
-          <a:p>
-            <a:pPr algn="ctr">
-              <a:lnSpc>
-                <a:spcPct val="114000"/>
-              </a:lnSpc>
-            </a:pPr>
-            <a:r>
-              <a:rPr sz="700" b="0" i="0">
-                <a:solidFill>
-                  <a:srgbClr val="8A938D"/>
-                </a:solidFill>
-                <a:latin typeface="Calibri"/>
-              </a:rPr>
               <a:t>напрямки</a:t>
             </a:r>
           </a:p>
@@ -11617,7 +11575,7 @@
       </p:sp>
       <p:sp>
         <p:nvSpPr>
-          <p:cNvPr id="26" name="Rounded Rectangle 25"/>
+          <p:cNvPr id="25" name="Rounded Rectangle 24"/>
           <p:cNvSpPr/>
           <p:nvPr/>
         </p:nvSpPr>
@@ -11663,7 +11621,7 @@
       </p:sp>
       <p:sp>
         <p:nvSpPr>
-          <p:cNvPr id="27" name="Rectangle 26"/>
+          <p:cNvPr id="26" name="Rectangle 25"/>
           <p:cNvSpPr/>
           <p:nvPr/>
         </p:nvSpPr>
@@ -11705,14 +11663,53 @@
       </p:sp>
       <p:sp>
         <p:nvSpPr>
+          <p:cNvPr id="27" name="TextBox 26"/>
+          <p:cNvSpPr txBox="1"/>
+          <p:nvPr/>
+        </p:nvSpPr>
+        <p:spPr>
+          <a:xfrm>
+            <a:off x="3593592" y="3931920"/>
+            <a:ext cx="1481328" cy="274320"/>
+          </a:xfrm>
+          <a:prstGeom prst="rect">
+            <a:avLst/>
+          </a:prstGeom>
+          <a:noFill/>
+        </p:spPr>
+        <p:txBody>
+          <a:bodyPr wrap="square" lIns="0" rIns="0" tIns="0" bIns="0" anchor="t">
+            <a:spAutoFit/>
+          </a:bodyPr>
+          <a:lstStyle/>
+          <a:p>
+            <a:pPr algn="ctr">
+              <a:lnSpc>
+                <a:spcPct val="100000"/>
+              </a:lnSpc>
+            </a:pPr>
+            <a:r>
+              <a:rPr sz="1700" b="1" i="0">
+                <a:solidFill>
+                  <a:srgbClr val="AA3922"/>
+                </a:solidFill>
+                <a:latin typeface="Cambria"/>
+              </a:rPr>
+              <a:t>2 370</a:t>
+            </a:r>
+          </a:p>
+        </p:txBody>
+      </p:sp>
+      <p:sp>
+        <p:nvSpPr>
           <p:cNvPr id="28" name="TextBox 27"/>
           <p:cNvSpPr txBox="1"/>
           <p:nvPr/>
         </p:nvSpPr>
         <p:spPr>
           <a:xfrm>
-            <a:off x="3593592" y="3950208"/>
-            <a:ext cx="1481328" cy="292608"/>
+            <a:off x="3685032" y="4206240"/>
+            <a:ext cx="1298448" cy="310896"/>
           </a:xfrm>
           <a:prstGeom prst="rect">
             <a:avLst/>
@@ -11727,17 +11724,33 @@
           <a:p>
             <a:pPr algn="ctr">
               <a:lnSpc>
-                <a:spcPct val="100000"/>
-              </a:lnSpc>
-            </a:pPr>
-            <a:r>
-              <a:rPr sz="1700" b="1" i="0">
-                <a:solidFill>
-                  <a:srgbClr val="AA3922"/>
-                </a:solidFill>
-                <a:latin typeface="Cambria"/>
-              </a:rPr>
-              <a:t>2 370</a:t>
+                <a:spcPct val="112000"/>
+              </a:lnSpc>
+            </a:pPr>
+            <a:r>
+              <a:rPr sz="700" b="0" i="0">
+                <a:solidFill>
+                  <a:srgbClr val="8A938D"/>
+                </a:solidFill>
+                <a:latin typeface="Calibri"/>
+              </a:rPr>
+              <a:t>картонів</a:t>
+            </a:r>
+          </a:p>
+          <a:p>
+            <a:pPr algn="ctr">
+              <a:lnSpc>
+                <a:spcPct val="112000"/>
+              </a:lnSpc>
+            </a:pPr>
+            <a:r>
+              <a:rPr sz="700" b="0" i="0">
+                <a:solidFill>
+                  <a:srgbClr val="8A938D"/>
+                </a:solidFill>
+                <a:latin typeface="Calibri"/>
+              </a:rPr>
+              <a:t>у 40′HQ</a:t>
             </a:r>
           </a:p>
         </p:txBody>
@@ -11745,61 +11758,6 @@
       <p:sp>
         <p:nvSpPr>
           <p:cNvPr id="29" name="TextBox 28"/>
-          <p:cNvSpPr txBox="1"/>
-          <p:nvPr/>
-        </p:nvSpPr>
-        <p:spPr>
-          <a:xfrm>
-            <a:off x="3685032" y="4279392"/>
-            <a:ext cx="1298448" cy="329184"/>
-          </a:xfrm>
-          <a:prstGeom prst="rect">
-            <a:avLst/>
-          </a:prstGeom>
-          <a:noFill/>
-        </p:spPr>
-        <p:txBody>
-          <a:bodyPr wrap="square" lIns="0" rIns="0" tIns="0" bIns="0" anchor="t">
-            <a:spAutoFit/>
-          </a:bodyPr>
-          <a:lstStyle/>
-          <a:p>
-            <a:pPr algn="ctr">
-              <a:lnSpc>
-                <a:spcPct val="114000"/>
-              </a:lnSpc>
-            </a:pPr>
-            <a:r>
-              <a:rPr sz="700" b="0" i="0">
-                <a:solidFill>
-                  <a:srgbClr val="8A938D"/>
-                </a:solidFill>
-                <a:latin typeface="Calibri"/>
-              </a:rPr>
-              <a:t>картонів</a:t>
-            </a:r>
-          </a:p>
-          <a:p>
-            <a:pPr algn="ctr">
-              <a:lnSpc>
-                <a:spcPct val="114000"/>
-              </a:lnSpc>
-            </a:pPr>
-            <a:r>
-              <a:rPr sz="700" b="0" i="0">
-                <a:solidFill>
-                  <a:srgbClr val="8A938D"/>
-                </a:solidFill>
-                <a:latin typeface="Calibri"/>
-              </a:rPr>
-              <a:t>у 40′HQ</a:t>
-            </a:r>
-          </a:p>
-        </p:txBody>
-      </p:sp>
-      <p:sp>
-        <p:nvSpPr>
-          <p:cNvPr id="30" name="TextBox 29"/>
           <p:cNvSpPr txBox="1"/>
           <p:nvPr/>
         </p:nvSpPr>
@@ -27170,8 +27128,8 @@
         </p:nvSpPr>
         <p:spPr>
           <a:xfrm>
-            <a:off x="5806440" y="1005840"/>
-            <a:ext cx="2880360" cy="2331720"/>
+            <a:off x="5806440" y="566928"/>
+            <a:ext cx="2880360" cy="1097280"/>
           </a:xfrm>
           <a:prstGeom prst="roundRect">
             <a:avLst>
@@ -27206,71 +27164,225 @@
           <a:p/>
         </p:txBody>
       </p:sp>
-      <p:sp>
-        <p:nvSpPr>
-          <p:cNvPr id="5" name="TextBox 4"/>
-          <p:cNvSpPr txBox="1"/>
-          <p:nvPr/>
-        </p:nvSpPr>
-        <p:spPr>
-          <a:xfrm>
-            <a:off x="5952744" y="1298448"/>
-            <a:ext cx="2587752" cy="914400"/>
-          </a:xfrm>
-          <a:prstGeom prst="rect">
-            <a:avLst/>
-          </a:prstGeom>
-          <a:noFill/>
-        </p:spPr>
-        <p:txBody>
-          <a:bodyPr wrap="square" lIns="0" rIns="0" tIns="0" bIns="0" anchor="ctr">
+      <p:pic>
+        <p:nvPicPr>
+          <p:cNvPr id="5" name="Picture 4" descr="logo_singha.png"/>
+          <p:cNvPicPr>
+            <a:picLocks noChangeAspect="1"/>
+          </p:cNvPicPr>
+          <p:nvPr/>
+        </p:nvPicPr>
+        <p:blipFill>
+          <a:blip r:embed="rId2"/>
+          <a:stretch>
+            <a:fillRect/>
+          </a:stretch>
+        </p:blipFill>
+        <p:spPr>
+          <a:xfrm>
+            <a:off x="6489632" y="713232"/>
+            <a:ext cx="1513975" cy="804671"/>
+          </a:xfrm>
+          <a:prstGeom prst="rect">
+            <a:avLst/>
+          </a:prstGeom>
+        </p:spPr>
+      </p:pic>
+      <p:sp>
+        <p:nvSpPr>
+          <p:cNvPr id="6" name="Rounded Rectangle 5"/>
+          <p:cNvSpPr/>
+          <p:nvPr/>
+        </p:nvSpPr>
+        <p:spPr>
+          <a:xfrm>
+            <a:off x="5806440" y="1847088"/>
+            <a:ext cx="2880360" cy="1828800"/>
+          </a:xfrm>
+          <a:prstGeom prst="roundRect">
+            <a:avLst>
+              <a:gd name="adj" fmla="val 5000"/>
+            </a:avLst>
+          </a:prstGeom>
+          <a:solidFill>
+            <a:srgbClr val="FFFFFF"/>
+          </a:solidFill>
+          <a:ln>
+            <a:noFill/>
+          </a:ln>
+          <a:effectLst/>
+        </p:spPr>
+        <p:style>
+          <a:lnRef idx="1">
+            <a:schemeClr val="accent1"/>
+          </a:lnRef>
+          <a:fillRef idx="3">
+            <a:schemeClr val="accent1"/>
+          </a:fillRef>
+          <a:effectRef idx="2">
+            <a:schemeClr val="accent1"/>
+          </a:effectRef>
+          <a:fontRef idx="minor">
+            <a:schemeClr val="lt1"/>
+          </a:fontRef>
+        </p:style>
+        <p:txBody>
+          <a:bodyPr rtlCol="0" anchor="ctr"/>
+          <a:lstStyle/>
+          <a:p/>
+        </p:txBody>
+      </p:sp>
+      <p:pic>
+        <p:nvPicPr>
+          <p:cNvPr id="7" name="Picture 6" descr="plant_singha.png"/>
+          <p:cNvPicPr>
+            <a:picLocks noChangeAspect="1"/>
+          </p:cNvPicPr>
+          <p:nvPr/>
+        </p:nvPicPr>
+        <p:blipFill>
+          <a:blip r:embed="rId3"/>
+          <a:stretch>
+            <a:fillRect/>
+          </a:stretch>
+        </p:blipFill>
+        <p:spPr>
+          <a:xfrm>
+            <a:off x="6429597" y="1920240"/>
+            <a:ext cx="1634044" cy="1463040"/>
+          </a:xfrm>
+          <a:prstGeom prst="rect">
+            <a:avLst/>
+          </a:prstGeom>
+        </p:spPr>
+      </p:pic>
+      <p:sp>
+        <p:nvSpPr>
+          <p:cNvPr id="8" name="TextBox 7"/>
+          <p:cNvSpPr txBox="1"/>
+          <p:nvPr/>
+        </p:nvSpPr>
+        <p:spPr>
+          <a:xfrm>
+            <a:off x="5879592" y="3419856"/>
+            <a:ext cx="2734056" cy="182880"/>
+          </a:xfrm>
+          <a:prstGeom prst="rect">
+            <a:avLst/>
+          </a:prstGeom>
+          <a:noFill/>
+        </p:spPr>
+        <p:txBody>
+          <a:bodyPr wrap="square" lIns="0" rIns="0" tIns="0" bIns="0" anchor="t">
             <a:spAutoFit/>
           </a:bodyPr>
           <a:lstStyle/>
           <a:p>
             <a:pPr algn="ctr">
               <a:lnSpc>
-                <a:spcPct val="108000"/>
-              </a:lnSpc>
-            </a:pPr>
-            <a:r>
-              <a:rPr sz="2500" b="1" i="0">
-                <a:solidFill>
-                  <a:srgbClr val="AB5F15"/>
+                <a:spcPct val="100000"/>
+              </a:lnSpc>
+            </a:pPr>
+            <a:r>
+              <a:rPr sz="650" b="0" i="1">
+                <a:solidFill>
+                  <a:srgbClr val="8A938D"/>
+                </a:solidFill>
+                <a:latin typeface="Calibri"/>
+              </a:rPr>
+              <a:t>Виробнича лінія · singhakameda.co.th</a:t>
+            </a:r>
+          </a:p>
+        </p:txBody>
+      </p:sp>
+      <p:sp>
+        <p:nvSpPr>
+          <p:cNvPr id="9" name="TextBox 8"/>
+          <p:cNvSpPr txBox="1"/>
+          <p:nvPr/>
+        </p:nvSpPr>
+        <p:spPr>
+          <a:xfrm>
+            <a:off x="5349240" y="3913632"/>
+            <a:ext cx="3794760" cy="182880"/>
+          </a:xfrm>
+          <a:prstGeom prst="rect">
+            <a:avLst/>
+          </a:prstGeom>
+          <a:noFill/>
+        </p:spPr>
+        <p:txBody>
+          <a:bodyPr wrap="square" lIns="0" rIns="0" tIns="0" bIns="0" anchor="t">
+            <a:spAutoFit/>
+          </a:bodyPr>
+          <a:lstStyle/>
+          <a:p>
+            <a:pPr algn="ctr">
+              <a:lnSpc>
+                <a:spcPct val="100000"/>
+              </a:lnSpc>
+            </a:pPr>
+            <a:r>
+              <a:rPr sz="700" b="1" i="0" spc="90">
+                <a:solidFill>
+                  <a:srgbClr val="E8D0B8"/>
+                </a:solidFill>
+                <a:latin typeface="Calibri"/>
+              </a:rPr>
+              <a:t>ВИРОБНИЦТВО</a:t>
+            </a:r>
+          </a:p>
+        </p:txBody>
+      </p:sp>
+      <p:sp>
+        <p:nvSpPr>
+          <p:cNvPr id="10" name="TextBox 9"/>
+          <p:cNvSpPr txBox="1"/>
+          <p:nvPr/>
+        </p:nvSpPr>
+        <p:spPr>
+          <a:xfrm>
+            <a:off x="5349240" y="4114800"/>
+            <a:ext cx="3794760" cy="274320"/>
+          </a:xfrm>
+          <a:prstGeom prst="rect">
+            <a:avLst/>
+          </a:prstGeom>
+          <a:noFill/>
+        </p:spPr>
+        <p:txBody>
+          <a:bodyPr wrap="square" lIns="0" rIns="0" tIns="0" bIns="0" anchor="t">
+            <a:spAutoFit/>
+          </a:bodyPr>
+          <a:lstStyle/>
+          <a:p>
+            <a:pPr algn="ctr">
+              <a:lnSpc>
+                <a:spcPct val="100000"/>
+              </a:lnSpc>
+            </a:pPr>
+            <a:r>
+              <a:rPr sz="1300" b="1" i="0">
+                <a:solidFill>
+                  <a:srgbClr val="FFFFFF"/>
                 </a:solidFill>
                 <a:latin typeface="Cambria"/>
               </a:rPr>
-              <a:t>SINGHA</a:t>
-            </a:r>
-          </a:p>
-          <a:p>
-            <a:pPr algn="ctr">
-              <a:lnSpc>
-                <a:spcPct val="108000"/>
-              </a:lnSpc>
-            </a:pPr>
-            <a:r>
-              <a:rPr sz="2500" b="1" i="0">
-                <a:solidFill>
-                  <a:srgbClr val="AB5F15"/>
-                </a:solidFill>
-                <a:latin typeface="Cambria"/>
-              </a:rPr>
-              <a:t>KAMEDA</a:t>
-            </a:r>
-          </a:p>
-        </p:txBody>
-      </p:sp>
-      <p:sp>
-        <p:nvSpPr>
-          <p:cNvPr id="6" name="Rectangle 5"/>
+              <a:t>Таїланд</a:t>
+            </a:r>
+          </a:p>
+        </p:txBody>
+      </p:sp>
+      <p:sp>
+        <p:nvSpPr>
+          <p:cNvPr id="11" name="Rectangle 10"/>
           <p:cNvSpPr/>
           <p:nvPr/>
         </p:nvSpPr>
         <p:spPr>
           <a:xfrm>
-            <a:off x="6944868" y="2450592"/>
-            <a:ext cx="603504" cy="32004"/>
+            <a:off x="365760" y="475488"/>
+            <a:ext cx="237744" cy="237744"/>
           </a:xfrm>
           <a:prstGeom prst="rect">
             <a:avLst/>
@@ -27305,166 +27417,7 @@
       </p:sp>
       <p:sp>
         <p:nvSpPr>
-          <p:cNvPr id="7" name="TextBox 6"/>
-          <p:cNvSpPr txBox="1"/>
-          <p:nvPr/>
-        </p:nvSpPr>
-        <p:spPr>
-          <a:xfrm>
-            <a:off x="5952744" y="2633472"/>
-            <a:ext cx="2587752" cy="274320"/>
-          </a:xfrm>
-          <a:prstGeom prst="rect">
-            <a:avLst/>
-          </a:prstGeom>
-          <a:noFill/>
-        </p:spPr>
-        <p:txBody>
-          <a:bodyPr wrap="square" lIns="0" rIns="0" tIns="0" bIns="0" anchor="t">
-            <a:spAutoFit/>
-          </a:bodyPr>
-          <a:lstStyle/>
-          <a:p>
-            <a:pPr algn="ctr">
-              <a:lnSpc>
-                <a:spcPct val="100000"/>
-              </a:lnSpc>
-            </a:pPr>
-            <a:r>
-              <a:rPr sz="1050" b="0" i="0">
-                <a:solidFill>
-                  <a:srgbClr val="8A938D"/>
-                </a:solidFill>
-                <a:latin typeface="Calibri"/>
-              </a:rPr>
-              <a:t>Arare Norimaki</a:t>
-            </a:r>
-          </a:p>
-        </p:txBody>
-      </p:sp>
-      <p:sp>
-        <p:nvSpPr>
-          <p:cNvPr id="8" name="TextBox 7"/>
-          <p:cNvSpPr txBox="1"/>
-          <p:nvPr/>
-        </p:nvSpPr>
-        <p:spPr>
-          <a:xfrm>
-            <a:off x="5349240" y="3694176"/>
-            <a:ext cx="3794760" cy="182880"/>
-          </a:xfrm>
-          <a:prstGeom prst="rect">
-            <a:avLst/>
-          </a:prstGeom>
-          <a:noFill/>
-        </p:spPr>
-        <p:txBody>
-          <a:bodyPr wrap="square" lIns="0" rIns="0" tIns="0" bIns="0" anchor="t">
-            <a:spAutoFit/>
-          </a:bodyPr>
-          <a:lstStyle/>
-          <a:p>
-            <a:pPr algn="ctr">
-              <a:lnSpc>
-                <a:spcPct val="100000"/>
-              </a:lnSpc>
-            </a:pPr>
-            <a:r>
-              <a:rPr sz="700" b="1" i="0" spc="90">
-                <a:solidFill>
-                  <a:srgbClr val="EAD3BD"/>
-                </a:solidFill>
-                <a:latin typeface="Calibri"/>
-              </a:rPr>
-              <a:t>ВИРОБНИЦТВО</a:t>
-            </a:r>
-          </a:p>
-        </p:txBody>
-      </p:sp>
-      <p:sp>
-        <p:nvSpPr>
-          <p:cNvPr id="9" name="TextBox 8"/>
-          <p:cNvSpPr txBox="1"/>
-          <p:nvPr/>
-        </p:nvSpPr>
-        <p:spPr>
-          <a:xfrm>
-            <a:off x="5349240" y="3895344"/>
-            <a:ext cx="3794760" cy="274320"/>
-          </a:xfrm>
-          <a:prstGeom prst="rect">
-            <a:avLst/>
-          </a:prstGeom>
-          <a:noFill/>
-        </p:spPr>
-        <p:txBody>
-          <a:bodyPr wrap="square" lIns="0" rIns="0" tIns="0" bIns="0" anchor="t">
-            <a:spAutoFit/>
-          </a:bodyPr>
-          <a:lstStyle/>
-          <a:p>
-            <a:pPr algn="ctr">
-              <a:lnSpc>
-                <a:spcPct val="100000"/>
-              </a:lnSpc>
-            </a:pPr>
-            <a:r>
-              <a:rPr sz="1300" b="1" i="0">
-                <a:solidFill>
-                  <a:srgbClr val="FFFFFF"/>
-                </a:solidFill>
-                <a:latin typeface="Cambria"/>
-              </a:rPr>
-              <a:t>Таїланд</a:t>
-            </a:r>
-          </a:p>
-        </p:txBody>
-      </p:sp>
-      <p:sp>
-        <p:nvSpPr>
-          <p:cNvPr id="10" name="Rectangle 9"/>
-          <p:cNvSpPr/>
-          <p:nvPr/>
-        </p:nvSpPr>
-        <p:spPr>
-          <a:xfrm>
-            <a:off x="365760" y="475488"/>
-            <a:ext cx="237744" cy="237744"/>
-          </a:xfrm>
-          <a:prstGeom prst="rect">
-            <a:avLst/>
-          </a:prstGeom>
-          <a:solidFill>
-            <a:srgbClr val="B36214"/>
-          </a:solidFill>
-          <a:ln>
-            <a:noFill/>
-          </a:ln>
-          <a:effectLst/>
-        </p:spPr>
-        <p:style>
-          <a:lnRef idx="1">
-            <a:schemeClr val="accent1"/>
-          </a:lnRef>
-          <a:fillRef idx="3">
-            <a:schemeClr val="accent1"/>
-          </a:fillRef>
-          <a:effectRef idx="2">
-            <a:schemeClr val="accent1"/>
-          </a:effectRef>
-          <a:fontRef idx="minor">
-            <a:schemeClr val="lt1"/>
-          </a:fontRef>
-        </p:style>
-        <p:txBody>
-          <a:bodyPr rtlCol="0" anchor="ctr"/>
-          <a:lstStyle/>
-          <a:p/>
-        </p:txBody>
-      </p:sp>
-      <p:sp>
-        <p:nvSpPr>
-          <p:cNvPr id="11" name="TextBox 10"/>
+          <p:cNvPr id="12" name="TextBox 11"/>
           <p:cNvSpPr txBox="1"/>
           <p:nvPr/>
         </p:nvSpPr>
@@ -27503,13 +27456,13 @@
       </p:sp>
       <p:sp>
         <p:nvSpPr>
-          <p:cNvPr id="12" name="TextBox 11"/>
-          <p:cNvSpPr txBox="1"/>
-          <p:nvPr/>
-        </p:nvSpPr>
-        <p:spPr>
-          <a:xfrm>
-            <a:off x="365760" y="859536"/>
+          <p:cNvPr id="13" name="TextBox 12"/>
+          <p:cNvSpPr txBox="1"/>
+          <p:nvPr/>
+        </p:nvSpPr>
+        <p:spPr>
+          <a:xfrm>
+            <a:off x="365760" y="841248"/>
             <a:ext cx="4617720" cy="914400"/>
           </a:xfrm>
           <a:prstGeom prst="rect">
@@ -27558,13 +27511,13 @@
       </p:sp>
       <p:sp>
         <p:nvSpPr>
-          <p:cNvPr id="13" name="TextBox 12"/>
-          <p:cNvSpPr txBox="1"/>
-          <p:nvPr/>
-        </p:nvSpPr>
-        <p:spPr>
-          <a:xfrm>
-            <a:off x="365760" y="1920240"/>
+          <p:cNvPr id="14" name="TextBox 13"/>
+          <p:cNvSpPr txBox="1"/>
+          <p:nvPr/>
+        </p:nvSpPr>
+        <p:spPr>
+          <a:xfrm>
+            <a:off x="365760" y="1901952"/>
             <a:ext cx="4617720" cy="274320"/>
           </a:xfrm>
           <a:prstGeom prst="rect">
@@ -27597,13 +27550,13 @@
       </p:sp>
       <p:sp>
         <p:nvSpPr>
-          <p:cNvPr id="14" name="Rounded Rectangle 13"/>
+          <p:cNvPr id="15" name="Rounded Rectangle 14"/>
           <p:cNvSpPr/>
           <p:nvPr/>
         </p:nvSpPr>
         <p:spPr>
           <a:xfrm>
-            <a:off x="365760" y="2286000"/>
+            <a:off x="365760" y="2249424"/>
             <a:ext cx="1025956" cy="274320"/>
           </a:xfrm>
           <a:prstGeom prst="roundRect">
@@ -27641,13 +27594,13 @@
       </p:sp>
       <p:sp>
         <p:nvSpPr>
-          <p:cNvPr id="15" name="TextBox 14"/>
-          <p:cNvSpPr txBox="1"/>
-          <p:nvPr/>
-        </p:nvSpPr>
-        <p:spPr>
-          <a:xfrm>
-            <a:off x="365760" y="2286000"/>
+          <p:cNvPr id="16" name="TextBox 15"/>
+          <p:cNvSpPr txBox="1"/>
+          <p:nvPr/>
+        </p:nvSpPr>
+        <p:spPr>
+          <a:xfrm>
+            <a:off x="365760" y="2249424"/>
             <a:ext cx="1025956" cy="274320"/>
           </a:xfrm>
           <a:prstGeom prst="rect">
@@ -27680,13 +27633,13 @@
       </p:sp>
       <p:sp>
         <p:nvSpPr>
-          <p:cNvPr id="16" name="TextBox 15"/>
-          <p:cNvSpPr txBox="1"/>
-          <p:nvPr/>
-        </p:nvSpPr>
-        <p:spPr>
-          <a:xfrm>
-            <a:off x="365760" y="2779776"/>
+          <p:cNvPr id="17" name="TextBox 16"/>
+          <p:cNvSpPr txBox="1"/>
+          <p:nvPr/>
+        </p:nvSpPr>
+        <p:spPr>
+          <a:xfrm>
+            <a:off x="365760" y="2706624"/>
             <a:ext cx="4617720" cy="146304"/>
           </a:xfrm>
           <a:prstGeom prst="rect">
@@ -27719,14 +27672,14 @@
       </p:sp>
       <p:sp>
         <p:nvSpPr>
-          <p:cNvPr id="17" name="TextBox 16"/>
-          <p:cNvSpPr txBox="1"/>
-          <p:nvPr/>
-        </p:nvSpPr>
-        <p:spPr>
-          <a:xfrm>
-            <a:off x="365760" y="2962656"/>
-            <a:ext cx="4617720" cy="731520"/>
+          <p:cNvPr id="18" name="TextBox 17"/>
+          <p:cNvSpPr txBox="1"/>
+          <p:nvPr/>
+        </p:nvSpPr>
+        <p:spPr>
+          <a:xfrm>
+            <a:off x="365760" y="2889504"/>
+            <a:ext cx="4617720" cy="658368"/>
           </a:xfrm>
           <a:prstGeom prst="rect">
             <a:avLst/>
@@ -27741,7 +27694,7 @@
           <a:p>
             <a:pPr algn="l">
               <a:lnSpc>
-                <a:spcPct val="132000"/>
+                <a:spcPct val="130000"/>
               </a:lnSpc>
             </a:pPr>
             <a:r>
@@ -27758,14 +27711,14 @@
       </p:sp>
       <p:sp>
         <p:nvSpPr>
-          <p:cNvPr id="18" name="Rounded Rectangle 17"/>
+          <p:cNvPr id="19" name="Rounded Rectangle 18"/>
           <p:cNvSpPr/>
           <p:nvPr/>
         </p:nvSpPr>
         <p:spPr>
           <a:xfrm>
-            <a:off x="365760" y="3803904"/>
-            <a:ext cx="1481328" cy="859536"/>
+            <a:off x="365760" y="3602736"/>
+            <a:ext cx="1481328" cy="713232"/>
           </a:xfrm>
           <a:prstGeom prst="roundRect">
             <a:avLst>
@@ -27804,13 +27757,13 @@
       </p:sp>
       <p:sp>
         <p:nvSpPr>
-          <p:cNvPr id="19" name="Rectangle 18"/>
+          <p:cNvPr id="20" name="Rectangle 19"/>
           <p:cNvSpPr/>
           <p:nvPr/>
         </p:nvSpPr>
         <p:spPr>
           <a:xfrm>
-            <a:off x="365760" y="3803904"/>
+            <a:off x="365760" y="3602736"/>
             <a:ext cx="1481328" cy="45720"/>
           </a:xfrm>
           <a:prstGeom prst="rect">
@@ -27846,14 +27799,14 @@
       </p:sp>
       <p:sp>
         <p:nvSpPr>
-          <p:cNvPr id="20" name="TextBox 19"/>
-          <p:cNvSpPr txBox="1"/>
-          <p:nvPr/>
-        </p:nvSpPr>
-        <p:spPr>
-          <a:xfrm>
-            <a:off x="365760" y="3950208"/>
-            <a:ext cx="1481328" cy="292608"/>
+          <p:cNvPr id="21" name="TextBox 20"/>
+          <p:cNvSpPr txBox="1"/>
+          <p:nvPr/>
+        </p:nvSpPr>
+        <p:spPr>
+          <a:xfrm>
+            <a:off x="365760" y="3730752"/>
+            <a:ext cx="1481328" cy="274320"/>
           </a:xfrm>
           <a:prstGeom prst="rect">
             <a:avLst/>
@@ -27872,7 +27825,7 @@
               </a:lnSpc>
             </a:pPr>
             <a:r>
-              <a:rPr sz="1700" b="1" i="0">
+              <a:rPr sz="1600" b="1" i="0">
                 <a:solidFill>
                   <a:srgbClr val="AB5F15"/>
                 </a:solidFill>
@@ -27885,14 +27838,14 @@
       </p:sp>
       <p:sp>
         <p:nvSpPr>
-          <p:cNvPr id="21" name="TextBox 20"/>
-          <p:cNvSpPr txBox="1"/>
-          <p:nvPr/>
-        </p:nvSpPr>
-        <p:spPr>
-          <a:xfrm>
-            <a:off x="457200" y="4279392"/>
-            <a:ext cx="1298448" cy="329184"/>
+          <p:cNvPr id="22" name="TextBox 21"/>
+          <p:cNvSpPr txBox="1"/>
+          <p:nvPr/>
+        </p:nvSpPr>
+        <p:spPr>
+          <a:xfrm>
+            <a:off x="457200" y="4005072"/>
+            <a:ext cx="1298448" cy="310896"/>
           </a:xfrm>
           <a:prstGeom prst="rect">
             <a:avLst/>
@@ -27907,11 +27860,11 @@
           <a:p>
             <a:pPr algn="ctr">
               <a:lnSpc>
-                <a:spcPct val="114000"/>
-              </a:lnSpc>
-            </a:pPr>
-            <a:r>
-              <a:rPr sz="700" b="0" i="0">
+                <a:spcPct val="112000"/>
+              </a:lnSpc>
+            </a:pPr>
+            <a:r>
+              <a:rPr sz="650" b="0" i="0">
                 <a:solidFill>
                   <a:srgbClr val="8A938D"/>
                 </a:solidFill>
@@ -27923,11 +27876,11 @@
           <a:p>
             <a:pPr algn="ctr">
               <a:lnSpc>
-                <a:spcPct val="114000"/>
-              </a:lnSpc>
-            </a:pPr>
-            <a:r>
-              <a:rPr sz="700" b="0" i="0">
+                <a:spcPct val="112000"/>
+              </a:lnSpc>
+            </a:pPr>
+            <a:r>
+              <a:rPr sz="650" b="0" i="0">
                 <a:solidFill>
                   <a:srgbClr val="8A938D"/>
                 </a:solidFill>
@@ -27940,14 +27893,14 @@
       </p:sp>
       <p:sp>
         <p:nvSpPr>
-          <p:cNvPr id="22" name="Rounded Rectangle 21"/>
+          <p:cNvPr id="23" name="Rounded Rectangle 22"/>
           <p:cNvSpPr/>
           <p:nvPr/>
         </p:nvSpPr>
         <p:spPr>
           <a:xfrm>
-            <a:off x="1979676" y="3803904"/>
-            <a:ext cx="1481328" cy="859536"/>
+            <a:off x="1979676" y="3602736"/>
+            <a:ext cx="1481328" cy="713232"/>
           </a:xfrm>
           <a:prstGeom prst="roundRect">
             <a:avLst>
@@ -27986,13 +27939,13 @@
       </p:sp>
       <p:sp>
         <p:nvSpPr>
-          <p:cNvPr id="23" name="Rectangle 22"/>
+          <p:cNvPr id="24" name="Rectangle 23"/>
           <p:cNvSpPr/>
           <p:nvPr/>
         </p:nvSpPr>
         <p:spPr>
           <a:xfrm>
-            <a:off x="1979676" y="3803904"/>
+            <a:off x="1979676" y="3602736"/>
             <a:ext cx="1481328" cy="45720"/>
           </a:xfrm>
           <a:prstGeom prst="rect">
@@ -28028,14 +27981,14 @@
       </p:sp>
       <p:sp>
         <p:nvSpPr>
-          <p:cNvPr id="24" name="TextBox 23"/>
-          <p:cNvSpPr txBox="1"/>
-          <p:nvPr/>
-        </p:nvSpPr>
-        <p:spPr>
-          <a:xfrm>
-            <a:off x="1979676" y="3950208"/>
-            <a:ext cx="1481328" cy="292608"/>
+          <p:cNvPr id="25" name="TextBox 24"/>
+          <p:cNvSpPr txBox="1"/>
+          <p:nvPr/>
+        </p:nvSpPr>
+        <p:spPr>
+          <a:xfrm>
+            <a:off x="1979676" y="3730752"/>
+            <a:ext cx="1481328" cy="274320"/>
           </a:xfrm>
           <a:prstGeom prst="rect">
             <a:avLst/>
@@ -28054,7 +28007,7 @@
               </a:lnSpc>
             </a:pPr>
             <a:r>
-              <a:rPr sz="1700" b="1" i="0">
+              <a:rPr sz="1600" b="1" i="0">
                 <a:solidFill>
                   <a:srgbClr val="AB5F15"/>
                 </a:solidFill>
@@ -28067,14 +28020,14 @@
       </p:sp>
       <p:sp>
         <p:nvSpPr>
-          <p:cNvPr id="25" name="TextBox 24"/>
-          <p:cNvSpPr txBox="1"/>
-          <p:nvPr/>
-        </p:nvSpPr>
-        <p:spPr>
-          <a:xfrm>
-            <a:off x="2071116" y="4279392"/>
-            <a:ext cx="1298448" cy="329184"/>
+          <p:cNvPr id="26" name="TextBox 25"/>
+          <p:cNvSpPr txBox="1"/>
+          <p:nvPr/>
+        </p:nvSpPr>
+        <p:spPr>
+          <a:xfrm>
+            <a:off x="2071116" y="4005072"/>
+            <a:ext cx="1298448" cy="310896"/>
           </a:xfrm>
           <a:prstGeom prst="rect">
             <a:avLst/>
@@ -28089,11 +28042,11 @@
           <a:p>
             <a:pPr algn="ctr">
               <a:lnSpc>
-                <a:spcPct val="114000"/>
-              </a:lnSpc>
-            </a:pPr>
-            <a:r>
-              <a:rPr sz="700" b="0" i="0">
+                <a:spcPct val="112000"/>
+              </a:lnSpc>
+            </a:pPr>
+            <a:r>
+              <a:rPr sz="650" b="0" i="0">
                 <a:solidFill>
                   <a:srgbClr val="8A938D"/>
                 </a:solidFill>
@@ -28105,11 +28058,11 @@
           <a:p>
             <a:pPr algn="ctr">
               <a:lnSpc>
-                <a:spcPct val="114000"/>
-              </a:lnSpc>
-            </a:pPr>
-            <a:r>
-              <a:rPr sz="700" b="0" i="0">
+                <a:spcPct val="112000"/>
+              </a:lnSpc>
+            </a:pPr>
+            <a:r>
+              <a:rPr sz="650" b="0" i="0">
                 <a:solidFill>
                   <a:srgbClr val="8A938D"/>
                 </a:solidFill>
@@ -28122,14 +28075,14 @@
       </p:sp>
       <p:sp>
         <p:nvSpPr>
-          <p:cNvPr id="26" name="Rounded Rectangle 25"/>
+          <p:cNvPr id="27" name="Rounded Rectangle 26"/>
           <p:cNvSpPr/>
           <p:nvPr/>
         </p:nvSpPr>
         <p:spPr>
           <a:xfrm>
-            <a:off x="3593592" y="3803904"/>
-            <a:ext cx="1481328" cy="859536"/>
+            <a:off x="3593592" y="3602736"/>
+            <a:ext cx="1481328" cy="713232"/>
           </a:xfrm>
           <a:prstGeom prst="roundRect">
             <a:avLst>
@@ -28168,13 +28121,13 @@
       </p:sp>
       <p:sp>
         <p:nvSpPr>
-          <p:cNvPr id="27" name="Rectangle 26"/>
+          <p:cNvPr id="28" name="Rectangle 27"/>
           <p:cNvSpPr/>
           <p:nvPr/>
         </p:nvSpPr>
         <p:spPr>
           <a:xfrm>
-            <a:off x="3593592" y="3803904"/>
+            <a:off x="3593592" y="3602736"/>
             <a:ext cx="1481328" cy="45720"/>
           </a:xfrm>
           <a:prstGeom prst="rect">
@@ -28210,14 +28163,14 @@
       </p:sp>
       <p:sp>
         <p:nvSpPr>
-          <p:cNvPr id="28" name="TextBox 27"/>
-          <p:cNvSpPr txBox="1"/>
-          <p:nvPr/>
-        </p:nvSpPr>
-        <p:spPr>
-          <a:xfrm>
-            <a:off x="3593592" y="3950208"/>
-            <a:ext cx="1481328" cy="292608"/>
+          <p:cNvPr id="29" name="TextBox 28"/>
+          <p:cNvSpPr txBox="1"/>
+          <p:nvPr/>
+        </p:nvSpPr>
+        <p:spPr>
+          <a:xfrm>
+            <a:off x="3593592" y="3730752"/>
+            <a:ext cx="1481328" cy="274320"/>
           </a:xfrm>
           <a:prstGeom prst="rect">
             <a:avLst/>
@@ -28236,7 +28189,7 @@
               </a:lnSpc>
             </a:pPr>
             <a:r>
-              <a:rPr sz="1700" b="1" i="0">
+              <a:rPr sz="1600" b="1" i="0">
                 <a:solidFill>
                   <a:srgbClr val="AB5F15"/>
                 </a:solidFill>
@@ -28249,14 +28202,14 @@
       </p:sp>
       <p:sp>
         <p:nvSpPr>
-          <p:cNvPr id="29" name="TextBox 28"/>
-          <p:cNvSpPr txBox="1"/>
-          <p:nvPr/>
-        </p:nvSpPr>
-        <p:spPr>
-          <a:xfrm>
-            <a:off x="3685032" y="4279392"/>
-            <a:ext cx="1298448" cy="329184"/>
+          <p:cNvPr id="30" name="TextBox 29"/>
+          <p:cNvSpPr txBox="1"/>
+          <p:nvPr/>
+        </p:nvSpPr>
+        <p:spPr>
+          <a:xfrm>
+            <a:off x="3685032" y="4005072"/>
+            <a:ext cx="1298448" cy="310896"/>
           </a:xfrm>
           <a:prstGeom prst="rect">
             <a:avLst/>
@@ -28271,11 +28224,11 @@
           <a:p>
             <a:pPr algn="ctr">
               <a:lnSpc>
-                <a:spcPct val="114000"/>
-              </a:lnSpc>
-            </a:pPr>
-            <a:r>
-              <a:rPr sz="700" b="0" i="0">
+                <a:spcPct val="112000"/>
+              </a:lnSpc>
+            </a:pPr>
+            <a:r>
+              <a:rPr sz="650" b="0" i="0">
                 <a:solidFill>
                   <a:srgbClr val="8A938D"/>
                 </a:solidFill>
@@ -28287,11 +28240,11 @@
           <a:p>
             <a:pPr algn="ctr">
               <a:lnSpc>
-                <a:spcPct val="114000"/>
-              </a:lnSpc>
-            </a:pPr>
-            <a:r>
-              <a:rPr sz="700" b="0" i="0">
+                <a:spcPct val="112000"/>
+              </a:lnSpc>
+            </a:pPr>
+            <a:r>
+              <a:rPr sz="650" b="0" i="0">
                 <a:solidFill>
                   <a:srgbClr val="8A938D"/>
                 </a:solidFill>
@@ -28304,7 +28257,190 @@
       </p:sp>
       <p:sp>
         <p:nvSpPr>
-          <p:cNvPr id="30" name="TextBox 29"/>
+          <p:cNvPr id="31" name="TextBox 30"/>
+          <p:cNvSpPr txBox="1"/>
+          <p:nvPr/>
+        </p:nvSpPr>
+        <p:spPr>
+          <a:xfrm>
+            <a:off x="365760" y="4443984"/>
+            <a:ext cx="4617720" cy="146304"/>
+          </a:xfrm>
+          <a:prstGeom prst="rect">
+            <a:avLst/>
+          </a:prstGeom>
+          <a:noFill/>
+        </p:spPr>
+        <p:txBody>
+          <a:bodyPr wrap="square" lIns="0" rIns="0" tIns="0" bIns="0" anchor="t">
+            <a:spAutoFit/>
+          </a:bodyPr>
+          <a:lstStyle/>
+          <a:p>
+            <a:pPr algn="l">
+              <a:lnSpc>
+                <a:spcPct val="100000"/>
+              </a:lnSpc>
+            </a:pPr>
+            <a:r>
+              <a:rPr sz="700" b="1" i="0" spc="90">
+                <a:solidFill>
+                  <a:srgbClr val="A35C15"/>
+                </a:solidFill>
+                <a:latin typeface="Calibri"/>
+              </a:rPr>
+              <a:t>СЕРТИФІКАТИ ВИРОБНИЦТВА</a:t>
+            </a:r>
+          </a:p>
+        </p:txBody>
+      </p:sp>
+      <p:pic>
+        <p:nvPicPr>
+          <p:cNvPr id="32" name="Picture 31" descr="cert_haccp.png"/>
+          <p:cNvPicPr>
+            <a:picLocks noChangeAspect="1"/>
+          </p:cNvPicPr>
+          <p:nvPr/>
+        </p:nvPicPr>
+        <p:blipFill>
+          <a:blip r:embed="rId4"/>
+          <a:stretch>
+            <a:fillRect/>
+          </a:stretch>
+        </p:blipFill>
+        <p:spPr>
+          <a:xfrm>
+            <a:off x="365760" y="4626864"/>
+            <a:ext cx="489382" cy="237744"/>
+          </a:xfrm>
+          <a:prstGeom prst="rect">
+            <a:avLst/>
+          </a:prstGeom>
+        </p:spPr>
+      </p:pic>
+      <p:pic>
+        <p:nvPicPr>
+          <p:cNvPr id="33" name="Picture 32" descr="cert_brc.png"/>
+          <p:cNvPicPr>
+            <a:picLocks noChangeAspect="1"/>
+          </p:cNvPicPr>
+          <p:nvPr/>
+        </p:nvPicPr>
+        <p:blipFill>
+          <a:blip r:embed="rId5"/>
+          <a:stretch>
+            <a:fillRect/>
+          </a:stretch>
+        </p:blipFill>
+        <p:spPr>
+          <a:xfrm>
+            <a:off x="1038022" y="4626864"/>
+            <a:ext cx="159692" cy="237744"/>
+          </a:xfrm>
+          <a:prstGeom prst="rect">
+            <a:avLst/>
+          </a:prstGeom>
+        </p:spPr>
+      </p:pic>
+      <p:pic>
+        <p:nvPicPr>
+          <p:cNvPr id="34" name="Picture 33" descr="cert_halal.png"/>
+          <p:cNvPicPr>
+            <a:picLocks noChangeAspect="1"/>
+          </p:cNvPicPr>
+          <p:nvPr/>
+        </p:nvPicPr>
+        <p:blipFill>
+          <a:blip r:embed="rId6"/>
+          <a:stretch>
+            <a:fillRect/>
+          </a:stretch>
+        </p:blipFill>
+        <p:spPr>
+          <a:xfrm>
+            <a:off x="1380594" y="4626864"/>
+            <a:ext cx="424904" cy="237744"/>
+          </a:xfrm>
+          <a:prstGeom prst="rect">
+            <a:avLst/>
+          </a:prstGeom>
+        </p:spPr>
+      </p:pic>
+      <p:pic>
+        <p:nvPicPr>
+          <p:cNvPr id="35" name="Picture 34" descr="cert_nsf.png"/>
+          <p:cNvPicPr>
+            <a:picLocks noChangeAspect="1"/>
+          </p:cNvPicPr>
+          <p:nvPr/>
+        </p:nvPicPr>
+        <p:blipFill>
+          <a:blip r:embed="rId7"/>
+          <a:stretch>
+            <a:fillRect/>
+          </a:stretch>
+        </p:blipFill>
+        <p:spPr>
+          <a:xfrm>
+            <a:off x="1988378" y="4626864"/>
+            <a:ext cx="726895" cy="237744"/>
+          </a:xfrm>
+          <a:prstGeom prst="rect">
+            <a:avLst/>
+          </a:prstGeom>
+        </p:spPr>
+      </p:pic>
+      <p:pic>
+        <p:nvPicPr>
+          <p:cNvPr id="36" name="Picture 35" descr="cert_organic.png"/>
+          <p:cNvPicPr>
+            <a:picLocks noChangeAspect="1"/>
+          </p:cNvPicPr>
+          <p:nvPr/>
+        </p:nvPicPr>
+        <p:blipFill>
+          <a:blip r:embed="rId8"/>
+          <a:stretch>
+            <a:fillRect/>
+          </a:stretch>
+        </p:blipFill>
+        <p:spPr>
+          <a:xfrm>
+            <a:off x="2898153" y="4626864"/>
+            <a:ext cx="299764" cy="237744"/>
+          </a:xfrm>
+          <a:prstGeom prst="rect">
+            <a:avLst/>
+          </a:prstGeom>
+        </p:spPr>
+      </p:pic>
+      <p:pic>
+        <p:nvPicPr>
+          <p:cNvPr id="37" name="Picture 36" descr="cert_sedex.png"/>
+          <p:cNvPicPr>
+            <a:picLocks noChangeAspect="1"/>
+          </p:cNvPicPr>
+          <p:nvPr/>
+        </p:nvPicPr>
+        <p:blipFill>
+          <a:blip r:embed="rId9"/>
+          <a:stretch>
+            <a:fillRect/>
+          </a:stretch>
+        </p:blipFill>
+        <p:spPr>
+          <a:xfrm>
+            <a:off x="3380798" y="4626864"/>
+            <a:ext cx="236537" cy="237744"/>
+          </a:xfrm>
+          <a:prstGeom prst="rect">
+            <a:avLst/>
+          </a:prstGeom>
+        </p:spPr>
+      </p:pic>
+      <p:sp>
+        <p:nvSpPr>
+          <p:cNvPr id="38" name="TextBox 37"/>
           <p:cNvSpPr txBox="1"/>
           <p:nvPr/>
         </p:nvSpPr>
@@ -34969,16 +35105,83 @@
           <a:p/>
         </p:txBody>
       </p:sp>
-      <p:sp>
-        <p:nvSpPr>
-          <p:cNvPr id="4" name="Rounded Rectangle 3"/>
+      <p:pic>
+        <p:nvPicPr>
+          <p:cNvPr id="4" name="Picture 3" descr="plant_thainichi.png"/>
+          <p:cNvPicPr>
+            <a:picLocks noChangeAspect="1"/>
+          </p:cNvPicPr>
+          <p:nvPr/>
+        </p:nvPicPr>
+        <p:blipFill>
+          <a:blip r:embed="rId2"/>
+          <a:srcRect t="10606" b="10606"/>
+          <a:stretch>
+            <a:fillRect/>
+          </a:stretch>
+        </p:blipFill>
+        <p:spPr>
+          <a:xfrm>
+            <a:off x="5349240" y="0"/>
+            <a:ext cx="3794760" cy="3072384"/>
+          </a:xfrm>
+          <a:prstGeom prst="rect">
+            <a:avLst/>
+          </a:prstGeom>
+        </p:spPr>
+      </p:pic>
+      <p:sp>
+        <p:nvSpPr>
+          <p:cNvPr id="5" name="Rectangle 4"/>
           <p:cNvSpPr/>
           <p:nvPr/>
         </p:nvSpPr>
         <p:spPr>
           <a:xfrm>
-            <a:off x="5806440" y="1005840"/>
-            <a:ext cx="2880360" cy="2331720"/>
+            <a:off x="5349240" y="3072384"/>
+            <a:ext cx="3794760" cy="54864"/>
+          </a:xfrm>
+          <a:prstGeom prst="rect">
+            <a:avLst/>
+          </a:prstGeom>
+          <a:solidFill>
+            <a:srgbClr val="6C949A"/>
+          </a:solidFill>
+          <a:ln>
+            <a:noFill/>
+          </a:ln>
+          <a:effectLst/>
+        </p:spPr>
+        <p:style>
+          <a:lnRef idx="1">
+            <a:schemeClr val="accent1"/>
+          </a:lnRef>
+          <a:fillRef idx="3">
+            <a:schemeClr val="accent1"/>
+          </a:fillRef>
+          <a:effectRef idx="2">
+            <a:schemeClr val="accent1"/>
+          </a:effectRef>
+          <a:fontRef idx="minor">
+            <a:schemeClr val="lt1"/>
+          </a:fontRef>
+        </p:style>
+        <p:txBody>
+          <a:bodyPr rtlCol="0" anchor="ctr"/>
+          <a:lstStyle/>
+          <a:p/>
+        </p:txBody>
+      </p:sp>
+      <p:sp>
+        <p:nvSpPr>
+          <p:cNvPr id="6" name="Rounded Rectangle 5"/>
+          <p:cNvSpPr/>
+          <p:nvPr/>
+        </p:nvSpPr>
+        <p:spPr>
+          <a:xfrm>
+            <a:off x="5806440" y="2542032"/>
+            <a:ext cx="2880360" cy="1133856"/>
           </a:xfrm>
           <a:prstGeom prst="roundRect">
             <a:avLst>
@@ -35013,71 +35216,157 @@
           <a:p/>
         </p:txBody>
       </p:sp>
-      <p:sp>
-        <p:nvSpPr>
-          <p:cNvPr id="5" name="TextBox 4"/>
-          <p:cNvSpPr txBox="1"/>
-          <p:nvPr/>
-        </p:nvSpPr>
-        <p:spPr>
-          <a:xfrm>
-            <a:off x="5952744" y="1298448"/>
-            <a:ext cx="2587752" cy="914400"/>
-          </a:xfrm>
-          <a:prstGeom prst="rect">
-            <a:avLst/>
-          </a:prstGeom>
-          <a:noFill/>
-        </p:spPr>
-        <p:txBody>
-          <a:bodyPr wrap="square" lIns="0" rIns="0" tIns="0" bIns="0" anchor="ctr">
+      <p:pic>
+        <p:nvPicPr>
+          <p:cNvPr id="7" name="Picture 6" descr="logo_mizuho.png"/>
+          <p:cNvPicPr>
+            <a:picLocks noChangeAspect="1"/>
+          </p:cNvPicPr>
+          <p:nvPr/>
+        </p:nvPicPr>
+        <p:blipFill>
+          <a:blip r:embed="rId3"/>
+          <a:stretch>
+            <a:fillRect/>
+          </a:stretch>
+        </p:blipFill>
+        <p:spPr>
+          <a:xfrm>
+            <a:off x="6442988" y="2688336"/>
+            <a:ext cx="1607262" cy="841247"/>
+          </a:xfrm>
+          <a:prstGeom prst="rect">
+            <a:avLst/>
+          </a:prstGeom>
+        </p:spPr>
+      </p:pic>
+      <p:sp>
+        <p:nvSpPr>
+          <p:cNvPr id="8" name="TextBox 7"/>
+          <p:cNvSpPr txBox="1"/>
+          <p:nvPr/>
+        </p:nvSpPr>
+        <p:spPr>
+          <a:xfrm>
+            <a:off x="5806440" y="3749039"/>
+            <a:ext cx="2880360" cy="182880"/>
+          </a:xfrm>
+          <a:prstGeom prst="rect">
+            <a:avLst/>
+          </a:prstGeom>
+          <a:noFill/>
+        </p:spPr>
+        <p:txBody>
+          <a:bodyPr wrap="square" lIns="0" rIns="0" tIns="0" bIns="0" anchor="t">
             <a:spAutoFit/>
           </a:bodyPr>
           <a:lstStyle/>
           <a:p>
             <a:pPr algn="ctr">
               <a:lnSpc>
-                <a:spcPct val="108000"/>
-              </a:lnSpc>
-            </a:pPr>
-            <a:r>
-              <a:rPr sz="2500" b="1" i="0">
-                <a:solidFill>
-                  <a:srgbClr val="1D5860"/>
+                <a:spcPct val="100000"/>
+              </a:lnSpc>
+            </a:pPr>
+            <a:r>
+              <a:rPr sz="650" b="0" i="1">
+                <a:solidFill>
+                  <a:srgbClr val="C0D1D3"/>
+                </a:solidFill>
+                <a:latin typeface="Calibri"/>
+              </a:rPr>
+              <a:t>Продукція Mizuho · thai-nichi.com</a:t>
+            </a:r>
+          </a:p>
+        </p:txBody>
+      </p:sp>
+      <p:sp>
+        <p:nvSpPr>
+          <p:cNvPr id="9" name="TextBox 8"/>
+          <p:cNvSpPr txBox="1"/>
+          <p:nvPr/>
+        </p:nvSpPr>
+        <p:spPr>
+          <a:xfrm>
+            <a:off x="5349240" y="3986784"/>
+            <a:ext cx="3794760" cy="182880"/>
+          </a:xfrm>
+          <a:prstGeom prst="rect">
+            <a:avLst/>
+          </a:prstGeom>
+          <a:noFill/>
+        </p:spPr>
+        <p:txBody>
+          <a:bodyPr wrap="square" lIns="0" rIns="0" tIns="0" bIns="0" anchor="t">
+            <a:spAutoFit/>
+          </a:bodyPr>
+          <a:lstStyle/>
+          <a:p>
+            <a:pPr algn="ctr">
+              <a:lnSpc>
+                <a:spcPct val="100000"/>
+              </a:lnSpc>
+            </a:pPr>
+            <a:r>
+              <a:rPr sz="700" b="1" i="0" spc="90">
+                <a:solidFill>
+                  <a:srgbClr val="BBCED0"/>
+                </a:solidFill>
+                <a:latin typeface="Calibri"/>
+              </a:rPr>
+              <a:t>ВИРОБНИЦТВО</a:t>
+            </a:r>
+          </a:p>
+        </p:txBody>
+      </p:sp>
+      <p:sp>
+        <p:nvSpPr>
+          <p:cNvPr id="10" name="TextBox 9"/>
+          <p:cNvSpPr txBox="1"/>
+          <p:nvPr/>
+        </p:nvSpPr>
+        <p:spPr>
+          <a:xfrm>
+            <a:off x="5349240" y="4187952"/>
+            <a:ext cx="3794760" cy="274320"/>
+          </a:xfrm>
+          <a:prstGeom prst="rect">
+            <a:avLst/>
+          </a:prstGeom>
+          <a:noFill/>
+        </p:spPr>
+        <p:txBody>
+          <a:bodyPr wrap="square" lIns="0" rIns="0" tIns="0" bIns="0" anchor="t">
+            <a:spAutoFit/>
+          </a:bodyPr>
+          <a:lstStyle/>
+          <a:p>
+            <a:pPr algn="ctr">
+              <a:lnSpc>
+                <a:spcPct val="100000"/>
+              </a:lnSpc>
+            </a:pPr>
+            <a:r>
+              <a:rPr sz="1300" b="1" i="0">
+                <a:solidFill>
+                  <a:srgbClr val="FFFFFF"/>
                 </a:solidFill>
                 <a:latin typeface="Cambria"/>
               </a:rPr>
-              <a:t>THAI</a:t>
-            </a:r>
-          </a:p>
-          <a:p>
-            <a:pPr algn="ctr">
-              <a:lnSpc>
-                <a:spcPct val="108000"/>
-              </a:lnSpc>
-            </a:pPr>
-            <a:r>
-              <a:rPr sz="2500" b="1" i="0">
-                <a:solidFill>
-                  <a:srgbClr val="1D5860"/>
-                </a:solidFill>
-                <a:latin typeface="Cambria"/>
-              </a:rPr>
-              <a:t>NICHI</a:t>
-            </a:r>
-          </a:p>
-        </p:txBody>
-      </p:sp>
-      <p:sp>
-        <p:nvSpPr>
-          <p:cNvPr id="6" name="Rectangle 5"/>
+              <a:t>Таїланд</a:t>
+            </a:r>
+          </a:p>
+        </p:txBody>
+      </p:sp>
+      <p:sp>
+        <p:nvSpPr>
+          <p:cNvPr id="11" name="Rectangle 10"/>
           <p:cNvSpPr/>
           <p:nvPr/>
         </p:nvSpPr>
         <p:spPr>
           <a:xfrm>
-            <a:off x="6944868" y="2450592"/>
-            <a:ext cx="603504" cy="32004"/>
+            <a:off x="365760" y="475488"/>
+            <a:ext cx="237744" cy="237744"/>
           </a:xfrm>
           <a:prstGeom prst="rect">
             <a:avLst/>
@@ -35112,166 +35401,7 @@
       </p:sp>
       <p:sp>
         <p:nvSpPr>
-          <p:cNvPr id="7" name="TextBox 6"/>
-          <p:cNvSpPr txBox="1"/>
-          <p:nvPr/>
-        </p:nvSpPr>
-        <p:spPr>
-          <a:xfrm>
-            <a:off x="5952744" y="2633472"/>
-            <a:ext cx="2587752" cy="274320"/>
-          </a:xfrm>
-          <a:prstGeom prst="rect">
-            <a:avLst/>
-          </a:prstGeom>
-          <a:noFill/>
-        </p:spPr>
-        <p:txBody>
-          <a:bodyPr wrap="square" lIns="0" rIns="0" tIns="0" bIns="0" anchor="t">
-            <a:spAutoFit/>
-          </a:bodyPr>
-          <a:lstStyle/>
-          <a:p>
-            <a:pPr algn="ctr">
-              <a:lnSpc>
-                <a:spcPct val="100000"/>
-              </a:lnSpc>
-            </a:pPr>
-            <a:r>
-              <a:rPr sz="1050" b="0" i="0">
-                <a:solidFill>
-                  <a:srgbClr val="8A938D"/>
-                </a:solidFill>
-                <a:latin typeface="Calibri"/>
-              </a:rPr>
-              <a:t>Mizuho · Norimaki</a:t>
-            </a:r>
-          </a:p>
-        </p:txBody>
-      </p:sp>
-      <p:sp>
-        <p:nvSpPr>
-          <p:cNvPr id="8" name="TextBox 7"/>
-          <p:cNvSpPr txBox="1"/>
-          <p:nvPr/>
-        </p:nvSpPr>
-        <p:spPr>
-          <a:xfrm>
-            <a:off x="5349240" y="3694176"/>
-            <a:ext cx="3794760" cy="182880"/>
-          </a:xfrm>
-          <a:prstGeom prst="rect">
-            <a:avLst/>
-          </a:prstGeom>
-          <a:noFill/>
-        </p:spPr>
-        <p:txBody>
-          <a:bodyPr wrap="square" lIns="0" rIns="0" tIns="0" bIns="0" anchor="t">
-            <a:spAutoFit/>
-          </a:bodyPr>
-          <a:lstStyle/>
-          <a:p>
-            <a:pPr algn="ctr">
-              <a:lnSpc>
-                <a:spcPct val="100000"/>
-              </a:lnSpc>
-            </a:pPr>
-            <a:r>
-              <a:rPr sz="700" b="1" i="0" spc="90">
-                <a:solidFill>
-                  <a:srgbClr val="C0D1D3"/>
-                </a:solidFill>
-                <a:latin typeface="Calibri"/>
-              </a:rPr>
-              <a:t>ВИРОБНИЦТВО</a:t>
-            </a:r>
-          </a:p>
-        </p:txBody>
-      </p:sp>
-      <p:sp>
-        <p:nvSpPr>
-          <p:cNvPr id="9" name="TextBox 8"/>
-          <p:cNvSpPr txBox="1"/>
-          <p:nvPr/>
-        </p:nvSpPr>
-        <p:spPr>
-          <a:xfrm>
-            <a:off x="5349240" y="3895344"/>
-            <a:ext cx="3794760" cy="274320"/>
-          </a:xfrm>
-          <a:prstGeom prst="rect">
-            <a:avLst/>
-          </a:prstGeom>
-          <a:noFill/>
-        </p:spPr>
-        <p:txBody>
-          <a:bodyPr wrap="square" lIns="0" rIns="0" tIns="0" bIns="0" anchor="t">
-            <a:spAutoFit/>
-          </a:bodyPr>
-          <a:lstStyle/>
-          <a:p>
-            <a:pPr algn="ctr">
-              <a:lnSpc>
-                <a:spcPct val="100000"/>
-              </a:lnSpc>
-            </a:pPr>
-            <a:r>
-              <a:rPr sz="1300" b="1" i="0">
-                <a:solidFill>
-                  <a:srgbClr val="FFFFFF"/>
-                </a:solidFill>
-                <a:latin typeface="Cambria"/>
-              </a:rPr>
-              <a:t>Таїланд</a:t>
-            </a:r>
-          </a:p>
-        </p:txBody>
-      </p:sp>
-      <p:sp>
-        <p:nvSpPr>
-          <p:cNvPr id="10" name="Rectangle 9"/>
-          <p:cNvSpPr/>
-          <p:nvPr/>
-        </p:nvSpPr>
-        <p:spPr>
-          <a:xfrm>
-            <a:off x="365760" y="475488"/>
-            <a:ext cx="237744" cy="237744"/>
-          </a:xfrm>
-          <a:prstGeom prst="rect">
-            <a:avLst/>
-          </a:prstGeom>
-          <a:solidFill>
-            <a:srgbClr val="1D5B63"/>
-          </a:solidFill>
-          <a:ln>
-            <a:noFill/>
-          </a:ln>
-          <a:effectLst/>
-        </p:spPr>
-        <p:style>
-          <a:lnRef idx="1">
-            <a:schemeClr val="accent1"/>
-          </a:lnRef>
-          <a:fillRef idx="3">
-            <a:schemeClr val="accent1"/>
-          </a:fillRef>
-          <a:effectRef idx="2">
-            <a:schemeClr val="accent1"/>
-          </a:effectRef>
-          <a:fontRef idx="minor">
-            <a:schemeClr val="lt1"/>
-          </a:fontRef>
-        </p:style>
-        <p:txBody>
-          <a:bodyPr rtlCol="0" anchor="ctr"/>
-          <a:lstStyle/>
-          <a:p/>
-        </p:txBody>
-      </p:sp>
-      <p:sp>
-        <p:nvSpPr>
-          <p:cNvPr id="11" name="TextBox 10"/>
+          <p:cNvPr id="12" name="TextBox 11"/>
           <p:cNvSpPr txBox="1"/>
           <p:nvPr/>
         </p:nvSpPr>
@@ -35310,13 +35440,13 @@
       </p:sp>
       <p:sp>
         <p:nvSpPr>
-          <p:cNvPr id="12" name="TextBox 11"/>
-          <p:cNvSpPr txBox="1"/>
-          <p:nvPr/>
-        </p:nvSpPr>
-        <p:spPr>
-          <a:xfrm>
-            <a:off x="365760" y="859536"/>
+          <p:cNvPr id="13" name="TextBox 12"/>
+          <p:cNvSpPr txBox="1"/>
+          <p:nvPr/>
+        </p:nvSpPr>
+        <p:spPr>
+          <a:xfrm>
+            <a:off x="365760" y="841248"/>
             <a:ext cx="4617720" cy="914400"/>
           </a:xfrm>
           <a:prstGeom prst="rect">
@@ -35365,13 +35495,13 @@
       </p:sp>
       <p:sp>
         <p:nvSpPr>
-          <p:cNvPr id="13" name="TextBox 12"/>
-          <p:cNvSpPr txBox="1"/>
-          <p:nvPr/>
-        </p:nvSpPr>
-        <p:spPr>
-          <a:xfrm>
-            <a:off x="365760" y="1920240"/>
+          <p:cNvPr id="14" name="TextBox 13"/>
+          <p:cNvSpPr txBox="1"/>
+          <p:nvPr/>
+        </p:nvSpPr>
+        <p:spPr>
+          <a:xfrm>
+            <a:off x="365760" y="1901952"/>
             <a:ext cx="4617720" cy="274320"/>
           </a:xfrm>
           <a:prstGeom prst="rect">
@@ -35404,13 +35534,13 @@
       </p:sp>
       <p:sp>
         <p:nvSpPr>
-          <p:cNvPr id="14" name="Rounded Rectangle 13"/>
+          <p:cNvPr id="15" name="Rounded Rectangle 14"/>
           <p:cNvSpPr/>
           <p:nvPr/>
         </p:nvSpPr>
         <p:spPr>
           <a:xfrm>
-            <a:off x="365760" y="2286000"/>
+            <a:off x="365760" y="2249424"/>
             <a:ext cx="1025956" cy="274320"/>
           </a:xfrm>
           <a:prstGeom prst="roundRect">
@@ -35448,13 +35578,13 @@
       </p:sp>
       <p:sp>
         <p:nvSpPr>
-          <p:cNvPr id="15" name="TextBox 14"/>
-          <p:cNvSpPr txBox="1"/>
-          <p:nvPr/>
-        </p:nvSpPr>
-        <p:spPr>
-          <a:xfrm>
-            <a:off x="365760" y="2286000"/>
+          <p:cNvPr id="16" name="TextBox 15"/>
+          <p:cNvSpPr txBox="1"/>
+          <p:nvPr/>
+        </p:nvSpPr>
+        <p:spPr>
+          <a:xfrm>
+            <a:off x="365760" y="2249424"/>
             <a:ext cx="1025956" cy="274320"/>
           </a:xfrm>
           <a:prstGeom prst="rect">
@@ -35487,13 +35617,13 @@
       </p:sp>
       <p:sp>
         <p:nvSpPr>
-          <p:cNvPr id="16" name="TextBox 15"/>
-          <p:cNvSpPr txBox="1"/>
-          <p:nvPr/>
-        </p:nvSpPr>
-        <p:spPr>
-          <a:xfrm>
-            <a:off x="365760" y="2779776"/>
+          <p:cNvPr id="17" name="TextBox 16"/>
+          <p:cNvSpPr txBox="1"/>
+          <p:nvPr/>
+        </p:nvSpPr>
+        <p:spPr>
+          <a:xfrm>
+            <a:off x="365760" y="2706624"/>
             <a:ext cx="4617720" cy="146304"/>
           </a:xfrm>
           <a:prstGeom prst="rect">
@@ -35526,14 +35656,14 @@
       </p:sp>
       <p:sp>
         <p:nvSpPr>
-          <p:cNvPr id="17" name="TextBox 16"/>
-          <p:cNvSpPr txBox="1"/>
-          <p:nvPr/>
-        </p:nvSpPr>
-        <p:spPr>
-          <a:xfrm>
-            <a:off x="365760" y="2962656"/>
-            <a:ext cx="4617720" cy="731520"/>
+          <p:cNvPr id="18" name="TextBox 17"/>
+          <p:cNvSpPr txBox="1"/>
+          <p:nvPr/>
+        </p:nvSpPr>
+        <p:spPr>
+          <a:xfrm>
+            <a:off x="365760" y="2889504"/>
+            <a:ext cx="4617720" cy="658368"/>
           </a:xfrm>
           <a:prstGeom prst="rect">
             <a:avLst/>
@@ -35548,7 +35678,7 @@
           <a:p>
             <a:pPr algn="l">
               <a:lnSpc>
-                <a:spcPct val="132000"/>
+                <a:spcPct val="130000"/>
               </a:lnSpc>
             </a:pPr>
             <a:r>
@@ -35565,7 +35695,7 @@
       </p:sp>
       <p:sp>
         <p:nvSpPr>
-          <p:cNvPr id="18" name="Rounded Rectangle 17"/>
+          <p:cNvPr id="19" name="Rounded Rectangle 18"/>
           <p:cNvSpPr/>
           <p:nvPr/>
         </p:nvSpPr>
@@ -35611,7 +35741,7 @@
       </p:sp>
       <p:sp>
         <p:nvSpPr>
-          <p:cNvPr id="19" name="Rectangle 18"/>
+          <p:cNvPr id="20" name="Rectangle 19"/>
           <p:cNvSpPr/>
           <p:nvPr/>
         </p:nvSpPr>
@@ -35653,14 +35783,14 @@
       </p:sp>
       <p:sp>
         <p:nvSpPr>
-          <p:cNvPr id="20" name="TextBox 19"/>
-          <p:cNvSpPr txBox="1"/>
-          <p:nvPr/>
-        </p:nvSpPr>
-        <p:spPr>
-          <a:xfrm>
-            <a:off x="365760" y="3950208"/>
-            <a:ext cx="1481328" cy="292608"/>
+          <p:cNvPr id="21" name="TextBox 20"/>
+          <p:cNvSpPr txBox="1"/>
+          <p:nvPr/>
+        </p:nvSpPr>
+        <p:spPr>
+          <a:xfrm>
+            <a:off x="365760" y="3931920"/>
+            <a:ext cx="1481328" cy="274320"/>
           </a:xfrm>
           <a:prstGeom prst="rect">
             <a:avLst/>
@@ -35692,14 +35822,14 @@
       </p:sp>
       <p:sp>
         <p:nvSpPr>
-          <p:cNvPr id="21" name="TextBox 20"/>
-          <p:cNvSpPr txBox="1"/>
-          <p:nvPr/>
-        </p:nvSpPr>
-        <p:spPr>
-          <a:xfrm>
-            <a:off x="457200" y="4279392"/>
-            <a:ext cx="1298448" cy="329184"/>
+          <p:cNvPr id="22" name="TextBox 21"/>
+          <p:cNvSpPr txBox="1"/>
+          <p:nvPr/>
+        </p:nvSpPr>
+        <p:spPr>
+          <a:xfrm>
+            <a:off x="457200" y="4206240"/>
+            <a:ext cx="1298448" cy="310896"/>
           </a:xfrm>
           <a:prstGeom prst="rect">
             <a:avLst/>
@@ -35714,7 +35844,7 @@
           <a:p>
             <a:pPr algn="ctr">
               <a:lnSpc>
-                <a:spcPct val="114000"/>
+                <a:spcPct val="112000"/>
               </a:lnSpc>
             </a:pPr>
             <a:r>
@@ -35730,7 +35860,7 @@
           <a:p>
             <a:pPr algn="ctr">
               <a:lnSpc>
-                <a:spcPct val="114000"/>
+                <a:spcPct val="112000"/>
               </a:lnSpc>
             </a:pPr>
             <a:r>
@@ -35747,7 +35877,7 @@
       </p:sp>
       <p:sp>
         <p:nvSpPr>
-          <p:cNvPr id="22" name="Rounded Rectangle 21"/>
+          <p:cNvPr id="23" name="Rounded Rectangle 22"/>
           <p:cNvSpPr/>
           <p:nvPr/>
         </p:nvSpPr>
@@ -35793,7 +35923,7 @@
       </p:sp>
       <p:sp>
         <p:nvSpPr>
-          <p:cNvPr id="23" name="Rectangle 22"/>
+          <p:cNvPr id="24" name="Rectangle 23"/>
           <p:cNvSpPr/>
           <p:nvPr/>
         </p:nvSpPr>
@@ -35835,14 +35965,14 @@
       </p:sp>
       <p:sp>
         <p:nvSpPr>
-          <p:cNvPr id="24" name="TextBox 23"/>
-          <p:cNvSpPr txBox="1"/>
-          <p:nvPr/>
-        </p:nvSpPr>
-        <p:spPr>
-          <a:xfrm>
-            <a:off x="1979676" y="3950208"/>
-            <a:ext cx="1481328" cy="292608"/>
+          <p:cNvPr id="25" name="TextBox 24"/>
+          <p:cNvSpPr txBox="1"/>
+          <p:nvPr/>
+        </p:nvSpPr>
+        <p:spPr>
+          <a:xfrm>
+            <a:off x="1979676" y="3931920"/>
+            <a:ext cx="1481328" cy="274320"/>
           </a:xfrm>
           <a:prstGeom prst="rect">
             <a:avLst/>
@@ -35874,14 +36004,14 @@
       </p:sp>
       <p:sp>
         <p:nvSpPr>
-          <p:cNvPr id="25" name="TextBox 24"/>
-          <p:cNvSpPr txBox="1"/>
-          <p:nvPr/>
-        </p:nvSpPr>
-        <p:spPr>
-          <a:xfrm>
-            <a:off x="2071116" y="4279392"/>
-            <a:ext cx="1298448" cy="329184"/>
+          <p:cNvPr id="26" name="TextBox 25"/>
+          <p:cNvSpPr txBox="1"/>
+          <p:nvPr/>
+        </p:nvSpPr>
+        <p:spPr>
+          <a:xfrm>
+            <a:off x="2071116" y="4206240"/>
+            <a:ext cx="1298448" cy="310896"/>
           </a:xfrm>
           <a:prstGeom prst="rect">
             <a:avLst/>
@@ -35896,7 +36026,7 @@
           <a:p>
             <a:pPr algn="ctr">
               <a:lnSpc>
-                <a:spcPct val="114000"/>
+                <a:spcPct val="112000"/>
               </a:lnSpc>
             </a:pPr>
             <a:r>
@@ -35912,7 +36042,7 @@
           <a:p>
             <a:pPr algn="ctr">
               <a:lnSpc>
-                <a:spcPct val="114000"/>
+                <a:spcPct val="112000"/>
               </a:lnSpc>
             </a:pPr>
             <a:r>
@@ -35929,7 +36059,7 @@
       </p:sp>
       <p:sp>
         <p:nvSpPr>
-          <p:cNvPr id="26" name="Rounded Rectangle 25"/>
+          <p:cNvPr id="27" name="Rounded Rectangle 26"/>
           <p:cNvSpPr/>
           <p:nvPr/>
         </p:nvSpPr>
@@ -35975,7 +36105,7 @@
       </p:sp>
       <p:sp>
         <p:nvSpPr>
-          <p:cNvPr id="27" name="Rectangle 26"/>
+          <p:cNvPr id="28" name="Rectangle 27"/>
           <p:cNvSpPr/>
           <p:nvPr/>
         </p:nvSpPr>
@@ -36017,14 +36147,14 @@
       </p:sp>
       <p:sp>
         <p:nvSpPr>
-          <p:cNvPr id="28" name="TextBox 27"/>
-          <p:cNvSpPr txBox="1"/>
-          <p:nvPr/>
-        </p:nvSpPr>
-        <p:spPr>
-          <a:xfrm>
-            <a:off x="3593592" y="3950208"/>
-            <a:ext cx="1481328" cy="292608"/>
+          <p:cNvPr id="29" name="TextBox 28"/>
+          <p:cNvSpPr txBox="1"/>
+          <p:nvPr/>
+        </p:nvSpPr>
+        <p:spPr>
+          <a:xfrm>
+            <a:off x="3593592" y="3931920"/>
+            <a:ext cx="1481328" cy="274320"/>
           </a:xfrm>
           <a:prstGeom prst="rect">
             <a:avLst/>
@@ -36056,14 +36186,14 @@
       </p:sp>
       <p:sp>
         <p:nvSpPr>
-          <p:cNvPr id="29" name="TextBox 28"/>
-          <p:cNvSpPr txBox="1"/>
-          <p:nvPr/>
-        </p:nvSpPr>
-        <p:spPr>
-          <a:xfrm>
-            <a:off x="3685032" y="4279392"/>
-            <a:ext cx="1298448" cy="329184"/>
+          <p:cNvPr id="30" name="TextBox 29"/>
+          <p:cNvSpPr txBox="1"/>
+          <p:nvPr/>
+        </p:nvSpPr>
+        <p:spPr>
+          <a:xfrm>
+            <a:off x="3685032" y="4206240"/>
+            <a:ext cx="1298448" cy="310896"/>
           </a:xfrm>
           <a:prstGeom prst="rect">
             <a:avLst/>
@@ -36078,7 +36208,7 @@
           <a:p>
             <a:pPr algn="ctr">
               <a:lnSpc>
-                <a:spcPct val="114000"/>
+                <a:spcPct val="112000"/>
               </a:lnSpc>
             </a:pPr>
             <a:r>
@@ -36094,7 +36224,7 @@
           <a:p>
             <a:pPr algn="ctr">
               <a:lnSpc>
-                <a:spcPct val="114000"/>
+                <a:spcPct val="112000"/>
               </a:lnSpc>
             </a:pPr>
             <a:r>
@@ -36111,7 +36241,7 @@
       </p:sp>
       <p:sp>
         <p:nvSpPr>
-          <p:cNvPr id="30" name="TextBox 29"/>
+          <p:cNvPr id="31" name="TextBox 30"/>
           <p:cNvSpPr txBox="1"/>
           <p:nvPr/>
         </p:nvSpPr>
@@ -42784,8 +42914,8 @@
         </p:nvSpPr>
         <p:spPr>
           <a:xfrm>
-            <a:off x="5806440" y="1005840"/>
-            <a:ext cx="2880360" cy="2331720"/>
+            <a:off x="5806440" y="1225296"/>
+            <a:ext cx="2880360" cy="1463040"/>
           </a:xfrm>
           <a:prstGeom prst="roundRect">
             <a:avLst>
@@ -42836,7 +42966,7 @@
         </p:blipFill>
         <p:spPr>
           <a:xfrm>
-            <a:off x="6499859" y="1516888"/>
+            <a:off x="6499859" y="1718056"/>
             <a:ext cx="1493520" cy="477520"/>
           </a:xfrm>
           <a:prstGeom prst="rect">
@@ -42846,14 +42976,131 @@
       </p:pic>
       <p:sp>
         <p:nvSpPr>
-          <p:cNvPr id="6" name="Rectangle 5"/>
+          <p:cNvPr id="6" name="TextBox 5"/>
+          <p:cNvSpPr txBox="1"/>
+          <p:nvPr/>
+        </p:nvSpPr>
+        <p:spPr>
+          <a:xfrm>
+            <a:off x="5806440" y="2834640"/>
+            <a:ext cx="2880360" cy="274320"/>
+          </a:xfrm>
+          <a:prstGeom prst="rect">
+            <a:avLst/>
+          </a:prstGeom>
+          <a:noFill/>
+        </p:spPr>
+        <p:txBody>
+          <a:bodyPr wrap="square" lIns="0" rIns="0" tIns="0" bIns="0" anchor="t">
+            <a:spAutoFit/>
+          </a:bodyPr>
+          <a:lstStyle/>
+          <a:p>
+            <a:pPr algn="ctr">
+              <a:lnSpc>
+                <a:spcPct val="100000"/>
+              </a:lnSpc>
+            </a:pPr>
+            <a:r>
+              <a:rPr sz="1050" b="0" i="0">
+                <a:solidFill>
+                  <a:srgbClr val="D5E4D8"/>
+                </a:solidFill>
+                <a:latin typeface="Calibri"/>
+              </a:rPr>
+              <a:t>KOKIRI Wow</a:t>
+            </a:r>
+          </a:p>
+        </p:txBody>
+      </p:sp>
+      <p:sp>
+        <p:nvSpPr>
+          <p:cNvPr id="7" name="TextBox 6"/>
+          <p:cNvSpPr txBox="1"/>
+          <p:nvPr/>
+        </p:nvSpPr>
+        <p:spPr>
+          <a:xfrm>
+            <a:off x="5349240" y="3749039"/>
+            <a:ext cx="3794760" cy="182880"/>
+          </a:xfrm>
+          <a:prstGeom prst="rect">
+            <a:avLst/>
+          </a:prstGeom>
+          <a:noFill/>
+        </p:spPr>
+        <p:txBody>
+          <a:bodyPr wrap="square" lIns="0" rIns="0" tIns="0" bIns="0" anchor="t">
+            <a:spAutoFit/>
+          </a:bodyPr>
+          <a:lstStyle/>
+          <a:p>
+            <a:pPr algn="ctr">
+              <a:lnSpc>
+                <a:spcPct val="100000"/>
+              </a:lnSpc>
+            </a:pPr>
+            <a:r>
+              <a:rPr sz="700" b="1" i="0" spc="90">
+                <a:solidFill>
+                  <a:srgbClr val="C1D7C5"/>
+                </a:solidFill>
+                <a:latin typeface="Calibri"/>
+              </a:rPr>
+              <a:t>ВИРОБНИЦТВО</a:t>
+            </a:r>
+          </a:p>
+        </p:txBody>
+      </p:sp>
+      <p:sp>
+        <p:nvSpPr>
+          <p:cNvPr id="8" name="TextBox 7"/>
+          <p:cNvSpPr txBox="1"/>
+          <p:nvPr/>
+        </p:nvSpPr>
+        <p:spPr>
+          <a:xfrm>
+            <a:off x="5349240" y="3950207"/>
+            <a:ext cx="3794760" cy="274320"/>
+          </a:xfrm>
+          <a:prstGeom prst="rect">
+            <a:avLst/>
+          </a:prstGeom>
+          <a:noFill/>
+        </p:spPr>
+        <p:txBody>
+          <a:bodyPr wrap="square" lIns="0" rIns="0" tIns="0" bIns="0" anchor="t">
+            <a:spAutoFit/>
+          </a:bodyPr>
+          <a:lstStyle/>
+          <a:p>
+            <a:pPr algn="ctr">
+              <a:lnSpc>
+                <a:spcPct val="100000"/>
+              </a:lnSpc>
+            </a:pPr>
+            <a:r>
+              <a:rPr sz="1300" b="1" i="0">
+                <a:solidFill>
+                  <a:srgbClr val="FFFFFF"/>
+                </a:solidFill>
+                <a:latin typeface="Cambria"/>
+              </a:rPr>
+              <a:t>Таїланд</a:t>
+            </a:r>
+          </a:p>
+        </p:txBody>
+      </p:sp>
+      <p:sp>
+        <p:nvSpPr>
+          <p:cNvPr id="9" name="Rectangle 8"/>
           <p:cNvSpPr/>
           <p:nvPr/>
         </p:nvSpPr>
         <p:spPr>
           <a:xfrm>
-            <a:off x="6944868" y="2450592"/>
-            <a:ext cx="603504" cy="32004"/>
+            <a:off x="365760" y="475488"/>
+            <a:ext cx="237744" cy="237744"/>
           </a:xfrm>
           <a:prstGeom prst="rect">
             <a:avLst/>
@@ -42888,166 +43135,7 @@
       </p:sp>
       <p:sp>
         <p:nvSpPr>
-          <p:cNvPr id="7" name="TextBox 6"/>
-          <p:cNvSpPr txBox="1"/>
-          <p:nvPr/>
-        </p:nvSpPr>
-        <p:spPr>
-          <a:xfrm>
-            <a:off x="5952744" y="2633472"/>
-            <a:ext cx="2587752" cy="274320"/>
-          </a:xfrm>
-          <a:prstGeom prst="rect">
-            <a:avLst/>
-          </a:prstGeom>
-          <a:noFill/>
-        </p:spPr>
-        <p:txBody>
-          <a:bodyPr wrap="square" lIns="0" rIns="0" tIns="0" bIns="0" anchor="t">
-            <a:spAutoFit/>
-          </a:bodyPr>
-          <a:lstStyle/>
-          <a:p>
-            <a:pPr algn="ctr">
-              <a:lnSpc>
-                <a:spcPct val="100000"/>
-              </a:lnSpc>
-            </a:pPr>
-            <a:r>
-              <a:rPr sz="1050" b="0" i="0">
-                <a:solidFill>
-                  <a:srgbClr val="8A938D"/>
-                </a:solidFill>
-                <a:latin typeface="Calibri"/>
-              </a:rPr>
-              <a:t>KOKIRI Wow</a:t>
-            </a:r>
-          </a:p>
-        </p:txBody>
-      </p:sp>
-      <p:sp>
-        <p:nvSpPr>
-          <p:cNvPr id="8" name="TextBox 7"/>
-          <p:cNvSpPr txBox="1"/>
-          <p:nvPr/>
-        </p:nvSpPr>
-        <p:spPr>
-          <a:xfrm>
-            <a:off x="5349240" y="3694176"/>
-            <a:ext cx="3794760" cy="182880"/>
-          </a:xfrm>
-          <a:prstGeom prst="rect">
-            <a:avLst/>
-          </a:prstGeom>
-          <a:noFill/>
-        </p:spPr>
-        <p:txBody>
-          <a:bodyPr wrap="square" lIns="0" rIns="0" tIns="0" bIns="0" anchor="t">
-            <a:spAutoFit/>
-          </a:bodyPr>
-          <a:lstStyle/>
-          <a:p>
-            <a:pPr algn="ctr">
-              <a:lnSpc>
-                <a:spcPct val="100000"/>
-              </a:lnSpc>
-            </a:pPr>
-            <a:r>
-              <a:rPr sz="700" b="1" i="0" spc="90">
-                <a:solidFill>
-                  <a:srgbClr val="C5DAC9"/>
-                </a:solidFill>
-                <a:latin typeface="Calibri"/>
-              </a:rPr>
-              <a:t>ВИРОБНИЦТВО</a:t>
-            </a:r>
-          </a:p>
-        </p:txBody>
-      </p:sp>
-      <p:sp>
-        <p:nvSpPr>
-          <p:cNvPr id="9" name="TextBox 8"/>
-          <p:cNvSpPr txBox="1"/>
-          <p:nvPr/>
-        </p:nvSpPr>
-        <p:spPr>
-          <a:xfrm>
-            <a:off x="5349240" y="3895344"/>
-            <a:ext cx="3794760" cy="274320"/>
-          </a:xfrm>
-          <a:prstGeom prst="rect">
-            <a:avLst/>
-          </a:prstGeom>
-          <a:noFill/>
-        </p:spPr>
-        <p:txBody>
-          <a:bodyPr wrap="square" lIns="0" rIns="0" tIns="0" bIns="0" anchor="t">
-            <a:spAutoFit/>
-          </a:bodyPr>
-          <a:lstStyle/>
-          <a:p>
-            <a:pPr algn="ctr">
-              <a:lnSpc>
-                <a:spcPct val="100000"/>
-              </a:lnSpc>
-            </a:pPr>
-            <a:r>
-              <a:rPr sz="1300" b="1" i="0">
-                <a:solidFill>
-                  <a:srgbClr val="FFFFFF"/>
-                </a:solidFill>
-                <a:latin typeface="Cambria"/>
-              </a:rPr>
-              <a:t>Таїланд</a:t>
-            </a:r>
-          </a:p>
-        </p:txBody>
-      </p:sp>
-      <p:sp>
-        <p:nvSpPr>
-          <p:cNvPr id="10" name="Rectangle 9"/>
-          <p:cNvSpPr/>
-          <p:nvPr/>
-        </p:nvSpPr>
-        <p:spPr>
-          <a:xfrm>
-            <a:off x="365760" y="475488"/>
-            <a:ext cx="237744" cy="237744"/>
-          </a:xfrm>
-          <a:prstGeom prst="rect">
-            <a:avLst/>
-          </a:prstGeom>
-          <a:solidFill>
-            <a:srgbClr val="2F7A3E"/>
-          </a:solidFill>
-          <a:ln>
-            <a:noFill/>
-          </a:ln>
-          <a:effectLst/>
-        </p:spPr>
-        <p:style>
-          <a:lnRef idx="1">
-            <a:schemeClr val="accent1"/>
-          </a:lnRef>
-          <a:fillRef idx="3">
-            <a:schemeClr val="accent1"/>
-          </a:fillRef>
-          <a:effectRef idx="2">
-            <a:schemeClr val="accent1"/>
-          </a:effectRef>
-          <a:fontRef idx="minor">
-            <a:schemeClr val="lt1"/>
-          </a:fontRef>
-        </p:style>
-        <p:txBody>
-          <a:bodyPr rtlCol="0" anchor="ctr"/>
-          <a:lstStyle/>
-          <a:p/>
-        </p:txBody>
-      </p:sp>
-      <p:sp>
-        <p:nvSpPr>
-          <p:cNvPr id="11" name="TextBox 10"/>
+          <p:cNvPr id="10" name="TextBox 9"/>
           <p:cNvSpPr txBox="1"/>
           <p:nvPr/>
         </p:nvSpPr>
@@ -43086,14 +43174,69 @@
       </p:sp>
       <p:sp>
         <p:nvSpPr>
+          <p:cNvPr id="11" name="TextBox 10"/>
+          <p:cNvSpPr txBox="1"/>
+          <p:nvPr/>
+        </p:nvSpPr>
+        <p:spPr>
+          <a:xfrm>
+            <a:off x="365760" y="841248"/>
+            <a:ext cx="4617720" cy="914400"/>
+          </a:xfrm>
+          <a:prstGeom prst="rect">
+            <a:avLst/>
+          </a:prstGeom>
+          <a:noFill/>
+        </p:spPr>
+        <p:txBody>
+          <a:bodyPr wrap="square" lIns="0" rIns="0" tIns="0" bIns="0" anchor="t">
+            <a:spAutoFit/>
+          </a:bodyPr>
+          <a:lstStyle/>
+          <a:p>
+            <a:pPr algn="l">
+              <a:lnSpc>
+                <a:spcPct val="108000"/>
+              </a:lnSpc>
+            </a:pPr>
+            <a:r>
+              <a:rPr sz="2600" b="1" i="0">
+                <a:solidFill>
+                  <a:srgbClr val="14241F"/>
+                </a:solidFill>
+                <a:latin typeface="Cambria"/>
+              </a:rPr>
+              <a:t>TMK (Thailand)</a:t>
+            </a:r>
+          </a:p>
+          <a:p>
+            <a:pPr algn="l">
+              <a:lnSpc>
+                <a:spcPct val="108000"/>
+              </a:lnSpc>
+            </a:pPr>
+            <a:r>
+              <a:rPr sz="2600" b="1" i="0">
+                <a:solidFill>
+                  <a:srgbClr val="14241F"/>
+                </a:solidFill>
+                <a:latin typeface="Cambria"/>
+              </a:rPr>
+              <a:t>Co., Ltd.</a:t>
+            </a:r>
+          </a:p>
+        </p:txBody>
+      </p:sp>
+      <p:sp>
+        <p:nvSpPr>
           <p:cNvPr id="12" name="TextBox 11"/>
           <p:cNvSpPr txBox="1"/>
           <p:nvPr/>
         </p:nvSpPr>
         <p:spPr>
           <a:xfrm>
-            <a:off x="365760" y="859536"/>
-            <a:ext cx="4617720" cy="914400"/>
+            <a:off x="365760" y="1901952"/>
+            <a:ext cx="4617720" cy="274320"/>
           </a:xfrm>
           <a:prstGeom prst="rect">
             <a:avLst/>
@@ -43108,61 +43251,6 @@
           <a:p>
             <a:pPr algn="l">
               <a:lnSpc>
-                <a:spcPct val="108000"/>
-              </a:lnSpc>
-            </a:pPr>
-            <a:r>
-              <a:rPr sz="2600" b="1" i="0">
-                <a:solidFill>
-                  <a:srgbClr val="14241F"/>
-                </a:solidFill>
-                <a:latin typeface="Cambria"/>
-              </a:rPr>
-              <a:t>TMK (Thailand)</a:t>
-            </a:r>
-          </a:p>
-          <a:p>
-            <a:pPr algn="l">
-              <a:lnSpc>
-                <a:spcPct val="108000"/>
-              </a:lnSpc>
-            </a:pPr>
-            <a:r>
-              <a:rPr sz="2600" b="1" i="0">
-                <a:solidFill>
-                  <a:srgbClr val="14241F"/>
-                </a:solidFill>
-                <a:latin typeface="Cambria"/>
-              </a:rPr>
-              <a:t>Co., Ltd.</a:t>
-            </a:r>
-          </a:p>
-        </p:txBody>
-      </p:sp>
-      <p:sp>
-        <p:nvSpPr>
-          <p:cNvPr id="13" name="TextBox 12"/>
-          <p:cNvSpPr txBox="1"/>
-          <p:nvPr/>
-        </p:nvSpPr>
-        <p:spPr>
-          <a:xfrm>
-            <a:off x="365760" y="1920240"/>
-            <a:ext cx="4617720" cy="274320"/>
-          </a:xfrm>
-          <a:prstGeom prst="rect">
-            <a:avLst/>
-          </a:prstGeom>
-          <a:noFill/>
-        </p:spPr>
-        <p:txBody>
-          <a:bodyPr wrap="square" lIns="0" rIns="0" tIns="0" bIns="0" anchor="t">
-            <a:spAutoFit/>
-          </a:bodyPr>
-          <a:lstStyle/>
-          <a:p>
-            <a:pPr algn="l">
-              <a:lnSpc>
                 <a:spcPct val="100000"/>
               </a:lnSpc>
             </a:pPr>
@@ -43180,13 +43268,13 @@
       </p:sp>
       <p:sp>
         <p:nvSpPr>
-          <p:cNvPr id="14" name="Rounded Rectangle 13"/>
+          <p:cNvPr id="13" name="Rounded Rectangle 12"/>
           <p:cNvSpPr/>
           <p:nvPr/>
         </p:nvSpPr>
         <p:spPr>
           <a:xfrm>
-            <a:off x="365760" y="2286000"/>
+            <a:off x="365760" y="2249424"/>
             <a:ext cx="1025956" cy="274320"/>
           </a:xfrm>
           <a:prstGeom prst="roundRect">
@@ -43224,39 +43312,78 @@
       </p:sp>
       <p:sp>
         <p:nvSpPr>
+          <p:cNvPr id="14" name="TextBox 13"/>
+          <p:cNvSpPr txBox="1"/>
+          <p:nvPr/>
+        </p:nvSpPr>
+        <p:spPr>
+          <a:xfrm>
+            <a:off x="365760" y="2249424"/>
+            <a:ext cx="1025956" cy="274320"/>
+          </a:xfrm>
+          <a:prstGeom prst="rect">
+            <a:avLst/>
+          </a:prstGeom>
+          <a:noFill/>
+        </p:spPr>
+        <p:txBody>
+          <a:bodyPr wrap="square" lIns="0" rIns="0" tIns="0" bIns="0" anchor="ctr">
+            <a:spAutoFit/>
+          </a:bodyPr>
+          <a:lstStyle/>
+          <a:p>
+            <a:pPr algn="ctr">
+              <a:lnSpc>
+                <a:spcPct val="100000"/>
+              </a:lnSpc>
+            </a:pPr>
+            <a:r>
+              <a:rPr sz="850" b="1" i="0">
+                <a:solidFill>
+                  <a:srgbClr val="2E763C"/>
+                </a:solidFill>
+                <a:latin typeface="Calibri"/>
+              </a:rPr>
+              <a:t>FOB Bangkok</a:t>
+            </a:r>
+          </a:p>
+        </p:txBody>
+      </p:sp>
+      <p:sp>
+        <p:nvSpPr>
           <p:cNvPr id="15" name="TextBox 14"/>
           <p:cNvSpPr txBox="1"/>
           <p:nvPr/>
         </p:nvSpPr>
         <p:spPr>
           <a:xfrm>
-            <a:off x="365760" y="2286000"/>
-            <a:ext cx="1025956" cy="274320"/>
-          </a:xfrm>
-          <a:prstGeom prst="rect">
-            <a:avLst/>
-          </a:prstGeom>
-          <a:noFill/>
-        </p:spPr>
-        <p:txBody>
-          <a:bodyPr wrap="square" lIns="0" rIns="0" tIns="0" bIns="0" anchor="ctr">
-            <a:spAutoFit/>
-          </a:bodyPr>
-          <a:lstStyle/>
-          <a:p>
-            <a:pPr algn="ctr">
-              <a:lnSpc>
-                <a:spcPct val="100000"/>
-              </a:lnSpc>
-            </a:pPr>
-            <a:r>
-              <a:rPr sz="850" b="1" i="0">
-                <a:solidFill>
-                  <a:srgbClr val="2E763C"/>
-                </a:solidFill>
-                <a:latin typeface="Calibri"/>
-              </a:rPr>
-              <a:t>FOB Bangkok</a:t>
+            <a:off x="365760" y="2706624"/>
+            <a:ext cx="4617720" cy="146304"/>
+          </a:xfrm>
+          <a:prstGeom prst="rect">
+            <a:avLst/>
+          </a:prstGeom>
+          <a:noFill/>
+        </p:spPr>
+        <p:txBody>
+          <a:bodyPr wrap="square" lIns="0" rIns="0" tIns="0" bIns="0" anchor="t">
+            <a:spAutoFit/>
+          </a:bodyPr>
+          <a:lstStyle/>
+          <a:p>
+            <a:pPr algn="l">
+              <a:lnSpc>
+                <a:spcPct val="100000"/>
+              </a:lnSpc>
+            </a:pPr>
+            <a:r>
+              <a:rPr sz="700" b="1" i="0" spc="90">
+                <a:solidFill>
+                  <a:srgbClr val="2C713B"/>
+                </a:solidFill>
+                <a:latin typeface="Calibri"/>
+              </a:rPr>
+              <a:t>ПРО КОМПАНІЮ</a:t>
             </a:r>
           </a:p>
         </p:txBody>
@@ -43269,8 +43396,8 @@
         </p:nvSpPr>
         <p:spPr>
           <a:xfrm>
-            <a:off x="365760" y="2779776"/>
-            <a:ext cx="4617720" cy="146304"/>
+            <a:off x="365760" y="2889504"/>
+            <a:ext cx="4617720" cy="658368"/>
           </a:xfrm>
           <a:prstGeom prst="rect">
             <a:avLst/>
@@ -43285,46 +43412,7 @@
           <a:p>
             <a:pPr algn="l">
               <a:lnSpc>
-                <a:spcPct val="100000"/>
-              </a:lnSpc>
-            </a:pPr>
-            <a:r>
-              <a:rPr sz="700" b="1" i="0" spc="90">
-                <a:solidFill>
-                  <a:srgbClr val="2C713B"/>
-                </a:solidFill>
-                <a:latin typeface="Calibri"/>
-              </a:rPr>
-              <a:t>ПРО КОМПАНІЮ</a:t>
-            </a:r>
-          </a:p>
-        </p:txBody>
-      </p:sp>
-      <p:sp>
-        <p:nvSpPr>
-          <p:cNvPr id="17" name="TextBox 16"/>
-          <p:cNvSpPr txBox="1"/>
-          <p:nvPr/>
-        </p:nvSpPr>
-        <p:spPr>
-          <a:xfrm>
-            <a:off x="365760" y="2962656"/>
-            <a:ext cx="4617720" cy="731520"/>
-          </a:xfrm>
-          <a:prstGeom prst="rect">
-            <a:avLst/>
-          </a:prstGeom>
-          <a:noFill/>
-        </p:spPr>
-        <p:txBody>
-          <a:bodyPr wrap="square" lIns="0" rIns="0" tIns="0" bIns="0" anchor="t">
-            <a:spAutoFit/>
-          </a:bodyPr>
-          <a:lstStyle/>
-          <a:p>
-            <a:pPr algn="l">
-              <a:lnSpc>
-                <a:spcPct val="132000"/>
+                <a:spcPct val="130000"/>
               </a:lnSpc>
             </a:pPr>
             <a:r>
@@ -43341,7 +43429,7 @@
       </p:sp>
       <p:sp>
         <p:nvSpPr>
-          <p:cNvPr id="18" name="Rounded Rectangle 17"/>
+          <p:cNvPr id="17" name="Rounded Rectangle 16"/>
           <p:cNvSpPr/>
           <p:nvPr/>
         </p:nvSpPr>
@@ -43387,7 +43475,7 @@
       </p:sp>
       <p:sp>
         <p:nvSpPr>
-          <p:cNvPr id="19" name="Rectangle 18"/>
+          <p:cNvPr id="18" name="Rectangle 17"/>
           <p:cNvSpPr/>
           <p:nvPr/>
         </p:nvSpPr>
@@ -43429,14 +43517,53 @@
       </p:sp>
       <p:sp>
         <p:nvSpPr>
+          <p:cNvPr id="19" name="TextBox 18"/>
+          <p:cNvSpPr txBox="1"/>
+          <p:nvPr/>
+        </p:nvSpPr>
+        <p:spPr>
+          <a:xfrm>
+            <a:off x="365760" y="3931920"/>
+            <a:ext cx="1481328" cy="274320"/>
+          </a:xfrm>
+          <a:prstGeom prst="rect">
+            <a:avLst/>
+          </a:prstGeom>
+          <a:noFill/>
+        </p:spPr>
+        <p:txBody>
+          <a:bodyPr wrap="square" lIns="0" rIns="0" tIns="0" bIns="0" anchor="t">
+            <a:spAutoFit/>
+          </a:bodyPr>
+          <a:lstStyle/>
+          <a:p>
+            <a:pPr algn="ctr">
+              <a:lnSpc>
+                <a:spcPct val="100000"/>
+              </a:lnSpc>
+            </a:pPr>
+            <a:r>
+              <a:rPr sz="1700" b="1" i="0">
+                <a:solidFill>
+                  <a:srgbClr val="2E763C"/>
+                </a:solidFill>
+                <a:latin typeface="Cambria"/>
+              </a:rPr>
+              <a:t>10</a:t>
+            </a:r>
+          </a:p>
+        </p:txBody>
+      </p:sp>
+      <p:sp>
+        <p:nvSpPr>
           <p:cNvPr id="20" name="TextBox 19"/>
           <p:cNvSpPr txBox="1"/>
           <p:nvPr/>
         </p:nvSpPr>
         <p:spPr>
           <a:xfrm>
-            <a:off x="365760" y="3950208"/>
-            <a:ext cx="1481328" cy="292608"/>
+            <a:off x="457200" y="4206240"/>
+            <a:ext cx="1298448" cy="310896"/>
           </a:xfrm>
           <a:prstGeom prst="rect">
             <a:avLst/>
@@ -43451,46 +43578,23 @@
           <a:p>
             <a:pPr algn="ctr">
               <a:lnSpc>
-                <a:spcPct val="100000"/>
-              </a:lnSpc>
-            </a:pPr>
-            <a:r>
-              <a:rPr sz="1700" b="1" i="0">
-                <a:solidFill>
-                  <a:srgbClr val="2E763C"/>
-                </a:solidFill>
-                <a:latin typeface="Cambria"/>
-              </a:rPr>
-              <a:t>10</a:t>
-            </a:r>
-          </a:p>
-        </p:txBody>
-      </p:sp>
-      <p:sp>
-        <p:nvSpPr>
-          <p:cNvPr id="21" name="TextBox 20"/>
-          <p:cNvSpPr txBox="1"/>
-          <p:nvPr/>
-        </p:nvSpPr>
-        <p:spPr>
-          <a:xfrm>
-            <a:off x="457200" y="4279392"/>
-            <a:ext cx="1298448" cy="329184"/>
-          </a:xfrm>
-          <a:prstGeom prst="rect">
-            <a:avLst/>
-          </a:prstGeom>
-          <a:noFill/>
-        </p:spPr>
-        <p:txBody>
-          <a:bodyPr wrap="square" lIns="0" rIns="0" tIns="0" bIns="0" anchor="t">
-            <a:spAutoFit/>
-          </a:bodyPr>
-          <a:lstStyle/>
+                <a:spcPct val="112000"/>
+              </a:lnSpc>
+            </a:pPr>
+            <a:r>
+              <a:rPr sz="700" b="0" i="0">
+                <a:solidFill>
+                  <a:srgbClr val="8A938D"/>
+                </a:solidFill>
+                <a:latin typeface="Calibri"/>
+              </a:rPr>
+              <a:t>SKU із розрахованою</a:t>
+            </a:r>
+          </a:p>
           <a:p>
             <a:pPr algn="ctr">
               <a:lnSpc>
-                <a:spcPct val="114000"/>
+                <a:spcPct val="112000"/>
               </a:lnSpc>
             </a:pPr>
             <a:r>
@@ -43500,22 +43604,6 @@
                 </a:solidFill>
                 <a:latin typeface="Calibri"/>
               </a:rPr>
-              <a:t>SKU із розрахованою</a:t>
-            </a:r>
-          </a:p>
-          <a:p>
-            <a:pPr algn="ctr">
-              <a:lnSpc>
-                <a:spcPct val="114000"/>
-              </a:lnSpc>
-            </a:pPr>
-            <a:r>
-              <a:rPr sz="700" b="0" i="0">
-                <a:solidFill>
-                  <a:srgbClr val="8A938D"/>
-                </a:solidFill>
-                <a:latin typeface="Calibri"/>
-              </a:rPr>
               <a:t>собівартістю</a:t>
             </a:r>
           </a:p>
@@ -43523,7 +43611,7 @@
       </p:sp>
       <p:sp>
         <p:nvSpPr>
-          <p:cNvPr id="22" name="Rounded Rectangle 21"/>
+          <p:cNvPr id="21" name="Rounded Rectangle 20"/>
           <p:cNvSpPr/>
           <p:nvPr/>
         </p:nvSpPr>
@@ -43569,7 +43657,7 @@
       </p:sp>
       <p:sp>
         <p:nvSpPr>
-          <p:cNvPr id="23" name="Rectangle 22"/>
+          <p:cNvPr id="22" name="Rectangle 21"/>
           <p:cNvSpPr/>
           <p:nvPr/>
         </p:nvSpPr>
@@ -43611,14 +43699,53 @@
       </p:sp>
       <p:sp>
         <p:nvSpPr>
+          <p:cNvPr id="23" name="TextBox 22"/>
+          <p:cNvSpPr txBox="1"/>
+          <p:nvPr/>
+        </p:nvSpPr>
+        <p:spPr>
+          <a:xfrm>
+            <a:off x="1979676" y="3931920"/>
+            <a:ext cx="1481328" cy="274320"/>
+          </a:xfrm>
+          <a:prstGeom prst="rect">
+            <a:avLst/>
+          </a:prstGeom>
+          <a:noFill/>
+        </p:spPr>
+        <p:txBody>
+          <a:bodyPr wrap="square" lIns="0" rIns="0" tIns="0" bIns="0" anchor="t">
+            <a:spAutoFit/>
+          </a:bodyPr>
+          <a:lstStyle/>
+          <a:p>
+            <a:pPr algn="ctr">
+              <a:lnSpc>
+                <a:spcPct val="100000"/>
+              </a:lnSpc>
+            </a:pPr>
+            <a:r>
+              <a:rPr sz="1700" b="1" i="0">
+                <a:solidFill>
+                  <a:srgbClr val="2E763C"/>
+                </a:solidFill>
+                <a:latin typeface="Cambria"/>
+              </a:rPr>
+              <a:t>45–60</a:t>
+            </a:r>
+          </a:p>
+        </p:txBody>
+      </p:sp>
+      <p:sp>
+        <p:nvSpPr>
           <p:cNvPr id="24" name="TextBox 23"/>
           <p:cNvSpPr txBox="1"/>
           <p:nvPr/>
         </p:nvSpPr>
         <p:spPr>
           <a:xfrm>
-            <a:off x="1979676" y="3950208"/>
-            <a:ext cx="1481328" cy="292608"/>
+            <a:off x="2071116" y="4206240"/>
+            <a:ext cx="1298448" cy="310896"/>
           </a:xfrm>
           <a:prstGeom prst="rect">
             <a:avLst/>
@@ -43633,46 +43760,23 @@
           <a:p>
             <a:pPr algn="ctr">
               <a:lnSpc>
-                <a:spcPct val="100000"/>
-              </a:lnSpc>
-            </a:pPr>
-            <a:r>
-              <a:rPr sz="1700" b="1" i="0">
-                <a:solidFill>
-                  <a:srgbClr val="2E763C"/>
-                </a:solidFill>
-                <a:latin typeface="Cambria"/>
-              </a:rPr>
-              <a:t>45–60</a:t>
-            </a:r>
-          </a:p>
-        </p:txBody>
-      </p:sp>
-      <p:sp>
-        <p:nvSpPr>
-          <p:cNvPr id="25" name="TextBox 24"/>
-          <p:cNvSpPr txBox="1"/>
-          <p:nvPr/>
-        </p:nvSpPr>
-        <p:spPr>
-          <a:xfrm>
-            <a:off x="2071116" y="4279392"/>
-            <a:ext cx="1298448" cy="329184"/>
-          </a:xfrm>
-          <a:prstGeom prst="rect">
-            <a:avLst/>
-          </a:prstGeom>
-          <a:noFill/>
-        </p:spPr>
-        <p:txBody>
-          <a:bodyPr wrap="square" lIns="0" rIns="0" tIns="0" bIns="0" anchor="t">
-            <a:spAutoFit/>
-          </a:bodyPr>
-          <a:lstStyle/>
+                <a:spcPct val="112000"/>
+              </a:lnSpc>
+            </a:pPr>
+            <a:r>
+              <a:rPr sz="700" b="0" i="0">
+                <a:solidFill>
+                  <a:srgbClr val="8A938D"/>
+                </a:solidFill>
+                <a:latin typeface="Calibri"/>
+              </a:rPr>
+              <a:t>днів</a:t>
+            </a:r>
+          </a:p>
           <a:p>
             <a:pPr algn="ctr">
               <a:lnSpc>
-                <a:spcPct val="114000"/>
+                <a:spcPct val="112000"/>
               </a:lnSpc>
             </a:pPr>
             <a:r>
@@ -43682,22 +43786,6 @@
                 </a:solidFill>
                 <a:latin typeface="Calibri"/>
               </a:rPr>
-              <a:t>днів</a:t>
-            </a:r>
-          </a:p>
-          <a:p>
-            <a:pPr algn="ctr">
-              <a:lnSpc>
-                <a:spcPct val="114000"/>
-              </a:lnSpc>
-            </a:pPr>
-            <a:r>
-              <a:rPr sz="700" b="0" i="0">
-                <a:solidFill>
-                  <a:srgbClr val="8A938D"/>
-                </a:solidFill>
-                <a:latin typeface="Calibri"/>
-              </a:rPr>
               <a:t>виробництва</a:t>
             </a:r>
           </a:p>
@@ -43705,7 +43793,7 @@
       </p:sp>
       <p:sp>
         <p:nvSpPr>
-          <p:cNvPr id="26" name="Rounded Rectangle 25"/>
+          <p:cNvPr id="25" name="Rounded Rectangle 24"/>
           <p:cNvSpPr/>
           <p:nvPr/>
         </p:nvSpPr>
@@ -43751,7 +43839,7 @@
       </p:sp>
       <p:sp>
         <p:nvSpPr>
-          <p:cNvPr id="27" name="Rectangle 26"/>
+          <p:cNvPr id="26" name="Rectangle 25"/>
           <p:cNvSpPr/>
           <p:nvPr/>
         </p:nvSpPr>
@@ -43793,14 +43881,53 @@
       </p:sp>
       <p:sp>
         <p:nvSpPr>
+          <p:cNvPr id="27" name="TextBox 26"/>
+          <p:cNvSpPr txBox="1"/>
+          <p:nvPr/>
+        </p:nvSpPr>
+        <p:spPr>
+          <a:xfrm>
+            <a:off x="3593592" y="3931920"/>
+            <a:ext cx="1481328" cy="274320"/>
+          </a:xfrm>
+          <a:prstGeom prst="rect">
+            <a:avLst/>
+          </a:prstGeom>
+          <a:noFill/>
+        </p:spPr>
+        <p:txBody>
+          <a:bodyPr wrap="square" lIns="0" rIns="0" tIns="0" bIns="0" anchor="t">
+            <a:spAutoFit/>
+          </a:bodyPr>
+          <a:lstStyle/>
+          <a:p>
+            <a:pPr algn="ctr">
+              <a:lnSpc>
+                <a:spcPct val="100000"/>
+              </a:lnSpc>
+            </a:pPr>
+            <a:r>
+              <a:rPr sz="1700" b="1" i="0">
+                <a:solidFill>
+                  <a:srgbClr val="2E763C"/>
+                </a:solidFill>
+                <a:latin typeface="Cambria"/>
+              </a:rPr>
+              <a:t>3 431</a:t>
+            </a:r>
+          </a:p>
+        </p:txBody>
+      </p:sp>
+      <p:sp>
+        <p:nvSpPr>
           <p:cNvPr id="28" name="TextBox 27"/>
           <p:cNvSpPr txBox="1"/>
           <p:nvPr/>
         </p:nvSpPr>
         <p:spPr>
           <a:xfrm>
-            <a:off x="3593592" y="3950208"/>
-            <a:ext cx="1481328" cy="292608"/>
+            <a:off x="3685032" y="4206240"/>
+            <a:ext cx="1298448" cy="310896"/>
           </a:xfrm>
           <a:prstGeom prst="rect">
             <a:avLst/>
@@ -43815,17 +43942,33 @@
           <a:p>
             <a:pPr algn="ctr">
               <a:lnSpc>
-                <a:spcPct val="100000"/>
-              </a:lnSpc>
-            </a:pPr>
-            <a:r>
-              <a:rPr sz="1700" b="1" i="0">
-                <a:solidFill>
-                  <a:srgbClr val="2E763C"/>
-                </a:solidFill>
-                <a:latin typeface="Cambria"/>
-              </a:rPr>
-              <a:t>3 431</a:t>
+                <a:spcPct val="112000"/>
+              </a:lnSpc>
+            </a:pPr>
+            <a:r>
+              <a:rPr sz="700" b="0" i="0">
+                <a:solidFill>
+                  <a:srgbClr val="8A938D"/>
+                </a:solidFill>
+                <a:latin typeface="Calibri"/>
+              </a:rPr>
+              <a:t>картонів</a:t>
+            </a:r>
+          </a:p>
+          <a:p>
+            <a:pPr algn="ctr">
+              <a:lnSpc>
+                <a:spcPct val="112000"/>
+              </a:lnSpc>
+            </a:pPr>
+            <a:r>
+              <a:rPr sz="700" b="0" i="0">
+                <a:solidFill>
+                  <a:srgbClr val="8A938D"/>
+                </a:solidFill>
+                <a:latin typeface="Calibri"/>
+              </a:rPr>
+              <a:t>у 40′HQ</a:t>
             </a:r>
           </a:p>
         </p:txBody>
@@ -43833,61 +43976,6 @@
       <p:sp>
         <p:nvSpPr>
           <p:cNvPr id="29" name="TextBox 28"/>
-          <p:cNvSpPr txBox="1"/>
-          <p:nvPr/>
-        </p:nvSpPr>
-        <p:spPr>
-          <a:xfrm>
-            <a:off x="3685032" y="4279392"/>
-            <a:ext cx="1298448" cy="329184"/>
-          </a:xfrm>
-          <a:prstGeom prst="rect">
-            <a:avLst/>
-          </a:prstGeom>
-          <a:noFill/>
-        </p:spPr>
-        <p:txBody>
-          <a:bodyPr wrap="square" lIns="0" rIns="0" tIns="0" bIns="0" anchor="t">
-            <a:spAutoFit/>
-          </a:bodyPr>
-          <a:lstStyle/>
-          <a:p>
-            <a:pPr algn="ctr">
-              <a:lnSpc>
-                <a:spcPct val="114000"/>
-              </a:lnSpc>
-            </a:pPr>
-            <a:r>
-              <a:rPr sz="700" b="0" i="0">
-                <a:solidFill>
-                  <a:srgbClr val="8A938D"/>
-                </a:solidFill>
-                <a:latin typeface="Calibri"/>
-              </a:rPr>
-              <a:t>картонів</a:t>
-            </a:r>
-          </a:p>
-          <a:p>
-            <a:pPr algn="ctr">
-              <a:lnSpc>
-                <a:spcPct val="114000"/>
-              </a:lnSpc>
-            </a:pPr>
-            <a:r>
-              <a:rPr sz="700" b="0" i="0">
-                <a:solidFill>
-                  <a:srgbClr val="8A938D"/>
-                </a:solidFill>
-                <a:latin typeface="Calibri"/>
-              </a:rPr>
-              <a:t>у 40′HQ</a:t>
-            </a:r>
-          </a:p>
-        </p:txBody>
-      </p:sp>
-      <p:sp>
-        <p:nvSpPr>
-          <p:cNvPr id="30" name="TextBox 29"/>
           <p:cNvSpPr txBox="1"/>
           <p:nvPr/>
         </p:nvSpPr>
